--- a/session1/session1_full.pptx
+++ b/session1/session1_full.pptx
@@ -5,20 +5,24 @@
     <p:sldMasterId id="2147483648" r:id="rId1"/>
   </p:sldMasterIdLst>
   <p:notesMasterIdLst>
-    <p:notesMasterId r:id="rId13"/>
+    <p:notesMasterId r:id="rId17"/>
   </p:notesMasterIdLst>
   <p:sldIdLst>
     <p:sldId id="256" r:id="rId2"/>
-    <p:sldId id="257" r:id="rId3"/>
-    <p:sldId id="258" r:id="rId4"/>
-    <p:sldId id="259" r:id="rId5"/>
-    <p:sldId id="260" r:id="rId6"/>
-    <p:sldId id="261" r:id="rId7"/>
-    <p:sldId id="262" r:id="rId8"/>
-    <p:sldId id="268" r:id="rId9"/>
-    <p:sldId id="264" r:id="rId10"/>
-    <p:sldId id="265" r:id="rId11"/>
-    <p:sldId id="266" r:id="rId12"/>
+    <p:sldId id="269" r:id="rId3"/>
+    <p:sldId id="257" r:id="rId4"/>
+    <p:sldId id="258" r:id="rId5"/>
+    <p:sldId id="259" r:id="rId6"/>
+    <p:sldId id="260" r:id="rId7"/>
+    <p:sldId id="261" r:id="rId8"/>
+    <p:sldId id="262" r:id="rId9"/>
+    <p:sldId id="268" r:id="rId10"/>
+    <p:sldId id="264" r:id="rId11"/>
+    <p:sldId id="265" r:id="rId12"/>
+    <p:sldId id="266" r:id="rId13"/>
+    <p:sldId id="267" r:id="rId14"/>
+    <p:sldId id="271" r:id="rId15"/>
+    <p:sldId id="272" r:id="rId16"/>
   </p:sldIdLst>
   <p:sldSz cx="9144000" cy="5143500" type="screen16x9"/>
   <p:notesSz cx="5143500" cy="9144000"/>
@@ -410,7 +414,7 @@
           <a:p>
             <a:fld id="{F7021451-1387-4CA6-816F-3879F97B5CBC}" type="slidenum">
               <a:rPr lang="en-US"/>
-              <a:t>10</a:t>
+              <a:t>11</a:t>
             </a:fld>
             <a:endParaRPr lang="en-US"/>
           </a:p>
@@ -501,7 +505,259 @@
           <a:p>
             <a:fld id="{F7021451-1387-4CA6-816F-3879F97B5CBC}" type="slidenum">
               <a:rPr lang="en-US"/>
-              <a:t>11</a:t>
+              <a:t>12</a:t>
+            </a:fld>
+            <a:endParaRPr lang="en-US"/>
+          </a:p>
+        </p:txBody>
+      </p:sp>
+    </p:spTree>
+    <p:extLst>
+      <p:ext uri="{BB962C8B-B14F-4D97-AF65-F5344CB8AC3E}">
+        <p14:creationId xmlns:p14="http://schemas.microsoft.com/office/powerpoint/2010/main" val="1024086991"/>
+      </p:ext>
+    </p:extLst>
+  </p:cSld>
+  <p:clrMapOvr>
+    <a:masterClrMapping/>
+  </p:clrMapOvr>
+</p:notes>
+</file>
+
+<file path=ppt/notesSlides/notesSlide12.xml><?xml version="1.0" encoding="utf-8"?>
+<p:notes xmlns:a="http://schemas.openxmlformats.org/drawingml/2006/main" xmlns:r="http://schemas.openxmlformats.org/officeDocument/2006/relationships" xmlns:p="http://schemas.openxmlformats.org/presentationml/2006/main">
+  <p:cSld>
+    <p:spTree>
+      <p:nvGrpSpPr>
+        <p:cNvPr id="1" name=""/>
+        <p:cNvGrpSpPr/>
+        <p:nvPr/>
+      </p:nvGrpSpPr>
+      <p:grpSpPr>
+        <a:xfrm>
+          <a:off x="0" y="0"/>
+          <a:ext cx="0" cy="0"/>
+          <a:chOff x="0" y="0"/>
+          <a:chExt cx="0" cy="0"/>
+        </a:xfrm>
+      </p:grpSpPr>
+      <p:sp>
+        <p:nvSpPr>
+          <p:cNvPr id="2" name="Slide Image Placeholder 1"/>
+          <p:cNvSpPr>
+            <a:spLocks noGrp="1" noRot="1" noChangeAspect="1"/>
+          </p:cNvSpPr>
+          <p:nvPr>
+            <p:ph type="sldImg"/>
+          </p:nvPr>
+        </p:nvSpPr>
+        <p:spPr/>
+      </p:sp>
+      <p:sp>
+        <p:nvSpPr>
+          <p:cNvPr id="3" name="Notes Placeholder 2"/>
+          <p:cNvSpPr>
+            <a:spLocks noGrp="1"/>
+          </p:cNvSpPr>
+          <p:nvPr>
+            <p:ph type="body" idx="1"/>
+          </p:nvPr>
+        </p:nvSpPr>
+        <p:spPr/>
+        <p:txBody>
+          <a:bodyPr/>
+          <a:lstStyle/>
+          <a:p>
+            <a:endParaRPr lang="en-US" dirty="0"/>
+          </a:p>
+        </p:txBody>
+      </p:sp>
+      <p:sp>
+        <p:nvSpPr>
+          <p:cNvPr id="4" name="Slide Number Placeholder 3"/>
+          <p:cNvSpPr>
+            <a:spLocks noGrp="1"/>
+          </p:cNvSpPr>
+          <p:nvPr>
+            <p:ph type="sldNum" sz="quarter" idx="10"/>
+          </p:nvPr>
+        </p:nvSpPr>
+        <p:spPr/>
+        <p:txBody>
+          <a:bodyPr/>
+          <a:lstStyle/>
+          <a:p>
+            <a:fld id="{F7021451-1387-4CA6-816F-3879F97B5CBC}" type="slidenum">
+              <a:rPr lang="en-US"/>
+              <a:t>13</a:t>
+            </a:fld>
+            <a:endParaRPr lang="en-US"/>
+          </a:p>
+        </p:txBody>
+      </p:sp>
+    </p:spTree>
+    <p:extLst>
+      <p:ext uri="{BB962C8B-B14F-4D97-AF65-F5344CB8AC3E}">
+        <p14:creationId xmlns:p14="http://schemas.microsoft.com/office/powerpoint/2010/main" val="1024086991"/>
+      </p:ext>
+    </p:extLst>
+  </p:cSld>
+  <p:clrMapOvr>
+    <a:masterClrMapping/>
+  </p:clrMapOvr>
+</p:notes>
+</file>
+
+<file path=ppt/notesSlides/notesSlide13.xml><?xml version="1.0" encoding="utf-8"?>
+<p:notes xmlns:a="http://schemas.openxmlformats.org/drawingml/2006/main" xmlns:r="http://schemas.openxmlformats.org/officeDocument/2006/relationships" xmlns:p="http://schemas.openxmlformats.org/presentationml/2006/main">
+  <p:cSld>
+    <p:spTree>
+      <p:nvGrpSpPr>
+        <p:cNvPr id="1" name=""/>
+        <p:cNvGrpSpPr/>
+        <p:nvPr/>
+      </p:nvGrpSpPr>
+      <p:grpSpPr>
+        <a:xfrm>
+          <a:off x="0" y="0"/>
+          <a:ext cx="0" cy="0"/>
+          <a:chOff x="0" y="0"/>
+          <a:chExt cx="0" cy="0"/>
+        </a:xfrm>
+      </p:grpSpPr>
+      <p:sp>
+        <p:nvSpPr>
+          <p:cNvPr id="2" name="Slide Image Placeholder 1"/>
+          <p:cNvSpPr>
+            <a:spLocks noGrp="1" noRot="1" noChangeAspect="1"/>
+          </p:cNvSpPr>
+          <p:nvPr>
+            <p:ph type="sldImg"/>
+          </p:nvPr>
+        </p:nvSpPr>
+        <p:spPr/>
+      </p:sp>
+      <p:sp>
+        <p:nvSpPr>
+          <p:cNvPr id="3" name="Notes Placeholder 2"/>
+          <p:cNvSpPr>
+            <a:spLocks noGrp="1"/>
+          </p:cNvSpPr>
+          <p:nvPr>
+            <p:ph type="body" idx="1"/>
+          </p:nvPr>
+        </p:nvSpPr>
+        <p:spPr/>
+        <p:txBody>
+          <a:bodyPr/>
+          <a:lstStyle/>
+          <a:p>
+            <a:endParaRPr lang="en-US" dirty="0"/>
+          </a:p>
+        </p:txBody>
+      </p:sp>
+      <p:sp>
+        <p:nvSpPr>
+          <p:cNvPr id="4" name="Slide Number Placeholder 3"/>
+          <p:cNvSpPr>
+            <a:spLocks noGrp="1"/>
+          </p:cNvSpPr>
+          <p:nvPr>
+            <p:ph type="sldNum" sz="quarter" idx="10"/>
+          </p:nvPr>
+        </p:nvSpPr>
+        <p:spPr/>
+        <p:txBody>
+          <a:bodyPr/>
+          <a:lstStyle/>
+          <a:p>
+            <a:fld id="{F7021451-1387-4CA6-816F-3879F97B5CBC}" type="slidenum">
+              <a:rPr lang="en-US"/>
+              <a:t>14</a:t>
+            </a:fld>
+            <a:endParaRPr lang="en-US"/>
+          </a:p>
+        </p:txBody>
+      </p:sp>
+    </p:spTree>
+    <p:extLst>
+      <p:ext uri="{BB962C8B-B14F-4D97-AF65-F5344CB8AC3E}">
+        <p14:creationId xmlns:p14="http://schemas.microsoft.com/office/powerpoint/2010/main" val="1024086991"/>
+      </p:ext>
+    </p:extLst>
+  </p:cSld>
+  <p:clrMapOvr>
+    <a:masterClrMapping/>
+  </p:clrMapOvr>
+</p:notes>
+</file>
+
+<file path=ppt/notesSlides/notesSlide14.xml><?xml version="1.0" encoding="utf-8"?>
+<p:notes xmlns:a="http://schemas.openxmlformats.org/drawingml/2006/main" xmlns:r="http://schemas.openxmlformats.org/officeDocument/2006/relationships" xmlns:p="http://schemas.openxmlformats.org/presentationml/2006/main">
+  <p:cSld>
+    <p:spTree>
+      <p:nvGrpSpPr>
+        <p:cNvPr id="1" name=""/>
+        <p:cNvGrpSpPr/>
+        <p:nvPr/>
+      </p:nvGrpSpPr>
+      <p:grpSpPr>
+        <a:xfrm>
+          <a:off x="0" y="0"/>
+          <a:ext cx="0" cy="0"/>
+          <a:chOff x="0" y="0"/>
+          <a:chExt cx="0" cy="0"/>
+        </a:xfrm>
+      </p:grpSpPr>
+      <p:sp>
+        <p:nvSpPr>
+          <p:cNvPr id="2" name="Slide Image Placeholder 1"/>
+          <p:cNvSpPr>
+            <a:spLocks noGrp="1" noRot="1" noChangeAspect="1"/>
+          </p:cNvSpPr>
+          <p:nvPr>
+            <p:ph type="sldImg"/>
+          </p:nvPr>
+        </p:nvSpPr>
+        <p:spPr/>
+      </p:sp>
+      <p:sp>
+        <p:nvSpPr>
+          <p:cNvPr id="3" name="Notes Placeholder 2"/>
+          <p:cNvSpPr>
+            <a:spLocks noGrp="1"/>
+          </p:cNvSpPr>
+          <p:nvPr>
+            <p:ph type="body" idx="1"/>
+          </p:nvPr>
+        </p:nvSpPr>
+        <p:spPr/>
+        <p:txBody>
+          <a:bodyPr/>
+          <a:lstStyle/>
+          <a:p>
+            <a:endParaRPr lang="en-US" dirty="0"/>
+          </a:p>
+        </p:txBody>
+      </p:sp>
+      <p:sp>
+        <p:nvSpPr>
+          <p:cNvPr id="4" name="Slide Number Placeholder 3"/>
+          <p:cNvSpPr>
+            <a:spLocks noGrp="1"/>
+          </p:cNvSpPr>
+          <p:nvPr>
+            <p:ph type="sldNum" sz="quarter" idx="10"/>
+          </p:nvPr>
+        </p:nvSpPr>
+        <p:spPr/>
+        <p:txBody>
+          <a:bodyPr/>
+          <a:lstStyle/>
+          <a:p>
+            <a:fld id="{F7021451-1387-4CA6-816F-3879F97B5CBC}" type="slidenum">
+              <a:rPr lang="en-US"/>
+              <a:t>15</a:t>
             </a:fld>
             <a:endParaRPr lang="en-US"/>
           </a:p>
@@ -592,7 +848,7 @@
           <a:p>
             <a:fld id="{F7021451-1387-4CA6-816F-3879F97B5CBC}" type="slidenum">
               <a:rPr lang="en-US"/>
-              <a:t>2</a:t>
+              <a:t>3</a:t>
             </a:fld>
             <a:endParaRPr lang="en-US" dirty="0"/>
           </a:p>
@@ -683,7 +939,7 @@
           <a:p>
             <a:fld id="{F7021451-1387-4CA6-816F-3879F97B5CBC}" type="slidenum">
               <a:rPr lang="en-US"/>
-              <a:t>3</a:t>
+              <a:t>4</a:t>
             </a:fld>
             <a:endParaRPr lang="en-US"/>
           </a:p>
@@ -774,7 +1030,7 @@
           <a:p>
             <a:fld id="{F7021451-1387-4CA6-816F-3879F97B5CBC}" type="slidenum">
               <a:rPr lang="en-US"/>
-              <a:t>4</a:t>
+              <a:t>5</a:t>
             </a:fld>
             <a:endParaRPr lang="en-US"/>
           </a:p>
@@ -865,7 +1121,7 @@
           <a:p>
             <a:fld id="{F7021451-1387-4CA6-816F-3879F97B5CBC}" type="slidenum">
               <a:rPr lang="en-US"/>
-              <a:t>5</a:t>
+              <a:t>6</a:t>
             </a:fld>
             <a:endParaRPr lang="en-US"/>
           </a:p>
@@ -956,7 +1212,7 @@
           <a:p>
             <a:fld id="{F7021451-1387-4CA6-816F-3879F97B5CBC}" type="slidenum">
               <a:rPr lang="en-US"/>
-              <a:t>6</a:t>
+              <a:t>7</a:t>
             </a:fld>
             <a:endParaRPr lang="en-US"/>
           </a:p>
@@ -1047,7 +1303,7 @@
           <a:p>
             <a:fld id="{F7021451-1387-4CA6-816F-3879F97B5CBC}" type="slidenum">
               <a:rPr lang="en-US"/>
-              <a:t>7</a:t>
+              <a:t>8</a:t>
             </a:fld>
             <a:endParaRPr lang="en-US"/>
           </a:p>
@@ -1138,7 +1394,7 @@
           <a:p>
             <a:fld id="{F7021451-1387-4CA6-816F-3879F97B5CBC}" type="slidenum">
               <a:rPr lang="en-US"/>
-              <a:t>8</a:t>
+              <a:t>9</a:t>
             </a:fld>
             <a:endParaRPr lang="en-US" dirty="0"/>
           </a:p>
@@ -1229,7 +1485,7 @@
           <a:p>
             <a:fld id="{F7021451-1387-4CA6-816F-3879F97B5CBC}" type="slidenum">
               <a:rPr lang="en-US"/>
-              <a:t>9</a:t>
+              <a:t>10</a:t>
             </a:fld>
             <a:endParaRPr lang="en-US"/>
           </a:p>
@@ -1947,6 +2203,39 @@
           </a:p>
         </p:txBody>
       </p:sp>
+      <p:sp>
+        <p:nvSpPr>
+          <p:cNvPr id="11" name="TextBox 10"/>
+          <p:cNvSpPr txBox="1"/>
+          <p:nvPr/>
+        </p:nvSpPr>
+        <p:spPr>
+          <a:xfrm>
+            <a:off x="457200" y="4280000"/>
+            <a:ext cx="8229600" cy="290000"/>
+          </a:xfrm>
+          <a:prstGeom prst="rect">
+            <a:avLst/>
+          </a:prstGeom>
+          <a:noFill/>
+        </p:spPr>
+        <p:txBody>
+          <a:bodyPr wrap="square" lIns="0" tIns="0" rIns="0" bIns="0">
+            <a:spAutoFit/>
+          </a:bodyPr>
+          <a:lstStyle/>
+          <a:p>
+            <a:r>
+              <a:rPr sz="1500" b="1">
+                <a:solidFill>
+                  <a:srgbClr val="FFC800"/>
+                </a:solidFill>
+              </a:rPr>
+              <a:t>★ 覚えて帰る一言: 「分ける・防ぐ・残す、だけ覚えて帰る」</a:t>
+            </a:r>
+          </a:p>
+        </p:txBody>
+      </p:sp>
     </p:spTree>
   </p:cSld>
   <p:clrMapOvr>
@@ -1956,6 +2245,904 @@
 </file>
 
 <file path=ppt/slides/slide10.xml><?xml version="1.0" encoding="utf-8"?>
+<p:sld xmlns:a="http://schemas.openxmlformats.org/drawingml/2006/main" xmlns:r="http://schemas.openxmlformats.org/officeDocument/2006/relationships" xmlns:p="http://schemas.openxmlformats.org/presentationml/2006/main">
+  <p:cSld name="Slide 9">
+    <p:bg>
+      <p:bgPr>
+        <a:solidFill>
+          <a:srgbClr val="FFFFFF"/>
+        </a:solidFill>
+        <a:effectLst/>
+      </p:bgPr>
+    </p:bg>
+    <p:spTree>
+      <p:nvGrpSpPr>
+        <p:cNvPr id="1" name=""/>
+        <p:cNvGrpSpPr/>
+        <p:nvPr/>
+      </p:nvGrpSpPr>
+      <p:grpSpPr>
+        <a:xfrm>
+          <a:off x="0" y="0"/>
+          <a:ext cx="0" cy="0"/>
+          <a:chOff x="0" y="0"/>
+          <a:chExt cx="0" cy="0"/>
+        </a:xfrm>
+      </p:grpSpPr>
+      <p:sp>
+        <p:nvSpPr>
+          <p:cNvPr id="2" name="Text 0"/>
+          <p:cNvSpPr/>
+          <p:nvPr/>
+        </p:nvSpPr>
+        <p:spPr>
+          <a:xfrm>
+            <a:off x="457200" y="320040"/>
+            <a:ext cx="8229600" cy="548640"/>
+          </a:xfrm>
+          <a:prstGeom prst="rect">
+            <a:avLst/>
+          </a:prstGeom>
+          <a:noFill/>
+          <a:ln/>
+        </p:spPr>
+        <p:txBody>
+          <a:bodyPr wrap="square" lIns="0" tIns="0" rIns="0" bIns="0" rtlCol="0" anchor="ctr"/>
+          <a:lstStyle/>
+          <a:p>
+            <a:pPr marL="0" indent="0">
+              <a:buNone/>
+            </a:pPr>
+            <a:r>
+              <a:rPr lang="en-US" sz="2600" b="1" dirty="0" err="1">
+                <a:solidFill>
+                  <a:srgbClr val="1E2761"/>
+                </a:solidFill>
+                <a:latin typeface="Arial Black" pitchFamily="34" charset="0"/>
+                <a:ea typeface="Arial Black" pitchFamily="34" charset="-122"/>
+                <a:cs typeface="Arial Black" pitchFamily="34" charset="-120"/>
+              </a:rPr>
+              <a:t>実演の参考</a:t>
+            </a:r>
+            <a:r>
+              <a:rPr lang="en-US" sz="2600" b="1">
+                <a:solidFill>
+                  <a:srgbClr val="1E2761"/>
+                </a:solidFill>
+                <a:latin typeface="Arial Black" pitchFamily="34" charset="0"/>
+                <a:ea typeface="Arial Black" pitchFamily="34" charset="-122"/>
+                <a:cs typeface="Arial Black" pitchFamily="34" charset="-120"/>
+              </a:rPr>
+              <a:t> ― 設定サンプル</a:t>
+            </a:r>
+            <a:endParaRPr lang="en-US" sz="2600"/>
+          </a:p>
+        </p:txBody>
+      </p:sp>
+      <p:sp>
+        <p:nvSpPr>
+          <p:cNvPr id="3" name="Shape 1"/>
+          <p:cNvSpPr/>
+          <p:nvPr/>
+        </p:nvSpPr>
+        <p:spPr>
+          <a:xfrm>
+            <a:off x="457200" y="932688"/>
+            <a:ext cx="548640" cy="45720"/>
+          </a:xfrm>
+          <a:prstGeom prst="rect">
+            <a:avLst/>
+          </a:prstGeom>
+          <a:solidFill>
+            <a:srgbClr val="F96167"/>
+          </a:solidFill>
+          <a:ln w="12700">
+            <a:solidFill>
+              <a:srgbClr val="F96167"/>
+            </a:solidFill>
+            <a:prstDash val="solid"/>
+          </a:ln>
+        </p:spPr>
+        <p:txBody>
+          <a:bodyPr/>
+          <a:lstStyle/>
+          <a:p>
+            <a:endParaRPr lang="ja-JP" altLang="en-US"/>
+          </a:p>
+        </p:txBody>
+      </p:sp>
+      <p:sp>
+        <p:nvSpPr>
+          <p:cNvPr id="5" name="Text 3"/>
+          <p:cNvSpPr/>
+          <p:nvPr/>
+        </p:nvSpPr>
+        <p:spPr>
+          <a:xfrm>
+            <a:off x="457200" y="1143000"/>
+            <a:ext cx="4023360" cy="274320"/>
+          </a:xfrm>
+          <a:prstGeom prst="rect">
+            <a:avLst/>
+          </a:prstGeom>
+          <a:noFill/>
+          <a:ln/>
+        </p:spPr>
+        <p:txBody>
+          <a:bodyPr wrap="square" lIns="0" tIns="0" rIns="0" bIns="0" rtlCol="0" anchor="ctr"/>
+          <a:lstStyle/>
+          <a:p>
+            <a:pPr marL="0" indent="0">
+              <a:buNone/>
+            </a:pPr>
+            <a:r>
+              <a:rPr lang="en-US" sz="1300" b="1" dirty="0">
+                <a:solidFill>
+                  <a:srgbClr val="F96167"/>
+                </a:solidFill>
+                <a:latin typeface="Meiryo" pitchFamily="34" charset="0"/>
+                <a:ea typeface="Meiryo" pitchFamily="34" charset="-122"/>
+                <a:cs typeface="Meiryo" pitchFamily="34" charset="-120"/>
+              </a:rPr>
+              <a:t>DEMO A ▸ </a:t>
+            </a:r>
+            <a:r>
+              <a:rPr lang="en-US" sz="1300" b="1" dirty="0" err="1">
+                <a:solidFill>
+                  <a:srgbClr val="1E2761"/>
+                </a:solidFill>
+                <a:latin typeface="Consolas" pitchFamily="34" charset="0"/>
+                <a:ea typeface="Consolas" pitchFamily="34" charset="-122"/>
+                <a:cs typeface="Consolas" pitchFamily="34" charset="-120"/>
+              </a:rPr>
+              <a:t>settings.json</a:t>
+            </a:r>
+            <a:endParaRPr lang="en-US" sz="1300" dirty="0"/>
+          </a:p>
+        </p:txBody>
+      </p:sp>
+      <p:sp>
+        <p:nvSpPr>
+          <p:cNvPr id="6" name="Shape 4"/>
+          <p:cNvSpPr/>
+          <p:nvPr/>
+        </p:nvSpPr>
+        <p:spPr>
+          <a:xfrm>
+            <a:off x="457200" y="1463040"/>
+            <a:ext cx="4023360" cy="2926080"/>
+          </a:xfrm>
+          <a:prstGeom prst="rect">
+            <a:avLst/>
+          </a:prstGeom>
+          <a:solidFill>
+            <a:srgbClr val="0F1434"/>
+          </a:solidFill>
+          <a:ln w="12700">
+            <a:solidFill>
+              <a:srgbClr val="0F1434"/>
+            </a:solidFill>
+            <a:prstDash val="solid"/>
+          </a:ln>
+        </p:spPr>
+        <p:txBody>
+          <a:bodyPr/>
+          <a:lstStyle/>
+          <a:p>
+            <a:endParaRPr lang="ja-JP" altLang="en-US"/>
+          </a:p>
+        </p:txBody>
+      </p:sp>
+      <p:sp>
+        <p:nvSpPr>
+          <p:cNvPr id="7" name="Text 5"/>
+          <p:cNvSpPr/>
+          <p:nvPr/>
+        </p:nvSpPr>
+        <p:spPr>
+          <a:xfrm>
+            <a:off x="640080" y="1600200"/>
+            <a:ext cx="3657600" cy="2651760"/>
+          </a:xfrm>
+          <a:prstGeom prst="rect">
+            <a:avLst/>
+          </a:prstGeom>
+          <a:noFill/>
+          <a:ln/>
+        </p:spPr>
+        <p:txBody>
+          <a:bodyPr wrap="square" lIns="0" tIns="0" rIns="0" bIns="0" rtlCol="0" anchor="t"/>
+          <a:lstStyle/>
+          <a:p>
+            <a:pPr marL="0" indent="0">
+              <a:buNone/>
+            </a:pPr>
+            <a:r>
+              <a:rPr lang="en-US" sz="1000">
+                <a:solidFill>
+                  <a:srgbClr val="CADCFC"/>
+                </a:solidFill>
+                <a:latin typeface="Consolas" pitchFamily="34" charset="0"/>
+                <a:ea typeface="Consolas" pitchFamily="34" charset="-122"/>
+                <a:cs typeface="Consolas" pitchFamily="34" charset="-120"/>
+              </a:rPr>
+              <a:t>{</a:t>
+            </a:r>
+            <a:endParaRPr lang="en-US" sz="1000"/>
+          </a:p>
+          <a:p>
+            <a:pPr marL="0" indent="0">
+              <a:buNone/>
+            </a:pPr>
+            <a:r>
+              <a:rPr lang="en-US" sz="1000">
+                <a:solidFill>
+                  <a:srgbClr val="CADCFC"/>
+                </a:solidFill>
+                <a:latin typeface="Consolas" pitchFamily="34" charset="0"/>
+                <a:ea typeface="Consolas" pitchFamily="34" charset="-122"/>
+                <a:cs typeface="Consolas" pitchFamily="34" charset="-120"/>
+              </a:rPr>
+              <a:t>  "permissions": {</a:t>
+            </a:r>
+            <a:endParaRPr lang="en-US" sz="1000"/>
+          </a:p>
+          <a:p>
+            <a:pPr marL="0" indent="0">
+              <a:buNone/>
+            </a:pPr>
+            <a:r>
+              <a:rPr lang="en-US" sz="1000">
+                <a:solidFill>
+                  <a:srgbClr val="CADCFC"/>
+                </a:solidFill>
+                <a:latin typeface="Consolas" pitchFamily="34" charset="0"/>
+                <a:ea typeface="Consolas" pitchFamily="34" charset="-122"/>
+                <a:cs typeface="Consolas" pitchFamily="34" charset="-120"/>
+              </a:rPr>
+              <a:t>    "deny": [</a:t>
+            </a:r>
+            <a:endParaRPr lang="en-US" sz="1000"/>
+          </a:p>
+          <a:p>
+            <a:pPr marL="0" indent="0">
+              <a:buNone/>
+            </a:pPr>
+            <a:r>
+              <a:rPr lang="en-US" sz="1000">
+                <a:solidFill>
+                  <a:srgbClr val="F96167"/>
+                </a:solidFill>
+                <a:latin typeface="Consolas" pitchFamily="34" charset="0"/>
+                <a:ea typeface="Consolas" pitchFamily="34" charset="-122"/>
+                <a:cs typeface="Consolas" pitchFamily="34" charset="-120"/>
+              </a:rPr>
+              <a:t>      "Bash(rm -rf *)",</a:t>
+            </a:r>
+            <a:endParaRPr lang="en-US" sz="1000"/>
+          </a:p>
+          <a:p>
+            <a:pPr marL="0" indent="0">
+              <a:buNone/>
+            </a:pPr>
+            <a:r>
+              <a:rPr lang="en-US" sz="1000">
+                <a:solidFill>
+                  <a:srgbClr val="F96167"/>
+                </a:solidFill>
+                <a:latin typeface="Consolas" pitchFamily="34" charset="0"/>
+                <a:ea typeface="Consolas" pitchFamily="34" charset="-122"/>
+                <a:cs typeface="Consolas" pitchFamily="34" charset="-120"/>
+              </a:rPr>
+              <a:t>      "Bash(curl *)",</a:t>
+            </a:r>
+            <a:endParaRPr lang="en-US" sz="1000"/>
+          </a:p>
+          <a:p>
+            <a:pPr marL="0" indent="0">
+              <a:buNone/>
+            </a:pPr>
+            <a:r>
+              <a:rPr lang="en-US" sz="1000">
+                <a:solidFill>
+                  <a:srgbClr val="F96167"/>
+                </a:solidFill>
+                <a:latin typeface="Consolas" pitchFamily="34" charset="0"/>
+                <a:ea typeface="Consolas" pitchFamily="34" charset="-122"/>
+                <a:cs typeface="Consolas" pitchFamily="34" charset="-120"/>
+              </a:rPr>
+              <a:t>      "Bash(wget *)",</a:t>
+            </a:r>
+            <a:endParaRPr lang="en-US" sz="1000"/>
+          </a:p>
+          <a:p>
+            <a:pPr marL="0" indent="0">
+              <a:buNone/>
+            </a:pPr>
+            <a:r>
+              <a:rPr lang="en-US" sz="1000">
+                <a:solidFill>
+                  <a:srgbClr val="F96167"/>
+                </a:solidFill>
+                <a:latin typeface="Consolas" pitchFamily="34" charset="0"/>
+                <a:ea typeface="Consolas" pitchFamily="34" charset="-122"/>
+                <a:cs typeface="Consolas" pitchFamily="34" charset="-120"/>
+              </a:rPr>
+              <a:t>      "Read(.env*)",</a:t>
+            </a:r>
+            <a:endParaRPr lang="en-US" sz="1000"/>
+          </a:p>
+          <a:p>
+            <a:pPr marL="0" indent="0">
+              <a:buNone/>
+            </a:pPr>
+            <a:r>
+              <a:rPr lang="en-US" sz="1000">
+                <a:solidFill>
+                  <a:srgbClr val="F96167"/>
+                </a:solidFill>
+                <a:latin typeface="Consolas" pitchFamily="34" charset="0"/>
+                <a:ea typeface="Consolas" pitchFamily="34" charset="-122"/>
+                <a:cs typeface="Consolas" pitchFamily="34" charset="-120"/>
+              </a:rPr>
+              <a:t>      "Read(**/credentials*)"</a:t>
+            </a:r>
+            <a:endParaRPr lang="en-US" sz="1000"/>
+          </a:p>
+          <a:p>
+            <a:pPr marL="0" indent="0">
+              <a:buNone/>
+            </a:pPr>
+            <a:r>
+              <a:rPr lang="en-US" sz="1000">
+                <a:solidFill>
+                  <a:srgbClr val="CADCFC"/>
+                </a:solidFill>
+                <a:latin typeface="Consolas" pitchFamily="34" charset="0"/>
+                <a:ea typeface="Consolas" pitchFamily="34" charset="-122"/>
+                <a:cs typeface="Consolas" pitchFamily="34" charset="-120"/>
+              </a:rPr>
+              <a:t>    ],</a:t>
+            </a:r>
+            <a:endParaRPr lang="en-US" sz="1000"/>
+          </a:p>
+          <a:p>
+            <a:pPr marL="0" indent="0">
+              <a:buNone/>
+            </a:pPr>
+            <a:r>
+              <a:rPr lang="en-US" sz="1000">
+                <a:solidFill>
+                  <a:srgbClr val="CADCFC"/>
+                </a:solidFill>
+                <a:latin typeface="Consolas" pitchFamily="34" charset="0"/>
+                <a:ea typeface="Consolas" pitchFamily="34" charset="-122"/>
+                <a:cs typeface="Consolas" pitchFamily="34" charset="-120"/>
+              </a:rPr>
+              <a:t>    "allow": [</a:t>
+            </a:r>
+            <a:endParaRPr lang="en-US" sz="1000"/>
+          </a:p>
+          <a:p>
+            <a:pPr marL="0" indent="0">
+              <a:buNone/>
+            </a:pPr>
+            <a:r>
+              <a:rPr lang="en-US" sz="1000">
+                <a:solidFill>
+                  <a:srgbClr val="A5D6A7"/>
+                </a:solidFill>
+                <a:latin typeface="Consolas" pitchFamily="34" charset="0"/>
+                <a:ea typeface="Consolas" pitchFamily="34" charset="-122"/>
+                <a:cs typeface="Consolas" pitchFamily="34" charset="-120"/>
+              </a:rPr>
+              <a:t>      "Bash(git *)",</a:t>
+            </a:r>
+            <a:endParaRPr lang="en-US" sz="1000"/>
+          </a:p>
+          <a:p>
+            <a:pPr marL="0" indent="0">
+              <a:buNone/>
+            </a:pPr>
+            <a:r>
+              <a:rPr lang="en-US" sz="1000">
+                <a:solidFill>
+                  <a:srgbClr val="A5D6A7"/>
+                </a:solidFill>
+                <a:latin typeface="Consolas" pitchFamily="34" charset="0"/>
+                <a:ea typeface="Consolas" pitchFamily="34" charset="-122"/>
+                <a:cs typeface="Consolas" pitchFamily="34" charset="-120"/>
+              </a:rPr>
+              <a:t>      "Bash(npm run *)"</a:t>
+            </a:r>
+            <a:endParaRPr lang="en-US" sz="1000"/>
+          </a:p>
+          <a:p>
+            <a:pPr marL="0" indent="0">
+              <a:buNone/>
+            </a:pPr>
+            <a:r>
+              <a:rPr lang="en-US" sz="1000">
+                <a:solidFill>
+                  <a:srgbClr val="CADCFC"/>
+                </a:solidFill>
+                <a:latin typeface="Consolas" pitchFamily="34" charset="0"/>
+                <a:ea typeface="Consolas" pitchFamily="34" charset="-122"/>
+                <a:cs typeface="Consolas" pitchFamily="34" charset="-120"/>
+              </a:rPr>
+              <a:t>    ]</a:t>
+            </a:r>
+            <a:endParaRPr lang="en-US" sz="1000"/>
+          </a:p>
+          <a:p>
+            <a:pPr marL="0" indent="0">
+              <a:buNone/>
+            </a:pPr>
+            <a:r>
+              <a:rPr lang="en-US" sz="1000">
+                <a:solidFill>
+                  <a:srgbClr val="CADCFC"/>
+                </a:solidFill>
+                <a:latin typeface="Consolas" pitchFamily="34" charset="0"/>
+                <a:ea typeface="Consolas" pitchFamily="34" charset="-122"/>
+                <a:cs typeface="Consolas" pitchFamily="34" charset="-120"/>
+              </a:rPr>
+              <a:t>  }</a:t>
+            </a:r>
+            <a:endParaRPr lang="en-US" sz="1000"/>
+          </a:p>
+          <a:p>
+            <a:pPr marL="0" indent="0">
+              <a:buNone/>
+            </a:pPr>
+            <a:r>
+              <a:rPr lang="en-US" sz="1000">
+                <a:solidFill>
+                  <a:srgbClr val="CADCFC"/>
+                </a:solidFill>
+                <a:latin typeface="Consolas" pitchFamily="34" charset="0"/>
+                <a:ea typeface="Consolas" pitchFamily="34" charset="-122"/>
+                <a:cs typeface="Consolas" pitchFamily="34" charset="-120"/>
+              </a:rPr>
+              <a:t>}</a:t>
+            </a:r>
+            <a:endParaRPr lang="en-US" sz="1000"/>
+          </a:p>
+        </p:txBody>
+      </p:sp>
+      <p:sp>
+        <p:nvSpPr>
+          <p:cNvPr id="8" name="Text 6"/>
+          <p:cNvSpPr/>
+          <p:nvPr/>
+        </p:nvSpPr>
+        <p:spPr>
+          <a:xfrm>
+            <a:off x="4663440" y="1143000"/>
+            <a:ext cx="4023360" cy="274320"/>
+          </a:xfrm>
+          <a:prstGeom prst="rect">
+            <a:avLst/>
+          </a:prstGeom>
+          <a:noFill/>
+          <a:ln/>
+        </p:spPr>
+        <p:txBody>
+          <a:bodyPr wrap="square" lIns="0" tIns="0" rIns="0" bIns="0" rtlCol="0" anchor="ctr"/>
+          <a:lstStyle/>
+          <a:p>
+            <a:pPr marL="0" indent="0">
+              <a:buNone/>
+            </a:pPr>
+            <a:r>
+              <a:rPr lang="en-US" sz="1300" b="1" dirty="0">
+                <a:solidFill>
+                  <a:srgbClr val="F96167"/>
+                </a:solidFill>
+                <a:latin typeface="Meiryo" pitchFamily="34" charset="0"/>
+                <a:ea typeface="Meiryo" pitchFamily="34" charset="-122"/>
+                <a:cs typeface="Meiryo" pitchFamily="34" charset="-120"/>
+              </a:rPr>
+              <a:t>DEMO B ▸ </a:t>
+            </a:r>
+            <a:r>
+              <a:rPr lang="en-US" sz="1300" b="1" dirty="0" err="1">
+                <a:solidFill>
+                  <a:srgbClr val="1E2761"/>
+                </a:solidFill>
+                <a:latin typeface="Consolas" pitchFamily="34" charset="0"/>
+                <a:ea typeface="Consolas" pitchFamily="34" charset="-122"/>
+                <a:cs typeface="Consolas" pitchFamily="34" charset="-120"/>
+              </a:rPr>
+              <a:t>PreToolUse</a:t>
+            </a:r>
+            <a:r>
+              <a:rPr lang="en-US" sz="1300" b="1" dirty="0">
+                <a:solidFill>
+                  <a:srgbClr val="1E2761"/>
+                </a:solidFill>
+                <a:latin typeface="Consolas" pitchFamily="34" charset="0"/>
+                <a:ea typeface="Consolas" pitchFamily="34" charset="-122"/>
+                <a:cs typeface="Consolas" pitchFamily="34" charset="-120"/>
+              </a:rPr>
+              <a:t> Hook</a:t>
+            </a:r>
+            <a:endParaRPr lang="en-US" sz="1300" dirty="0"/>
+          </a:p>
+        </p:txBody>
+      </p:sp>
+      <p:sp>
+        <p:nvSpPr>
+          <p:cNvPr id="9" name="Shape 7"/>
+          <p:cNvSpPr/>
+          <p:nvPr/>
+        </p:nvSpPr>
+        <p:spPr>
+          <a:xfrm>
+            <a:off x="4663440" y="1463040"/>
+            <a:ext cx="4023360" cy="2926080"/>
+          </a:xfrm>
+          <a:prstGeom prst="rect">
+            <a:avLst/>
+          </a:prstGeom>
+          <a:solidFill>
+            <a:srgbClr val="0F1434"/>
+          </a:solidFill>
+          <a:ln w="12700">
+            <a:solidFill>
+              <a:srgbClr val="0F1434"/>
+            </a:solidFill>
+            <a:prstDash val="solid"/>
+          </a:ln>
+        </p:spPr>
+        <p:txBody>
+          <a:bodyPr/>
+          <a:lstStyle/>
+          <a:p>
+            <a:endParaRPr lang="ja-JP" altLang="en-US"/>
+          </a:p>
+        </p:txBody>
+      </p:sp>
+      <p:sp>
+        <p:nvSpPr>
+          <p:cNvPr id="10" name="Text 8"/>
+          <p:cNvSpPr/>
+          <p:nvPr/>
+        </p:nvSpPr>
+        <p:spPr>
+          <a:xfrm>
+            <a:off x="4846320" y="1600200"/>
+            <a:ext cx="3657600" cy="2651760"/>
+          </a:xfrm>
+          <a:prstGeom prst="rect">
+            <a:avLst/>
+          </a:prstGeom>
+          <a:noFill/>
+          <a:ln/>
+        </p:spPr>
+        <p:txBody>
+          <a:bodyPr wrap="square" lIns="0" tIns="0" rIns="0" bIns="0" rtlCol="0" anchor="t"/>
+          <a:lstStyle/>
+          <a:p>
+            <a:pPr marL="0" indent="0">
+              <a:buNone/>
+            </a:pPr>
+            <a:r>
+              <a:rPr lang="en-US" sz="1000">
+                <a:solidFill>
+                  <a:srgbClr val="7F8FA6"/>
+                </a:solidFill>
+                <a:latin typeface="Consolas" pitchFamily="34" charset="0"/>
+                <a:ea typeface="Consolas" pitchFamily="34" charset="-122"/>
+                <a:cs typeface="Consolas" pitchFamily="34" charset="-120"/>
+              </a:rPr>
+              <a:t>#!/bin/bash</a:t>
+            </a:r>
+            <a:endParaRPr lang="en-US" sz="1000"/>
+          </a:p>
+          <a:p>
+            <a:pPr marL="0" indent="0">
+              <a:buNone/>
+            </a:pPr>
+            <a:r>
+              <a:rPr lang="en-US" sz="1000">
+                <a:solidFill>
+                  <a:srgbClr val="7F8FA6"/>
+                </a:solidFill>
+                <a:latin typeface="Consolas" pitchFamily="34" charset="0"/>
+                <a:ea typeface="Consolas" pitchFamily="34" charset="-122"/>
+                <a:cs typeface="Consolas" pitchFamily="34" charset="-120"/>
+              </a:rPr>
+              <a:t># .claude/hooks/pretool-guard.sh</a:t>
+            </a:r>
+            <a:endParaRPr lang="en-US" sz="1000"/>
+          </a:p>
+          <a:p>
+            <a:pPr marL="0" indent="0">
+              <a:buNone/>
+            </a:pPr>
+            <a:endParaRPr lang="en-US" sz="1000"/>
+          </a:p>
+          <a:p>
+            <a:pPr marL="0" indent="0">
+              <a:buNone/>
+            </a:pPr>
+            <a:r>
+              <a:rPr lang="en-US" sz="1000">
+                <a:solidFill>
+                  <a:srgbClr val="CADCFC"/>
+                </a:solidFill>
+                <a:latin typeface="Consolas" pitchFamily="34" charset="0"/>
+                <a:ea typeface="Consolas" pitchFamily="34" charset="-122"/>
+                <a:cs typeface="Consolas" pitchFamily="34" charset="-120"/>
+              </a:rPr>
+              <a:t>input=$(cat)</a:t>
+            </a:r>
+            <a:endParaRPr lang="en-US" sz="1000"/>
+          </a:p>
+          <a:p>
+            <a:pPr marL="0" indent="0">
+              <a:buNone/>
+            </a:pPr>
+            <a:r>
+              <a:rPr lang="en-US" sz="1000">
+                <a:solidFill>
+                  <a:srgbClr val="CADCFC"/>
+                </a:solidFill>
+                <a:latin typeface="Consolas" pitchFamily="34" charset="0"/>
+                <a:ea typeface="Consolas" pitchFamily="34" charset="-122"/>
+                <a:cs typeface="Consolas" pitchFamily="34" charset="-120"/>
+              </a:rPr>
+              <a:t>cmd=$(echo "$input" | jq -r .command)</a:t>
+            </a:r>
+            <a:endParaRPr lang="en-US" sz="1000"/>
+          </a:p>
+          <a:p>
+            <a:pPr marL="0" indent="0">
+              <a:buNone/>
+            </a:pPr>
+            <a:endParaRPr lang="en-US" sz="1000"/>
+          </a:p>
+          <a:p>
+            <a:pPr marL="0" indent="0">
+              <a:buNone/>
+            </a:pPr>
+            <a:r>
+              <a:rPr lang="en-US" sz="1000">
+                <a:solidFill>
+                  <a:srgbClr val="CADCFC"/>
+                </a:solidFill>
+                <a:latin typeface="Consolas" pitchFamily="34" charset="0"/>
+                <a:ea typeface="Consolas" pitchFamily="34" charset="-122"/>
+                <a:cs typeface="Consolas" pitchFamily="34" charset="-120"/>
+              </a:rPr>
+              <a:t>if echo "$cmd" | grep -qE \</a:t>
+            </a:r>
+            <a:endParaRPr lang="en-US" sz="1000"/>
+          </a:p>
+          <a:p>
+            <a:pPr marL="0" indent="0">
+              <a:buNone/>
+            </a:pPr>
+            <a:r>
+              <a:rPr lang="en-US" sz="1000">
+                <a:solidFill>
+                  <a:srgbClr val="CADCFC"/>
+                </a:solidFill>
+                <a:latin typeface="Consolas" pitchFamily="34" charset="0"/>
+                <a:ea typeface="Consolas" pitchFamily="34" charset="-122"/>
+                <a:cs typeface="Consolas" pitchFamily="34" charset="-120"/>
+              </a:rPr>
+              <a:t>    "rm -rf|curl |\.env"; then</a:t>
+            </a:r>
+            <a:endParaRPr lang="en-US" sz="1000"/>
+          </a:p>
+          <a:p>
+            <a:pPr marL="0" indent="0">
+              <a:buNone/>
+            </a:pPr>
+            <a:r>
+              <a:rPr lang="en-US" sz="1000">
+                <a:solidFill>
+                  <a:srgbClr val="F96167"/>
+                </a:solidFill>
+                <a:latin typeface="Consolas" pitchFamily="34" charset="0"/>
+                <a:ea typeface="Consolas" pitchFamily="34" charset="-122"/>
+                <a:cs typeface="Consolas" pitchFamily="34" charset="-120"/>
+              </a:rPr>
+              <a:t>  echo "Blocked: $cmd" &gt;&amp;2</a:t>
+            </a:r>
+            <a:endParaRPr lang="en-US" sz="1000"/>
+          </a:p>
+          <a:p>
+            <a:pPr marL="0" indent="0">
+              <a:buNone/>
+            </a:pPr>
+            <a:r>
+              <a:rPr lang="en-US" sz="1000">
+                <a:solidFill>
+                  <a:srgbClr val="F96167"/>
+                </a:solidFill>
+                <a:latin typeface="Consolas" pitchFamily="34" charset="0"/>
+                <a:ea typeface="Consolas" pitchFamily="34" charset="-122"/>
+                <a:cs typeface="Consolas" pitchFamily="34" charset="-120"/>
+              </a:rPr>
+              <a:t>  exit 2   # ← 決定的にブロック</a:t>
+            </a:r>
+            <a:endParaRPr lang="en-US" sz="1000"/>
+          </a:p>
+          <a:p>
+            <a:pPr marL="0" indent="0">
+              <a:buNone/>
+            </a:pPr>
+            <a:r>
+              <a:rPr lang="en-US" sz="1000">
+                <a:solidFill>
+                  <a:srgbClr val="CADCFC"/>
+                </a:solidFill>
+                <a:latin typeface="Consolas" pitchFamily="34" charset="0"/>
+                <a:ea typeface="Consolas" pitchFamily="34" charset="-122"/>
+                <a:cs typeface="Consolas" pitchFamily="34" charset="-120"/>
+              </a:rPr>
+              <a:t>fi</a:t>
+            </a:r>
+            <a:endParaRPr lang="en-US" sz="1000"/>
+          </a:p>
+          <a:p>
+            <a:pPr marL="0" indent="0">
+              <a:buNone/>
+            </a:pPr>
+            <a:endParaRPr lang="en-US" sz="1000"/>
+          </a:p>
+          <a:p>
+            <a:pPr marL="0" indent="0">
+              <a:buNone/>
+            </a:pPr>
+            <a:r>
+              <a:rPr lang="en-US" sz="1000">
+                <a:solidFill>
+                  <a:srgbClr val="A5D6A7"/>
+                </a:solidFill>
+                <a:latin typeface="Consolas" pitchFamily="34" charset="0"/>
+                <a:ea typeface="Consolas" pitchFamily="34" charset="-122"/>
+                <a:cs typeface="Consolas" pitchFamily="34" charset="-120"/>
+              </a:rPr>
+              <a:t>exit 0   # ← 許可</a:t>
+            </a:r>
+            <a:endParaRPr lang="en-US" sz="1000"/>
+          </a:p>
+        </p:txBody>
+      </p:sp>
+      <p:sp>
+        <p:nvSpPr>
+          <p:cNvPr id="11" name="Shape 9"/>
+          <p:cNvSpPr/>
+          <p:nvPr/>
+        </p:nvSpPr>
+        <p:spPr>
+          <a:xfrm>
+            <a:off x="457200" y="4526280"/>
+            <a:ext cx="8229600" cy="320040"/>
+          </a:xfrm>
+          <a:prstGeom prst="rect">
+            <a:avLst/>
+          </a:prstGeom>
+          <a:solidFill>
+            <a:srgbClr val="F8F9FC"/>
+          </a:solidFill>
+          <a:ln w="6350">
+            <a:solidFill>
+              <a:srgbClr val="E5E9F2"/>
+            </a:solidFill>
+            <a:prstDash val="solid"/>
+          </a:ln>
+        </p:spPr>
+        <p:txBody>
+          <a:bodyPr/>
+          <a:lstStyle/>
+          <a:p>
+            <a:endParaRPr lang="ja-JP" altLang="en-US"/>
+          </a:p>
+        </p:txBody>
+      </p:sp>
+      <p:sp>
+        <p:nvSpPr>
+          <p:cNvPr id="12" name="Text 10"/>
+          <p:cNvSpPr/>
+          <p:nvPr/>
+        </p:nvSpPr>
+        <p:spPr>
+          <a:xfrm>
+            <a:off x="594360" y="4526280"/>
+            <a:ext cx="7955280" cy="320040"/>
+          </a:xfrm>
+          <a:prstGeom prst="rect">
+            <a:avLst/>
+          </a:prstGeom>
+          <a:noFill/>
+          <a:ln/>
+        </p:spPr>
+        <p:txBody>
+          <a:bodyPr wrap="square" lIns="0" tIns="0" rIns="0" bIns="0" rtlCol="0" anchor="ctr"/>
+          <a:lstStyle/>
+          <a:p>
+            <a:pPr marL="0" indent="0">
+              <a:buNone/>
+            </a:pPr>
+            <a:r>
+              <a:rPr lang="en-US" sz="1100" b="1">
+                <a:solidFill>
+                  <a:srgbClr val="F96167"/>
+                </a:solidFill>
+                <a:latin typeface="Meiryo" pitchFamily="34" charset="0"/>
+                <a:ea typeface="Meiryo" pitchFamily="34" charset="-122"/>
+                <a:cs typeface="Meiryo" pitchFamily="34" charset="-120"/>
+              </a:rPr>
+              <a:t>ポイント ▸ </a:t>
+            </a:r>
+            <a:r>
+              <a:rPr lang="en-US" sz="1100">
+                <a:solidFill>
+                  <a:srgbClr val="2D3748"/>
+                </a:solidFill>
+                <a:latin typeface="Meiryo" pitchFamily="34" charset="0"/>
+                <a:ea typeface="Meiryo" pitchFamily="34" charset="-122"/>
+                <a:cs typeface="Meiryo" pitchFamily="34" charset="-120"/>
+              </a:rPr>
+              <a:t>Deny = Claude Codeが解釈 / Hook = OSレベルで強制。両方組み合わせるのが実務的</a:t>
+            </a:r>
+            <a:endParaRPr lang="en-US" sz="1100"/>
+          </a:p>
+        </p:txBody>
+      </p:sp>
+      <p:sp>
+        <p:nvSpPr>
+          <p:cNvPr id="13" name="Text 11"/>
+          <p:cNvSpPr/>
+          <p:nvPr/>
+        </p:nvSpPr>
+        <p:spPr>
+          <a:xfrm>
+            <a:off x="5486400" y="4828032"/>
+            <a:ext cx="3474720" cy="228600"/>
+          </a:xfrm>
+          <a:prstGeom prst="rect">
+            <a:avLst/>
+          </a:prstGeom>
+          <a:noFill/>
+          <a:ln/>
+        </p:spPr>
+        <p:txBody>
+          <a:bodyPr wrap="square" rtlCol="0" anchor="ctr"/>
+          <a:lstStyle/>
+          <a:p>
+            <a:pPr marL="0" indent="0" algn="r">
+              <a:buNone/>
+            </a:pPr>
+            <a:r>
+              <a:rPr lang="en-US" sz="1000" kern="0" spc="100">
+                <a:solidFill>
+                  <a:srgbClr val="64748B"/>
+                </a:solidFill>
+                <a:latin typeface="Arial" pitchFamily="34" charset="0"/>
+                <a:ea typeface="Arial" pitchFamily="34" charset="-122"/>
+                <a:cs typeface="Arial" pitchFamily="34" charset="-120"/>
+              </a:rPr>
+              <a:t>● ○ ○ ○ ○ ○ ○ ○ ○ ○</a:t>
+            </a:r>
+            <a:endParaRPr lang="en-US" sz="1000"/>
+          </a:p>
+        </p:txBody>
+      </p:sp>
+    </p:spTree>
+  </p:cSld>
+  <p:clrMapOvr>
+    <a:masterClrMapping/>
+  </p:clrMapOvr>
+</p:sld>
+</file>
+
+<file path=ppt/slides/slide11.xml><?xml version="1.0" encoding="utf-8"?>
 <p:sld xmlns:a="http://schemas.openxmlformats.org/drawingml/2006/main" xmlns:r="http://schemas.openxmlformats.org/officeDocument/2006/relationships" xmlns:p="http://schemas.openxmlformats.org/presentationml/2006/main">
   <p:cSld name="Slide 10">
     <p:bg>
@@ -2111,6 +3298,21 @@
           <a:bodyPr wrap="square" lIns="0" tIns="0" rIns="0" bIns="0" rtlCol="0" anchor="t"/>
           <a:lstStyle/>
           <a:p>
+            <a:pPr algn="ctr"/>
+            <a:r>
+              <a:rPr lang="ja-JP" sz="2200" b="1">
+                <a:solidFill>
+                  <a:srgbClr val="FFC800"/>
+                </a:solidFill>
+                <a:latin typeface="+mj-lt"/>
+              </a:rPr>
+              <a:t>★ 「分ける・防ぐ・残す、だけ覚えて帰る」</a:t>
+            </a:r>
+          </a:p>
+          <a:p>
+            <a:endParaRPr lang="ja-JP" sz="800"/>
+          </a:p>
+          <a:p>
             <a:pPr marL="0" indent="0">
               <a:spcAft>
                 <a:spcPts val="800"/>
@@ -2566,6 +3768,39 @@
           </a:p>
         </p:txBody>
       </p:sp>
+      <p:sp>
+        <p:nvSpPr>
+          <p:cNvPr id="14" name="TextBox 13"/>
+          <p:cNvSpPr txBox="1"/>
+          <p:nvPr/>
+        </p:nvSpPr>
+        <p:spPr>
+          <a:xfrm>
+            <a:off x="457200" y="4900000"/>
+            <a:ext cx="8229600" cy="220000"/>
+          </a:xfrm>
+          <a:prstGeom prst="rect">
+            <a:avLst/>
+          </a:prstGeom>
+          <a:noFill/>
+        </p:spPr>
+        <p:txBody>
+          <a:bodyPr wrap="square" lIns="0" tIns="0" rIns="0" bIns="0">
+            <a:spAutoFit/>
+          </a:bodyPr>
+          <a:lstStyle/>
+          <a:p>
+            <a:r>
+              <a:rPr sz="1100" b="1">
+                <a:solidFill>
+                  <a:srgbClr val="FFC800"/>
+                </a:solidFill>
+              </a:rPr>
+              <a:t>3原則の現在地：  01 分ける ⏳    02 防ぐ ⏳    03 残す ⏳    （今日: 3原則の導入）</a:t>
+            </a:r>
+          </a:p>
+        </p:txBody>
+      </p:sp>
     </p:spTree>
   </p:cSld>
   <p:clrMapOvr>
@@ -2574,7 +3809,7 @@
 </p:sld>
 </file>
 
-<file path=ppt/slides/slide11.xml><?xml version="1.0" encoding="utf-8"?>
+<file path=ppt/slides/slide12.xml><?xml version="1.0" encoding="utf-8"?>
 <p:sld xmlns:a="http://schemas.openxmlformats.org/drawingml/2006/main" xmlns:r="http://schemas.openxmlformats.org/officeDocument/2006/relationships" xmlns:p="http://schemas.openxmlformats.org/presentationml/2006/main">
   <p:cSld name="Slide 11">
     <p:bg>
@@ -3204,7 +4439,4646 @@
 </p:sld>
 </file>
 
+<file path=ppt/slides/slide13.xml><?xml version="1.0" encoding="utf-8"?>
+<p:sld xmlns:a="http://schemas.openxmlformats.org/drawingml/2006/main" xmlns:r="http://schemas.openxmlformats.org/officeDocument/2006/relationships" xmlns:p="http://schemas.openxmlformats.org/presentationml/2006/main">
+  <p:cSld>
+    <p:spTree>
+      <p:nvGrpSpPr>
+        <p:cNvPr id="1" name=""/>
+        <p:cNvGrpSpPr/>
+        <p:nvPr/>
+      </p:nvGrpSpPr>
+      <p:grpSpPr>
+        <a:xfrm>
+          <a:off x="0" y="0"/>
+          <a:ext cx="0" cy="0"/>
+          <a:chOff x="0" y="0"/>
+          <a:chExt cx="0" cy="0"/>
+        </a:xfrm>
+      </p:grpSpPr>
+      <p:sp>
+        <p:nvSpPr>
+          <p:cNvPr id="2" name="Text 0"/>
+          <p:cNvSpPr/>
+          <p:nvPr/>
+        </p:nvSpPr>
+        <p:spPr>
+          <a:xfrm>
+            <a:off x="457200" y="320040"/>
+            <a:ext cx="8229600" cy="548640"/>
+          </a:xfrm>
+          <a:prstGeom prst="rect">
+            <a:avLst/>
+          </a:prstGeom>
+          <a:noFill/>
+          <a:ln/>
+        </p:spPr>
+        <p:txBody>
+          <a:bodyPr wrap="square" lIns="0" tIns="0" rIns="0" bIns="0" rtlCol="0" anchor="ctr"/>
+          <a:lstStyle/>
+          <a:p>
+            <a:pPr marL="0" indent="0">
+              <a:buNone/>
+            </a:pPr>
+            <a:r>
+              <a:rPr lang="en-US" sz="2200" b="1" dirty="0">
+                <a:solidFill>
+                  <a:srgbClr val="1E2761"/>
+                </a:solidFill>
+                <a:latin typeface="Arial Black" pitchFamily="34" charset="0"/>
+                <a:ea typeface="Arial Black" pitchFamily="34" charset="-122"/>
+                <a:cs typeface="Arial Black" pitchFamily="34" charset="-120"/>
+              </a:rPr>
+              <a:t>Appendix A: Claude Code 7つの典型事故パターン</a:t>
+            </a:r>
+            <a:endParaRPr lang="en-US" sz="2200" dirty="0"/>
+          </a:p>
+        </p:txBody>
+      </p:sp>
+      <p:sp>
+        <p:nvSpPr>
+          <p:cNvPr id="3" name="Shape 1"/>
+          <p:cNvSpPr/>
+          <p:nvPr/>
+        </p:nvSpPr>
+        <p:spPr>
+          <a:xfrm>
+            <a:off x="457200" y="932688"/>
+            <a:ext cx="548640" cy="45720"/>
+          </a:xfrm>
+          <a:prstGeom prst="rect">
+            <a:avLst/>
+          </a:prstGeom>
+          <a:solidFill>
+            <a:srgbClr val="F96167"/>
+          </a:solidFill>
+          <a:ln w="12700">
+            <a:solidFill>
+              <a:srgbClr val="F96167"/>
+            </a:solidFill>
+            <a:prstDash val="solid"/>
+          </a:ln>
+        </p:spPr>
+      </p:sp>
+      <p:sp>
+        <p:nvSpPr>
+          <p:cNvPr id="4" name="Text 2"/>
+          <p:cNvSpPr/>
+          <p:nvPr/>
+        </p:nvSpPr>
+        <p:spPr>
+          <a:xfrm>
+            <a:off x="457200" y="1051560"/>
+            <a:ext cx="8229600" cy="274320"/>
+          </a:xfrm>
+          <a:prstGeom prst="rect">
+            <a:avLst/>
+          </a:prstGeom>
+          <a:noFill/>
+          <a:ln/>
+        </p:spPr>
+        <p:txBody>
+          <a:bodyPr wrap="square" lIns="0" tIns="0" rIns="0" bIns="0" rtlCol="0" anchor="ctr"/>
+          <a:lstStyle/>
+          <a:p>
+            <a:pPr marL="0" indent="0">
+              <a:buNone/>
+            </a:pPr>
+            <a:r>
+              <a:rPr lang="en-US" sz="1300" i="1" dirty="0">
+                <a:solidFill>
+                  <a:srgbClr val="64748B"/>
+                </a:solidFill>
+                <a:latin typeface="Meiryo" pitchFamily="34" charset="0"/>
+                <a:ea typeface="Meiryo" pitchFamily="34" charset="-122"/>
+                <a:cs typeface="Meiryo" pitchFamily="34" charset="-120"/>
+              </a:rPr>
+              <a:t>発信者自身もAPIキー管理が甘く約100万円の不正請求を受けた経験あり</a:t>
+            </a:r>
+            <a:endParaRPr lang="en-US" sz="1300" dirty="0"/>
+          </a:p>
+        </p:txBody>
+      </p:sp>
+      <p:graphicFrame>
+        <p:nvGraphicFramePr>
+          <p:cNvPr id="13" name="Table 0"/>
+          <p:cNvGraphicFramePr>
+            <a:graphicFrameLocks noGrp="1"/>
+          </p:cNvGraphicFramePr>
+          <p:nvPr/>
+        </p:nvGraphicFramePr>
+        <p:xfrm>
+          <a:off x="457200" y="1417320"/>
+          <a:ext cx="7498080" cy="2663952"/>
+        </p:xfrm>
+        <a:graphic>
+          <a:graphicData uri="http://schemas.openxmlformats.org/drawingml/2006/table">
+            <a:tbl>
+              <a:tblPr/>
+              <a:tblGrid>
+                <a:gridCol w="365760">
+                  <a:extLst>
+                    <a:ext uri="{9D8B030D-6E8A-4147-A177-3AD203B41FA5}">
+                      <a16:colId xmlns:a16="http://schemas.microsoft.com/office/drawing/2014/main" val="20000"/>
+                    </a:ext>
+                  </a:extLst>
+                </a:gridCol>
+                <a:gridCol w="1920240">
+                  <a:extLst>
+                    <a:ext uri="{9D8B030D-6E8A-4147-A177-3AD203B41FA5}">
+                      <a16:colId xmlns:a16="http://schemas.microsoft.com/office/drawing/2014/main" val="20001"/>
+                    </a:ext>
+                  </a:extLst>
+                </a:gridCol>
+                <a:gridCol w="3657600">
+                  <a:extLst>
+                    <a:ext uri="{9D8B030D-6E8A-4147-A177-3AD203B41FA5}">
+                      <a16:colId xmlns:a16="http://schemas.microsoft.com/office/drawing/2014/main" val="20002"/>
+                    </a:ext>
+                  </a:extLst>
+                </a:gridCol>
+                <a:gridCol w="1554480">
+                  <a:extLst>
+                    <a:ext uri="{9D8B030D-6E8A-4147-A177-3AD203B41FA5}">
+                      <a16:colId xmlns:a16="http://schemas.microsoft.com/office/drawing/2014/main" val="20003"/>
+                    </a:ext>
+                  </a:extLst>
+                </a:gridCol>
+              </a:tblGrid>
+              <a:tr h="256032">
+                <a:tc>
+                  <a:txBody>
+                    <a:bodyPr/>
+                    <a:lstStyle/>
+                    <a:p>
+                      <a:pPr marL="0" indent="0" algn="ctr">
+                        <a:buNone/>
+                      </a:pPr>
+                      <a:r>
+                        <a:rPr lang="en-US" sz="900" b="1" dirty="0">
+                          <a:solidFill>
+                            <a:srgbClr val="FFFFFF"/>
+                          </a:solidFill>
+                        </a:rPr>
+                        <a:t>#</a:t>
+                      </a:r>
+                      <a:endParaRPr lang="en-US" sz="900" dirty="0"/>
+                    </a:p>
+                  </a:txBody>
+                  <a:tcPr>
+                    <a:lnL w="6350" cap="flat" cmpd="sng" algn="ctr">
+                      <a:solidFill>
+                        <a:srgbClr val="E5E9F2"/>
+                      </a:solidFill>
+                      <a:prstDash val="solid"/>
+                      <a:round/>
+                      <a:headEnd type="none" w="med" len="med"/>
+                      <a:tailEnd type="none" w="med" len="med"/>
+                    </a:lnL>
+                    <a:lnR w="6350" cap="flat" cmpd="sng" algn="ctr">
+                      <a:solidFill>
+                        <a:srgbClr val="E5E9F2"/>
+                      </a:solidFill>
+                      <a:prstDash val="solid"/>
+                      <a:round/>
+                      <a:headEnd type="none" w="med" len="med"/>
+                      <a:tailEnd type="none" w="med" len="med"/>
+                    </a:lnR>
+                    <a:lnT w="6350" cap="flat" cmpd="sng" algn="ctr">
+                      <a:solidFill>
+                        <a:srgbClr val="E5E9F2"/>
+                      </a:solidFill>
+                      <a:prstDash val="solid"/>
+                      <a:round/>
+                      <a:headEnd type="none" w="med" len="med"/>
+                      <a:tailEnd type="none" w="med" len="med"/>
+                    </a:lnT>
+                    <a:lnB w="6350" cap="flat" cmpd="sng" algn="ctr">
+                      <a:solidFill>
+                        <a:srgbClr val="E5E9F2"/>
+                      </a:solidFill>
+                      <a:prstDash val="solid"/>
+                      <a:round/>
+                      <a:headEnd type="none" w="med" len="med"/>
+                      <a:tailEnd type="none" w="med" len="med"/>
+                    </a:lnB>
+                    <a:solidFill>
+                      <a:srgbClr val="1E2761"/>
+                    </a:solidFill>
+                  </a:tcPr>
+                </a:tc>
+                <a:tc>
+                  <a:txBody>
+                    <a:bodyPr/>
+                    <a:lstStyle/>
+                    <a:p>
+                      <a:pPr marL="0" indent="0">
+                        <a:buNone/>
+                      </a:pPr>
+                      <a:r>
+                        <a:rPr lang="en-US" sz="900" b="1" dirty="0">
+                          <a:solidFill>
+                            <a:srgbClr val="FFFFFF"/>
+                          </a:solidFill>
+                        </a:rPr>
+                        <a:t>事故パターン</a:t>
+                      </a:r>
+                      <a:endParaRPr lang="en-US" sz="900" dirty="0"/>
+                    </a:p>
+                  </a:txBody>
+                  <a:tcPr>
+                    <a:lnL w="6350" cap="flat" cmpd="sng" algn="ctr">
+                      <a:solidFill>
+                        <a:srgbClr val="E5E9F2"/>
+                      </a:solidFill>
+                      <a:prstDash val="solid"/>
+                      <a:round/>
+                      <a:headEnd type="none" w="med" len="med"/>
+                      <a:tailEnd type="none" w="med" len="med"/>
+                    </a:lnL>
+                    <a:lnR w="6350" cap="flat" cmpd="sng" algn="ctr">
+                      <a:solidFill>
+                        <a:srgbClr val="E5E9F2"/>
+                      </a:solidFill>
+                      <a:prstDash val="solid"/>
+                      <a:round/>
+                      <a:headEnd type="none" w="med" len="med"/>
+                      <a:tailEnd type="none" w="med" len="med"/>
+                    </a:lnR>
+                    <a:lnT w="6350" cap="flat" cmpd="sng" algn="ctr">
+                      <a:solidFill>
+                        <a:srgbClr val="E5E9F2"/>
+                      </a:solidFill>
+                      <a:prstDash val="solid"/>
+                      <a:round/>
+                      <a:headEnd type="none" w="med" len="med"/>
+                      <a:tailEnd type="none" w="med" len="med"/>
+                    </a:lnT>
+                    <a:lnB w="6350" cap="flat" cmpd="sng" algn="ctr">
+                      <a:solidFill>
+                        <a:srgbClr val="E5E9F2"/>
+                      </a:solidFill>
+                      <a:prstDash val="solid"/>
+                      <a:round/>
+                      <a:headEnd type="none" w="med" len="med"/>
+                      <a:tailEnd type="none" w="med" len="med"/>
+                    </a:lnB>
+                    <a:solidFill>
+                      <a:srgbClr val="1E2761"/>
+                    </a:solidFill>
+                  </a:tcPr>
+                </a:tc>
+                <a:tc>
+                  <a:txBody>
+                    <a:bodyPr/>
+                    <a:lstStyle/>
+                    <a:p>
+                      <a:pPr marL="0" indent="0">
+                        <a:buNone/>
+                      </a:pPr>
+                      <a:r>
+                        <a:rPr lang="en-US" sz="900" b="1" dirty="0">
+                          <a:solidFill>
+                            <a:srgbClr val="FFFFFF"/>
+                          </a:solidFill>
+                        </a:rPr>
+                        <a:t>何が起きるか</a:t>
+                      </a:r>
+                      <a:endParaRPr lang="en-US" sz="900" dirty="0"/>
+                    </a:p>
+                  </a:txBody>
+                  <a:tcPr>
+                    <a:lnL w="6350" cap="flat" cmpd="sng" algn="ctr">
+                      <a:solidFill>
+                        <a:srgbClr val="E5E9F2"/>
+                      </a:solidFill>
+                      <a:prstDash val="solid"/>
+                      <a:round/>
+                      <a:headEnd type="none" w="med" len="med"/>
+                      <a:tailEnd type="none" w="med" len="med"/>
+                    </a:lnL>
+                    <a:lnR w="6350" cap="flat" cmpd="sng" algn="ctr">
+                      <a:solidFill>
+                        <a:srgbClr val="E5E9F2"/>
+                      </a:solidFill>
+                      <a:prstDash val="solid"/>
+                      <a:round/>
+                      <a:headEnd type="none" w="med" len="med"/>
+                      <a:tailEnd type="none" w="med" len="med"/>
+                    </a:lnR>
+                    <a:lnT w="6350" cap="flat" cmpd="sng" algn="ctr">
+                      <a:solidFill>
+                        <a:srgbClr val="E5E9F2"/>
+                      </a:solidFill>
+                      <a:prstDash val="solid"/>
+                      <a:round/>
+                      <a:headEnd type="none" w="med" len="med"/>
+                      <a:tailEnd type="none" w="med" len="med"/>
+                    </a:lnT>
+                    <a:lnB w="6350" cap="flat" cmpd="sng" algn="ctr">
+                      <a:solidFill>
+                        <a:srgbClr val="E5E9F2"/>
+                      </a:solidFill>
+                      <a:prstDash val="solid"/>
+                      <a:round/>
+                      <a:headEnd type="none" w="med" len="med"/>
+                      <a:tailEnd type="none" w="med" len="med"/>
+                    </a:lnB>
+                    <a:solidFill>
+                      <a:srgbClr val="1E2761"/>
+                    </a:solidFill>
+                  </a:tcPr>
+                </a:tc>
+                <a:tc>
+                  <a:txBody>
+                    <a:bodyPr/>
+                    <a:lstStyle/>
+                    <a:p>
+                      <a:pPr marL="0" indent="0" algn="ctr">
+                        <a:buNone/>
+                      </a:pPr>
+                      <a:r>
+                        <a:rPr lang="en-US" sz="900" b="1" dirty="0">
+                          <a:solidFill>
+                            <a:srgbClr val="FFFFFF"/>
+                          </a:solidFill>
+                        </a:rPr>
+                        <a:t>対応する防御</a:t>
+                      </a:r>
+                      <a:endParaRPr lang="en-US" sz="900" dirty="0"/>
+                    </a:p>
+                  </a:txBody>
+                  <a:tcPr>
+                    <a:lnL w="6350" cap="flat" cmpd="sng" algn="ctr">
+                      <a:solidFill>
+                        <a:srgbClr val="E5E9F2"/>
+                      </a:solidFill>
+                      <a:prstDash val="solid"/>
+                      <a:round/>
+                      <a:headEnd type="none" w="med" len="med"/>
+                      <a:tailEnd type="none" w="med" len="med"/>
+                    </a:lnL>
+                    <a:lnR w="6350" cap="flat" cmpd="sng" algn="ctr">
+                      <a:solidFill>
+                        <a:srgbClr val="E5E9F2"/>
+                      </a:solidFill>
+                      <a:prstDash val="solid"/>
+                      <a:round/>
+                      <a:headEnd type="none" w="med" len="med"/>
+                      <a:tailEnd type="none" w="med" len="med"/>
+                    </a:lnR>
+                    <a:lnT w="6350" cap="flat" cmpd="sng" algn="ctr">
+                      <a:solidFill>
+                        <a:srgbClr val="E5E9F2"/>
+                      </a:solidFill>
+                      <a:prstDash val="solid"/>
+                      <a:round/>
+                      <a:headEnd type="none" w="med" len="med"/>
+                      <a:tailEnd type="none" w="med" len="med"/>
+                    </a:lnT>
+                    <a:lnB w="6350" cap="flat" cmpd="sng" algn="ctr">
+                      <a:solidFill>
+                        <a:srgbClr val="E5E9F2"/>
+                      </a:solidFill>
+                      <a:prstDash val="solid"/>
+                      <a:round/>
+                      <a:headEnd type="none" w="med" len="med"/>
+                      <a:tailEnd type="none" w="med" len="med"/>
+                    </a:lnB>
+                    <a:solidFill>
+                      <a:srgbClr val="1E2761"/>
+                    </a:solidFill>
+                  </a:tcPr>
+                </a:tc>
+                <a:extLst>
+                  <a:ext uri="{0D108BD9-81ED-4DB2-BD59-A6C34878D82A}">
+                    <a16:rowId xmlns:a16="http://schemas.microsoft.com/office/drawing/2014/main" val="10000"/>
+                  </a:ext>
+                </a:extLst>
+              </a:tr>
+              <a:tr h="320040">
+                <a:tc>
+                  <a:txBody>
+                    <a:bodyPr/>
+                    <a:lstStyle/>
+                    <a:p>
+                      <a:pPr marL="0" indent="0" algn="ctr">
+                        <a:buNone/>
+                      </a:pPr>
+                      <a:r>
+                        <a:rPr lang="en-US" sz="900" b="1" dirty="0">
+                          <a:solidFill>
+                            <a:srgbClr val="F96167"/>
+                          </a:solidFill>
+                        </a:rPr>
+                        <a:t>1</a:t>
+                      </a:r>
+                      <a:endParaRPr lang="en-US" sz="900" dirty="0"/>
+                    </a:p>
+                  </a:txBody>
+                  <a:tcPr>
+                    <a:lnL w="6350" cap="flat" cmpd="sng" algn="ctr">
+                      <a:solidFill>
+                        <a:srgbClr val="E5E9F2"/>
+                      </a:solidFill>
+                      <a:prstDash val="solid"/>
+                      <a:round/>
+                      <a:headEnd type="none" w="med" len="med"/>
+                      <a:tailEnd type="none" w="med" len="med"/>
+                    </a:lnL>
+                    <a:lnR w="6350" cap="flat" cmpd="sng" algn="ctr">
+                      <a:solidFill>
+                        <a:srgbClr val="E5E9F2"/>
+                      </a:solidFill>
+                      <a:prstDash val="solid"/>
+                      <a:round/>
+                      <a:headEnd type="none" w="med" len="med"/>
+                      <a:tailEnd type="none" w="med" len="med"/>
+                    </a:lnR>
+                    <a:lnT w="6350" cap="flat" cmpd="sng" algn="ctr">
+                      <a:solidFill>
+                        <a:srgbClr val="E5E9F2"/>
+                      </a:solidFill>
+                      <a:prstDash val="solid"/>
+                      <a:round/>
+                      <a:headEnd type="none" w="med" len="med"/>
+                      <a:tailEnd type="none" w="med" len="med"/>
+                    </a:lnT>
+                    <a:lnB w="6350" cap="flat" cmpd="sng" algn="ctr">
+                      <a:solidFill>
+                        <a:srgbClr val="E5E9F2"/>
+                      </a:solidFill>
+                      <a:prstDash val="solid"/>
+                      <a:round/>
+                      <a:headEnd type="none" w="med" len="med"/>
+                      <a:tailEnd type="none" w="med" len="med"/>
+                    </a:lnB>
+                  </a:tcPr>
+                </a:tc>
+                <a:tc>
+                  <a:txBody>
+                    <a:bodyPr/>
+                    <a:lstStyle/>
+                    <a:p>
+                      <a:pPr marL="0" indent="0">
+                        <a:buNone/>
+                      </a:pPr>
+                      <a:r>
+                        <a:rPr lang="en-US" sz="900" b="1" dirty="0">
+                          <a:solidFill>
+                            <a:srgbClr val="000000"/>
+                          </a:solidFill>
+                        </a:rPr>
+                        <a:t>.envをGitHubにコミット</a:t>
+                      </a:r>
+                      <a:endParaRPr lang="en-US" sz="900" dirty="0"/>
+                    </a:p>
+                  </a:txBody>
+                  <a:tcPr>
+                    <a:lnL w="6350" cap="flat" cmpd="sng" algn="ctr">
+                      <a:solidFill>
+                        <a:srgbClr val="E5E9F2"/>
+                      </a:solidFill>
+                      <a:prstDash val="solid"/>
+                      <a:round/>
+                      <a:headEnd type="none" w="med" len="med"/>
+                      <a:tailEnd type="none" w="med" len="med"/>
+                    </a:lnL>
+                    <a:lnR w="6350" cap="flat" cmpd="sng" algn="ctr">
+                      <a:solidFill>
+                        <a:srgbClr val="E5E9F2"/>
+                      </a:solidFill>
+                      <a:prstDash val="solid"/>
+                      <a:round/>
+                      <a:headEnd type="none" w="med" len="med"/>
+                      <a:tailEnd type="none" w="med" len="med"/>
+                    </a:lnR>
+                    <a:lnT w="6350" cap="flat" cmpd="sng" algn="ctr">
+                      <a:solidFill>
+                        <a:srgbClr val="E5E9F2"/>
+                      </a:solidFill>
+                      <a:prstDash val="solid"/>
+                      <a:round/>
+                      <a:headEnd type="none" w="med" len="med"/>
+                      <a:tailEnd type="none" w="med" len="med"/>
+                    </a:lnT>
+                    <a:lnB w="6350" cap="flat" cmpd="sng" algn="ctr">
+                      <a:solidFill>
+                        <a:srgbClr val="E5E9F2"/>
+                      </a:solidFill>
+                      <a:prstDash val="solid"/>
+                      <a:round/>
+                      <a:headEnd type="none" w="med" len="med"/>
+                      <a:tailEnd type="none" w="med" len="med"/>
+                    </a:lnB>
+                  </a:tcPr>
+                </a:tc>
+                <a:tc>
+                  <a:txBody>
+                    <a:bodyPr/>
+                    <a:lstStyle/>
+                    <a:p>
+                      <a:pPr marL="0" indent="0">
+                        <a:buNone/>
+                      </a:pPr>
+                      <a:r>
+                        <a:rPr lang="en-US" sz="800" dirty="0">
+                          <a:solidFill>
+                            <a:srgbClr val="000000"/>
+                          </a:solidFill>
+                        </a:rPr>
+                        <a:t>数分以内にクローラーがAPIキーを発見→不正利用→数万〜数百万円請求</a:t>
+                      </a:r>
+                      <a:endParaRPr lang="en-US" sz="800" dirty="0"/>
+                    </a:p>
+                  </a:txBody>
+                  <a:tcPr>
+                    <a:lnL w="6350" cap="flat" cmpd="sng" algn="ctr">
+                      <a:solidFill>
+                        <a:srgbClr val="E5E9F2"/>
+                      </a:solidFill>
+                      <a:prstDash val="solid"/>
+                      <a:round/>
+                      <a:headEnd type="none" w="med" len="med"/>
+                      <a:tailEnd type="none" w="med" len="med"/>
+                    </a:lnL>
+                    <a:lnR w="6350" cap="flat" cmpd="sng" algn="ctr">
+                      <a:solidFill>
+                        <a:srgbClr val="E5E9F2"/>
+                      </a:solidFill>
+                      <a:prstDash val="solid"/>
+                      <a:round/>
+                      <a:headEnd type="none" w="med" len="med"/>
+                      <a:tailEnd type="none" w="med" len="med"/>
+                    </a:lnR>
+                    <a:lnT w="6350" cap="flat" cmpd="sng" algn="ctr">
+                      <a:solidFill>
+                        <a:srgbClr val="E5E9F2"/>
+                      </a:solidFill>
+                      <a:prstDash val="solid"/>
+                      <a:round/>
+                      <a:headEnd type="none" w="med" len="med"/>
+                      <a:tailEnd type="none" w="med" len="med"/>
+                    </a:lnT>
+                    <a:lnB w="6350" cap="flat" cmpd="sng" algn="ctr">
+                      <a:solidFill>
+                        <a:srgbClr val="E5E9F2"/>
+                      </a:solidFill>
+                      <a:prstDash val="solid"/>
+                      <a:round/>
+                      <a:headEnd type="none" w="med" len="med"/>
+                      <a:tailEnd type="none" w="med" len="med"/>
+                    </a:lnB>
+                  </a:tcPr>
+                </a:tc>
+                <a:tc>
+                  <a:txBody>
+                    <a:bodyPr/>
+                    <a:lstStyle/>
+                    <a:p>
+                      <a:pPr marL="0" indent="0" algn="ctr">
+                        <a:buNone/>
+                      </a:pPr>
+                      <a:r>
+                        <a:rPr lang="en-US" sz="800" dirty="0">
+                          <a:solidFill>
+                            <a:srgbClr val="000000"/>
+                          </a:solidFill>
+                        </a:rPr>
+                        <a:t>Deny: Read(.env*)</a:t>
+                      </a:r>
+                      <a:endParaRPr lang="en-US" sz="800" dirty="0"/>
+                    </a:p>
+                    <a:p>
+                      <a:pPr marL="0" indent="0" algn="ctr">
+                        <a:buNone/>
+                      </a:pPr>
+                      <a:r>
+                        <a:rPr lang="en-US" sz="800" dirty="0">
+                          <a:solidFill>
+                            <a:srgbClr val="000000"/>
+                          </a:solidFill>
+                        </a:rPr>
+                        <a:t>.gitignore設定</a:t>
+                      </a:r>
+                      <a:endParaRPr lang="en-US" sz="800" dirty="0"/>
+                    </a:p>
+                  </a:txBody>
+                  <a:tcPr>
+                    <a:lnL w="6350" cap="flat" cmpd="sng" algn="ctr">
+                      <a:solidFill>
+                        <a:srgbClr val="E5E9F2"/>
+                      </a:solidFill>
+                      <a:prstDash val="solid"/>
+                      <a:round/>
+                      <a:headEnd type="none" w="med" len="med"/>
+                      <a:tailEnd type="none" w="med" len="med"/>
+                    </a:lnL>
+                    <a:lnR w="6350" cap="flat" cmpd="sng" algn="ctr">
+                      <a:solidFill>
+                        <a:srgbClr val="E5E9F2"/>
+                      </a:solidFill>
+                      <a:prstDash val="solid"/>
+                      <a:round/>
+                      <a:headEnd type="none" w="med" len="med"/>
+                      <a:tailEnd type="none" w="med" len="med"/>
+                    </a:lnR>
+                    <a:lnT w="6350" cap="flat" cmpd="sng" algn="ctr">
+                      <a:solidFill>
+                        <a:srgbClr val="E5E9F2"/>
+                      </a:solidFill>
+                      <a:prstDash val="solid"/>
+                      <a:round/>
+                      <a:headEnd type="none" w="med" len="med"/>
+                      <a:tailEnd type="none" w="med" len="med"/>
+                    </a:lnT>
+                    <a:lnB w="6350" cap="flat" cmpd="sng" algn="ctr">
+                      <a:solidFill>
+                        <a:srgbClr val="E5E9F2"/>
+                      </a:solidFill>
+                      <a:prstDash val="solid"/>
+                      <a:round/>
+                      <a:headEnd type="none" w="med" len="med"/>
+                      <a:tailEnd type="none" w="med" len="med"/>
+                    </a:lnB>
+                  </a:tcPr>
+                </a:tc>
+                <a:extLst>
+                  <a:ext uri="{0D108BD9-81ED-4DB2-BD59-A6C34878D82A}">
+                    <a16:rowId xmlns:a16="http://schemas.microsoft.com/office/drawing/2014/main" val="10001"/>
+                  </a:ext>
+                </a:extLst>
+              </a:tr>
+              <a:tr h="320040">
+                <a:tc>
+                  <a:txBody>
+                    <a:bodyPr/>
+                    <a:lstStyle/>
+                    <a:p>
+                      <a:pPr marL="0" indent="0" algn="ctr">
+                        <a:buNone/>
+                      </a:pPr>
+                      <a:r>
+                        <a:rPr lang="en-US" sz="900" b="1" dirty="0">
+                          <a:solidFill>
+                            <a:srgbClr val="F96167"/>
+                          </a:solidFill>
+                        </a:rPr>
+                        <a:t>2</a:t>
+                      </a:r>
+                      <a:endParaRPr lang="en-US" sz="900" dirty="0"/>
+                    </a:p>
+                  </a:txBody>
+                  <a:tcPr>
+                    <a:lnL w="6350" cap="flat" cmpd="sng" algn="ctr">
+                      <a:solidFill>
+                        <a:srgbClr val="E5E9F2"/>
+                      </a:solidFill>
+                      <a:prstDash val="solid"/>
+                      <a:round/>
+                      <a:headEnd type="none" w="med" len="med"/>
+                      <a:tailEnd type="none" w="med" len="med"/>
+                    </a:lnL>
+                    <a:lnR w="6350" cap="flat" cmpd="sng" algn="ctr">
+                      <a:solidFill>
+                        <a:srgbClr val="E5E9F2"/>
+                      </a:solidFill>
+                      <a:prstDash val="solid"/>
+                      <a:round/>
+                      <a:headEnd type="none" w="med" len="med"/>
+                      <a:tailEnd type="none" w="med" len="med"/>
+                    </a:lnR>
+                    <a:lnT w="6350" cap="flat" cmpd="sng" algn="ctr">
+                      <a:solidFill>
+                        <a:srgbClr val="E5E9F2"/>
+                      </a:solidFill>
+                      <a:prstDash val="solid"/>
+                      <a:round/>
+                      <a:headEnd type="none" w="med" len="med"/>
+                      <a:tailEnd type="none" w="med" len="med"/>
+                    </a:lnT>
+                    <a:lnB w="6350" cap="flat" cmpd="sng" algn="ctr">
+                      <a:solidFill>
+                        <a:srgbClr val="E5E9F2"/>
+                      </a:solidFill>
+                      <a:prstDash val="solid"/>
+                      <a:round/>
+                      <a:headEnd type="none" w="med" len="med"/>
+                      <a:tailEnd type="none" w="med" len="med"/>
+                    </a:lnB>
+                  </a:tcPr>
+                </a:tc>
+                <a:tc>
+                  <a:txBody>
+                    <a:bodyPr/>
+                    <a:lstStyle/>
+                    <a:p>
+                      <a:pPr marL="0" indent="0">
+                        <a:buNone/>
+                      </a:pPr>
+                      <a:r>
+                        <a:rPr lang="en-US" sz="900" b="1" dirty="0">
+                          <a:solidFill>
+                            <a:srgbClr val="000000"/>
+                          </a:solidFill>
+                        </a:rPr>
+                        <a:t>本番DBにDROP TABLE</a:t>
+                      </a:r>
+                      <a:endParaRPr lang="en-US" sz="900" dirty="0"/>
+                    </a:p>
+                  </a:txBody>
+                  <a:tcPr>
+                    <a:lnL w="6350" cap="flat" cmpd="sng" algn="ctr">
+                      <a:solidFill>
+                        <a:srgbClr val="E5E9F2"/>
+                      </a:solidFill>
+                      <a:prstDash val="solid"/>
+                      <a:round/>
+                      <a:headEnd type="none" w="med" len="med"/>
+                      <a:tailEnd type="none" w="med" len="med"/>
+                    </a:lnL>
+                    <a:lnR w="6350" cap="flat" cmpd="sng" algn="ctr">
+                      <a:solidFill>
+                        <a:srgbClr val="E5E9F2"/>
+                      </a:solidFill>
+                      <a:prstDash val="solid"/>
+                      <a:round/>
+                      <a:headEnd type="none" w="med" len="med"/>
+                      <a:tailEnd type="none" w="med" len="med"/>
+                    </a:lnR>
+                    <a:lnT w="6350" cap="flat" cmpd="sng" algn="ctr">
+                      <a:solidFill>
+                        <a:srgbClr val="E5E9F2"/>
+                      </a:solidFill>
+                      <a:prstDash val="solid"/>
+                      <a:round/>
+                      <a:headEnd type="none" w="med" len="med"/>
+                      <a:tailEnd type="none" w="med" len="med"/>
+                    </a:lnT>
+                    <a:lnB w="6350" cap="flat" cmpd="sng" algn="ctr">
+                      <a:solidFill>
+                        <a:srgbClr val="E5E9F2"/>
+                      </a:solidFill>
+                      <a:prstDash val="solid"/>
+                      <a:round/>
+                      <a:headEnd type="none" w="med" len="med"/>
+                      <a:tailEnd type="none" w="med" len="med"/>
+                    </a:lnB>
+                  </a:tcPr>
+                </a:tc>
+                <a:tc>
+                  <a:txBody>
+                    <a:bodyPr/>
+                    <a:lstStyle/>
+                    <a:p>
+                      <a:pPr marL="0" indent="0">
+                        <a:buNone/>
+                      </a:pPr>
+                      <a:r>
+                        <a:rPr lang="en-US" sz="800" dirty="0">
+                          <a:solidFill>
+                            <a:srgbClr val="000000"/>
+                          </a:solidFill>
+                        </a:rPr>
+                        <a:t>AIが本番環境のDBに接続した状態でテーブル丸ごと削除。3日分のデータ消失</a:t>
+                      </a:r>
+                      <a:endParaRPr lang="en-US" sz="800" dirty="0"/>
+                    </a:p>
+                  </a:txBody>
+                  <a:tcPr>
+                    <a:lnL w="6350" cap="flat" cmpd="sng" algn="ctr">
+                      <a:solidFill>
+                        <a:srgbClr val="E5E9F2"/>
+                      </a:solidFill>
+                      <a:prstDash val="solid"/>
+                      <a:round/>
+                      <a:headEnd type="none" w="med" len="med"/>
+                      <a:tailEnd type="none" w="med" len="med"/>
+                    </a:lnL>
+                    <a:lnR w="6350" cap="flat" cmpd="sng" algn="ctr">
+                      <a:solidFill>
+                        <a:srgbClr val="E5E9F2"/>
+                      </a:solidFill>
+                      <a:prstDash val="solid"/>
+                      <a:round/>
+                      <a:headEnd type="none" w="med" len="med"/>
+                      <a:tailEnd type="none" w="med" len="med"/>
+                    </a:lnR>
+                    <a:lnT w="6350" cap="flat" cmpd="sng" algn="ctr">
+                      <a:solidFill>
+                        <a:srgbClr val="E5E9F2"/>
+                      </a:solidFill>
+                      <a:prstDash val="solid"/>
+                      <a:round/>
+                      <a:headEnd type="none" w="med" len="med"/>
+                      <a:tailEnd type="none" w="med" len="med"/>
+                    </a:lnT>
+                    <a:lnB w="6350" cap="flat" cmpd="sng" algn="ctr">
+                      <a:solidFill>
+                        <a:srgbClr val="E5E9F2"/>
+                      </a:solidFill>
+                      <a:prstDash val="solid"/>
+                      <a:round/>
+                      <a:headEnd type="none" w="med" len="med"/>
+                      <a:tailEnd type="none" w="med" len="med"/>
+                    </a:lnB>
+                  </a:tcPr>
+                </a:tc>
+                <a:tc>
+                  <a:txBody>
+                    <a:bodyPr/>
+                    <a:lstStyle/>
+                    <a:p>
+                      <a:pPr marL="0" indent="0" algn="ctr">
+                        <a:buNone/>
+                      </a:pPr>
+                      <a:r>
+                        <a:rPr lang="en-US" sz="800" dirty="0">
+                          <a:solidFill>
+                            <a:srgbClr val="000000"/>
+                          </a:solidFill>
+                        </a:rPr>
+                        <a:t>環境分離（第2回）</a:t>
+                      </a:r>
+                      <a:endParaRPr lang="en-US" sz="800" dirty="0"/>
+                    </a:p>
+                    <a:p>
+                      <a:pPr marL="0" indent="0" algn="ctr">
+                        <a:buNone/>
+                      </a:pPr>
+                      <a:r>
+                        <a:rPr lang="en-US" sz="800" dirty="0">
+                          <a:solidFill>
+                            <a:srgbClr val="000000"/>
+                          </a:solidFill>
+                        </a:rPr>
+                        <a:t>HooksでSQL制限</a:t>
+                      </a:r>
+                      <a:endParaRPr lang="en-US" sz="800" dirty="0"/>
+                    </a:p>
+                  </a:txBody>
+                  <a:tcPr>
+                    <a:lnL w="6350" cap="flat" cmpd="sng" algn="ctr">
+                      <a:solidFill>
+                        <a:srgbClr val="E5E9F2"/>
+                      </a:solidFill>
+                      <a:prstDash val="solid"/>
+                      <a:round/>
+                      <a:headEnd type="none" w="med" len="med"/>
+                      <a:tailEnd type="none" w="med" len="med"/>
+                    </a:lnL>
+                    <a:lnR w="6350" cap="flat" cmpd="sng" algn="ctr">
+                      <a:solidFill>
+                        <a:srgbClr val="E5E9F2"/>
+                      </a:solidFill>
+                      <a:prstDash val="solid"/>
+                      <a:round/>
+                      <a:headEnd type="none" w="med" len="med"/>
+                      <a:tailEnd type="none" w="med" len="med"/>
+                    </a:lnR>
+                    <a:lnT w="6350" cap="flat" cmpd="sng" algn="ctr">
+                      <a:solidFill>
+                        <a:srgbClr val="E5E9F2"/>
+                      </a:solidFill>
+                      <a:prstDash val="solid"/>
+                      <a:round/>
+                      <a:headEnd type="none" w="med" len="med"/>
+                      <a:tailEnd type="none" w="med" len="med"/>
+                    </a:lnT>
+                    <a:lnB w="6350" cap="flat" cmpd="sng" algn="ctr">
+                      <a:solidFill>
+                        <a:srgbClr val="E5E9F2"/>
+                      </a:solidFill>
+                      <a:prstDash val="solid"/>
+                      <a:round/>
+                      <a:headEnd type="none" w="med" len="med"/>
+                      <a:tailEnd type="none" w="med" len="med"/>
+                    </a:lnB>
+                  </a:tcPr>
+                </a:tc>
+                <a:extLst>
+                  <a:ext uri="{0D108BD9-81ED-4DB2-BD59-A6C34878D82A}">
+                    <a16:rowId xmlns:a16="http://schemas.microsoft.com/office/drawing/2014/main" val="10002"/>
+                  </a:ext>
+                </a:extLst>
+              </a:tr>
+              <a:tr h="320040">
+                <a:tc>
+                  <a:txBody>
+                    <a:bodyPr/>
+                    <a:lstStyle/>
+                    <a:p>
+                      <a:pPr marL="0" indent="0" algn="ctr">
+                        <a:buNone/>
+                      </a:pPr>
+                      <a:r>
+                        <a:rPr lang="en-US" sz="900" b="1" dirty="0">
+                          <a:solidFill>
+                            <a:srgbClr val="F96167"/>
+                          </a:solidFill>
+                        </a:rPr>
+                        <a:t>3</a:t>
+                      </a:r>
+                      <a:endParaRPr lang="en-US" sz="900" dirty="0"/>
+                    </a:p>
+                  </a:txBody>
+                  <a:tcPr>
+                    <a:lnL w="6350" cap="flat" cmpd="sng" algn="ctr">
+                      <a:solidFill>
+                        <a:srgbClr val="E5E9F2"/>
+                      </a:solidFill>
+                      <a:prstDash val="solid"/>
+                      <a:round/>
+                      <a:headEnd type="none" w="med" len="med"/>
+                      <a:tailEnd type="none" w="med" len="med"/>
+                    </a:lnL>
+                    <a:lnR w="6350" cap="flat" cmpd="sng" algn="ctr">
+                      <a:solidFill>
+                        <a:srgbClr val="E5E9F2"/>
+                      </a:solidFill>
+                      <a:prstDash val="solid"/>
+                      <a:round/>
+                      <a:headEnd type="none" w="med" len="med"/>
+                      <a:tailEnd type="none" w="med" len="med"/>
+                    </a:lnR>
+                    <a:lnT w="6350" cap="flat" cmpd="sng" algn="ctr">
+                      <a:solidFill>
+                        <a:srgbClr val="E5E9F2"/>
+                      </a:solidFill>
+                      <a:prstDash val="solid"/>
+                      <a:round/>
+                      <a:headEnd type="none" w="med" len="med"/>
+                      <a:tailEnd type="none" w="med" len="med"/>
+                    </a:lnT>
+                    <a:lnB w="6350" cap="flat" cmpd="sng" algn="ctr">
+                      <a:solidFill>
+                        <a:srgbClr val="E5E9F2"/>
+                      </a:solidFill>
+                      <a:prstDash val="solid"/>
+                      <a:round/>
+                      <a:headEnd type="none" w="med" len="med"/>
+                      <a:tailEnd type="none" w="med" len="med"/>
+                    </a:lnB>
+                  </a:tcPr>
+                </a:tc>
+                <a:tc>
+                  <a:txBody>
+                    <a:bodyPr/>
+                    <a:lstStyle/>
+                    <a:p>
+                      <a:pPr marL="0" indent="0">
+                        <a:buNone/>
+                      </a:pPr>
+                      <a:r>
+                        <a:rPr lang="en-US" sz="900" b="1" dirty="0">
+                          <a:solidFill>
+                            <a:srgbClr val="000000"/>
+                          </a:solidFill>
+                        </a:rPr>
+                        <a:t>rm -rf で全ファイル削除</a:t>
+                      </a:r>
+                      <a:endParaRPr lang="en-US" sz="900" dirty="0"/>
+                    </a:p>
+                  </a:txBody>
+                  <a:tcPr>
+                    <a:lnL w="6350" cap="flat" cmpd="sng" algn="ctr">
+                      <a:solidFill>
+                        <a:srgbClr val="E5E9F2"/>
+                      </a:solidFill>
+                      <a:prstDash val="solid"/>
+                      <a:round/>
+                      <a:headEnd type="none" w="med" len="med"/>
+                      <a:tailEnd type="none" w="med" len="med"/>
+                    </a:lnL>
+                    <a:lnR w="6350" cap="flat" cmpd="sng" algn="ctr">
+                      <a:solidFill>
+                        <a:srgbClr val="E5E9F2"/>
+                      </a:solidFill>
+                      <a:prstDash val="solid"/>
+                      <a:round/>
+                      <a:headEnd type="none" w="med" len="med"/>
+                      <a:tailEnd type="none" w="med" len="med"/>
+                    </a:lnR>
+                    <a:lnT w="6350" cap="flat" cmpd="sng" algn="ctr">
+                      <a:solidFill>
+                        <a:srgbClr val="E5E9F2"/>
+                      </a:solidFill>
+                      <a:prstDash val="solid"/>
+                      <a:round/>
+                      <a:headEnd type="none" w="med" len="med"/>
+                      <a:tailEnd type="none" w="med" len="med"/>
+                    </a:lnT>
+                    <a:lnB w="6350" cap="flat" cmpd="sng" algn="ctr">
+                      <a:solidFill>
+                        <a:srgbClr val="E5E9F2"/>
+                      </a:solidFill>
+                      <a:prstDash val="solid"/>
+                      <a:round/>
+                      <a:headEnd type="none" w="med" len="med"/>
+                      <a:tailEnd type="none" w="med" len="med"/>
+                    </a:lnB>
+                  </a:tcPr>
+                </a:tc>
+                <a:tc>
+                  <a:txBody>
+                    <a:bodyPr/>
+                    <a:lstStyle/>
+                    <a:p>
+                      <a:pPr marL="0" indent="0">
+                        <a:buNone/>
+                      </a:pPr>
+                      <a:r>
+                        <a:rPr lang="en-US" sz="800" dirty="0">
+                          <a:solidFill>
+                            <a:srgbClr val="000000"/>
+                          </a:solidFill>
+                        </a:rPr>
+                        <a:t>誤ったパスで問答無用の全削除。Git管理外のファイルは復旧不能。「朝起きたらデータが消えていた」</a:t>
+                      </a:r>
+                      <a:endParaRPr lang="en-US" sz="800" dirty="0"/>
+                    </a:p>
+                  </a:txBody>
+                  <a:tcPr>
+                    <a:lnL w="6350" cap="flat" cmpd="sng" algn="ctr">
+                      <a:solidFill>
+                        <a:srgbClr val="E5E9F2"/>
+                      </a:solidFill>
+                      <a:prstDash val="solid"/>
+                      <a:round/>
+                      <a:headEnd type="none" w="med" len="med"/>
+                      <a:tailEnd type="none" w="med" len="med"/>
+                    </a:lnL>
+                    <a:lnR w="6350" cap="flat" cmpd="sng" algn="ctr">
+                      <a:solidFill>
+                        <a:srgbClr val="E5E9F2"/>
+                      </a:solidFill>
+                      <a:prstDash val="solid"/>
+                      <a:round/>
+                      <a:headEnd type="none" w="med" len="med"/>
+                      <a:tailEnd type="none" w="med" len="med"/>
+                    </a:lnR>
+                    <a:lnT w="6350" cap="flat" cmpd="sng" algn="ctr">
+                      <a:solidFill>
+                        <a:srgbClr val="E5E9F2"/>
+                      </a:solidFill>
+                      <a:prstDash val="solid"/>
+                      <a:round/>
+                      <a:headEnd type="none" w="med" len="med"/>
+                      <a:tailEnd type="none" w="med" len="med"/>
+                    </a:lnT>
+                    <a:lnB w="6350" cap="flat" cmpd="sng" algn="ctr">
+                      <a:solidFill>
+                        <a:srgbClr val="E5E9F2"/>
+                      </a:solidFill>
+                      <a:prstDash val="solid"/>
+                      <a:round/>
+                      <a:headEnd type="none" w="med" len="med"/>
+                      <a:tailEnd type="none" w="med" len="med"/>
+                    </a:lnB>
+                  </a:tcPr>
+                </a:tc>
+                <a:tc>
+                  <a:txBody>
+                    <a:bodyPr/>
+                    <a:lstStyle/>
+                    <a:p>
+                      <a:pPr marL="0" indent="0" algn="ctr">
+                        <a:buNone/>
+                      </a:pPr>
+                      <a:r>
+                        <a:rPr lang="en-US" sz="800" dirty="0">
+                          <a:solidFill>
+                            <a:srgbClr val="000000"/>
+                          </a:solidFill>
+                        </a:rPr>
+                        <a:t>Deny + Hooks</a:t>
+                      </a:r>
+                      <a:endParaRPr lang="en-US" sz="800" dirty="0"/>
+                    </a:p>
+                    <a:p>
+                      <a:pPr marL="0" indent="0" algn="ctr">
+                        <a:buNone/>
+                      </a:pPr>
+                      <a:r>
+                        <a:rPr lang="en-US" sz="800" dirty="0">
+                          <a:solidFill>
+                            <a:srgbClr val="000000"/>
+                          </a:solidFill>
+                        </a:rPr>
+                        <a:t>(本編DEMO)</a:t>
+                      </a:r>
+                      <a:endParaRPr lang="en-US" sz="800" dirty="0"/>
+                    </a:p>
+                  </a:txBody>
+                  <a:tcPr>
+                    <a:lnL w="6350" cap="flat" cmpd="sng" algn="ctr">
+                      <a:solidFill>
+                        <a:srgbClr val="E5E9F2"/>
+                      </a:solidFill>
+                      <a:prstDash val="solid"/>
+                      <a:round/>
+                      <a:headEnd type="none" w="med" len="med"/>
+                      <a:tailEnd type="none" w="med" len="med"/>
+                    </a:lnL>
+                    <a:lnR w="6350" cap="flat" cmpd="sng" algn="ctr">
+                      <a:solidFill>
+                        <a:srgbClr val="E5E9F2"/>
+                      </a:solidFill>
+                      <a:prstDash val="solid"/>
+                      <a:round/>
+                      <a:headEnd type="none" w="med" len="med"/>
+                      <a:tailEnd type="none" w="med" len="med"/>
+                    </a:lnR>
+                    <a:lnT w="6350" cap="flat" cmpd="sng" algn="ctr">
+                      <a:solidFill>
+                        <a:srgbClr val="E5E9F2"/>
+                      </a:solidFill>
+                      <a:prstDash val="solid"/>
+                      <a:round/>
+                      <a:headEnd type="none" w="med" len="med"/>
+                      <a:tailEnd type="none" w="med" len="med"/>
+                    </a:lnT>
+                    <a:lnB w="6350" cap="flat" cmpd="sng" algn="ctr">
+                      <a:solidFill>
+                        <a:srgbClr val="E5E9F2"/>
+                      </a:solidFill>
+                      <a:prstDash val="solid"/>
+                      <a:round/>
+                      <a:headEnd type="none" w="med" len="med"/>
+                      <a:tailEnd type="none" w="med" len="med"/>
+                    </a:lnB>
+                  </a:tcPr>
+                </a:tc>
+                <a:extLst>
+                  <a:ext uri="{0D108BD9-81ED-4DB2-BD59-A6C34878D82A}">
+                    <a16:rowId xmlns:a16="http://schemas.microsoft.com/office/drawing/2014/main" val="10003"/>
+                  </a:ext>
+                </a:extLst>
+              </a:tr>
+              <a:tr h="320040">
+                <a:tc>
+                  <a:txBody>
+                    <a:bodyPr/>
+                    <a:lstStyle/>
+                    <a:p>
+                      <a:pPr marL="0" indent="0" algn="ctr">
+                        <a:buNone/>
+                      </a:pPr>
+                      <a:r>
+                        <a:rPr lang="en-US" sz="900" b="1" dirty="0">
+                          <a:solidFill>
+                            <a:srgbClr val="000000"/>
+                          </a:solidFill>
+                        </a:rPr>
+                        <a:t>4</a:t>
+                      </a:r>
+                      <a:endParaRPr lang="en-US" sz="900" dirty="0"/>
+                    </a:p>
+                  </a:txBody>
+                  <a:tcPr>
+                    <a:lnL w="6350" cap="flat" cmpd="sng" algn="ctr">
+                      <a:solidFill>
+                        <a:srgbClr val="E5E9F2"/>
+                      </a:solidFill>
+                      <a:prstDash val="solid"/>
+                      <a:round/>
+                      <a:headEnd type="none" w="med" len="med"/>
+                      <a:tailEnd type="none" w="med" len="med"/>
+                    </a:lnL>
+                    <a:lnR w="6350" cap="flat" cmpd="sng" algn="ctr">
+                      <a:solidFill>
+                        <a:srgbClr val="E5E9F2"/>
+                      </a:solidFill>
+                      <a:prstDash val="solid"/>
+                      <a:round/>
+                      <a:headEnd type="none" w="med" len="med"/>
+                      <a:tailEnd type="none" w="med" len="med"/>
+                    </a:lnR>
+                    <a:lnT w="6350" cap="flat" cmpd="sng" algn="ctr">
+                      <a:solidFill>
+                        <a:srgbClr val="E5E9F2"/>
+                      </a:solidFill>
+                      <a:prstDash val="solid"/>
+                      <a:round/>
+                      <a:headEnd type="none" w="med" len="med"/>
+                      <a:tailEnd type="none" w="med" len="med"/>
+                    </a:lnT>
+                    <a:lnB w="6350" cap="flat" cmpd="sng" algn="ctr">
+                      <a:solidFill>
+                        <a:srgbClr val="E5E9F2"/>
+                      </a:solidFill>
+                      <a:prstDash val="solid"/>
+                      <a:round/>
+                      <a:headEnd type="none" w="med" len="med"/>
+                      <a:tailEnd type="none" w="med" len="med"/>
+                    </a:lnB>
+                  </a:tcPr>
+                </a:tc>
+                <a:tc>
+                  <a:txBody>
+                    <a:bodyPr/>
+                    <a:lstStyle/>
+                    <a:p>
+                      <a:pPr marL="0" indent="0">
+                        <a:buNone/>
+                      </a:pPr>
+                      <a:r>
+                        <a:rPr lang="en-US" sz="900" b="1" dirty="0">
+                          <a:solidFill>
+                            <a:srgbClr val="000000"/>
+                          </a:solidFill>
+                        </a:rPr>
+                        <a:t>APIキーをプロンプトに直書き</a:t>
+                      </a:r>
+                      <a:endParaRPr lang="en-US" sz="900" dirty="0"/>
+                    </a:p>
+                  </a:txBody>
+                  <a:tcPr>
+                    <a:lnL w="6350" cap="flat" cmpd="sng" algn="ctr">
+                      <a:solidFill>
+                        <a:srgbClr val="E5E9F2"/>
+                      </a:solidFill>
+                      <a:prstDash val="solid"/>
+                      <a:round/>
+                      <a:headEnd type="none" w="med" len="med"/>
+                      <a:tailEnd type="none" w="med" len="med"/>
+                    </a:lnL>
+                    <a:lnR w="6350" cap="flat" cmpd="sng" algn="ctr">
+                      <a:solidFill>
+                        <a:srgbClr val="E5E9F2"/>
+                      </a:solidFill>
+                      <a:prstDash val="solid"/>
+                      <a:round/>
+                      <a:headEnd type="none" w="med" len="med"/>
+                      <a:tailEnd type="none" w="med" len="med"/>
+                    </a:lnR>
+                    <a:lnT w="6350" cap="flat" cmpd="sng" algn="ctr">
+                      <a:solidFill>
+                        <a:srgbClr val="E5E9F2"/>
+                      </a:solidFill>
+                      <a:prstDash val="solid"/>
+                      <a:round/>
+                      <a:headEnd type="none" w="med" len="med"/>
+                      <a:tailEnd type="none" w="med" len="med"/>
+                    </a:lnT>
+                    <a:lnB w="6350" cap="flat" cmpd="sng" algn="ctr">
+                      <a:solidFill>
+                        <a:srgbClr val="E5E9F2"/>
+                      </a:solidFill>
+                      <a:prstDash val="solid"/>
+                      <a:round/>
+                      <a:headEnd type="none" w="med" len="med"/>
+                      <a:tailEnd type="none" w="med" len="med"/>
+                    </a:lnB>
+                  </a:tcPr>
+                </a:tc>
+                <a:tc>
+                  <a:txBody>
+                    <a:bodyPr/>
+                    <a:lstStyle/>
+                    <a:p>
+                      <a:pPr marL="0" indent="0">
+                        <a:buNone/>
+                      </a:pPr>
+                      <a:r>
+                        <a:rPr lang="en-US" sz="800" dirty="0">
+                          <a:solidFill>
+                            <a:srgbClr val="000000"/>
+                          </a:solidFill>
+                        </a:rPr>
+                        <a:t>AIに聞かれて貼る→ログファイルにAPIキーが記録→ログ流出で不正利用</a:t>
+                      </a:r>
+                      <a:endParaRPr lang="en-US" sz="800" dirty="0"/>
+                    </a:p>
+                  </a:txBody>
+                  <a:tcPr>
+                    <a:lnL w="6350" cap="flat" cmpd="sng" algn="ctr">
+                      <a:solidFill>
+                        <a:srgbClr val="E5E9F2"/>
+                      </a:solidFill>
+                      <a:prstDash val="solid"/>
+                      <a:round/>
+                      <a:headEnd type="none" w="med" len="med"/>
+                      <a:tailEnd type="none" w="med" len="med"/>
+                    </a:lnL>
+                    <a:lnR w="6350" cap="flat" cmpd="sng" algn="ctr">
+                      <a:solidFill>
+                        <a:srgbClr val="E5E9F2"/>
+                      </a:solidFill>
+                      <a:prstDash val="solid"/>
+                      <a:round/>
+                      <a:headEnd type="none" w="med" len="med"/>
+                      <a:tailEnd type="none" w="med" len="med"/>
+                    </a:lnR>
+                    <a:lnT w="6350" cap="flat" cmpd="sng" algn="ctr">
+                      <a:solidFill>
+                        <a:srgbClr val="E5E9F2"/>
+                      </a:solidFill>
+                      <a:prstDash val="solid"/>
+                      <a:round/>
+                      <a:headEnd type="none" w="med" len="med"/>
+                      <a:tailEnd type="none" w="med" len="med"/>
+                    </a:lnT>
+                    <a:lnB w="6350" cap="flat" cmpd="sng" algn="ctr">
+                      <a:solidFill>
+                        <a:srgbClr val="E5E9F2"/>
+                      </a:solidFill>
+                      <a:prstDash val="solid"/>
+                      <a:round/>
+                      <a:headEnd type="none" w="med" len="med"/>
+                      <a:tailEnd type="none" w="med" len="med"/>
+                    </a:lnB>
+                  </a:tcPr>
+                </a:tc>
+                <a:tc>
+                  <a:txBody>
+                    <a:bodyPr/>
+                    <a:lstStyle/>
+                    <a:p>
+                      <a:pPr marL="0" indent="0" algn="ctr">
+                        <a:buNone/>
+                      </a:pPr>
+                      <a:r>
+                        <a:rPr lang="en-US" sz="800" dirty="0">
+                          <a:solidFill>
+                            <a:srgbClr val="000000"/>
+                          </a:solidFill>
+                        </a:rPr>
+                        <a:t>ログのPIIマスキング</a:t>
+                      </a:r>
+                      <a:endParaRPr lang="en-US" sz="800" dirty="0"/>
+                    </a:p>
+                    <a:p>
+                      <a:pPr marL="0" indent="0" algn="ctr">
+                        <a:buNone/>
+                      </a:pPr>
+                      <a:r>
+                        <a:rPr lang="en-US" sz="800" dirty="0">
+                          <a:solidFill>
+                            <a:srgbClr val="000000"/>
+                          </a:solidFill>
+                        </a:rPr>
+                        <a:t>(第6回)</a:t>
+                      </a:r>
+                      <a:endParaRPr lang="en-US" sz="800" dirty="0"/>
+                    </a:p>
+                  </a:txBody>
+                  <a:tcPr>
+                    <a:lnL w="6350" cap="flat" cmpd="sng" algn="ctr">
+                      <a:solidFill>
+                        <a:srgbClr val="E5E9F2"/>
+                      </a:solidFill>
+                      <a:prstDash val="solid"/>
+                      <a:round/>
+                      <a:headEnd type="none" w="med" len="med"/>
+                      <a:tailEnd type="none" w="med" len="med"/>
+                    </a:lnL>
+                    <a:lnR w="6350" cap="flat" cmpd="sng" algn="ctr">
+                      <a:solidFill>
+                        <a:srgbClr val="E5E9F2"/>
+                      </a:solidFill>
+                      <a:prstDash val="solid"/>
+                      <a:round/>
+                      <a:headEnd type="none" w="med" len="med"/>
+                      <a:tailEnd type="none" w="med" len="med"/>
+                    </a:lnR>
+                    <a:lnT w="6350" cap="flat" cmpd="sng" algn="ctr">
+                      <a:solidFill>
+                        <a:srgbClr val="E5E9F2"/>
+                      </a:solidFill>
+                      <a:prstDash val="solid"/>
+                      <a:round/>
+                      <a:headEnd type="none" w="med" len="med"/>
+                      <a:tailEnd type="none" w="med" len="med"/>
+                    </a:lnT>
+                    <a:lnB w="6350" cap="flat" cmpd="sng" algn="ctr">
+                      <a:solidFill>
+                        <a:srgbClr val="E5E9F2"/>
+                      </a:solidFill>
+                      <a:prstDash val="solid"/>
+                      <a:round/>
+                      <a:headEnd type="none" w="med" len="med"/>
+                      <a:tailEnd type="none" w="med" len="med"/>
+                    </a:lnB>
+                  </a:tcPr>
+                </a:tc>
+                <a:extLst>
+                  <a:ext uri="{0D108BD9-81ED-4DB2-BD59-A6C34878D82A}">
+                    <a16:rowId xmlns:a16="http://schemas.microsoft.com/office/drawing/2014/main" val="10004"/>
+                  </a:ext>
+                </a:extLst>
+              </a:tr>
+              <a:tr h="320040">
+                <a:tc>
+                  <a:txBody>
+                    <a:bodyPr/>
+                    <a:lstStyle/>
+                    <a:p>
+                      <a:pPr marL="0" indent="0" algn="ctr">
+                        <a:buNone/>
+                      </a:pPr>
+                      <a:r>
+                        <a:rPr lang="en-US" sz="900" b="1" dirty="0">
+                          <a:solidFill>
+                            <a:srgbClr val="000000"/>
+                          </a:solidFill>
+                        </a:rPr>
+                        <a:t>5</a:t>
+                      </a:r>
+                      <a:endParaRPr lang="en-US" sz="900" dirty="0"/>
+                    </a:p>
+                  </a:txBody>
+                  <a:tcPr>
+                    <a:lnL w="6350" cap="flat" cmpd="sng" algn="ctr">
+                      <a:solidFill>
+                        <a:srgbClr val="E5E9F2"/>
+                      </a:solidFill>
+                      <a:prstDash val="solid"/>
+                      <a:round/>
+                      <a:headEnd type="none" w="med" len="med"/>
+                      <a:tailEnd type="none" w="med" len="med"/>
+                    </a:lnL>
+                    <a:lnR w="6350" cap="flat" cmpd="sng" algn="ctr">
+                      <a:solidFill>
+                        <a:srgbClr val="E5E9F2"/>
+                      </a:solidFill>
+                      <a:prstDash val="solid"/>
+                      <a:round/>
+                      <a:headEnd type="none" w="med" len="med"/>
+                      <a:tailEnd type="none" w="med" len="med"/>
+                    </a:lnR>
+                    <a:lnT w="6350" cap="flat" cmpd="sng" algn="ctr">
+                      <a:solidFill>
+                        <a:srgbClr val="E5E9F2"/>
+                      </a:solidFill>
+                      <a:prstDash val="solid"/>
+                      <a:round/>
+                      <a:headEnd type="none" w="med" len="med"/>
+                      <a:tailEnd type="none" w="med" len="med"/>
+                    </a:lnT>
+                    <a:lnB w="6350" cap="flat" cmpd="sng" algn="ctr">
+                      <a:solidFill>
+                        <a:srgbClr val="E5E9F2"/>
+                      </a:solidFill>
+                      <a:prstDash val="solid"/>
+                      <a:round/>
+                      <a:headEnd type="none" w="med" len="med"/>
+                      <a:tailEnd type="none" w="med" len="med"/>
+                    </a:lnB>
+                  </a:tcPr>
+                </a:tc>
+                <a:tc>
+                  <a:txBody>
+                    <a:bodyPr/>
+                    <a:lstStyle/>
+                    <a:p>
+                      <a:pPr marL="0" indent="0">
+                        <a:buNone/>
+                      </a:pPr>
+                      <a:r>
+                        <a:rPr lang="en-US" sz="900" b="1" dirty="0">
+                          <a:solidFill>
+                            <a:srgbClr val="000000"/>
+                          </a:solidFill>
+                        </a:rPr>
+                        <a:t>APIの無限リトライで高額請求</a:t>
+                      </a:r>
+                      <a:endParaRPr lang="en-US" sz="900" dirty="0"/>
+                    </a:p>
+                  </a:txBody>
+                  <a:tcPr>
+                    <a:lnL w="6350" cap="flat" cmpd="sng" algn="ctr">
+                      <a:solidFill>
+                        <a:srgbClr val="E5E9F2"/>
+                      </a:solidFill>
+                      <a:prstDash val="solid"/>
+                      <a:round/>
+                      <a:headEnd type="none" w="med" len="med"/>
+                      <a:tailEnd type="none" w="med" len="med"/>
+                    </a:lnL>
+                    <a:lnR w="6350" cap="flat" cmpd="sng" algn="ctr">
+                      <a:solidFill>
+                        <a:srgbClr val="E5E9F2"/>
+                      </a:solidFill>
+                      <a:prstDash val="solid"/>
+                      <a:round/>
+                      <a:headEnd type="none" w="med" len="med"/>
+                      <a:tailEnd type="none" w="med" len="med"/>
+                    </a:lnR>
+                    <a:lnT w="6350" cap="flat" cmpd="sng" algn="ctr">
+                      <a:solidFill>
+                        <a:srgbClr val="E5E9F2"/>
+                      </a:solidFill>
+                      <a:prstDash val="solid"/>
+                      <a:round/>
+                      <a:headEnd type="none" w="med" len="med"/>
+                      <a:tailEnd type="none" w="med" len="med"/>
+                    </a:lnT>
+                    <a:lnB w="6350" cap="flat" cmpd="sng" algn="ctr">
+                      <a:solidFill>
+                        <a:srgbClr val="E5E9F2"/>
+                      </a:solidFill>
+                      <a:prstDash val="solid"/>
+                      <a:round/>
+                      <a:headEnd type="none" w="med" len="med"/>
+                      <a:tailEnd type="none" w="med" len="med"/>
+                    </a:lnB>
+                  </a:tcPr>
+                </a:tc>
+                <a:tc>
+                  <a:txBody>
+                    <a:bodyPr/>
+                    <a:lstStyle/>
+                    <a:p>
+                      <a:pPr marL="0" indent="0">
+                        <a:buNone/>
+                      </a:pPr>
+                      <a:r>
+                        <a:rPr lang="en-US" sz="800" dirty="0">
+                          <a:solidFill>
+                            <a:srgbClr val="000000"/>
+                          </a:solidFill>
+                        </a:rPr>
+                        <a:t>リトライ上限なしで1時間3,000回API呼び出し（約3万円/h）。気づかなければ膨張</a:t>
+                      </a:r>
+                      <a:endParaRPr lang="en-US" sz="800" dirty="0"/>
+                    </a:p>
+                  </a:txBody>
+                  <a:tcPr>
+                    <a:lnL w="6350" cap="flat" cmpd="sng" algn="ctr">
+                      <a:solidFill>
+                        <a:srgbClr val="E5E9F2"/>
+                      </a:solidFill>
+                      <a:prstDash val="solid"/>
+                      <a:round/>
+                      <a:headEnd type="none" w="med" len="med"/>
+                      <a:tailEnd type="none" w="med" len="med"/>
+                    </a:lnL>
+                    <a:lnR w="6350" cap="flat" cmpd="sng" algn="ctr">
+                      <a:solidFill>
+                        <a:srgbClr val="E5E9F2"/>
+                      </a:solidFill>
+                      <a:prstDash val="solid"/>
+                      <a:round/>
+                      <a:headEnd type="none" w="med" len="med"/>
+                      <a:tailEnd type="none" w="med" len="med"/>
+                    </a:lnR>
+                    <a:lnT w="6350" cap="flat" cmpd="sng" algn="ctr">
+                      <a:solidFill>
+                        <a:srgbClr val="E5E9F2"/>
+                      </a:solidFill>
+                      <a:prstDash val="solid"/>
+                      <a:round/>
+                      <a:headEnd type="none" w="med" len="med"/>
+                      <a:tailEnd type="none" w="med" len="med"/>
+                    </a:lnT>
+                    <a:lnB w="6350" cap="flat" cmpd="sng" algn="ctr">
+                      <a:solidFill>
+                        <a:srgbClr val="E5E9F2"/>
+                      </a:solidFill>
+                      <a:prstDash val="solid"/>
+                      <a:round/>
+                      <a:headEnd type="none" w="med" len="med"/>
+                      <a:tailEnd type="none" w="med" len="med"/>
+                    </a:lnB>
+                  </a:tcPr>
+                </a:tc>
+                <a:tc>
+                  <a:txBody>
+                    <a:bodyPr/>
+                    <a:lstStyle/>
+                    <a:p>
+                      <a:pPr marL="0" indent="0" algn="ctr">
+                        <a:buNone/>
+                      </a:pPr>
+                      <a:r>
+                        <a:rPr lang="en-US" sz="800" dirty="0">
+                          <a:solidFill>
+                            <a:srgbClr val="000000"/>
+                          </a:solidFill>
+                        </a:rPr>
+                        <a:t>コスト監視</a:t>
+                      </a:r>
+                      <a:endParaRPr lang="en-US" sz="800" dirty="0"/>
+                    </a:p>
+                    <a:p>
+                      <a:pPr marL="0" indent="0" algn="ctr">
+                        <a:buNone/>
+                      </a:pPr>
+                      <a:r>
+                        <a:rPr lang="en-US" sz="800" dirty="0">
+                          <a:solidFill>
+                            <a:srgbClr val="000000"/>
+                          </a:solidFill>
+                        </a:rPr>
+                        <a:t>Langfuse(第6回)</a:t>
+                      </a:r>
+                      <a:endParaRPr lang="en-US" sz="800" dirty="0"/>
+                    </a:p>
+                  </a:txBody>
+                  <a:tcPr>
+                    <a:lnL w="6350" cap="flat" cmpd="sng" algn="ctr">
+                      <a:solidFill>
+                        <a:srgbClr val="E5E9F2"/>
+                      </a:solidFill>
+                      <a:prstDash val="solid"/>
+                      <a:round/>
+                      <a:headEnd type="none" w="med" len="med"/>
+                      <a:tailEnd type="none" w="med" len="med"/>
+                    </a:lnL>
+                    <a:lnR w="6350" cap="flat" cmpd="sng" algn="ctr">
+                      <a:solidFill>
+                        <a:srgbClr val="E5E9F2"/>
+                      </a:solidFill>
+                      <a:prstDash val="solid"/>
+                      <a:round/>
+                      <a:headEnd type="none" w="med" len="med"/>
+                      <a:tailEnd type="none" w="med" len="med"/>
+                    </a:lnR>
+                    <a:lnT w="6350" cap="flat" cmpd="sng" algn="ctr">
+                      <a:solidFill>
+                        <a:srgbClr val="E5E9F2"/>
+                      </a:solidFill>
+                      <a:prstDash val="solid"/>
+                      <a:round/>
+                      <a:headEnd type="none" w="med" len="med"/>
+                      <a:tailEnd type="none" w="med" len="med"/>
+                    </a:lnT>
+                    <a:lnB w="6350" cap="flat" cmpd="sng" algn="ctr">
+                      <a:solidFill>
+                        <a:srgbClr val="E5E9F2"/>
+                      </a:solidFill>
+                      <a:prstDash val="solid"/>
+                      <a:round/>
+                      <a:headEnd type="none" w="med" len="med"/>
+                      <a:tailEnd type="none" w="med" len="med"/>
+                    </a:lnB>
+                  </a:tcPr>
+                </a:tc>
+                <a:extLst>
+                  <a:ext uri="{0D108BD9-81ED-4DB2-BD59-A6C34878D82A}">
+                    <a16:rowId xmlns:a16="http://schemas.microsoft.com/office/drawing/2014/main" val="10005"/>
+                  </a:ext>
+                </a:extLst>
+              </a:tr>
+              <a:tr h="320040">
+                <a:tc>
+                  <a:txBody>
+                    <a:bodyPr/>
+                    <a:lstStyle/>
+                    <a:p>
+                      <a:pPr marL="0" indent="0" algn="ctr">
+                        <a:buNone/>
+                      </a:pPr>
+                      <a:r>
+                        <a:rPr lang="en-US" sz="900" b="1" dirty="0">
+                          <a:solidFill>
+                            <a:srgbClr val="000000"/>
+                          </a:solidFill>
+                        </a:rPr>
+                        <a:t>6</a:t>
+                      </a:r>
+                      <a:endParaRPr lang="en-US" sz="900" dirty="0"/>
+                    </a:p>
+                  </a:txBody>
+                  <a:tcPr>
+                    <a:lnL w="6350" cap="flat" cmpd="sng" algn="ctr">
+                      <a:solidFill>
+                        <a:srgbClr val="E5E9F2"/>
+                      </a:solidFill>
+                      <a:prstDash val="solid"/>
+                      <a:round/>
+                      <a:headEnd type="none" w="med" len="med"/>
+                      <a:tailEnd type="none" w="med" len="med"/>
+                    </a:lnL>
+                    <a:lnR w="6350" cap="flat" cmpd="sng" algn="ctr">
+                      <a:solidFill>
+                        <a:srgbClr val="E5E9F2"/>
+                      </a:solidFill>
+                      <a:prstDash val="solid"/>
+                      <a:round/>
+                      <a:headEnd type="none" w="med" len="med"/>
+                      <a:tailEnd type="none" w="med" len="med"/>
+                    </a:lnR>
+                    <a:lnT w="6350" cap="flat" cmpd="sng" algn="ctr">
+                      <a:solidFill>
+                        <a:srgbClr val="E5E9F2"/>
+                      </a:solidFill>
+                      <a:prstDash val="solid"/>
+                      <a:round/>
+                      <a:headEnd type="none" w="med" len="med"/>
+                      <a:tailEnd type="none" w="med" len="med"/>
+                    </a:lnT>
+                    <a:lnB w="6350" cap="flat" cmpd="sng" algn="ctr">
+                      <a:solidFill>
+                        <a:srgbClr val="E5E9F2"/>
+                      </a:solidFill>
+                      <a:prstDash val="solid"/>
+                      <a:round/>
+                      <a:headEnd type="none" w="med" len="med"/>
+                      <a:tailEnd type="none" w="med" len="med"/>
+                    </a:lnB>
+                  </a:tcPr>
+                </a:tc>
+                <a:tc>
+                  <a:txBody>
+                    <a:bodyPr/>
+                    <a:lstStyle/>
+                    <a:p>
+                      <a:pPr marL="0" indent="0">
+                        <a:buNone/>
+                      </a:pPr>
+                      <a:r>
+                        <a:rPr lang="en-US" sz="900" b="1" dirty="0">
+                          <a:solidFill>
+                            <a:srgbClr val="000000"/>
+                          </a:solidFill>
+                        </a:rPr>
+                        <a:t>git push --force で同僚のコミット消去</a:t>
+                      </a:r>
+                      <a:endParaRPr lang="en-US" sz="900" dirty="0"/>
+                    </a:p>
+                  </a:txBody>
+                  <a:tcPr>
+                    <a:lnL w="6350" cap="flat" cmpd="sng" algn="ctr">
+                      <a:solidFill>
+                        <a:srgbClr val="E5E9F2"/>
+                      </a:solidFill>
+                      <a:prstDash val="solid"/>
+                      <a:round/>
+                      <a:headEnd type="none" w="med" len="med"/>
+                      <a:tailEnd type="none" w="med" len="med"/>
+                    </a:lnL>
+                    <a:lnR w="6350" cap="flat" cmpd="sng" algn="ctr">
+                      <a:solidFill>
+                        <a:srgbClr val="E5E9F2"/>
+                      </a:solidFill>
+                      <a:prstDash val="solid"/>
+                      <a:round/>
+                      <a:headEnd type="none" w="med" len="med"/>
+                      <a:tailEnd type="none" w="med" len="med"/>
+                    </a:lnR>
+                    <a:lnT w="6350" cap="flat" cmpd="sng" algn="ctr">
+                      <a:solidFill>
+                        <a:srgbClr val="E5E9F2"/>
+                      </a:solidFill>
+                      <a:prstDash val="solid"/>
+                      <a:round/>
+                      <a:headEnd type="none" w="med" len="med"/>
+                      <a:tailEnd type="none" w="med" len="med"/>
+                    </a:lnT>
+                    <a:lnB w="6350" cap="flat" cmpd="sng" algn="ctr">
+                      <a:solidFill>
+                        <a:srgbClr val="E5E9F2"/>
+                      </a:solidFill>
+                      <a:prstDash val="solid"/>
+                      <a:round/>
+                      <a:headEnd type="none" w="med" len="med"/>
+                      <a:tailEnd type="none" w="med" len="med"/>
+                    </a:lnB>
+                  </a:tcPr>
+                </a:tc>
+                <a:tc>
+                  <a:txBody>
+                    <a:bodyPr/>
+                    <a:lstStyle/>
+                    <a:p>
+                      <a:pPr marL="0" indent="0">
+                        <a:buNone/>
+                      </a:pPr>
+                      <a:r>
+                        <a:rPr lang="en-US" sz="800" dirty="0">
+                          <a:solidFill>
+                            <a:srgbClr val="000000"/>
+                          </a:solidFill>
+                        </a:rPr>
+                        <a:t>AIが強制プッシュを実行し、同僚の3件分のコミットが完全に消えた</a:t>
+                      </a:r>
+                      <a:endParaRPr lang="en-US" sz="800" dirty="0"/>
+                    </a:p>
+                  </a:txBody>
+                  <a:tcPr>
+                    <a:lnL w="6350" cap="flat" cmpd="sng" algn="ctr">
+                      <a:solidFill>
+                        <a:srgbClr val="E5E9F2"/>
+                      </a:solidFill>
+                      <a:prstDash val="solid"/>
+                      <a:round/>
+                      <a:headEnd type="none" w="med" len="med"/>
+                      <a:tailEnd type="none" w="med" len="med"/>
+                    </a:lnL>
+                    <a:lnR w="6350" cap="flat" cmpd="sng" algn="ctr">
+                      <a:solidFill>
+                        <a:srgbClr val="E5E9F2"/>
+                      </a:solidFill>
+                      <a:prstDash val="solid"/>
+                      <a:round/>
+                      <a:headEnd type="none" w="med" len="med"/>
+                      <a:tailEnd type="none" w="med" len="med"/>
+                    </a:lnR>
+                    <a:lnT w="6350" cap="flat" cmpd="sng" algn="ctr">
+                      <a:solidFill>
+                        <a:srgbClr val="E5E9F2"/>
+                      </a:solidFill>
+                      <a:prstDash val="solid"/>
+                      <a:round/>
+                      <a:headEnd type="none" w="med" len="med"/>
+                      <a:tailEnd type="none" w="med" len="med"/>
+                    </a:lnT>
+                    <a:lnB w="6350" cap="flat" cmpd="sng" algn="ctr">
+                      <a:solidFill>
+                        <a:srgbClr val="E5E9F2"/>
+                      </a:solidFill>
+                      <a:prstDash val="solid"/>
+                      <a:round/>
+                      <a:headEnd type="none" w="med" len="med"/>
+                      <a:tailEnd type="none" w="med" len="med"/>
+                    </a:lnB>
+                  </a:tcPr>
+                </a:tc>
+                <a:tc>
+                  <a:txBody>
+                    <a:bodyPr/>
+                    <a:lstStyle/>
+                    <a:p>
+                      <a:pPr marL="0" indent="0" algn="ctr">
+                        <a:buNone/>
+                      </a:pPr>
+                      <a:r>
+                        <a:rPr lang="en-US" sz="800" dirty="0">
+                          <a:solidFill>
+                            <a:srgbClr val="000000"/>
+                          </a:solidFill>
+                        </a:rPr>
+                        <a:t>Deny: force push</a:t>
+                      </a:r>
+                      <a:endParaRPr lang="en-US" sz="800" dirty="0"/>
+                    </a:p>
+                    <a:p>
+                      <a:pPr marL="0" indent="0" algn="ctr">
+                        <a:buNone/>
+                      </a:pPr>
+                      <a:r>
+                        <a:rPr lang="en-US" sz="800" dirty="0">
+                          <a:solidFill>
+                            <a:srgbClr val="000000"/>
+                          </a:solidFill>
+                        </a:rPr>
+                        <a:t>Hooksで阻止</a:t>
+                      </a:r>
+                      <a:endParaRPr lang="en-US" sz="800" dirty="0"/>
+                    </a:p>
+                  </a:txBody>
+                  <a:tcPr>
+                    <a:lnL w="6350" cap="flat" cmpd="sng" algn="ctr">
+                      <a:solidFill>
+                        <a:srgbClr val="E5E9F2"/>
+                      </a:solidFill>
+                      <a:prstDash val="solid"/>
+                      <a:round/>
+                      <a:headEnd type="none" w="med" len="med"/>
+                      <a:tailEnd type="none" w="med" len="med"/>
+                    </a:lnL>
+                    <a:lnR w="6350" cap="flat" cmpd="sng" algn="ctr">
+                      <a:solidFill>
+                        <a:srgbClr val="E5E9F2"/>
+                      </a:solidFill>
+                      <a:prstDash val="solid"/>
+                      <a:round/>
+                      <a:headEnd type="none" w="med" len="med"/>
+                      <a:tailEnd type="none" w="med" len="med"/>
+                    </a:lnR>
+                    <a:lnT w="6350" cap="flat" cmpd="sng" algn="ctr">
+                      <a:solidFill>
+                        <a:srgbClr val="E5E9F2"/>
+                      </a:solidFill>
+                      <a:prstDash val="solid"/>
+                      <a:round/>
+                      <a:headEnd type="none" w="med" len="med"/>
+                      <a:tailEnd type="none" w="med" len="med"/>
+                    </a:lnT>
+                    <a:lnB w="6350" cap="flat" cmpd="sng" algn="ctr">
+                      <a:solidFill>
+                        <a:srgbClr val="E5E9F2"/>
+                      </a:solidFill>
+                      <a:prstDash val="solid"/>
+                      <a:round/>
+                      <a:headEnd type="none" w="med" len="med"/>
+                      <a:tailEnd type="none" w="med" len="med"/>
+                    </a:lnB>
+                  </a:tcPr>
+                </a:tc>
+                <a:extLst>
+                  <a:ext uri="{0D108BD9-81ED-4DB2-BD59-A6C34878D82A}">
+                    <a16:rowId xmlns:a16="http://schemas.microsoft.com/office/drawing/2014/main" val="10006"/>
+                  </a:ext>
+                </a:extLst>
+              </a:tr>
+              <a:tr h="320040">
+                <a:tc>
+                  <a:txBody>
+                    <a:bodyPr/>
+                    <a:lstStyle/>
+                    <a:p>
+                      <a:pPr marL="0" indent="0" algn="ctr">
+                        <a:buNone/>
+                      </a:pPr>
+                      <a:r>
+                        <a:rPr lang="en-US" sz="900" b="1" dirty="0">
+                          <a:solidFill>
+                            <a:srgbClr val="000000"/>
+                          </a:solidFill>
+                        </a:rPr>
+                        <a:t>7</a:t>
+                      </a:r>
+                      <a:endParaRPr lang="en-US" sz="900" dirty="0"/>
+                    </a:p>
+                  </a:txBody>
+                  <a:tcPr>
+                    <a:lnL w="6350" cap="flat" cmpd="sng" algn="ctr">
+                      <a:solidFill>
+                        <a:srgbClr val="E5E9F2"/>
+                      </a:solidFill>
+                      <a:prstDash val="solid"/>
+                      <a:round/>
+                      <a:headEnd type="none" w="med" len="med"/>
+                      <a:tailEnd type="none" w="med" len="med"/>
+                    </a:lnL>
+                    <a:lnR w="6350" cap="flat" cmpd="sng" algn="ctr">
+                      <a:solidFill>
+                        <a:srgbClr val="E5E9F2"/>
+                      </a:solidFill>
+                      <a:prstDash val="solid"/>
+                      <a:round/>
+                      <a:headEnd type="none" w="med" len="med"/>
+                      <a:tailEnd type="none" w="med" len="med"/>
+                    </a:lnR>
+                    <a:lnT w="6350" cap="flat" cmpd="sng" algn="ctr">
+                      <a:solidFill>
+                        <a:srgbClr val="E5E9F2"/>
+                      </a:solidFill>
+                      <a:prstDash val="solid"/>
+                      <a:round/>
+                      <a:headEnd type="none" w="med" len="med"/>
+                      <a:tailEnd type="none" w="med" len="med"/>
+                    </a:lnT>
+                    <a:lnB w="6350" cap="flat" cmpd="sng" algn="ctr">
+                      <a:solidFill>
+                        <a:srgbClr val="E5E9F2"/>
+                      </a:solidFill>
+                      <a:prstDash val="solid"/>
+                      <a:round/>
+                      <a:headEnd type="none" w="med" len="med"/>
+                      <a:tailEnd type="none" w="med" len="med"/>
+                    </a:lnB>
+                  </a:tcPr>
+                </a:tc>
+                <a:tc>
+                  <a:txBody>
+                    <a:bodyPr/>
+                    <a:lstStyle/>
+                    <a:p>
+                      <a:pPr marL="0" indent="0">
+                        <a:buNone/>
+                      </a:pPr>
+                      <a:r>
+                        <a:rPr lang="en-US" sz="900" b="1" dirty="0">
+                          <a:solidFill>
+                            <a:srgbClr val="000000"/>
+                          </a:solidFill>
+                        </a:rPr>
+                        <a:t>過剰権限で意図しないリソース使用</a:t>
+                      </a:r>
+                      <a:endParaRPr lang="en-US" sz="900" dirty="0"/>
+                    </a:p>
+                  </a:txBody>
+                  <a:tcPr>
+                    <a:lnL w="6350" cap="flat" cmpd="sng" algn="ctr">
+                      <a:solidFill>
+                        <a:srgbClr val="E5E9F2"/>
+                      </a:solidFill>
+                      <a:prstDash val="solid"/>
+                      <a:round/>
+                      <a:headEnd type="none" w="med" len="med"/>
+                      <a:tailEnd type="none" w="med" len="med"/>
+                    </a:lnL>
+                    <a:lnR w="6350" cap="flat" cmpd="sng" algn="ctr">
+                      <a:solidFill>
+                        <a:srgbClr val="E5E9F2"/>
+                      </a:solidFill>
+                      <a:prstDash val="solid"/>
+                      <a:round/>
+                      <a:headEnd type="none" w="med" len="med"/>
+                      <a:tailEnd type="none" w="med" len="med"/>
+                    </a:lnR>
+                    <a:lnT w="6350" cap="flat" cmpd="sng" algn="ctr">
+                      <a:solidFill>
+                        <a:srgbClr val="E5E9F2"/>
+                      </a:solidFill>
+                      <a:prstDash val="solid"/>
+                      <a:round/>
+                      <a:headEnd type="none" w="med" len="med"/>
+                      <a:tailEnd type="none" w="med" len="med"/>
+                    </a:lnT>
+                    <a:lnB w="6350" cap="flat" cmpd="sng" algn="ctr">
+                      <a:solidFill>
+                        <a:srgbClr val="E5E9F2"/>
+                      </a:solidFill>
+                      <a:prstDash val="solid"/>
+                      <a:round/>
+                      <a:headEnd type="none" w="med" len="med"/>
+                      <a:tailEnd type="none" w="med" len="med"/>
+                    </a:lnB>
+                  </a:tcPr>
+                </a:tc>
+                <a:tc>
+                  <a:txBody>
+                    <a:bodyPr/>
+                    <a:lstStyle/>
+                    <a:p>
+                      <a:pPr marL="0" indent="0">
+                        <a:buNone/>
+                      </a:pPr>
+                      <a:r>
+                        <a:rPr lang="en-US" sz="800" dirty="0">
+                          <a:solidFill>
+                            <a:srgbClr val="000000"/>
+                          </a:solidFill>
+                        </a:rPr>
+                        <a:t>「ストレージだけ使って」と指示したのに、権限が広すぎてBigQuery等にも接続→課金発生</a:t>
+                      </a:r>
+                      <a:endParaRPr lang="en-US" sz="800" dirty="0"/>
+                    </a:p>
+                  </a:txBody>
+                  <a:tcPr>
+                    <a:lnL w="6350" cap="flat" cmpd="sng" algn="ctr">
+                      <a:solidFill>
+                        <a:srgbClr val="E5E9F2"/>
+                      </a:solidFill>
+                      <a:prstDash val="solid"/>
+                      <a:round/>
+                      <a:headEnd type="none" w="med" len="med"/>
+                      <a:tailEnd type="none" w="med" len="med"/>
+                    </a:lnL>
+                    <a:lnR w="6350" cap="flat" cmpd="sng" algn="ctr">
+                      <a:solidFill>
+                        <a:srgbClr val="E5E9F2"/>
+                      </a:solidFill>
+                      <a:prstDash val="solid"/>
+                      <a:round/>
+                      <a:headEnd type="none" w="med" len="med"/>
+                      <a:tailEnd type="none" w="med" len="med"/>
+                    </a:lnR>
+                    <a:lnT w="6350" cap="flat" cmpd="sng" algn="ctr">
+                      <a:solidFill>
+                        <a:srgbClr val="E5E9F2"/>
+                      </a:solidFill>
+                      <a:prstDash val="solid"/>
+                      <a:round/>
+                      <a:headEnd type="none" w="med" len="med"/>
+                      <a:tailEnd type="none" w="med" len="med"/>
+                    </a:lnT>
+                    <a:lnB w="6350" cap="flat" cmpd="sng" algn="ctr">
+                      <a:solidFill>
+                        <a:srgbClr val="E5E9F2"/>
+                      </a:solidFill>
+                      <a:prstDash val="solid"/>
+                      <a:round/>
+                      <a:headEnd type="none" w="med" len="med"/>
+                      <a:tailEnd type="none" w="med" len="med"/>
+                    </a:lnB>
+                  </a:tcPr>
+                </a:tc>
+                <a:tc>
+                  <a:txBody>
+                    <a:bodyPr/>
+                    <a:lstStyle/>
+                    <a:p>
+                      <a:pPr marL="0" indent="0" algn="ctr">
+                        <a:buNone/>
+                      </a:pPr>
+                      <a:r>
+                        <a:rPr lang="en-US" sz="800" dirty="0">
+                          <a:solidFill>
+                            <a:srgbClr val="000000"/>
+                          </a:solidFill>
+                        </a:rPr>
+                        <a:t>最小権限の原則</a:t>
+                      </a:r>
+                      <a:endParaRPr lang="en-US" sz="800" dirty="0"/>
+                    </a:p>
+                    <a:p>
+                      <a:pPr marL="0" indent="0" algn="ctr">
+                        <a:buNone/>
+                      </a:pPr>
+                      <a:r>
+                        <a:rPr lang="en-US" sz="800" dirty="0">
+                          <a:solidFill>
+                            <a:srgbClr val="000000"/>
+                          </a:solidFill>
+                        </a:rPr>
+                        <a:t>Sandbox(App.C)</a:t>
+                      </a:r>
+                      <a:endParaRPr lang="en-US" sz="800" dirty="0"/>
+                    </a:p>
+                  </a:txBody>
+                  <a:tcPr>
+                    <a:lnL w="6350" cap="flat" cmpd="sng" algn="ctr">
+                      <a:solidFill>
+                        <a:srgbClr val="E5E9F2"/>
+                      </a:solidFill>
+                      <a:prstDash val="solid"/>
+                      <a:round/>
+                      <a:headEnd type="none" w="med" len="med"/>
+                      <a:tailEnd type="none" w="med" len="med"/>
+                    </a:lnL>
+                    <a:lnR w="6350" cap="flat" cmpd="sng" algn="ctr">
+                      <a:solidFill>
+                        <a:srgbClr val="E5E9F2"/>
+                      </a:solidFill>
+                      <a:prstDash val="solid"/>
+                      <a:round/>
+                      <a:headEnd type="none" w="med" len="med"/>
+                      <a:tailEnd type="none" w="med" len="med"/>
+                    </a:lnR>
+                    <a:lnT w="6350" cap="flat" cmpd="sng" algn="ctr">
+                      <a:solidFill>
+                        <a:srgbClr val="E5E9F2"/>
+                      </a:solidFill>
+                      <a:prstDash val="solid"/>
+                      <a:round/>
+                      <a:headEnd type="none" w="med" len="med"/>
+                      <a:tailEnd type="none" w="med" len="med"/>
+                    </a:lnT>
+                    <a:lnB w="6350" cap="flat" cmpd="sng" algn="ctr">
+                      <a:solidFill>
+                        <a:srgbClr val="E5E9F2"/>
+                      </a:solidFill>
+                      <a:prstDash val="solid"/>
+                      <a:round/>
+                      <a:headEnd type="none" w="med" len="med"/>
+                      <a:tailEnd type="none" w="med" len="med"/>
+                    </a:lnB>
+                  </a:tcPr>
+                </a:tc>
+                <a:extLst>
+                  <a:ext uri="{0D108BD9-81ED-4DB2-BD59-A6C34878D82A}">
+                    <a16:rowId xmlns:a16="http://schemas.microsoft.com/office/drawing/2014/main" val="10007"/>
+                  </a:ext>
+                </a:extLst>
+              </a:tr>
+            </a:tbl>
+          </a:graphicData>
+        </a:graphic>
+      </p:graphicFrame>
+      <p:sp>
+        <p:nvSpPr>
+          <p:cNvPr id="6" name="Shape 3"/>
+          <p:cNvSpPr/>
+          <p:nvPr/>
+        </p:nvSpPr>
+        <p:spPr>
+          <a:xfrm>
+            <a:off x="457200" y="4206240"/>
+            <a:ext cx="8229600" cy="502920"/>
+          </a:xfrm>
+          <a:prstGeom prst="rect">
+            <a:avLst/>
+          </a:prstGeom>
+          <a:solidFill>
+            <a:srgbClr val="151B47"/>
+          </a:solidFill>
+          <a:ln w="12700">
+            <a:solidFill>
+              <a:srgbClr val="151B47"/>
+            </a:solidFill>
+            <a:prstDash val="solid"/>
+          </a:ln>
+        </p:spPr>
+      </p:sp>
+      <p:sp>
+        <p:nvSpPr>
+          <p:cNvPr id="7" name="Text 4"/>
+          <p:cNvSpPr/>
+          <p:nvPr/>
+        </p:nvSpPr>
+        <p:spPr>
+          <a:xfrm>
+            <a:off x="594360" y="4206240"/>
+            <a:ext cx="7955280" cy="502920"/>
+          </a:xfrm>
+          <a:prstGeom prst="rect">
+            <a:avLst/>
+          </a:prstGeom>
+          <a:noFill/>
+          <a:ln/>
+        </p:spPr>
+        <p:txBody>
+          <a:bodyPr wrap="square" lIns="0" tIns="0" rIns="0" bIns="0" rtlCol="0" anchor="ctr"/>
+          <a:lstStyle/>
+          <a:p>
+            <a:pPr marL="0" indent="0">
+              <a:buNone/>
+            </a:pPr>
+            <a:r>
+              <a:rPr lang="en-US" sz="1200" dirty="0">
+                <a:solidFill>
+                  <a:srgbClr val="F96167"/>
+                </a:solidFill>
+                <a:latin typeface="Meiryo" pitchFamily="34" charset="0"/>
+                <a:ea typeface="Meiryo" pitchFamily="34" charset="-122"/>
+                <a:cs typeface="Meiryo" pitchFamily="34" charset="-120"/>
+              </a:rPr>
+              <a:t>⚠️ </a:t>
+            </a:r>
+            <a:r>
+              <a:rPr lang="en-US" sz="1000" b="1" dirty="0">
+                <a:solidFill>
+                  <a:srgbClr val="FFFFFF"/>
+                </a:solidFill>
+                <a:latin typeface="Meiryo" pitchFamily="34" charset="0"/>
+                <a:ea typeface="Meiryo" pitchFamily="34" charset="-122"/>
+                <a:cs typeface="Meiryo" pitchFamily="34" charset="-120"/>
+              </a:rPr>
+              <a:t>共通の教訓: </a:t>
+            </a:r>
+            <a:r>
+              <a:rPr lang="en-US" sz="900" dirty="0">
+                <a:solidFill>
+                  <a:srgbClr val="CADCFC"/>
+                </a:solidFill>
+                <a:latin typeface="Meiryo" pitchFamily="34" charset="0"/>
+                <a:ea typeface="Meiryo" pitchFamily="34" charset="-122"/>
+                <a:cs typeface="Meiryo" pitchFamily="34" charset="-120"/>
+              </a:rPr>
+              <a:t>AIが危険なのではなく「ガードなしだと人間以上のスピードで事故が起きる」。Appendix B の設定で #1 #3 #6 を即座に防御</a:t>
+            </a:r>
+            <a:endParaRPr lang="en-US" sz="1200" dirty="0"/>
+          </a:p>
+        </p:txBody>
+      </p:sp>
+      <p:sp>
+        <p:nvSpPr>
+          <p:cNvPr id="8" name="Text 5"/>
+          <p:cNvSpPr/>
+          <p:nvPr/>
+        </p:nvSpPr>
+        <p:spPr>
+          <a:xfrm>
+            <a:off x="457200" y="4754880"/>
+            <a:ext cx="8229600" cy="228600"/>
+          </a:xfrm>
+          <a:prstGeom prst="rect">
+            <a:avLst/>
+          </a:prstGeom>
+          <a:noFill/>
+          <a:ln/>
+        </p:spPr>
+        <p:txBody>
+          <a:bodyPr wrap="square" lIns="0" tIns="0" rIns="0" bIns="0" rtlCol="0" anchor="ctr"/>
+          <a:lstStyle/>
+          <a:p>
+            <a:pPr marL="0" indent="0">
+              <a:buNone/>
+            </a:pPr>
+            <a:r>
+              <a:rPr lang="en-US" sz="700" dirty="0">
+                <a:solidFill>
+                  <a:srgbClr val="64748B"/>
+                </a:solidFill>
+                <a:latin typeface="Meiryo" pitchFamily="34" charset="0"/>
+                <a:ea typeface="Meiryo" pitchFamily="34" charset="-122"/>
+                <a:cs typeface="Meiryo" pitchFamily="34" charset="-120"/>
+              </a:rPr>
+              <a:t>出典: 中島氏 YouTube動画「Claude Code AIエージェントで起きた重大事故とセキュリティ対策」「Claude Codeで知っておくべきセキュリティ基礎」</a:t>
+            </a:r>
+            <a:endParaRPr lang="en-US" sz="700" dirty="0"/>
+          </a:p>
+        </p:txBody>
+      </p:sp>
+    </p:spTree>
+  </p:cSld>
+  <p:clrMapOvr>
+    <a:masterClrMapping/>
+  </p:clrMapOvr>
+</p:sld>
+</file>
+
+<file path=ppt/slides/slide14.xml><?xml version="1.0" encoding="utf-8"?>
+<p:sld xmlns:a="http://schemas.openxmlformats.org/drawingml/2006/main" xmlns:r="http://schemas.openxmlformats.org/officeDocument/2006/relationships" xmlns:p="http://schemas.openxmlformats.org/presentationml/2006/main">
+  <p:cSld>
+    <p:spTree>
+      <p:nvGrpSpPr>
+        <p:cNvPr id="1" name=""/>
+        <p:cNvGrpSpPr/>
+        <p:nvPr/>
+      </p:nvGrpSpPr>
+      <p:grpSpPr>
+        <a:xfrm>
+          <a:off x="0" y="0"/>
+          <a:ext cx="0" cy="0"/>
+          <a:chOff x="0" y="0"/>
+          <a:chExt cx="0" cy="0"/>
+        </a:xfrm>
+      </p:grpSpPr>
+      <p:sp>
+        <p:nvSpPr>
+          <p:cNvPr id="2" name="Text 0"/>
+          <p:cNvSpPr/>
+          <p:nvPr/>
+        </p:nvSpPr>
+        <p:spPr>
+          <a:xfrm>
+            <a:off x="457200" y="320040"/>
+            <a:ext cx="8229600" cy="548640"/>
+          </a:xfrm>
+          <a:prstGeom prst="rect">
+            <a:avLst/>
+          </a:prstGeom>
+          <a:noFill/>
+          <a:ln/>
+        </p:spPr>
+        <p:txBody>
+          <a:bodyPr wrap="square" lIns="0" tIns="0" rIns="0" bIns="0" rtlCol="0" anchor="ctr"/>
+          <a:lstStyle/>
+          <a:p>
+            <a:pPr marL="0" indent="0">
+              <a:buNone/>
+            </a:pPr>
+            <a:r>
+              <a:rPr lang="en-US" sz="2400" b="1" dirty="0">
+                <a:solidFill>
+                  <a:srgbClr val="1E2761"/>
+                </a:solidFill>
+                <a:latin typeface="Arial Black" pitchFamily="34" charset="0"/>
+                <a:ea typeface="Arial Black" pitchFamily="34" charset="-122"/>
+                <a:cs typeface="Arial Black" pitchFamily="34" charset="-120"/>
+              </a:rPr>
+              <a:t>Appendix B: これだけは設定しておこう</a:t>
+            </a:r>
+            <a:endParaRPr lang="en-US" sz="2400" dirty="0"/>
+          </a:p>
+        </p:txBody>
+      </p:sp>
+      <p:sp>
+        <p:nvSpPr>
+          <p:cNvPr id="3" name="Shape 1"/>
+          <p:cNvSpPr/>
+          <p:nvPr/>
+        </p:nvSpPr>
+        <p:spPr>
+          <a:xfrm>
+            <a:off x="457200" y="932688"/>
+            <a:ext cx="548640" cy="45720"/>
+          </a:xfrm>
+          <a:prstGeom prst="rect">
+            <a:avLst/>
+          </a:prstGeom>
+          <a:solidFill>
+            <a:srgbClr val="F96167"/>
+          </a:solidFill>
+          <a:ln w="12700">
+            <a:solidFill>
+              <a:srgbClr val="F96167"/>
+            </a:solidFill>
+            <a:prstDash val="solid"/>
+          </a:ln>
+        </p:spPr>
+      </p:sp>
+      <p:sp>
+        <p:nvSpPr>
+          <p:cNvPr id="4" name="Text 2"/>
+          <p:cNvSpPr/>
+          <p:nvPr/>
+        </p:nvSpPr>
+        <p:spPr>
+          <a:xfrm>
+            <a:off x="457200" y="1051560"/>
+            <a:ext cx="8229600" cy="274320"/>
+          </a:xfrm>
+          <a:prstGeom prst="rect">
+            <a:avLst/>
+          </a:prstGeom>
+          <a:noFill/>
+          <a:ln/>
+        </p:spPr>
+        <p:txBody>
+          <a:bodyPr wrap="square" lIns="0" tIns="0" rIns="0" bIns="0" rtlCol="0" anchor="ctr"/>
+          <a:lstStyle/>
+          <a:p>
+            <a:pPr marL="0" indent="0">
+              <a:buNone/>
+            </a:pPr>
+            <a:r>
+              <a:rPr lang="en-US" sz="1300" i="1" dirty="0">
+                <a:solidFill>
+                  <a:srgbClr val="64748B"/>
+                </a:solidFill>
+                <a:latin typeface="Meiryo" pitchFamily="34" charset="0"/>
+                <a:ea typeface="Meiryo" pitchFamily="34" charset="-122"/>
+                <a:cs typeface="Meiryo" pitchFamily="34" charset="-120"/>
+              </a:rPr>
+              <a:t>初日に貼るだけで主要リスクの8割をカバーする推奨設定</a:t>
+            </a:r>
+            <a:endParaRPr lang="en-US" sz="1300" dirty="0"/>
+          </a:p>
+        </p:txBody>
+      </p:sp>
+      <p:sp>
+        <p:nvSpPr>
+          <p:cNvPr id="5" name="Shape 3"/>
+          <p:cNvSpPr/>
+          <p:nvPr/>
+        </p:nvSpPr>
+        <p:spPr>
+          <a:xfrm>
+            <a:off x="457200" y="1417320"/>
+            <a:ext cx="8229600" cy="3108960"/>
+          </a:xfrm>
+          <a:prstGeom prst="rect">
+            <a:avLst/>
+          </a:prstGeom>
+          <a:solidFill>
+            <a:srgbClr val="0F1434"/>
+          </a:solidFill>
+          <a:ln w="9525">
+            <a:solidFill>
+              <a:srgbClr val="2A2F5A"/>
+            </a:solidFill>
+            <a:prstDash val="solid"/>
+          </a:ln>
+        </p:spPr>
+      </p:sp>
+      <p:sp>
+        <p:nvSpPr>
+          <p:cNvPr id="6" name="Text 4"/>
+          <p:cNvSpPr/>
+          <p:nvPr/>
+        </p:nvSpPr>
+        <p:spPr>
+          <a:xfrm>
+            <a:off x="594360" y="1472184"/>
+            <a:ext cx="7955280" cy="182880"/>
+          </a:xfrm>
+          <a:prstGeom prst="rect">
+            <a:avLst/>
+          </a:prstGeom>
+          <a:noFill/>
+          <a:ln/>
+        </p:spPr>
+        <p:txBody>
+          <a:bodyPr wrap="square" lIns="0" tIns="0" rIns="0" bIns="0" rtlCol="0" anchor="ctr"/>
+          <a:lstStyle/>
+          <a:p>
+            <a:pPr marL="0" indent="0">
+              <a:buNone/>
+            </a:pPr>
+            <a:r>
+              <a:rPr lang="en-US" sz="1000" b="1" dirty="0">
+                <a:solidFill>
+                  <a:srgbClr val="CADCFC"/>
+                </a:solidFill>
+                <a:latin typeface="Consolas" pitchFamily="34" charset="0"/>
+                <a:ea typeface="Consolas" pitchFamily="34" charset="-122"/>
+                <a:cs typeface="Consolas" pitchFamily="34" charset="-120"/>
+              </a:rPr>
+              <a:t>.claude/settings.json ― 推奨テンプレート</a:t>
+            </a:r>
+            <a:endParaRPr lang="en-US" sz="1000" dirty="0"/>
+          </a:p>
+        </p:txBody>
+      </p:sp>
+      <p:sp>
+        <p:nvSpPr>
+          <p:cNvPr id="7" name="Text 5"/>
+          <p:cNvSpPr/>
+          <p:nvPr/>
+        </p:nvSpPr>
+        <p:spPr>
+          <a:xfrm>
+            <a:off x="594360" y="1691640"/>
+            <a:ext cx="7955280" cy="2743200"/>
+          </a:xfrm>
+          <a:prstGeom prst="rect">
+            <a:avLst/>
+          </a:prstGeom>
+          <a:noFill/>
+          <a:ln/>
+        </p:spPr>
+        <p:txBody>
+          <a:bodyPr wrap="square" lIns="0" tIns="0" rIns="0" bIns="0" rtlCol="0" anchor="t"/>
+          <a:lstStyle/>
+          <a:p>
+            <a:pPr marL="0" indent="0">
+              <a:spcAft>
+                <a:spcPts val="30"/>
+              </a:spcAft>
+              <a:buNone/>
+            </a:pPr>
+            <a:r>
+              <a:rPr lang="en-US" sz="750" dirty="0">
+                <a:solidFill>
+                  <a:srgbClr val="CADCFC"/>
+                </a:solidFill>
+                <a:latin typeface="Consolas" pitchFamily="34" charset="0"/>
+                <a:ea typeface="Consolas" pitchFamily="34" charset="-122"/>
+                <a:cs typeface="Consolas" pitchFamily="34" charset="-120"/>
+              </a:rPr>
+              <a:t>{</a:t>
+            </a:r>
+            <a:endParaRPr lang="en-US" sz="750" dirty="0"/>
+          </a:p>
+          <a:p>
+            <a:pPr marL="0" indent="0">
+              <a:spcAft>
+                <a:spcPts val="30"/>
+              </a:spcAft>
+              <a:buNone/>
+            </a:pPr>
+            <a:r>
+              <a:rPr lang="en-US" sz="750" dirty="0">
+                <a:solidFill>
+                  <a:srgbClr val="CADCFC"/>
+                </a:solidFill>
+                <a:latin typeface="Consolas" pitchFamily="34" charset="0"/>
+                <a:ea typeface="Consolas" pitchFamily="34" charset="-122"/>
+                <a:cs typeface="Consolas" pitchFamily="34" charset="-120"/>
+              </a:rPr>
+              <a:t>  "permissions": {</a:t>
+            </a:r>
+            <a:endParaRPr lang="en-US" sz="750" dirty="0"/>
+          </a:p>
+          <a:p>
+            <a:pPr marL="0" indent="0">
+              <a:spcAft>
+                <a:spcPts val="30"/>
+              </a:spcAft>
+              <a:buNone/>
+            </a:pPr>
+            <a:r>
+              <a:rPr lang="en-US" sz="750" dirty="0">
+                <a:solidFill>
+                  <a:srgbClr val="FFFFFF"/>
+                </a:solidFill>
+                <a:latin typeface="Consolas" pitchFamily="34" charset="0"/>
+                <a:ea typeface="Consolas" pitchFamily="34" charset="-122"/>
+                <a:cs typeface="Consolas" pitchFamily="34" charset="-120"/>
+              </a:rPr>
+              <a:t>    "deny": [</a:t>
+            </a:r>
+            <a:endParaRPr lang="en-US" sz="750" dirty="0"/>
+          </a:p>
+          <a:p>
+            <a:pPr marL="0" indent="0">
+              <a:spcAft>
+                <a:spcPts val="30"/>
+              </a:spcAft>
+              <a:buNone/>
+            </a:pPr>
+            <a:r>
+              <a:rPr lang="en-US" sz="750" dirty="0">
+                <a:solidFill>
+                  <a:srgbClr val="64748B"/>
+                </a:solidFill>
+                <a:latin typeface="Consolas" pitchFamily="34" charset="0"/>
+                <a:ea typeface="Consolas" pitchFamily="34" charset="-122"/>
+                <a:cs typeface="Consolas" pitchFamily="34" charset="-120"/>
+              </a:rPr>
+              <a:t>      "Bash(rm -rf *)",         // 再帰削除をブロック</a:t>
+            </a:r>
+            <a:endParaRPr lang="en-US" sz="750" dirty="0"/>
+          </a:p>
+          <a:p>
+            <a:pPr marL="0" indent="0">
+              <a:spcAft>
+                <a:spcPts val="30"/>
+              </a:spcAft>
+              <a:buNone/>
+            </a:pPr>
+            <a:r>
+              <a:rPr lang="en-US" sz="750" dirty="0">
+                <a:solidFill>
+                  <a:srgbClr val="64748B"/>
+                </a:solidFill>
+                <a:latin typeface="Consolas" pitchFamily="34" charset="0"/>
+                <a:ea typeface="Consolas" pitchFamily="34" charset="-122"/>
+                <a:cs typeface="Consolas" pitchFamily="34" charset="-120"/>
+              </a:rPr>
+              <a:t>      "Bash(curl *)",           // 外部通信をブロック</a:t>
+            </a:r>
+            <a:endParaRPr lang="en-US" sz="750" dirty="0"/>
+          </a:p>
+          <a:p>
+            <a:pPr marL="0" indent="0">
+              <a:spcAft>
+                <a:spcPts val="30"/>
+              </a:spcAft>
+              <a:buNone/>
+            </a:pPr>
+            <a:r>
+              <a:rPr lang="en-US" sz="750" dirty="0">
+                <a:solidFill>
+                  <a:srgbClr val="64748B"/>
+                </a:solidFill>
+                <a:latin typeface="Consolas" pitchFamily="34" charset="0"/>
+                <a:ea typeface="Consolas" pitchFamily="34" charset="-122"/>
+                <a:cs typeface="Consolas" pitchFamily="34" charset="-120"/>
+              </a:rPr>
+              <a:t>      "Bash(wget *)",           // 外部ダウンロードをブロック</a:t>
+            </a:r>
+            <a:endParaRPr lang="en-US" sz="750" dirty="0"/>
+          </a:p>
+          <a:p>
+            <a:pPr marL="0" indent="0">
+              <a:spcAft>
+                <a:spcPts val="30"/>
+              </a:spcAft>
+              <a:buNone/>
+            </a:pPr>
+            <a:r>
+              <a:rPr lang="en-US" sz="750" dirty="0">
+                <a:solidFill>
+                  <a:srgbClr val="64748B"/>
+                </a:solidFill>
+                <a:latin typeface="Consolas" pitchFamily="34" charset="0"/>
+                <a:ea typeface="Consolas" pitchFamily="34" charset="-122"/>
+                <a:cs typeface="Consolas" pitchFamily="34" charset="-120"/>
+              </a:rPr>
+              <a:t>      "Bash(git push --force*)",// 強制プッシュをブロック</a:t>
+            </a:r>
+            <a:endParaRPr lang="en-US" sz="750" dirty="0"/>
+          </a:p>
+          <a:p>
+            <a:pPr marL="0" indent="0">
+              <a:spcAft>
+                <a:spcPts val="30"/>
+              </a:spcAft>
+              <a:buNone/>
+            </a:pPr>
+            <a:r>
+              <a:rPr lang="en-US" sz="750" dirty="0">
+                <a:solidFill>
+                  <a:srgbClr val="64748B"/>
+                </a:solidFill>
+                <a:latin typeface="Consolas" pitchFamily="34" charset="0"/>
+                <a:ea typeface="Consolas" pitchFamily="34" charset="-122"/>
+                <a:cs typeface="Consolas" pitchFamily="34" charset="-120"/>
+              </a:rPr>
+              <a:t>      "Read(.env*)",            // 認証情報の読み取りをブロック</a:t>
+            </a:r>
+            <a:endParaRPr lang="en-US" sz="750" dirty="0"/>
+          </a:p>
+          <a:p>
+            <a:pPr marL="0" indent="0">
+              <a:spcAft>
+                <a:spcPts val="30"/>
+              </a:spcAft>
+              <a:buNone/>
+            </a:pPr>
+            <a:r>
+              <a:rPr lang="en-US" sz="750" dirty="0">
+                <a:solidFill>
+                  <a:srgbClr val="64748B"/>
+                </a:solidFill>
+                <a:latin typeface="Consolas" pitchFamily="34" charset="0"/>
+                <a:ea typeface="Consolas" pitchFamily="34" charset="-122"/>
+                <a:cs typeface="Consolas" pitchFamily="34" charset="-120"/>
+              </a:rPr>
+              <a:t>      "Read(**/.ssh/*)",        // SSH鍵の読み取りをブロック</a:t>
+            </a:r>
+            <a:endParaRPr lang="en-US" sz="750" dirty="0"/>
+          </a:p>
+          <a:p>
+            <a:pPr marL="0" indent="0">
+              <a:spcAft>
+                <a:spcPts val="30"/>
+              </a:spcAft>
+              <a:buNone/>
+            </a:pPr>
+            <a:r>
+              <a:rPr lang="en-US" sz="750" dirty="0">
+                <a:solidFill>
+                  <a:srgbClr val="64748B"/>
+                </a:solidFill>
+                <a:latin typeface="Consolas" pitchFamily="34" charset="0"/>
+                <a:ea typeface="Consolas" pitchFamily="34" charset="-122"/>
+                <a:cs typeface="Consolas" pitchFamily="34" charset="-120"/>
+              </a:rPr>
+              <a:t>      "Read(**/credentials*)"   // クラウド認証情報をブロック</a:t>
+            </a:r>
+            <a:endParaRPr lang="en-US" sz="750" dirty="0"/>
+          </a:p>
+          <a:p>
+            <a:pPr marL="0" indent="0">
+              <a:spcAft>
+                <a:spcPts val="30"/>
+              </a:spcAft>
+              <a:buNone/>
+            </a:pPr>
+            <a:r>
+              <a:rPr lang="en-US" sz="750" dirty="0">
+                <a:solidFill>
+                  <a:srgbClr val="CADCFC"/>
+                </a:solidFill>
+                <a:latin typeface="Consolas" pitchFamily="34" charset="0"/>
+                <a:ea typeface="Consolas" pitchFamily="34" charset="-122"/>
+                <a:cs typeface="Consolas" pitchFamily="34" charset="-120"/>
+              </a:rPr>
+              <a:t>    ],</a:t>
+            </a:r>
+            <a:endParaRPr lang="en-US" sz="750" dirty="0"/>
+          </a:p>
+          <a:p>
+            <a:pPr marL="0" indent="0">
+              <a:spcAft>
+                <a:spcPts val="30"/>
+              </a:spcAft>
+              <a:buNone/>
+            </a:pPr>
+            <a:r>
+              <a:rPr lang="en-US" sz="750" dirty="0">
+                <a:solidFill>
+                  <a:srgbClr val="CADCFC"/>
+                </a:solidFill>
+                <a:latin typeface="Consolas" pitchFamily="34" charset="0"/>
+                <a:ea typeface="Consolas" pitchFamily="34" charset="-122"/>
+                <a:cs typeface="Consolas" pitchFamily="34" charset="-120"/>
+              </a:rPr>
+              <a:t>    "allow": [</a:t>
+            </a:r>
+            <a:endParaRPr lang="en-US" sz="750" dirty="0"/>
+          </a:p>
+          <a:p>
+            <a:pPr marL="0" indent="0">
+              <a:spcAft>
+                <a:spcPts val="30"/>
+              </a:spcAft>
+              <a:buNone/>
+            </a:pPr>
+            <a:r>
+              <a:rPr lang="en-US" sz="750" dirty="0">
+                <a:solidFill>
+                  <a:srgbClr val="CADCFC"/>
+                </a:solidFill>
+                <a:latin typeface="Consolas" pitchFamily="34" charset="0"/>
+                <a:ea typeface="Consolas" pitchFamily="34" charset="-122"/>
+                <a:cs typeface="Consolas" pitchFamily="34" charset="-120"/>
+              </a:rPr>
+              <a:t>      "Bash(git *)", "Bash(npm *)", "Bash(node *)", "Bash(python *)"</a:t>
+            </a:r>
+            <a:endParaRPr lang="en-US" sz="750" dirty="0"/>
+          </a:p>
+          <a:p>
+            <a:pPr marL="0" indent="0">
+              <a:spcAft>
+                <a:spcPts val="30"/>
+              </a:spcAft>
+              <a:buNone/>
+            </a:pPr>
+            <a:r>
+              <a:rPr lang="en-US" sz="750" dirty="0">
+                <a:solidFill>
+                  <a:srgbClr val="CADCFC"/>
+                </a:solidFill>
+                <a:latin typeface="Consolas" pitchFamily="34" charset="0"/>
+                <a:ea typeface="Consolas" pitchFamily="34" charset="-122"/>
+                <a:cs typeface="Consolas" pitchFamily="34" charset="-120"/>
+              </a:rPr>
+              <a:t>    ]</a:t>
+            </a:r>
+            <a:endParaRPr lang="en-US" sz="750" dirty="0"/>
+          </a:p>
+          <a:p>
+            <a:pPr marL="0" indent="0">
+              <a:spcAft>
+                <a:spcPts val="30"/>
+              </a:spcAft>
+              <a:buNone/>
+            </a:pPr>
+            <a:r>
+              <a:rPr lang="en-US" sz="750" dirty="0">
+                <a:solidFill>
+                  <a:srgbClr val="CADCFC"/>
+                </a:solidFill>
+                <a:latin typeface="Consolas" pitchFamily="34" charset="0"/>
+                <a:ea typeface="Consolas" pitchFamily="34" charset="-122"/>
+                <a:cs typeface="Consolas" pitchFamily="34" charset="-120"/>
+              </a:rPr>
+              <a:t>  },</a:t>
+            </a:r>
+            <a:endParaRPr lang="en-US" sz="750" dirty="0"/>
+          </a:p>
+          <a:p>
+            <a:pPr marL="0" indent="0">
+              <a:spcAft>
+                <a:spcPts val="30"/>
+              </a:spcAft>
+              <a:buNone/>
+            </a:pPr>
+            <a:r>
+              <a:rPr lang="en-US" sz="750" dirty="0">
+                <a:solidFill>
+                  <a:srgbClr val="FFFFFF"/>
+                </a:solidFill>
+                <a:latin typeface="Consolas" pitchFamily="34" charset="0"/>
+                <a:ea typeface="Consolas" pitchFamily="34" charset="-122"/>
+                <a:cs typeface="Consolas" pitchFamily="34" charset="-120"/>
+              </a:rPr>
+              <a:t>  "hooks": {</a:t>
+            </a:r>
+            <a:endParaRPr lang="en-US" sz="750" dirty="0"/>
+          </a:p>
+          <a:p>
+            <a:pPr marL="0" indent="0">
+              <a:spcAft>
+                <a:spcPts val="30"/>
+              </a:spcAft>
+              <a:buNone/>
+            </a:pPr>
+            <a:r>
+              <a:rPr lang="en-US" sz="750" dirty="0">
+                <a:solidFill>
+                  <a:srgbClr val="CADCFC"/>
+                </a:solidFill>
+                <a:latin typeface="Consolas" pitchFamily="34" charset="0"/>
+                <a:ea typeface="Consolas" pitchFamily="34" charset="-122"/>
+                <a:cs typeface="Consolas" pitchFamily="34" charset="-120"/>
+              </a:rPr>
+              <a:t>    "PreToolUse": [{ "matcher": "Bash",</a:t>
+            </a:r>
+            <a:endParaRPr lang="en-US" sz="750" dirty="0"/>
+          </a:p>
+          <a:p>
+            <a:pPr marL="0" indent="0">
+              <a:spcAft>
+                <a:spcPts val="30"/>
+              </a:spcAft>
+              <a:buNone/>
+            </a:pPr>
+            <a:r>
+              <a:rPr lang="en-US" sz="750" dirty="0">
+                <a:solidFill>
+                  <a:srgbClr val="FFFFFF"/>
+                </a:solidFill>
+                <a:latin typeface="Consolas" pitchFamily="34" charset="0"/>
+                <a:ea typeface="Consolas" pitchFamily="34" charset="-122"/>
+                <a:cs typeface="Consolas" pitchFamily="34" charset="-120"/>
+              </a:rPr>
+              <a:t>      "hooks": [{ "type": "command",</a:t>
+            </a:r>
+            <a:endParaRPr lang="en-US" sz="750" dirty="0"/>
+          </a:p>
+          <a:p>
+            <a:pPr marL="0" indent="0">
+              <a:spcAft>
+                <a:spcPts val="30"/>
+              </a:spcAft>
+              <a:buNone/>
+            </a:pPr>
+            <a:r>
+              <a:rPr lang="en-US" sz="750" dirty="0">
+                <a:solidFill>
+                  <a:srgbClr val="CADCFC"/>
+                </a:solidFill>
+                <a:latin typeface="Consolas" pitchFamily="34" charset="0"/>
+                <a:ea typeface="Consolas" pitchFamily="34" charset="-122"/>
+                <a:cs typeface="Consolas" pitchFamily="34" charset="-120"/>
+              </a:rPr>
+              <a:t>        "command": "grep -qE \"rm -rf|curl |wget |\\.env\" &lt;&lt;&lt; \"$CLAUDE_TOOL_INPUT\" &amp;&amp; exit 2 || exit 0"</a:t>
+            </a:r>
+            <a:endParaRPr lang="en-US" sz="750" dirty="0"/>
+          </a:p>
+          <a:p>
+            <a:pPr marL="0" indent="0">
+              <a:spcAft>
+                <a:spcPts val="30"/>
+              </a:spcAft>
+              <a:buNone/>
+            </a:pPr>
+            <a:r>
+              <a:rPr lang="en-US" sz="750" dirty="0">
+                <a:solidFill>
+                  <a:srgbClr val="CADCFC"/>
+                </a:solidFill>
+                <a:latin typeface="Consolas" pitchFamily="34" charset="0"/>
+                <a:ea typeface="Consolas" pitchFamily="34" charset="-122"/>
+                <a:cs typeface="Consolas" pitchFamily="34" charset="-120"/>
+              </a:rPr>
+              <a:t>      }]</a:t>
+            </a:r>
+            <a:endParaRPr lang="en-US" sz="750" dirty="0"/>
+          </a:p>
+          <a:p>
+            <a:pPr marL="0" indent="0">
+              <a:spcAft>
+                <a:spcPts val="30"/>
+              </a:spcAft>
+              <a:buNone/>
+            </a:pPr>
+            <a:r>
+              <a:rPr lang="en-US" sz="750" dirty="0">
+                <a:solidFill>
+                  <a:srgbClr val="CADCFC"/>
+                </a:solidFill>
+                <a:latin typeface="Consolas" pitchFamily="34" charset="0"/>
+                <a:ea typeface="Consolas" pitchFamily="34" charset="-122"/>
+                <a:cs typeface="Consolas" pitchFamily="34" charset="-120"/>
+              </a:rPr>
+              <a:t>    }]</a:t>
+            </a:r>
+            <a:endParaRPr lang="en-US" sz="750" dirty="0"/>
+          </a:p>
+          <a:p>
+            <a:pPr marL="0" indent="0">
+              <a:spcAft>
+                <a:spcPts val="30"/>
+              </a:spcAft>
+              <a:buNone/>
+            </a:pPr>
+            <a:r>
+              <a:rPr lang="en-US" sz="750" dirty="0">
+                <a:solidFill>
+                  <a:srgbClr val="CADCFC"/>
+                </a:solidFill>
+                <a:latin typeface="Consolas" pitchFamily="34" charset="0"/>
+                <a:ea typeface="Consolas" pitchFamily="34" charset="-122"/>
+                <a:cs typeface="Consolas" pitchFamily="34" charset="-120"/>
+              </a:rPr>
+              <a:t>  }</a:t>
+            </a:r>
+            <a:endParaRPr lang="en-US" sz="750" dirty="0"/>
+          </a:p>
+          <a:p>
+            <a:pPr marL="0" indent="0">
+              <a:spcAft>
+                <a:spcPts val="30"/>
+              </a:spcAft>
+              <a:buNone/>
+            </a:pPr>
+            <a:r>
+              <a:rPr lang="en-US" sz="750" dirty="0">
+                <a:solidFill>
+                  <a:srgbClr val="CADCFC"/>
+                </a:solidFill>
+                <a:latin typeface="Consolas" pitchFamily="34" charset="0"/>
+                <a:ea typeface="Consolas" pitchFamily="34" charset="-122"/>
+                <a:cs typeface="Consolas" pitchFamily="34" charset="-120"/>
+              </a:rPr>
+              <a:t>}</a:t>
+            </a:r>
+            <a:endParaRPr lang="en-US" sz="750" dirty="0"/>
+          </a:p>
+        </p:txBody>
+      </p:sp>
+      <p:sp>
+        <p:nvSpPr>
+          <p:cNvPr id="8" name="Shape 6"/>
+          <p:cNvSpPr/>
+          <p:nvPr/>
+        </p:nvSpPr>
+        <p:spPr>
+          <a:xfrm>
+            <a:off x="457200" y="4617720"/>
+            <a:ext cx="8229600" cy="365760"/>
+          </a:xfrm>
+          <a:prstGeom prst="rect">
+            <a:avLst/>
+          </a:prstGeom>
+          <a:solidFill>
+            <a:srgbClr val="151B47"/>
+          </a:solidFill>
+          <a:ln w="12700">
+            <a:solidFill>
+              <a:srgbClr val="151B47"/>
+            </a:solidFill>
+            <a:prstDash val="solid"/>
+          </a:ln>
+        </p:spPr>
+      </p:sp>
+      <p:sp>
+        <p:nvSpPr>
+          <p:cNvPr id="9" name="Text 7"/>
+          <p:cNvSpPr/>
+          <p:nvPr/>
+        </p:nvSpPr>
+        <p:spPr>
+          <a:xfrm>
+            <a:off x="594360" y="4617720"/>
+            <a:ext cx="7955280" cy="365760"/>
+          </a:xfrm>
+          <a:prstGeom prst="rect">
+            <a:avLst/>
+          </a:prstGeom>
+          <a:noFill/>
+          <a:ln/>
+        </p:spPr>
+        <p:txBody>
+          <a:bodyPr wrap="square" lIns="0" tIns="0" rIns="0" bIns="0" rtlCol="0" anchor="ctr"/>
+          <a:lstStyle/>
+          <a:p>
+            <a:pPr marL="0" indent="0">
+              <a:buNone/>
+            </a:pPr>
+            <a:r>
+              <a:rPr lang="en-US" sz="1200" dirty="0">
+                <a:solidFill>
+                  <a:srgbClr val="FFFFFF"/>
+                </a:solidFill>
+                <a:latin typeface="Meiryo" pitchFamily="34" charset="0"/>
+                <a:ea typeface="Meiryo" pitchFamily="34" charset="-122"/>
+                <a:cs typeface="Meiryo" pitchFamily="34" charset="-120"/>
+              </a:rPr>
+              <a:t>💡 </a:t>
+            </a:r>
+            <a:r>
+              <a:rPr lang="en-US" sz="1000" b="1" dirty="0">
+                <a:solidFill>
+                  <a:srgbClr val="FFFFFF"/>
+                </a:solidFill>
+                <a:latin typeface="Meiryo" pitchFamily="34" charset="0"/>
+                <a:ea typeface="Meiryo" pitchFamily="34" charset="-122"/>
+                <a:cs typeface="Meiryo" pitchFamily="34" charset="-120"/>
+              </a:rPr>
+              <a:t>Deny（助言的）+ Hooks（決定的）の2段構え。</a:t>
+            </a:r>
+            <a:r>
+              <a:rPr lang="en-US" sz="1000" dirty="0">
+                <a:solidFill>
+                  <a:srgbClr val="CADCFC"/>
+                </a:solidFill>
+                <a:latin typeface="Meiryo" pitchFamily="34" charset="0"/>
+                <a:ea typeface="Meiryo" pitchFamily="34" charset="-122"/>
+                <a:cs typeface="Meiryo" pitchFamily="34" charset="-120"/>
+              </a:rPr>
+              <a:t>これをコピペするだけで、事例①②④の大半を予防できる</a:t>
+            </a:r>
+            <a:endParaRPr lang="en-US" sz="1200" dirty="0"/>
+          </a:p>
+        </p:txBody>
+      </p:sp>
+    </p:spTree>
+  </p:cSld>
+  <p:clrMapOvr>
+    <a:masterClrMapping/>
+  </p:clrMapOvr>
+</p:sld>
+</file>
+
+<file path=ppt/slides/slide15.xml><?xml version="1.0" encoding="utf-8"?>
+<p:sld xmlns:a="http://schemas.openxmlformats.org/drawingml/2006/main" xmlns:r="http://schemas.openxmlformats.org/officeDocument/2006/relationships" xmlns:p="http://schemas.openxmlformats.org/presentationml/2006/main">
+  <p:cSld>
+    <p:spTree>
+      <p:nvGrpSpPr>
+        <p:cNvPr id="1" name=""/>
+        <p:cNvGrpSpPr/>
+        <p:nvPr/>
+      </p:nvGrpSpPr>
+      <p:grpSpPr>
+        <a:xfrm>
+          <a:off x="0" y="0"/>
+          <a:ext cx="0" cy="0"/>
+          <a:chOff x="0" y="0"/>
+          <a:chExt cx="0" cy="0"/>
+        </a:xfrm>
+      </p:grpSpPr>
+      <p:sp>
+        <p:nvSpPr>
+          <p:cNvPr id="2" name="Text 0"/>
+          <p:cNvSpPr/>
+          <p:nvPr/>
+        </p:nvSpPr>
+        <p:spPr>
+          <a:xfrm>
+            <a:off x="457200" y="320040"/>
+            <a:ext cx="8229600" cy="548640"/>
+          </a:xfrm>
+          <a:prstGeom prst="rect">
+            <a:avLst/>
+          </a:prstGeom>
+          <a:noFill/>
+          <a:ln/>
+        </p:spPr>
+        <p:txBody>
+          <a:bodyPr wrap="square" lIns="0" tIns="0" rIns="0" bIns="0" rtlCol="0" anchor="ctr"/>
+          <a:lstStyle/>
+          <a:p>
+            <a:pPr marL="0" indent="0">
+              <a:buNone/>
+            </a:pPr>
+            <a:r>
+              <a:rPr lang="en-US" sz="2400" b="1" dirty="0">
+                <a:solidFill>
+                  <a:srgbClr val="1E2761"/>
+                </a:solidFill>
+                <a:latin typeface="Arial Black" pitchFamily="34" charset="0"/>
+                <a:ea typeface="Arial Black" pitchFamily="34" charset="-122"/>
+                <a:cs typeface="Arial Black" pitchFamily="34" charset="-120"/>
+              </a:rPr>
+              <a:t>Appendix C: Sandbox推奨設定テンプレート</a:t>
+            </a:r>
+            <a:endParaRPr lang="en-US" sz="2400" dirty="0"/>
+          </a:p>
+        </p:txBody>
+      </p:sp>
+      <p:sp>
+        <p:nvSpPr>
+          <p:cNvPr id="3" name="Shape 1"/>
+          <p:cNvSpPr/>
+          <p:nvPr/>
+        </p:nvSpPr>
+        <p:spPr>
+          <a:xfrm>
+            <a:off x="457200" y="932688"/>
+            <a:ext cx="548640" cy="45720"/>
+          </a:xfrm>
+          <a:prstGeom prst="rect">
+            <a:avLst/>
+          </a:prstGeom>
+          <a:solidFill>
+            <a:srgbClr val="F96167"/>
+          </a:solidFill>
+          <a:ln w="12700">
+            <a:solidFill>
+              <a:srgbClr val="F96167"/>
+            </a:solidFill>
+            <a:prstDash val="solid"/>
+          </a:ln>
+        </p:spPr>
+      </p:sp>
+      <p:sp>
+        <p:nvSpPr>
+          <p:cNvPr id="4" name="Text 2"/>
+          <p:cNvSpPr/>
+          <p:nvPr/>
+        </p:nvSpPr>
+        <p:spPr>
+          <a:xfrm>
+            <a:off x="457200" y="1051560"/>
+            <a:ext cx="8229600" cy="274320"/>
+          </a:xfrm>
+          <a:prstGeom prst="rect">
+            <a:avLst/>
+          </a:prstGeom>
+          <a:noFill/>
+          <a:ln/>
+        </p:spPr>
+        <p:txBody>
+          <a:bodyPr wrap="square" lIns="0" tIns="0" rIns="0" bIns="0" rtlCol="0" anchor="ctr"/>
+          <a:lstStyle/>
+          <a:p>
+            <a:pPr marL="0" indent="0">
+              <a:buNone/>
+            </a:pPr>
+            <a:r>
+              <a:rPr lang="en-US" sz="1300" i="1" dirty="0">
+                <a:solidFill>
+                  <a:srgbClr val="64748B"/>
+                </a:solidFill>
+                <a:latin typeface="Meiryo" pitchFamily="34" charset="0"/>
+                <a:ea typeface="Meiryo" pitchFamily="34" charset="-122"/>
+                <a:cs typeface="Meiryo" pitchFamily="34" charset="-120"/>
+              </a:rPr>
+              <a:t>OSレベルの隔離でプロンプトインジェクション被害を最小化する</a:t>
+            </a:r>
+            <a:endParaRPr lang="en-US" sz="1300" dirty="0"/>
+          </a:p>
+        </p:txBody>
+      </p:sp>
+      <p:sp>
+        <p:nvSpPr>
+          <p:cNvPr id="5" name="Shape 3"/>
+          <p:cNvSpPr/>
+          <p:nvPr/>
+        </p:nvSpPr>
+        <p:spPr>
+          <a:xfrm>
+            <a:off x="457200" y="1417320"/>
+            <a:ext cx="4846320" cy="2560320"/>
+          </a:xfrm>
+          <a:prstGeom prst="rect">
+            <a:avLst/>
+          </a:prstGeom>
+          <a:solidFill>
+            <a:srgbClr val="0F1434"/>
+          </a:solidFill>
+          <a:ln w="9525">
+            <a:solidFill>
+              <a:srgbClr val="2A2F5A"/>
+            </a:solidFill>
+            <a:prstDash val="solid"/>
+          </a:ln>
+        </p:spPr>
+      </p:sp>
+      <p:sp>
+        <p:nvSpPr>
+          <p:cNvPr id="6" name="Text 4"/>
+          <p:cNvSpPr/>
+          <p:nvPr/>
+        </p:nvSpPr>
+        <p:spPr>
+          <a:xfrm>
+            <a:off x="594360" y="1472184"/>
+            <a:ext cx="4572000" cy="182880"/>
+          </a:xfrm>
+          <a:prstGeom prst="rect">
+            <a:avLst/>
+          </a:prstGeom>
+          <a:noFill/>
+          <a:ln/>
+        </p:spPr>
+        <p:txBody>
+          <a:bodyPr wrap="square" lIns="0" tIns="0" rIns="0" bIns="0" rtlCol="0" anchor="ctr"/>
+          <a:lstStyle/>
+          <a:p>
+            <a:pPr marL="0" indent="0">
+              <a:buNone/>
+            </a:pPr>
+            <a:r>
+              <a:rPr lang="en-US" sz="900" b="1" dirty="0">
+                <a:solidFill>
+                  <a:srgbClr val="CADCFC"/>
+                </a:solidFill>
+                <a:latin typeface="Consolas" pitchFamily="34" charset="0"/>
+                <a:ea typeface="Consolas" pitchFamily="34" charset="-122"/>
+                <a:cs typeface="Consolas" pitchFamily="34" charset="-120"/>
+              </a:rPr>
+              <a:t>settings.json ― sandbox セクション（標準版）</a:t>
+            </a:r>
+            <a:endParaRPr lang="en-US" sz="900" dirty="0"/>
+          </a:p>
+        </p:txBody>
+      </p:sp>
+      <p:sp>
+        <p:nvSpPr>
+          <p:cNvPr id="7" name="Text 5"/>
+          <p:cNvSpPr/>
+          <p:nvPr/>
+        </p:nvSpPr>
+        <p:spPr>
+          <a:xfrm>
+            <a:off x="594360" y="1691640"/>
+            <a:ext cx="4572000" cy="2194560"/>
+          </a:xfrm>
+          <a:prstGeom prst="rect">
+            <a:avLst/>
+          </a:prstGeom>
+          <a:noFill/>
+          <a:ln/>
+        </p:spPr>
+        <p:txBody>
+          <a:bodyPr wrap="square" lIns="0" tIns="0" rIns="0" bIns="0" rtlCol="0" anchor="t"/>
+          <a:lstStyle/>
+          <a:p>
+            <a:pPr marL="0" indent="0">
+              <a:spcAft>
+                <a:spcPts val="30"/>
+              </a:spcAft>
+              <a:buNone/>
+            </a:pPr>
+            <a:r>
+              <a:rPr lang="en-US" sz="800" dirty="0">
+                <a:solidFill>
+                  <a:srgbClr val="CADCFC"/>
+                </a:solidFill>
+                <a:latin typeface="Consolas" pitchFamily="34" charset="0"/>
+                <a:ea typeface="Consolas" pitchFamily="34" charset="-122"/>
+                <a:cs typeface="Consolas" pitchFamily="34" charset="-120"/>
+              </a:rPr>
+              <a:t>"sandbox": {</a:t>
+            </a:r>
+            <a:endParaRPr lang="en-US" sz="800" dirty="0"/>
+          </a:p>
+          <a:p>
+            <a:pPr marL="0" indent="0">
+              <a:spcAft>
+                <a:spcPts val="30"/>
+              </a:spcAft>
+              <a:buNone/>
+            </a:pPr>
+            <a:r>
+              <a:rPr lang="en-US" sz="800" dirty="0">
+                <a:solidFill>
+                  <a:srgbClr val="FFFFFF"/>
+                </a:solidFill>
+                <a:latin typeface="Consolas" pitchFamily="34" charset="0"/>
+                <a:ea typeface="Consolas" pitchFamily="34" charset="-122"/>
+                <a:cs typeface="Consolas" pitchFamily="34" charset="-120"/>
+              </a:rPr>
+              <a:t>  "enabled": true,</a:t>
+            </a:r>
+            <a:endParaRPr lang="en-US" sz="800" dirty="0"/>
+          </a:p>
+          <a:p>
+            <a:pPr marL="0" indent="0">
+              <a:spcAft>
+                <a:spcPts val="30"/>
+              </a:spcAft>
+              <a:buNone/>
+            </a:pPr>
+            <a:r>
+              <a:rPr lang="en-US" sz="800" dirty="0">
+                <a:solidFill>
+                  <a:srgbClr val="CADCFC"/>
+                </a:solidFill>
+                <a:latin typeface="Consolas" pitchFamily="34" charset="0"/>
+                <a:ea typeface="Consolas" pitchFamily="34" charset="-122"/>
+                <a:cs typeface="Consolas" pitchFamily="34" charset="-120"/>
+              </a:rPr>
+              <a:t>  "network": {</a:t>
+            </a:r>
+            <a:endParaRPr lang="en-US" sz="800" dirty="0"/>
+          </a:p>
+          <a:p>
+            <a:pPr marL="0" indent="0">
+              <a:spcAft>
+                <a:spcPts val="30"/>
+              </a:spcAft>
+              <a:buNone/>
+            </a:pPr>
+            <a:r>
+              <a:rPr lang="en-US" sz="800" dirty="0">
+                <a:solidFill>
+                  <a:srgbClr val="CADCFC"/>
+                </a:solidFill>
+                <a:latin typeface="Consolas" pitchFamily="34" charset="0"/>
+                <a:ea typeface="Consolas" pitchFamily="34" charset="-122"/>
+                <a:cs typeface="Consolas" pitchFamily="34" charset="-120"/>
+              </a:rPr>
+              <a:t>    "domains": [</a:t>
+            </a:r>
+            <a:endParaRPr lang="en-US" sz="800" dirty="0"/>
+          </a:p>
+          <a:p>
+            <a:pPr marL="0" indent="0">
+              <a:spcAft>
+                <a:spcPts val="30"/>
+              </a:spcAft>
+              <a:buNone/>
+            </a:pPr>
+            <a:r>
+              <a:rPr lang="en-US" sz="800" dirty="0">
+                <a:solidFill>
+                  <a:srgbClr val="CADCFC"/>
+                </a:solidFill>
+                <a:latin typeface="Consolas" pitchFamily="34" charset="0"/>
+                <a:ea typeface="Consolas" pitchFamily="34" charset="-122"/>
+                <a:cs typeface="Consolas" pitchFamily="34" charset="-120"/>
+              </a:rPr>
+              <a:t>      "github.com", "api.github.com",</a:t>
+            </a:r>
+            <a:endParaRPr lang="en-US" sz="800" dirty="0"/>
+          </a:p>
+          <a:p>
+            <a:pPr marL="0" indent="0">
+              <a:spcAft>
+                <a:spcPts val="30"/>
+              </a:spcAft>
+              <a:buNone/>
+            </a:pPr>
+            <a:r>
+              <a:rPr lang="en-US" sz="800" dirty="0">
+                <a:solidFill>
+                  <a:srgbClr val="CADCFC"/>
+                </a:solidFill>
+                <a:latin typeface="Consolas" pitchFamily="34" charset="0"/>
+                <a:ea typeface="Consolas" pitchFamily="34" charset="-122"/>
+                <a:cs typeface="Consolas" pitchFamily="34" charset="-120"/>
+              </a:rPr>
+              <a:t>      "registry.npmjs.org", "pypi.org",</a:t>
+            </a:r>
+            <a:endParaRPr lang="en-US" sz="800" dirty="0"/>
+          </a:p>
+          <a:p>
+            <a:pPr marL="0" indent="0">
+              <a:spcAft>
+                <a:spcPts val="30"/>
+              </a:spcAft>
+              <a:buNone/>
+            </a:pPr>
+            <a:r>
+              <a:rPr lang="en-US" sz="800" dirty="0">
+                <a:solidFill>
+                  <a:srgbClr val="CADCFC"/>
+                </a:solidFill>
+                <a:latin typeface="Consolas" pitchFamily="34" charset="0"/>
+                <a:ea typeface="Consolas" pitchFamily="34" charset="-122"/>
+                <a:cs typeface="Consolas" pitchFamily="34" charset="-120"/>
+              </a:rPr>
+              <a:t>      "cdn.jsdelivr.net",</a:t>
+            </a:r>
+            <a:endParaRPr lang="en-US" sz="800" dirty="0"/>
+          </a:p>
+          <a:p>
+            <a:pPr marL="0" indent="0">
+              <a:spcAft>
+                <a:spcPts val="30"/>
+              </a:spcAft>
+              <a:buNone/>
+            </a:pPr>
+            <a:r>
+              <a:rPr lang="en-US" sz="800" dirty="0">
+                <a:solidFill>
+                  <a:srgbClr val="CADCFC"/>
+                </a:solidFill>
+                <a:latin typeface="Consolas" pitchFamily="34" charset="0"/>
+                <a:ea typeface="Consolas" pitchFamily="34" charset="-122"/>
+                <a:cs typeface="Consolas" pitchFamily="34" charset="-120"/>
+              </a:rPr>
+              <a:t>      "objects.githubusercontent.com"</a:t>
+            </a:r>
+            <a:endParaRPr lang="en-US" sz="800" dirty="0"/>
+          </a:p>
+          <a:p>
+            <a:pPr marL="0" indent="0">
+              <a:spcAft>
+                <a:spcPts val="30"/>
+              </a:spcAft>
+              <a:buNone/>
+            </a:pPr>
+            <a:r>
+              <a:rPr lang="en-US" sz="800" dirty="0">
+                <a:solidFill>
+                  <a:srgbClr val="CADCFC"/>
+                </a:solidFill>
+                <a:latin typeface="Consolas" pitchFamily="34" charset="0"/>
+                <a:ea typeface="Consolas" pitchFamily="34" charset="-122"/>
+                <a:cs typeface="Consolas" pitchFamily="34" charset="-120"/>
+              </a:rPr>
+              <a:t>    ]</a:t>
+            </a:r>
+            <a:endParaRPr lang="en-US" sz="800" dirty="0"/>
+          </a:p>
+          <a:p>
+            <a:pPr marL="0" indent="0">
+              <a:spcAft>
+                <a:spcPts val="30"/>
+              </a:spcAft>
+              <a:buNone/>
+            </a:pPr>
+            <a:r>
+              <a:rPr lang="en-US" sz="800" dirty="0">
+                <a:solidFill>
+                  <a:srgbClr val="CADCFC"/>
+                </a:solidFill>
+                <a:latin typeface="Consolas" pitchFamily="34" charset="0"/>
+                <a:ea typeface="Consolas" pitchFamily="34" charset="-122"/>
+                <a:cs typeface="Consolas" pitchFamily="34" charset="-120"/>
+              </a:rPr>
+              <a:t>  },</a:t>
+            </a:r>
+            <a:endParaRPr lang="en-US" sz="800" dirty="0"/>
+          </a:p>
+          <a:p>
+            <a:pPr marL="0" indent="0">
+              <a:spcAft>
+                <a:spcPts val="30"/>
+              </a:spcAft>
+              <a:buNone/>
+            </a:pPr>
+            <a:r>
+              <a:rPr lang="en-US" sz="800" dirty="0">
+                <a:solidFill>
+                  <a:srgbClr val="CADCFC"/>
+                </a:solidFill>
+                <a:latin typeface="Consolas" pitchFamily="34" charset="0"/>
+                <a:ea typeface="Consolas" pitchFamily="34" charset="-122"/>
+                <a:cs typeface="Consolas" pitchFamily="34" charset="-120"/>
+              </a:rPr>
+              <a:t>  "fileSystem": {</a:t>
+            </a:r>
+            <a:endParaRPr lang="en-US" sz="800" dirty="0"/>
+          </a:p>
+          <a:p>
+            <a:pPr marL="0" indent="0">
+              <a:spcAft>
+                <a:spcPts val="30"/>
+              </a:spcAft>
+              <a:buNone/>
+            </a:pPr>
+            <a:r>
+              <a:rPr lang="en-US" sz="800" dirty="0">
+                <a:solidFill>
+                  <a:srgbClr val="64748B"/>
+                </a:solidFill>
+                <a:latin typeface="Consolas" pitchFamily="34" charset="0"/>
+                <a:ea typeface="Consolas" pitchFamily="34" charset="-122"/>
+                <a:cs typeface="Consolas" pitchFamily="34" charset="-120"/>
+              </a:rPr>
+              <a:t>    "allowWrite": []    // プロジェクト内は自動許可</a:t>
+            </a:r>
+            <a:endParaRPr lang="en-US" sz="800" dirty="0"/>
+          </a:p>
+          <a:p>
+            <a:pPr marL="0" indent="0">
+              <a:spcAft>
+                <a:spcPts val="30"/>
+              </a:spcAft>
+              <a:buNone/>
+            </a:pPr>
+            <a:r>
+              <a:rPr lang="en-US" sz="800" dirty="0">
+                <a:solidFill>
+                  <a:srgbClr val="CADCFC"/>
+                </a:solidFill>
+                <a:latin typeface="Consolas" pitchFamily="34" charset="0"/>
+                <a:ea typeface="Consolas" pitchFamily="34" charset="-122"/>
+                <a:cs typeface="Consolas" pitchFamily="34" charset="-120"/>
+              </a:rPr>
+              <a:t>  },</a:t>
+            </a:r>
+            <a:endParaRPr lang="en-US" sz="800" dirty="0"/>
+          </a:p>
+          <a:p>
+            <a:pPr marL="0" indent="0">
+              <a:spcAft>
+                <a:spcPts val="30"/>
+              </a:spcAft>
+              <a:buNone/>
+            </a:pPr>
+            <a:r>
+              <a:rPr lang="en-US" sz="800" dirty="0">
+                <a:solidFill>
+                  <a:srgbClr val="FFFFFF"/>
+                </a:solidFill>
+                <a:latin typeface="Consolas" pitchFamily="34" charset="0"/>
+                <a:ea typeface="Consolas" pitchFamily="34" charset="-122"/>
+                <a:cs typeface="Consolas" pitchFamily="34" charset="-120"/>
+              </a:rPr>
+              <a:t>  "allowUnsandboxedCommands": false</a:t>
+            </a:r>
+            <a:endParaRPr lang="en-US" sz="800" dirty="0"/>
+          </a:p>
+          <a:p>
+            <a:pPr marL="0" indent="0">
+              <a:spcAft>
+                <a:spcPts val="30"/>
+              </a:spcAft>
+              <a:buNone/>
+            </a:pPr>
+            <a:r>
+              <a:rPr lang="en-US" sz="800" dirty="0">
+                <a:solidFill>
+                  <a:srgbClr val="64748B"/>
+                </a:solidFill>
+                <a:latin typeface="Consolas" pitchFamily="34" charset="0"/>
+                <a:ea typeface="Consolas" pitchFamily="34" charset="-122"/>
+                <a:cs typeface="Consolas" pitchFamily="34" charset="-120"/>
+              </a:rPr>
+              <a:t>                         // ↑ 脱出口を封じる</a:t>
+            </a:r>
+            <a:endParaRPr lang="en-US" sz="800" dirty="0"/>
+          </a:p>
+          <a:p>
+            <a:pPr marL="0" indent="0">
+              <a:spcAft>
+                <a:spcPts val="30"/>
+              </a:spcAft>
+              <a:buNone/>
+            </a:pPr>
+            <a:r>
+              <a:rPr lang="en-US" sz="800" dirty="0">
+                <a:solidFill>
+                  <a:srgbClr val="CADCFC"/>
+                </a:solidFill>
+                <a:latin typeface="Consolas" pitchFamily="34" charset="0"/>
+                <a:ea typeface="Consolas" pitchFamily="34" charset="-122"/>
+                <a:cs typeface="Consolas" pitchFamily="34" charset="-120"/>
+              </a:rPr>
+              <a:t>}</a:t>
+            </a:r>
+            <a:endParaRPr lang="en-US" sz="800" dirty="0"/>
+          </a:p>
+        </p:txBody>
+      </p:sp>
+      <p:sp>
+        <p:nvSpPr>
+          <p:cNvPr id="8" name="Text 6"/>
+          <p:cNvSpPr/>
+          <p:nvPr/>
+        </p:nvSpPr>
+        <p:spPr>
+          <a:xfrm>
+            <a:off x="5486400" y="1417320"/>
+            <a:ext cx="320040" cy="411480"/>
+          </a:xfrm>
+          <a:prstGeom prst="rect">
+            <a:avLst/>
+          </a:prstGeom>
+          <a:noFill/>
+          <a:ln/>
+        </p:spPr>
+        <p:txBody>
+          <a:bodyPr wrap="square" lIns="0" tIns="0" rIns="0" bIns="0" rtlCol="0" anchor="t"/>
+          <a:lstStyle/>
+          <a:p>
+            <a:pPr marL="0" indent="0">
+              <a:buNone/>
+            </a:pPr>
+            <a:r>
+              <a:rPr lang="en-US" sz="1400" dirty="0">
+                <a:solidFill>
+                  <a:srgbClr val="000000"/>
+                </a:solidFill>
+              </a:rPr>
+              <a:t>🔒</a:t>
+            </a:r>
+            <a:endParaRPr lang="en-US" sz="1400" dirty="0"/>
+          </a:p>
+        </p:txBody>
+      </p:sp>
+      <p:sp>
+        <p:nvSpPr>
+          <p:cNvPr id="9" name="Text 7"/>
+          <p:cNvSpPr/>
+          <p:nvPr/>
+        </p:nvSpPr>
+        <p:spPr>
+          <a:xfrm>
+            <a:off x="5852160" y="1417320"/>
+            <a:ext cx="2834640" cy="182880"/>
+          </a:xfrm>
+          <a:prstGeom prst="rect">
+            <a:avLst/>
+          </a:prstGeom>
+          <a:noFill/>
+          <a:ln/>
+        </p:spPr>
+        <p:txBody>
+          <a:bodyPr wrap="square" lIns="0" tIns="0" rIns="0" bIns="0" rtlCol="0" anchor="ctr"/>
+          <a:lstStyle/>
+          <a:p>
+            <a:pPr marL="0" indent="0">
+              <a:buNone/>
+            </a:pPr>
+            <a:r>
+              <a:rPr lang="en-US" sz="1000" b="1" dirty="0">
+                <a:solidFill>
+                  <a:srgbClr val="1E2761"/>
+                </a:solidFill>
+                <a:latin typeface="Meiryo" pitchFamily="34" charset="0"/>
+                <a:ea typeface="Meiryo" pitchFamily="34" charset="-122"/>
+                <a:cs typeface="Meiryo" pitchFamily="34" charset="-120"/>
+              </a:rPr>
+              <a:t>Sandboxとは</a:t>
+            </a:r>
+            <a:endParaRPr lang="en-US" sz="1000" dirty="0"/>
+          </a:p>
+        </p:txBody>
+      </p:sp>
+      <p:sp>
+        <p:nvSpPr>
+          <p:cNvPr id="10" name="Text 8"/>
+          <p:cNvSpPr/>
+          <p:nvPr/>
+        </p:nvSpPr>
+        <p:spPr>
+          <a:xfrm>
+            <a:off x="5852160" y="1600200"/>
+            <a:ext cx="2834640" cy="274320"/>
+          </a:xfrm>
+          <a:prstGeom prst="rect">
+            <a:avLst/>
+          </a:prstGeom>
+          <a:noFill/>
+          <a:ln/>
+        </p:spPr>
+        <p:txBody>
+          <a:bodyPr wrap="square" lIns="0" tIns="0" rIns="0" bIns="0" rtlCol="0" anchor="t"/>
+          <a:lstStyle/>
+          <a:p>
+            <a:pPr marL="0" indent="0">
+              <a:buNone/>
+            </a:pPr>
+            <a:r>
+              <a:rPr lang="en-US" sz="800" dirty="0">
+                <a:solidFill>
+                  <a:srgbClr val="2D3748"/>
+                </a:solidFill>
+                <a:latin typeface="Meiryo" pitchFamily="34" charset="0"/>
+                <a:ea typeface="Meiryo" pitchFamily="34" charset="-122"/>
+                <a:cs typeface="Meiryo" pitchFamily="34" charset="-120"/>
+              </a:rPr>
+              <a:t>OSレベル（macOS Seatbelt / WSL2 bubblewrap）でbashプロセスを隔離する仕組み</a:t>
+            </a:r>
+            <a:endParaRPr lang="en-US" sz="800" dirty="0"/>
+          </a:p>
+        </p:txBody>
+      </p:sp>
+      <p:sp>
+        <p:nvSpPr>
+          <p:cNvPr id="11" name="Text 9"/>
+          <p:cNvSpPr/>
+          <p:nvPr/>
+        </p:nvSpPr>
+        <p:spPr>
+          <a:xfrm>
+            <a:off x="5486400" y="1920240"/>
+            <a:ext cx="320040" cy="411480"/>
+          </a:xfrm>
+          <a:prstGeom prst="rect">
+            <a:avLst/>
+          </a:prstGeom>
+          <a:noFill/>
+          <a:ln/>
+        </p:spPr>
+        <p:txBody>
+          <a:bodyPr wrap="square" lIns="0" tIns="0" rIns="0" bIns="0" rtlCol="0" anchor="t"/>
+          <a:lstStyle/>
+          <a:p>
+            <a:pPr marL="0" indent="0">
+              <a:buNone/>
+            </a:pPr>
+            <a:r>
+              <a:rPr lang="en-US" sz="1400" dirty="0">
+                <a:solidFill>
+                  <a:srgbClr val="000000"/>
+                </a:solidFill>
+              </a:rPr>
+              <a:t>🌐</a:t>
+            </a:r>
+            <a:endParaRPr lang="en-US" sz="1400" dirty="0"/>
+          </a:p>
+        </p:txBody>
+      </p:sp>
+      <p:sp>
+        <p:nvSpPr>
+          <p:cNvPr id="12" name="Text 10"/>
+          <p:cNvSpPr/>
+          <p:nvPr/>
+        </p:nvSpPr>
+        <p:spPr>
+          <a:xfrm>
+            <a:off x="5852160" y="1920240"/>
+            <a:ext cx="2834640" cy="182880"/>
+          </a:xfrm>
+          <a:prstGeom prst="rect">
+            <a:avLst/>
+          </a:prstGeom>
+          <a:noFill/>
+          <a:ln/>
+        </p:spPr>
+        <p:txBody>
+          <a:bodyPr wrap="square" lIns="0" tIns="0" rIns="0" bIns="0" rtlCol="0" anchor="ctr"/>
+          <a:lstStyle/>
+          <a:p>
+            <a:pPr marL="0" indent="0">
+              <a:buNone/>
+            </a:pPr>
+            <a:r>
+              <a:rPr lang="en-US" sz="1000" b="1" dirty="0">
+                <a:solidFill>
+                  <a:srgbClr val="1E2761"/>
+                </a:solidFill>
+                <a:latin typeface="Meiryo" pitchFamily="34" charset="0"/>
+                <a:ea typeface="Meiryo" pitchFamily="34" charset="-122"/>
+                <a:cs typeface="Meiryo" pitchFamily="34" charset="-120"/>
+              </a:rPr>
+              <a:t>network.domains</a:t>
+            </a:r>
+            <a:endParaRPr lang="en-US" sz="1000" dirty="0"/>
+          </a:p>
+        </p:txBody>
+      </p:sp>
+      <p:sp>
+        <p:nvSpPr>
+          <p:cNvPr id="13" name="Text 11"/>
+          <p:cNvSpPr/>
+          <p:nvPr/>
+        </p:nvSpPr>
+        <p:spPr>
+          <a:xfrm>
+            <a:off x="5852160" y="2103120"/>
+            <a:ext cx="2834640" cy="274320"/>
+          </a:xfrm>
+          <a:prstGeom prst="rect">
+            <a:avLst/>
+          </a:prstGeom>
+          <a:noFill/>
+          <a:ln/>
+        </p:spPr>
+        <p:txBody>
+          <a:bodyPr wrap="square" lIns="0" tIns="0" rIns="0" bIns="0" rtlCol="0" anchor="t"/>
+          <a:lstStyle/>
+          <a:p>
+            <a:pPr marL="0" indent="0">
+              <a:buNone/>
+            </a:pPr>
+            <a:r>
+              <a:rPr lang="en-US" sz="800" dirty="0">
+                <a:solidFill>
+                  <a:srgbClr val="2D3748"/>
+                </a:solidFill>
+                <a:latin typeface="Meiryo" pitchFamily="34" charset="0"/>
+                <a:ea typeface="Meiryo" pitchFamily="34" charset="-122"/>
+                <a:cs typeface="Meiryo" pitchFamily="34" charset="-120"/>
+              </a:rPr>
+              <a:t>許可リスト外のドメインへの通信をブロック。最もよく編集する項目</a:t>
+            </a:r>
+            <a:endParaRPr lang="en-US" sz="800" dirty="0"/>
+          </a:p>
+        </p:txBody>
+      </p:sp>
+      <p:sp>
+        <p:nvSpPr>
+          <p:cNvPr id="14" name="Text 12"/>
+          <p:cNvSpPr/>
+          <p:nvPr/>
+        </p:nvSpPr>
+        <p:spPr>
+          <a:xfrm>
+            <a:off x="5486400" y="2423160"/>
+            <a:ext cx="320040" cy="411480"/>
+          </a:xfrm>
+          <a:prstGeom prst="rect">
+            <a:avLst/>
+          </a:prstGeom>
+          <a:noFill/>
+          <a:ln/>
+        </p:spPr>
+        <p:txBody>
+          <a:bodyPr wrap="square" lIns="0" tIns="0" rIns="0" bIns="0" rtlCol="0" anchor="t"/>
+          <a:lstStyle/>
+          <a:p>
+            <a:pPr marL="0" indent="0">
+              <a:buNone/>
+            </a:pPr>
+            <a:r>
+              <a:rPr lang="en-US" sz="1400" dirty="0">
+                <a:solidFill>
+                  <a:srgbClr val="000000"/>
+                </a:solidFill>
+              </a:rPr>
+              <a:t>📁</a:t>
+            </a:r>
+            <a:endParaRPr lang="en-US" sz="1400" dirty="0"/>
+          </a:p>
+        </p:txBody>
+      </p:sp>
+      <p:sp>
+        <p:nvSpPr>
+          <p:cNvPr id="15" name="Text 13"/>
+          <p:cNvSpPr/>
+          <p:nvPr/>
+        </p:nvSpPr>
+        <p:spPr>
+          <a:xfrm>
+            <a:off x="5852160" y="2423160"/>
+            <a:ext cx="2834640" cy="182880"/>
+          </a:xfrm>
+          <a:prstGeom prst="rect">
+            <a:avLst/>
+          </a:prstGeom>
+          <a:noFill/>
+          <a:ln/>
+        </p:spPr>
+        <p:txBody>
+          <a:bodyPr wrap="square" lIns="0" tIns="0" rIns="0" bIns="0" rtlCol="0" anchor="ctr"/>
+          <a:lstStyle/>
+          <a:p>
+            <a:pPr marL="0" indent="0">
+              <a:buNone/>
+            </a:pPr>
+            <a:r>
+              <a:rPr lang="en-US" sz="1000" b="1" dirty="0">
+                <a:solidFill>
+                  <a:srgbClr val="1E2761"/>
+                </a:solidFill>
+                <a:latin typeface="Meiryo" pitchFamily="34" charset="0"/>
+                <a:ea typeface="Meiryo" pitchFamily="34" charset="-122"/>
+                <a:cs typeface="Meiryo" pitchFamily="34" charset="-120"/>
+              </a:rPr>
+              <a:t>allowWrite</a:t>
+            </a:r>
+            <a:endParaRPr lang="en-US" sz="1000" dirty="0"/>
+          </a:p>
+        </p:txBody>
+      </p:sp>
+      <p:sp>
+        <p:nvSpPr>
+          <p:cNvPr id="16" name="Text 14"/>
+          <p:cNvSpPr/>
+          <p:nvPr/>
+        </p:nvSpPr>
+        <p:spPr>
+          <a:xfrm>
+            <a:off x="5852160" y="2606040"/>
+            <a:ext cx="2834640" cy="274320"/>
+          </a:xfrm>
+          <a:prstGeom prst="rect">
+            <a:avLst/>
+          </a:prstGeom>
+          <a:noFill/>
+          <a:ln/>
+        </p:spPr>
+        <p:txBody>
+          <a:bodyPr wrap="square" lIns="0" tIns="0" rIns="0" bIns="0" rtlCol="0" anchor="t"/>
+          <a:lstStyle/>
+          <a:p>
+            <a:pPr marL="0" indent="0">
+              <a:buNone/>
+            </a:pPr>
+            <a:r>
+              <a:rPr lang="en-US" sz="800" dirty="0">
+                <a:solidFill>
+                  <a:srgbClr val="2D3748"/>
+                </a:solidFill>
+                <a:latin typeface="Meiryo" pitchFamily="34" charset="0"/>
+                <a:ea typeface="Meiryo" pitchFamily="34" charset="-122"/>
+                <a:cs typeface="Meiryo" pitchFamily="34" charset="-120"/>
+              </a:rPr>
+              <a:t>プロジェクト外への書き込みを制限。通常はデフォルトで十分</a:t>
+            </a:r>
+            <a:endParaRPr lang="en-US" sz="800" dirty="0"/>
+          </a:p>
+        </p:txBody>
+      </p:sp>
+      <p:sp>
+        <p:nvSpPr>
+          <p:cNvPr id="17" name="Text 15"/>
+          <p:cNvSpPr/>
+          <p:nvPr/>
+        </p:nvSpPr>
+        <p:spPr>
+          <a:xfrm>
+            <a:off x="5486400" y="2926080"/>
+            <a:ext cx="320040" cy="411480"/>
+          </a:xfrm>
+          <a:prstGeom prst="rect">
+            <a:avLst/>
+          </a:prstGeom>
+          <a:noFill/>
+          <a:ln/>
+        </p:spPr>
+        <p:txBody>
+          <a:bodyPr wrap="square" lIns="0" tIns="0" rIns="0" bIns="0" rtlCol="0" anchor="t"/>
+          <a:lstStyle/>
+          <a:p>
+            <a:pPr marL="0" indent="0">
+              <a:buNone/>
+            </a:pPr>
+            <a:r>
+              <a:rPr lang="en-US" sz="1400" dirty="0">
+                <a:solidFill>
+                  <a:srgbClr val="000000"/>
+                </a:solidFill>
+              </a:rPr>
+              <a:t>🚫</a:t>
+            </a:r>
+            <a:endParaRPr lang="en-US" sz="1400" dirty="0"/>
+          </a:p>
+        </p:txBody>
+      </p:sp>
+      <p:sp>
+        <p:nvSpPr>
+          <p:cNvPr id="18" name="Text 16"/>
+          <p:cNvSpPr/>
+          <p:nvPr/>
+        </p:nvSpPr>
+        <p:spPr>
+          <a:xfrm>
+            <a:off x="5852160" y="2926080"/>
+            <a:ext cx="2834640" cy="182880"/>
+          </a:xfrm>
+          <a:prstGeom prst="rect">
+            <a:avLst/>
+          </a:prstGeom>
+          <a:noFill/>
+          <a:ln/>
+        </p:spPr>
+        <p:txBody>
+          <a:bodyPr wrap="square" lIns="0" tIns="0" rIns="0" bIns="0" rtlCol="0" anchor="ctr"/>
+          <a:lstStyle/>
+          <a:p>
+            <a:pPr marL="0" indent="0">
+              <a:buNone/>
+            </a:pPr>
+            <a:r>
+              <a:rPr lang="en-US" sz="1000" b="1" dirty="0">
+                <a:solidFill>
+                  <a:srgbClr val="1E2761"/>
+                </a:solidFill>
+                <a:latin typeface="Meiryo" pitchFamily="34" charset="0"/>
+                <a:ea typeface="Meiryo" pitchFamily="34" charset="-122"/>
+                <a:cs typeface="Meiryo" pitchFamily="34" charset="-120"/>
+              </a:rPr>
+              <a:t>脱出口を封じる</a:t>
+            </a:r>
+            <a:endParaRPr lang="en-US" sz="1000" dirty="0"/>
+          </a:p>
+        </p:txBody>
+      </p:sp>
+      <p:sp>
+        <p:nvSpPr>
+          <p:cNvPr id="19" name="Text 17"/>
+          <p:cNvSpPr/>
+          <p:nvPr/>
+        </p:nvSpPr>
+        <p:spPr>
+          <a:xfrm>
+            <a:off x="5852160" y="3108960"/>
+            <a:ext cx="2834640" cy="274320"/>
+          </a:xfrm>
+          <a:prstGeom prst="rect">
+            <a:avLst/>
+          </a:prstGeom>
+          <a:noFill/>
+          <a:ln/>
+        </p:spPr>
+        <p:txBody>
+          <a:bodyPr wrap="square" lIns="0" tIns="0" rIns="0" bIns="0" rtlCol="0" anchor="t"/>
+          <a:lstStyle/>
+          <a:p>
+            <a:pPr marL="0" indent="0">
+              <a:buNone/>
+            </a:pPr>
+            <a:r>
+              <a:rPr lang="en-US" sz="800" dirty="0">
+                <a:solidFill>
+                  <a:srgbClr val="2D3748"/>
+                </a:solidFill>
+                <a:latin typeface="Meiryo" pitchFamily="34" charset="0"/>
+                <a:ea typeface="Meiryo" pitchFamily="34" charset="-122"/>
+                <a:cs typeface="Meiryo" pitchFamily="34" charset="-120"/>
+              </a:rPr>
+              <a:t>allowUnsandboxedCommands: false で --disable-sandbox フラグを無効化</a:t>
+            </a:r>
+            <a:endParaRPr lang="en-US" sz="800" dirty="0"/>
+          </a:p>
+        </p:txBody>
+      </p:sp>
+      <p:sp>
+        <p:nvSpPr>
+          <p:cNvPr id="20" name="Text 18"/>
+          <p:cNvSpPr/>
+          <p:nvPr/>
+        </p:nvSpPr>
+        <p:spPr>
+          <a:xfrm>
+            <a:off x="5486400" y="3429000"/>
+            <a:ext cx="320040" cy="411480"/>
+          </a:xfrm>
+          <a:prstGeom prst="rect">
+            <a:avLst/>
+          </a:prstGeom>
+          <a:noFill/>
+          <a:ln/>
+        </p:spPr>
+        <p:txBody>
+          <a:bodyPr wrap="square" lIns="0" tIns="0" rIns="0" bIns="0" rtlCol="0" anchor="t"/>
+          <a:lstStyle/>
+          <a:p>
+            <a:pPr marL="0" indent="0">
+              <a:buNone/>
+            </a:pPr>
+            <a:r>
+              <a:rPr lang="en-US" sz="1400" dirty="0">
+                <a:solidFill>
+                  <a:srgbClr val="000000"/>
+                </a:solidFill>
+              </a:rPr>
+              <a:t>⚠️</a:t>
+            </a:r>
+            <a:endParaRPr lang="en-US" sz="1400" dirty="0"/>
+          </a:p>
+        </p:txBody>
+      </p:sp>
+      <p:sp>
+        <p:nvSpPr>
+          <p:cNvPr id="21" name="Text 19"/>
+          <p:cNvSpPr/>
+          <p:nvPr/>
+        </p:nvSpPr>
+        <p:spPr>
+          <a:xfrm>
+            <a:off x="5852160" y="3429000"/>
+            <a:ext cx="2834640" cy="182880"/>
+          </a:xfrm>
+          <a:prstGeom prst="rect">
+            <a:avLst/>
+          </a:prstGeom>
+          <a:noFill/>
+          <a:ln/>
+        </p:spPr>
+        <p:txBody>
+          <a:bodyPr wrap="square" lIns="0" tIns="0" rIns="0" bIns="0" rtlCol="0" anchor="ctr"/>
+          <a:lstStyle/>
+          <a:p>
+            <a:pPr marL="0" indent="0">
+              <a:buNone/>
+            </a:pPr>
+            <a:r>
+              <a:rPr lang="en-US" sz="1000" b="1" dirty="0">
+                <a:solidFill>
+                  <a:srgbClr val="1E2761"/>
+                </a:solidFill>
+                <a:latin typeface="Meiryo" pitchFamily="34" charset="0"/>
+                <a:ea typeface="Meiryo" pitchFamily="34" charset="-122"/>
+                <a:cs typeface="Meiryo" pitchFamily="34" charset="-120"/>
+              </a:rPr>
+              <a:t>絶対やってはいけない</a:t>
+            </a:r>
+            <a:endParaRPr lang="en-US" sz="1000" dirty="0"/>
+          </a:p>
+        </p:txBody>
+      </p:sp>
+      <p:sp>
+        <p:nvSpPr>
+          <p:cNvPr id="22" name="Text 20"/>
+          <p:cNvSpPr/>
+          <p:nvPr/>
+        </p:nvSpPr>
+        <p:spPr>
+          <a:xfrm>
+            <a:off x="5852160" y="3611880"/>
+            <a:ext cx="2834640" cy="274320"/>
+          </a:xfrm>
+          <a:prstGeom prst="rect">
+            <a:avLst/>
+          </a:prstGeom>
+          <a:noFill/>
+          <a:ln/>
+        </p:spPr>
+        <p:txBody>
+          <a:bodyPr wrap="square" lIns="0" tIns="0" rIns="0" bIns="0" rtlCol="0" anchor="t"/>
+          <a:lstStyle/>
+          <a:p>
+            <a:pPr marL="0" indent="0">
+              <a:buNone/>
+            </a:pPr>
+            <a:r>
+              <a:rPr lang="en-US" sz="800" dirty="0">
+                <a:solidFill>
+                  <a:srgbClr val="2D3748"/>
+                </a:solidFill>
+                <a:latin typeface="Meiryo" pitchFamily="34" charset="0"/>
+                <a:ea typeface="Meiryo" pitchFamily="34" charset="-122"/>
+                <a:cs typeface="Meiryo" pitchFamily="34" charset="-120"/>
+              </a:rPr>
+              <a:t>allowWriteに~/ を入れない。許可ドメインを漠然と広くしない</a:t>
+            </a:r>
+            <a:endParaRPr lang="en-US" sz="800" dirty="0"/>
+          </a:p>
+        </p:txBody>
+      </p:sp>
+      <p:sp>
+        <p:nvSpPr>
+          <p:cNvPr id="23" name="Shape 21"/>
+          <p:cNvSpPr/>
+          <p:nvPr/>
+        </p:nvSpPr>
+        <p:spPr>
+          <a:xfrm>
+            <a:off x="457200" y="4114800"/>
+            <a:ext cx="8229600" cy="822960"/>
+          </a:xfrm>
+          <a:prstGeom prst="rect">
+            <a:avLst/>
+          </a:prstGeom>
+          <a:solidFill>
+            <a:srgbClr val="F8F9FC"/>
+          </a:solidFill>
+          <a:ln w="9525">
+            <a:solidFill>
+              <a:srgbClr val="E5E9F2"/>
+            </a:solidFill>
+            <a:prstDash val="solid"/>
+          </a:ln>
+        </p:spPr>
+      </p:sp>
+      <p:sp>
+        <p:nvSpPr>
+          <p:cNvPr id="24" name="Text 22"/>
+          <p:cNvSpPr/>
+          <p:nvPr/>
+        </p:nvSpPr>
+        <p:spPr>
+          <a:xfrm>
+            <a:off x="594360" y="4142232"/>
+            <a:ext cx="7955280" cy="201168"/>
+          </a:xfrm>
+          <a:prstGeom prst="rect">
+            <a:avLst/>
+          </a:prstGeom>
+          <a:noFill/>
+          <a:ln/>
+        </p:spPr>
+        <p:txBody>
+          <a:bodyPr wrap="square" lIns="0" tIns="0" rIns="0" bIns="0" rtlCol="0" anchor="ctr"/>
+          <a:lstStyle/>
+          <a:p>
+            <a:pPr marL="0" indent="0">
+              <a:buNone/>
+            </a:pPr>
+            <a:r>
+              <a:rPr lang="en-US" sz="1000" b="1" dirty="0">
+                <a:solidFill>
+                  <a:srgbClr val="1E2761"/>
+                </a:solidFill>
+                <a:latin typeface="Meiryo" pitchFamily="34" charset="0"/>
+                <a:ea typeface="Meiryo" pitchFamily="34" charset="-122"/>
+                <a:cs typeface="Meiryo" pitchFamily="34" charset="-120"/>
+              </a:rPr>
+              <a:t>設定したのに効かない時の診断フロー（3ステップ）</a:t>
+            </a:r>
+            <a:endParaRPr lang="en-US" sz="1000" dirty="0"/>
+          </a:p>
+        </p:txBody>
+      </p:sp>
+      <p:sp>
+        <p:nvSpPr>
+          <p:cNvPr id="25" name="Text 23"/>
+          <p:cNvSpPr/>
+          <p:nvPr/>
+        </p:nvSpPr>
+        <p:spPr>
+          <a:xfrm>
+            <a:off x="594360" y="4370832"/>
+            <a:ext cx="7955280" cy="502920"/>
+          </a:xfrm>
+          <a:prstGeom prst="rect">
+            <a:avLst/>
+          </a:prstGeom>
+          <a:noFill/>
+          <a:ln/>
+        </p:spPr>
+        <p:txBody>
+          <a:bodyPr wrap="square" lIns="0" tIns="0" rIns="0" bIns="0" rtlCol="0" anchor="t"/>
+          <a:lstStyle/>
+          <a:p>
+            <a:pPr marL="0" indent="0">
+              <a:spcAft>
+                <a:spcPts val="200"/>
+              </a:spcAft>
+              <a:buNone/>
+            </a:pPr>
+            <a:r>
+              <a:rPr lang="en-US" sz="900" dirty="0">
+                <a:solidFill>
+                  <a:srgbClr val="2D3748"/>
+                </a:solidFill>
+                <a:latin typeface="Meiryo" pitchFamily="34" charset="0"/>
+                <a:ea typeface="Meiryo" pitchFamily="34" charset="-122"/>
+                <a:cs typeface="Meiryo" pitchFamily="34" charset="-120"/>
+              </a:rPr>
+              <a:t>① /sandbox コマンドでモードと設定を確認</a:t>
+            </a:r>
+            <a:endParaRPr lang="en-US" sz="900" dirty="0"/>
+          </a:p>
+          <a:p>
+            <a:pPr marL="0" indent="0">
+              <a:spcAft>
+                <a:spcPts val="200"/>
+              </a:spcAft>
+              <a:buNone/>
+            </a:pPr>
+            <a:r>
+              <a:rPr lang="en-US" sz="900" dirty="0">
+                <a:solidFill>
+                  <a:srgbClr val="2D3748"/>
+                </a:solidFill>
+                <a:latin typeface="Meiryo" pitchFamily="34" charset="0"/>
+                <a:ea typeface="Meiryo" pitchFamily="34" charset="-122"/>
+                <a:cs typeface="Meiryo" pitchFamily="34" charset="-120"/>
+              </a:rPr>
+              <a:t> → ② Claude Codeを再起動（設定変更は再起動で反映されることが多い）</a:t>
+            </a:r>
+            <a:endParaRPr lang="en-US" sz="900" dirty="0"/>
+          </a:p>
+          <a:p>
+            <a:pPr marL="0" indent="0">
+              <a:spcAft>
+                <a:spcPts val="200"/>
+              </a:spcAft>
+              <a:buNone/>
+            </a:pPr>
+            <a:r>
+              <a:rPr lang="en-US" sz="900" dirty="0">
+                <a:solidFill>
+                  <a:srgbClr val="2D3748"/>
+                </a:solidFill>
+                <a:latin typeface="Meiryo" pitchFamily="34" charset="0"/>
+                <a:ea typeface="Meiryo" pitchFamily="34" charset="-122"/>
+                <a:cs typeface="Meiryo" pitchFamily="34" charset="-120"/>
+              </a:rPr>
+              <a:t> → ③ 設定ファイルの優先順位を確認（Managed &gt; CLI &gt; Local &gt; Project &gt; User）</a:t>
+            </a:r>
+            <a:endParaRPr lang="en-US" sz="900" dirty="0"/>
+          </a:p>
+        </p:txBody>
+      </p:sp>
+      <p:sp>
+        <p:nvSpPr>
+          <p:cNvPr id="26" name="Text 24"/>
+          <p:cNvSpPr/>
+          <p:nvPr/>
+        </p:nvSpPr>
+        <p:spPr>
+          <a:xfrm>
+            <a:off x="457200" y="4983480"/>
+            <a:ext cx="8229600" cy="182880"/>
+          </a:xfrm>
+          <a:prstGeom prst="rect">
+            <a:avLst/>
+          </a:prstGeom>
+          <a:noFill/>
+          <a:ln/>
+        </p:spPr>
+        <p:txBody>
+          <a:bodyPr wrap="square" lIns="0" tIns="0" rIns="0" bIns="0" rtlCol="0" anchor="ctr"/>
+          <a:lstStyle/>
+          <a:p>
+            <a:pPr marL="0" indent="0">
+              <a:buNone/>
+            </a:pPr>
+            <a:r>
+              <a:rPr lang="en-US" sz="700" dirty="0">
+                <a:solidFill>
+                  <a:srgbClr val="64748B"/>
+                </a:solidFill>
+                <a:latin typeface="Meiryo" pitchFamily="34" charset="0"/>
+                <a:ea typeface="Meiryo" pitchFamily="34" charset="-122"/>
+                <a:cs typeface="Meiryo" pitchFamily="34" charset="-120"/>
+              </a:rPr>
+              <a:t>出典: 「Claude Codeのsandboxを正しく理解する」YouTube動画 + Claude Code公式ドキュメント</a:t>
+            </a:r>
+            <a:endParaRPr lang="en-US" sz="700" dirty="0"/>
+          </a:p>
+        </p:txBody>
+      </p:sp>
+    </p:spTree>
+  </p:cSld>
+  <p:clrMapOvr>
+    <a:masterClrMapping/>
+  </p:clrMapOvr>
+</p:sld>
+</file>
+
 <file path=ppt/slides/slide2.xml><?xml version="1.0" encoding="utf-8"?>
+<p:sld xmlns:a="http://schemas.openxmlformats.org/drawingml/2006/main" xmlns:r="http://schemas.openxmlformats.org/officeDocument/2006/relationships" xmlns:p="http://schemas.openxmlformats.org/presentationml/2006/main">
+  <p:cSld>
+    <p:bg>
+      <p:bgPr>
+        <a:solidFill>
+          <a:srgbClr val="FFFFFF"/>
+        </a:solidFill>
+        <a:effectLst/>
+      </p:bgPr>
+    </p:bg>
+    <p:spTree>
+      <p:nvGrpSpPr>
+        <p:cNvPr id="1" name=""/>
+        <p:cNvGrpSpPr/>
+        <p:nvPr/>
+      </p:nvGrpSpPr>
+      <p:grpSpPr>
+        <a:xfrm>
+          <a:off x="0" y="0"/>
+          <a:ext cx="0" cy="0"/>
+          <a:chOff x="0" y="0"/>
+          <a:chExt cx="0" cy="0"/>
+        </a:xfrm>
+      </p:grpSpPr>
+      <p:sp>
+        <p:nvSpPr>
+          <p:cNvPr id="2" name="TextBox 1"/>
+          <p:cNvSpPr txBox="1"/>
+          <p:nvPr/>
+        </p:nvSpPr>
+        <p:spPr>
+          <a:xfrm>
+            <a:off x="457200" y="320040"/>
+            <a:ext cx="8229600" cy="548640"/>
+          </a:xfrm>
+          <a:prstGeom prst="rect">
+            <a:avLst/>
+          </a:prstGeom>
+          <a:noFill/>
+        </p:spPr>
+        <p:txBody>
+          <a:bodyPr wrap="square" lIns="0" tIns="0" rIns="0" bIns="0">
+            <a:spAutoFit/>
+          </a:bodyPr>
+          <a:lstStyle/>
+          <a:p>
+            <a:r>
+              <a:rPr sz="2600" b="1" i="0">
+                <a:solidFill>
+                  <a:srgbClr val="1E2761"/>
+                </a:solidFill>
+              </a:rPr>
+              <a:t>今日の用語ミニ辞典 ― 迷ったらここに戻る</a:t>
+            </a:r>
+          </a:p>
+        </p:txBody>
+      </p:sp>
+      <p:sp>
+        <p:nvSpPr>
+          <p:cNvPr id="3" name="TextBox 2"/>
+          <p:cNvSpPr txBox="1"/>
+          <p:nvPr/>
+        </p:nvSpPr>
+        <p:spPr>
+          <a:xfrm>
+            <a:off x="457200" y="960000"/>
+            <a:ext cx="8229600" cy="330000"/>
+          </a:xfrm>
+          <a:prstGeom prst="rect">
+            <a:avLst/>
+          </a:prstGeom>
+          <a:noFill/>
+        </p:spPr>
+        <p:txBody>
+          <a:bodyPr wrap="square" lIns="0" tIns="0" rIns="0" bIns="0">
+            <a:spAutoFit/>
+          </a:bodyPr>
+          <a:lstStyle/>
+          <a:p>
+            <a:r>
+              <a:rPr sz="1300" b="0" i="1">
+                <a:solidFill>
+                  <a:srgbClr val="64748B"/>
+                </a:solidFill>
+              </a:rPr>
+              <a:t>今日のスライドで初めて出てくるカタカナ語を1行で説明</a:t>
+            </a:r>
+          </a:p>
+        </p:txBody>
+      </p:sp>
+      <p:sp>
+        <p:nvSpPr>
+          <p:cNvPr id="4" name="TextBox 3"/>
+          <p:cNvSpPr txBox="1"/>
+          <p:nvPr/>
+        </p:nvSpPr>
+        <p:spPr>
+          <a:xfrm>
+            <a:off x="457200" y="1450000"/>
+            <a:ext cx="8229600" cy="3500000"/>
+          </a:xfrm>
+          <a:prstGeom prst="rect">
+            <a:avLst/>
+          </a:prstGeom>
+          <a:noFill/>
+        </p:spPr>
+        <p:txBody>
+          <a:bodyPr wrap="square" lIns="0" tIns="0" rIns="0" bIns="0">
+            <a:spAutoFit/>
+          </a:bodyPr>
+          <a:lstStyle/>
+          <a:p>
+            <a:r>
+              <a:rPr sz="1600" b="1">
+                <a:solidFill>
+                  <a:srgbClr val="1E2761"/>
+                </a:solidFill>
+              </a:rPr>
+              <a:t>●  DevContainer</a:t>
+            </a:r>
+            <a:r>
+              <a:rPr sz="1400" b="0">
+                <a:solidFill>
+                  <a:srgbClr val="2D3748"/>
+                </a:solidFill>
+              </a:rPr>
+              <a:t>　＝　プロジェクトごとの使い捨て開発コンテナ（ホストから分離）</a:t>
+            </a:r>
+          </a:p>
+          <a:p>
+            <a:pPr>
+              <a:spcBef>
+                <a:spcPts val="800"/>
+              </a:spcBef>
+            </a:pPr>
+            <a:r>
+              <a:rPr sz="1600" b="1">
+                <a:solidFill>
+                  <a:srgbClr val="1E2761"/>
+                </a:solidFill>
+              </a:rPr>
+              <a:t>●  Sandbox</a:t>
+            </a:r>
+            <a:r>
+              <a:rPr sz="1400" b="0">
+                <a:solidFill>
+                  <a:srgbClr val="2D3748"/>
+                </a:solidFill>
+              </a:rPr>
+              <a:t>　＝　OSが「ここから先は触らせない」と決める砂場</a:t>
+            </a:r>
+          </a:p>
+          <a:p>
+            <a:pPr>
+              <a:spcBef>
+                <a:spcPts val="800"/>
+              </a:spcBef>
+            </a:pPr>
+            <a:r>
+              <a:rPr sz="1600" b="1">
+                <a:solidFill>
+                  <a:srgbClr val="1E2761"/>
+                </a:solidFill>
+              </a:rPr>
+              <a:t>●  Hooks</a:t>
+            </a:r>
+            <a:r>
+              <a:rPr sz="1400" b="0">
+                <a:solidFill>
+                  <a:srgbClr val="2D3748"/>
+                </a:solidFill>
+              </a:rPr>
+              <a:t>　＝　ツール実行の前後に必ず呼ばれる関数（決定的にブロックできる）</a:t>
+            </a:r>
+          </a:p>
+          <a:p>
+            <a:pPr>
+              <a:spcBef>
+                <a:spcPts val="800"/>
+              </a:spcBef>
+            </a:pPr>
+            <a:r>
+              <a:rPr sz="1600" b="1">
+                <a:solidFill>
+                  <a:srgbClr val="1E2761"/>
+                </a:solidFill>
+              </a:rPr>
+              <a:t>●  プロンプトインジェクション</a:t>
+            </a:r>
+            <a:r>
+              <a:rPr sz="1400" b="0">
+                <a:solidFill>
+                  <a:srgbClr val="2D3748"/>
+                </a:solidFill>
+              </a:rPr>
+              <a:t>　＝　外部に仕込まれた指示でAIが誘導される攻撃</a:t>
+            </a:r>
+          </a:p>
+          <a:p>
+            <a:pPr>
+              <a:spcBef>
+                <a:spcPts val="800"/>
+              </a:spcBef>
+            </a:pPr>
+            <a:r>
+              <a:rPr sz="1600" b="1">
+                <a:solidFill>
+                  <a:srgbClr val="1E2761"/>
+                </a:solidFill>
+              </a:rPr>
+              <a:t>●  ラテラルムーブメント</a:t>
+            </a:r>
+            <a:r>
+              <a:rPr sz="1400" b="0">
+                <a:solidFill>
+                  <a:srgbClr val="2D3748"/>
+                </a:solidFill>
+              </a:rPr>
+              <a:t>　＝　1台が侵害されたあと他の機器に被害が拡がること</a:t>
+            </a:r>
+          </a:p>
+        </p:txBody>
+      </p:sp>
+      <p:sp>
+        <p:nvSpPr>
+          <p:cNvPr id="5" name="TextBox 4"/>
+          <p:cNvSpPr txBox="1"/>
+          <p:nvPr/>
+        </p:nvSpPr>
+        <p:spPr>
+          <a:xfrm>
+            <a:off x="457200" y="4828032"/>
+            <a:ext cx="8229600" cy="228600"/>
+          </a:xfrm>
+          <a:prstGeom prst="rect">
+            <a:avLst/>
+          </a:prstGeom>
+          <a:noFill/>
+        </p:spPr>
+        <p:txBody>
+          <a:bodyPr wrap="square" lIns="0" tIns="0" rIns="0" bIns="0">
+            <a:spAutoFit/>
+          </a:bodyPr>
+          <a:lstStyle/>
+          <a:p>
+            <a:r>
+              <a:rPr sz="1000" b="0" i="1">
+                <a:solidFill>
+                  <a:srgbClr val="64748B"/>
+                </a:solidFill>
+              </a:rPr>
+              <a:t>★ 用語が分からなくなったらここへ戻ってください</a:t>
+            </a:r>
+          </a:p>
+        </p:txBody>
+      </p:sp>
+    </p:spTree>
+  </p:cSld>
+  <p:clrMapOvr>
+    <a:masterClrMapping/>
+  </p:clrMapOvr>
+</p:sld>
+</file>
+
+<file path=ppt/slides/slide3.xml><?xml version="1.0" encoding="utf-8"?>
 <p:sld xmlns:a="http://schemas.openxmlformats.org/drawingml/2006/main" xmlns:r="http://schemas.openxmlformats.org/officeDocument/2006/relationships" xmlns:p="http://schemas.openxmlformats.org/presentationml/2006/main">
   <p:cSld name="Slide 2">
     <p:bg>
@@ -3815,7 +9689,7 @@
 </p:sld>
 </file>
 
-<file path=ppt/slides/slide3.xml><?xml version="1.0" encoding="utf-8"?>
+<file path=ppt/slides/slide4.xml><?xml version="1.0" encoding="utf-8"?>
 <p:sld xmlns:a="http://schemas.openxmlformats.org/drawingml/2006/main" xmlns:r="http://schemas.openxmlformats.org/officeDocument/2006/relationships" xmlns:p="http://schemas.openxmlformats.org/presentationml/2006/main">
   <p:cSld name="Slide 3">
     <p:bg>
@@ -4877,7 +10751,7 @@
 </p:sld>
 </file>
 
-<file path=ppt/slides/slide4.xml><?xml version="1.0" encoding="utf-8"?>
+<file path=ppt/slides/slide5.xml><?xml version="1.0" encoding="utf-8"?>
 <p:sld xmlns:a="http://schemas.openxmlformats.org/drawingml/2006/main" xmlns:r="http://schemas.openxmlformats.org/officeDocument/2006/relationships" xmlns:p="http://schemas.openxmlformats.org/presentationml/2006/main">
   <p:cSld name="Slide 4">
     <p:bg>
@@ -5824,7 +11698,7 @@
 </p:sld>
 </file>
 
-<file path=ppt/slides/slide5.xml><?xml version="1.0" encoding="utf-8"?>
+<file path=ppt/slides/slide6.xml><?xml version="1.0" encoding="utf-8"?>
 <p:sld xmlns:a="http://schemas.openxmlformats.org/drawingml/2006/main" xmlns:r="http://schemas.openxmlformats.org/officeDocument/2006/relationships" xmlns:p="http://schemas.openxmlformats.org/presentationml/2006/main">
   <p:cSld name="Slide 5">
     <p:bg>
@@ -6961,7 +12835,7 @@
 </p:sld>
 </file>
 
-<file path=ppt/slides/slide6.xml><?xml version="1.0" encoding="utf-8"?>
+<file path=ppt/slides/slide7.xml><?xml version="1.0" encoding="utf-8"?>
 <p:sld xmlns:a="http://schemas.openxmlformats.org/drawingml/2006/main" xmlns:r="http://schemas.openxmlformats.org/officeDocument/2006/relationships" xmlns:p="http://schemas.openxmlformats.org/presentationml/2006/main">
   <p:cSld name="Slide 6">
     <p:bg>
@@ -7844,7 +13718,7 @@
 </p:sld>
 </file>
 
-<file path=ppt/slides/slide7.xml><?xml version="1.0" encoding="utf-8"?>
+<file path=ppt/slides/slide8.xml><?xml version="1.0" encoding="utf-8"?>
 <p:sld xmlns:a="http://schemas.openxmlformats.org/drawingml/2006/main" xmlns:r="http://schemas.openxmlformats.org/officeDocument/2006/relationships" xmlns:p="http://schemas.openxmlformats.org/presentationml/2006/main">
   <p:cSld name="Slide 7">
     <p:bg>
@@ -8532,7 +14406,7 @@
 </p:sld>
 </file>
 
-<file path=ppt/slides/slide8.xml><?xml version="1.0" encoding="utf-8"?>
+<file path=ppt/slides/slide9.xml><?xml version="1.0" encoding="utf-8"?>
 <p:sld xmlns:a="http://schemas.openxmlformats.org/drawingml/2006/main" xmlns:r="http://schemas.openxmlformats.org/officeDocument/2006/relationships" xmlns:p="http://schemas.openxmlformats.org/presentationml/2006/main">
   <p:cSld name="Slide 8">
     <p:bg>
@@ -9345,904 +15219,6 @@
         <p14:creationId xmlns:p14="http://schemas.microsoft.com/office/powerpoint/2010/main" val="976499251"/>
       </p:ext>
     </p:extLst>
-  </p:cSld>
-  <p:clrMapOvr>
-    <a:masterClrMapping/>
-  </p:clrMapOvr>
-</p:sld>
-</file>
-
-<file path=ppt/slides/slide9.xml><?xml version="1.0" encoding="utf-8"?>
-<p:sld xmlns:a="http://schemas.openxmlformats.org/drawingml/2006/main" xmlns:r="http://schemas.openxmlformats.org/officeDocument/2006/relationships" xmlns:p="http://schemas.openxmlformats.org/presentationml/2006/main">
-  <p:cSld name="Slide 9">
-    <p:bg>
-      <p:bgPr>
-        <a:solidFill>
-          <a:srgbClr val="FFFFFF"/>
-        </a:solidFill>
-        <a:effectLst/>
-      </p:bgPr>
-    </p:bg>
-    <p:spTree>
-      <p:nvGrpSpPr>
-        <p:cNvPr id="1" name=""/>
-        <p:cNvGrpSpPr/>
-        <p:nvPr/>
-      </p:nvGrpSpPr>
-      <p:grpSpPr>
-        <a:xfrm>
-          <a:off x="0" y="0"/>
-          <a:ext cx="0" cy="0"/>
-          <a:chOff x="0" y="0"/>
-          <a:chExt cx="0" cy="0"/>
-        </a:xfrm>
-      </p:grpSpPr>
-      <p:sp>
-        <p:nvSpPr>
-          <p:cNvPr id="2" name="Text 0"/>
-          <p:cNvSpPr/>
-          <p:nvPr/>
-        </p:nvSpPr>
-        <p:spPr>
-          <a:xfrm>
-            <a:off x="457200" y="320040"/>
-            <a:ext cx="8229600" cy="548640"/>
-          </a:xfrm>
-          <a:prstGeom prst="rect">
-            <a:avLst/>
-          </a:prstGeom>
-          <a:noFill/>
-          <a:ln/>
-        </p:spPr>
-        <p:txBody>
-          <a:bodyPr wrap="square" lIns="0" tIns="0" rIns="0" bIns="0" rtlCol="0" anchor="ctr"/>
-          <a:lstStyle/>
-          <a:p>
-            <a:pPr marL="0" indent="0">
-              <a:buNone/>
-            </a:pPr>
-            <a:r>
-              <a:rPr lang="en-US" sz="2600" b="1" dirty="0" err="1">
-                <a:solidFill>
-                  <a:srgbClr val="1E2761"/>
-                </a:solidFill>
-                <a:latin typeface="Arial Black" pitchFamily="34" charset="0"/>
-                <a:ea typeface="Arial Black" pitchFamily="34" charset="-122"/>
-                <a:cs typeface="Arial Black" pitchFamily="34" charset="-120"/>
-              </a:rPr>
-              <a:t>実演の参考</a:t>
-            </a:r>
-            <a:r>
-              <a:rPr lang="en-US" sz="2600" b="1">
-                <a:solidFill>
-                  <a:srgbClr val="1E2761"/>
-                </a:solidFill>
-                <a:latin typeface="Arial Black" pitchFamily="34" charset="0"/>
-                <a:ea typeface="Arial Black" pitchFamily="34" charset="-122"/>
-                <a:cs typeface="Arial Black" pitchFamily="34" charset="-120"/>
-              </a:rPr>
-              <a:t> ― 設定サンプル</a:t>
-            </a:r>
-            <a:endParaRPr lang="en-US" sz="2600"/>
-          </a:p>
-        </p:txBody>
-      </p:sp>
-      <p:sp>
-        <p:nvSpPr>
-          <p:cNvPr id="3" name="Shape 1"/>
-          <p:cNvSpPr/>
-          <p:nvPr/>
-        </p:nvSpPr>
-        <p:spPr>
-          <a:xfrm>
-            <a:off x="457200" y="932688"/>
-            <a:ext cx="548640" cy="45720"/>
-          </a:xfrm>
-          <a:prstGeom prst="rect">
-            <a:avLst/>
-          </a:prstGeom>
-          <a:solidFill>
-            <a:srgbClr val="F96167"/>
-          </a:solidFill>
-          <a:ln w="12700">
-            <a:solidFill>
-              <a:srgbClr val="F96167"/>
-            </a:solidFill>
-            <a:prstDash val="solid"/>
-          </a:ln>
-        </p:spPr>
-        <p:txBody>
-          <a:bodyPr/>
-          <a:lstStyle/>
-          <a:p>
-            <a:endParaRPr lang="ja-JP" altLang="en-US"/>
-          </a:p>
-        </p:txBody>
-      </p:sp>
-      <p:sp>
-        <p:nvSpPr>
-          <p:cNvPr id="5" name="Text 3"/>
-          <p:cNvSpPr/>
-          <p:nvPr/>
-        </p:nvSpPr>
-        <p:spPr>
-          <a:xfrm>
-            <a:off x="457200" y="1143000"/>
-            <a:ext cx="4023360" cy="274320"/>
-          </a:xfrm>
-          <a:prstGeom prst="rect">
-            <a:avLst/>
-          </a:prstGeom>
-          <a:noFill/>
-          <a:ln/>
-        </p:spPr>
-        <p:txBody>
-          <a:bodyPr wrap="square" lIns="0" tIns="0" rIns="0" bIns="0" rtlCol="0" anchor="ctr"/>
-          <a:lstStyle/>
-          <a:p>
-            <a:pPr marL="0" indent="0">
-              <a:buNone/>
-            </a:pPr>
-            <a:r>
-              <a:rPr lang="en-US" sz="1300" b="1" dirty="0">
-                <a:solidFill>
-                  <a:srgbClr val="F96167"/>
-                </a:solidFill>
-                <a:latin typeface="Meiryo" pitchFamily="34" charset="0"/>
-                <a:ea typeface="Meiryo" pitchFamily="34" charset="-122"/>
-                <a:cs typeface="Meiryo" pitchFamily="34" charset="-120"/>
-              </a:rPr>
-              <a:t>DEMO A ▸ </a:t>
-            </a:r>
-            <a:r>
-              <a:rPr lang="en-US" sz="1300" b="1" dirty="0" err="1">
-                <a:solidFill>
-                  <a:srgbClr val="1E2761"/>
-                </a:solidFill>
-                <a:latin typeface="Consolas" pitchFamily="34" charset="0"/>
-                <a:ea typeface="Consolas" pitchFamily="34" charset="-122"/>
-                <a:cs typeface="Consolas" pitchFamily="34" charset="-120"/>
-              </a:rPr>
-              <a:t>settings.json</a:t>
-            </a:r>
-            <a:endParaRPr lang="en-US" sz="1300" dirty="0"/>
-          </a:p>
-        </p:txBody>
-      </p:sp>
-      <p:sp>
-        <p:nvSpPr>
-          <p:cNvPr id="6" name="Shape 4"/>
-          <p:cNvSpPr/>
-          <p:nvPr/>
-        </p:nvSpPr>
-        <p:spPr>
-          <a:xfrm>
-            <a:off x="457200" y="1463040"/>
-            <a:ext cx="4023360" cy="2926080"/>
-          </a:xfrm>
-          <a:prstGeom prst="rect">
-            <a:avLst/>
-          </a:prstGeom>
-          <a:solidFill>
-            <a:srgbClr val="0F1434"/>
-          </a:solidFill>
-          <a:ln w="12700">
-            <a:solidFill>
-              <a:srgbClr val="0F1434"/>
-            </a:solidFill>
-            <a:prstDash val="solid"/>
-          </a:ln>
-        </p:spPr>
-        <p:txBody>
-          <a:bodyPr/>
-          <a:lstStyle/>
-          <a:p>
-            <a:endParaRPr lang="ja-JP" altLang="en-US"/>
-          </a:p>
-        </p:txBody>
-      </p:sp>
-      <p:sp>
-        <p:nvSpPr>
-          <p:cNvPr id="7" name="Text 5"/>
-          <p:cNvSpPr/>
-          <p:nvPr/>
-        </p:nvSpPr>
-        <p:spPr>
-          <a:xfrm>
-            <a:off x="640080" y="1600200"/>
-            <a:ext cx="3657600" cy="2651760"/>
-          </a:xfrm>
-          <a:prstGeom prst="rect">
-            <a:avLst/>
-          </a:prstGeom>
-          <a:noFill/>
-          <a:ln/>
-        </p:spPr>
-        <p:txBody>
-          <a:bodyPr wrap="square" lIns="0" tIns="0" rIns="0" bIns="0" rtlCol="0" anchor="t"/>
-          <a:lstStyle/>
-          <a:p>
-            <a:pPr marL="0" indent="0">
-              <a:buNone/>
-            </a:pPr>
-            <a:r>
-              <a:rPr lang="en-US" sz="1000">
-                <a:solidFill>
-                  <a:srgbClr val="CADCFC"/>
-                </a:solidFill>
-                <a:latin typeface="Consolas" pitchFamily="34" charset="0"/>
-                <a:ea typeface="Consolas" pitchFamily="34" charset="-122"/>
-                <a:cs typeface="Consolas" pitchFamily="34" charset="-120"/>
-              </a:rPr>
-              <a:t>{</a:t>
-            </a:r>
-            <a:endParaRPr lang="en-US" sz="1000"/>
-          </a:p>
-          <a:p>
-            <a:pPr marL="0" indent="0">
-              <a:buNone/>
-            </a:pPr>
-            <a:r>
-              <a:rPr lang="en-US" sz="1000">
-                <a:solidFill>
-                  <a:srgbClr val="CADCFC"/>
-                </a:solidFill>
-                <a:latin typeface="Consolas" pitchFamily="34" charset="0"/>
-                <a:ea typeface="Consolas" pitchFamily="34" charset="-122"/>
-                <a:cs typeface="Consolas" pitchFamily="34" charset="-120"/>
-              </a:rPr>
-              <a:t>  "permissions": {</a:t>
-            </a:r>
-            <a:endParaRPr lang="en-US" sz="1000"/>
-          </a:p>
-          <a:p>
-            <a:pPr marL="0" indent="0">
-              <a:buNone/>
-            </a:pPr>
-            <a:r>
-              <a:rPr lang="en-US" sz="1000">
-                <a:solidFill>
-                  <a:srgbClr val="CADCFC"/>
-                </a:solidFill>
-                <a:latin typeface="Consolas" pitchFamily="34" charset="0"/>
-                <a:ea typeface="Consolas" pitchFamily="34" charset="-122"/>
-                <a:cs typeface="Consolas" pitchFamily="34" charset="-120"/>
-              </a:rPr>
-              <a:t>    "deny": [</a:t>
-            </a:r>
-            <a:endParaRPr lang="en-US" sz="1000"/>
-          </a:p>
-          <a:p>
-            <a:pPr marL="0" indent="0">
-              <a:buNone/>
-            </a:pPr>
-            <a:r>
-              <a:rPr lang="en-US" sz="1000">
-                <a:solidFill>
-                  <a:srgbClr val="F96167"/>
-                </a:solidFill>
-                <a:latin typeface="Consolas" pitchFamily="34" charset="0"/>
-                <a:ea typeface="Consolas" pitchFamily="34" charset="-122"/>
-                <a:cs typeface="Consolas" pitchFamily="34" charset="-120"/>
-              </a:rPr>
-              <a:t>      "Bash(rm -rf *)",</a:t>
-            </a:r>
-            <a:endParaRPr lang="en-US" sz="1000"/>
-          </a:p>
-          <a:p>
-            <a:pPr marL="0" indent="0">
-              <a:buNone/>
-            </a:pPr>
-            <a:r>
-              <a:rPr lang="en-US" sz="1000">
-                <a:solidFill>
-                  <a:srgbClr val="F96167"/>
-                </a:solidFill>
-                <a:latin typeface="Consolas" pitchFamily="34" charset="0"/>
-                <a:ea typeface="Consolas" pitchFamily="34" charset="-122"/>
-                <a:cs typeface="Consolas" pitchFamily="34" charset="-120"/>
-              </a:rPr>
-              <a:t>      "Bash(curl *)",</a:t>
-            </a:r>
-            <a:endParaRPr lang="en-US" sz="1000"/>
-          </a:p>
-          <a:p>
-            <a:pPr marL="0" indent="0">
-              <a:buNone/>
-            </a:pPr>
-            <a:r>
-              <a:rPr lang="en-US" sz="1000">
-                <a:solidFill>
-                  <a:srgbClr val="F96167"/>
-                </a:solidFill>
-                <a:latin typeface="Consolas" pitchFamily="34" charset="0"/>
-                <a:ea typeface="Consolas" pitchFamily="34" charset="-122"/>
-                <a:cs typeface="Consolas" pitchFamily="34" charset="-120"/>
-              </a:rPr>
-              <a:t>      "Bash(wget *)",</a:t>
-            </a:r>
-            <a:endParaRPr lang="en-US" sz="1000"/>
-          </a:p>
-          <a:p>
-            <a:pPr marL="0" indent="0">
-              <a:buNone/>
-            </a:pPr>
-            <a:r>
-              <a:rPr lang="en-US" sz="1000">
-                <a:solidFill>
-                  <a:srgbClr val="F96167"/>
-                </a:solidFill>
-                <a:latin typeface="Consolas" pitchFamily="34" charset="0"/>
-                <a:ea typeface="Consolas" pitchFamily="34" charset="-122"/>
-                <a:cs typeface="Consolas" pitchFamily="34" charset="-120"/>
-              </a:rPr>
-              <a:t>      "Read(.env*)",</a:t>
-            </a:r>
-            <a:endParaRPr lang="en-US" sz="1000"/>
-          </a:p>
-          <a:p>
-            <a:pPr marL="0" indent="0">
-              <a:buNone/>
-            </a:pPr>
-            <a:r>
-              <a:rPr lang="en-US" sz="1000">
-                <a:solidFill>
-                  <a:srgbClr val="F96167"/>
-                </a:solidFill>
-                <a:latin typeface="Consolas" pitchFamily="34" charset="0"/>
-                <a:ea typeface="Consolas" pitchFamily="34" charset="-122"/>
-                <a:cs typeface="Consolas" pitchFamily="34" charset="-120"/>
-              </a:rPr>
-              <a:t>      "Read(**/credentials*)"</a:t>
-            </a:r>
-            <a:endParaRPr lang="en-US" sz="1000"/>
-          </a:p>
-          <a:p>
-            <a:pPr marL="0" indent="0">
-              <a:buNone/>
-            </a:pPr>
-            <a:r>
-              <a:rPr lang="en-US" sz="1000">
-                <a:solidFill>
-                  <a:srgbClr val="CADCFC"/>
-                </a:solidFill>
-                <a:latin typeface="Consolas" pitchFamily="34" charset="0"/>
-                <a:ea typeface="Consolas" pitchFamily="34" charset="-122"/>
-                <a:cs typeface="Consolas" pitchFamily="34" charset="-120"/>
-              </a:rPr>
-              <a:t>    ],</a:t>
-            </a:r>
-            <a:endParaRPr lang="en-US" sz="1000"/>
-          </a:p>
-          <a:p>
-            <a:pPr marL="0" indent="0">
-              <a:buNone/>
-            </a:pPr>
-            <a:r>
-              <a:rPr lang="en-US" sz="1000">
-                <a:solidFill>
-                  <a:srgbClr val="CADCFC"/>
-                </a:solidFill>
-                <a:latin typeface="Consolas" pitchFamily="34" charset="0"/>
-                <a:ea typeface="Consolas" pitchFamily="34" charset="-122"/>
-                <a:cs typeface="Consolas" pitchFamily="34" charset="-120"/>
-              </a:rPr>
-              <a:t>    "allow": [</a:t>
-            </a:r>
-            <a:endParaRPr lang="en-US" sz="1000"/>
-          </a:p>
-          <a:p>
-            <a:pPr marL="0" indent="0">
-              <a:buNone/>
-            </a:pPr>
-            <a:r>
-              <a:rPr lang="en-US" sz="1000">
-                <a:solidFill>
-                  <a:srgbClr val="A5D6A7"/>
-                </a:solidFill>
-                <a:latin typeface="Consolas" pitchFamily="34" charset="0"/>
-                <a:ea typeface="Consolas" pitchFamily="34" charset="-122"/>
-                <a:cs typeface="Consolas" pitchFamily="34" charset="-120"/>
-              </a:rPr>
-              <a:t>      "Bash(git *)",</a:t>
-            </a:r>
-            <a:endParaRPr lang="en-US" sz="1000"/>
-          </a:p>
-          <a:p>
-            <a:pPr marL="0" indent="0">
-              <a:buNone/>
-            </a:pPr>
-            <a:r>
-              <a:rPr lang="en-US" sz="1000">
-                <a:solidFill>
-                  <a:srgbClr val="A5D6A7"/>
-                </a:solidFill>
-                <a:latin typeface="Consolas" pitchFamily="34" charset="0"/>
-                <a:ea typeface="Consolas" pitchFamily="34" charset="-122"/>
-                <a:cs typeface="Consolas" pitchFamily="34" charset="-120"/>
-              </a:rPr>
-              <a:t>      "Bash(npm run *)"</a:t>
-            </a:r>
-            <a:endParaRPr lang="en-US" sz="1000"/>
-          </a:p>
-          <a:p>
-            <a:pPr marL="0" indent="0">
-              <a:buNone/>
-            </a:pPr>
-            <a:r>
-              <a:rPr lang="en-US" sz="1000">
-                <a:solidFill>
-                  <a:srgbClr val="CADCFC"/>
-                </a:solidFill>
-                <a:latin typeface="Consolas" pitchFamily="34" charset="0"/>
-                <a:ea typeface="Consolas" pitchFamily="34" charset="-122"/>
-                <a:cs typeface="Consolas" pitchFamily="34" charset="-120"/>
-              </a:rPr>
-              <a:t>    ]</a:t>
-            </a:r>
-            <a:endParaRPr lang="en-US" sz="1000"/>
-          </a:p>
-          <a:p>
-            <a:pPr marL="0" indent="0">
-              <a:buNone/>
-            </a:pPr>
-            <a:r>
-              <a:rPr lang="en-US" sz="1000">
-                <a:solidFill>
-                  <a:srgbClr val="CADCFC"/>
-                </a:solidFill>
-                <a:latin typeface="Consolas" pitchFamily="34" charset="0"/>
-                <a:ea typeface="Consolas" pitchFamily="34" charset="-122"/>
-                <a:cs typeface="Consolas" pitchFamily="34" charset="-120"/>
-              </a:rPr>
-              <a:t>  }</a:t>
-            </a:r>
-            <a:endParaRPr lang="en-US" sz="1000"/>
-          </a:p>
-          <a:p>
-            <a:pPr marL="0" indent="0">
-              <a:buNone/>
-            </a:pPr>
-            <a:r>
-              <a:rPr lang="en-US" sz="1000">
-                <a:solidFill>
-                  <a:srgbClr val="CADCFC"/>
-                </a:solidFill>
-                <a:latin typeface="Consolas" pitchFamily="34" charset="0"/>
-                <a:ea typeface="Consolas" pitchFamily="34" charset="-122"/>
-                <a:cs typeface="Consolas" pitchFamily="34" charset="-120"/>
-              </a:rPr>
-              <a:t>}</a:t>
-            </a:r>
-            <a:endParaRPr lang="en-US" sz="1000"/>
-          </a:p>
-        </p:txBody>
-      </p:sp>
-      <p:sp>
-        <p:nvSpPr>
-          <p:cNvPr id="8" name="Text 6"/>
-          <p:cNvSpPr/>
-          <p:nvPr/>
-        </p:nvSpPr>
-        <p:spPr>
-          <a:xfrm>
-            <a:off x="4663440" y="1143000"/>
-            <a:ext cx="4023360" cy="274320"/>
-          </a:xfrm>
-          <a:prstGeom prst="rect">
-            <a:avLst/>
-          </a:prstGeom>
-          <a:noFill/>
-          <a:ln/>
-        </p:spPr>
-        <p:txBody>
-          <a:bodyPr wrap="square" lIns="0" tIns="0" rIns="0" bIns="0" rtlCol="0" anchor="ctr"/>
-          <a:lstStyle/>
-          <a:p>
-            <a:pPr marL="0" indent="0">
-              <a:buNone/>
-            </a:pPr>
-            <a:r>
-              <a:rPr lang="en-US" sz="1300" b="1" dirty="0">
-                <a:solidFill>
-                  <a:srgbClr val="F96167"/>
-                </a:solidFill>
-                <a:latin typeface="Meiryo" pitchFamily="34" charset="0"/>
-                <a:ea typeface="Meiryo" pitchFamily="34" charset="-122"/>
-                <a:cs typeface="Meiryo" pitchFamily="34" charset="-120"/>
-              </a:rPr>
-              <a:t>DEMO B ▸ </a:t>
-            </a:r>
-            <a:r>
-              <a:rPr lang="en-US" sz="1300" b="1" dirty="0" err="1">
-                <a:solidFill>
-                  <a:srgbClr val="1E2761"/>
-                </a:solidFill>
-                <a:latin typeface="Consolas" pitchFamily="34" charset="0"/>
-                <a:ea typeface="Consolas" pitchFamily="34" charset="-122"/>
-                <a:cs typeface="Consolas" pitchFamily="34" charset="-120"/>
-              </a:rPr>
-              <a:t>PreToolUse</a:t>
-            </a:r>
-            <a:r>
-              <a:rPr lang="en-US" sz="1300" b="1" dirty="0">
-                <a:solidFill>
-                  <a:srgbClr val="1E2761"/>
-                </a:solidFill>
-                <a:latin typeface="Consolas" pitchFamily="34" charset="0"/>
-                <a:ea typeface="Consolas" pitchFamily="34" charset="-122"/>
-                <a:cs typeface="Consolas" pitchFamily="34" charset="-120"/>
-              </a:rPr>
-              <a:t> Hook</a:t>
-            </a:r>
-            <a:endParaRPr lang="en-US" sz="1300" dirty="0"/>
-          </a:p>
-        </p:txBody>
-      </p:sp>
-      <p:sp>
-        <p:nvSpPr>
-          <p:cNvPr id="9" name="Shape 7"/>
-          <p:cNvSpPr/>
-          <p:nvPr/>
-        </p:nvSpPr>
-        <p:spPr>
-          <a:xfrm>
-            <a:off x="4663440" y="1463040"/>
-            <a:ext cx="4023360" cy="2926080"/>
-          </a:xfrm>
-          <a:prstGeom prst="rect">
-            <a:avLst/>
-          </a:prstGeom>
-          <a:solidFill>
-            <a:srgbClr val="0F1434"/>
-          </a:solidFill>
-          <a:ln w="12700">
-            <a:solidFill>
-              <a:srgbClr val="0F1434"/>
-            </a:solidFill>
-            <a:prstDash val="solid"/>
-          </a:ln>
-        </p:spPr>
-        <p:txBody>
-          <a:bodyPr/>
-          <a:lstStyle/>
-          <a:p>
-            <a:endParaRPr lang="ja-JP" altLang="en-US"/>
-          </a:p>
-        </p:txBody>
-      </p:sp>
-      <p:sp>
-        <p:nvSpPr>
-          <p:cNvPr id="10" name="Text 8"/>
-          <p:cNvSpPr/>
-          <p:nvPr/>
-        </p:nvSpPr>
-        <p:spPr>
-          <a:xfrm>
-            <a:off x="4846320" y="1600200"/>
-            <a:ext cx="3657600" cy="2651760"/>
-          </a:xfrm>
-          <a:prstGeom prst="rect">
-            <a:avLst/>
-          </a:prstGeom>
-          <a:noFill/>
-          <a:ln/>
-        </p:spPr>
-        <p:txBody>
-          <a:bodyPr wrap="square" lIns="0" tIns="0" rIns="0" bIns="0" rtlCol="0" anchor="t"/>
-          <a:lstStyle/>
-          <a:p>
-            <a:pPr marL="0" indent="0">
-              <a:buNone/>
-            </a:pPr>
-            <a:r>
-              <a:rPr lang="en-US" sz="1000">
-                <a:solidFill>
-                  <a:srgbClr val="7F8FA6"/>
-                </a:solidFill>
-                <a:latin typeface="Consolas" pitchFamily="34" charset="0"/>
-                <a:ea typeface="Consolas" pitchFamily="34" charset="-122"/>
-                <a:cs typeface="Consolas" pitchFamily="34" charset="-120"/>
-              </a:rPr>
-              <a:t>#!/bin/bash</a:t>
-            </a:r>
-            <a:endParaRPr lang="en-US" sz="1000"/>
-          </a:p>
-          <a:p>
-            <a:pPr marL="0" indent="0">
-              <a:buNone/>
-            </a:pPr>
-            <a:r>
-              <a:rPr lang="en-US" sz="1000">
-                <a:solidFill>
-                  <a:srgbClr val="7F8FA6"/>
-                </a:solidFill>
-                <a:latin typeface="Consolas" pitchFamily="34" charset="0"/>
-                <a:ea typeface="Consolas" pitchFamily="34" charset="-122"/>
-                <a:cs typeface="Consolas" pitchFamily="34" charset="-120"/>
-              </a:rPr>
-              <a:t># .claude/hooks/pretool-guard.sh</a:t>
-            </a:r>
-            <a:endParaRPr lang="en-US" sz="1000"/>
-          </a:p>
-          <a:p>
-            <a:pPr marL="0" indent="0">
-              <a:buNone/>
-            </a:pPr>
-            <a:endParaRPr lang="en-US" sz="1000"/>
-          </a:p>
-          <a:p>
-            <a:pPr marL="0" indent="0">
-              <a:buNone/>
-            </a:pPr>
-            <a:r>
-              <a:rPr lang="en-US" sz="1000">
-                <a:solidFill>
-                  <a:srgbClr val="CADCFC"/>
-                </a:solidFill>
-                <a:latin typeface="Consolas" pitchFamily="34" charset="0"/>
-                <a:ea typeface="Consolas" pitchFamily="34" charset="-122"/>
-                <a:cs typeface="Consolas" pitchFamily="34" charset="-120"/>
-              </a:rPr>
-              <a:t>input=$(cat)</a:t>
-            </a:r>
-            <a:endParaRPr lang="en-US" sz="1000"/>
-          </a:p>
-          <a:p>
-            <a:pPr marL="0" indent="0">
-              <a:buNone/>
-            </a:pPr>
-            <a:r>
-              <a:rPr lang="en-US" sz="1000">
-                <a:solidFill>
-                  <a:srgbClr val="CADCFC"/>
-                </a:solidFill>
-                <a:latin typeface="Consolas" pitchFamily="34" charset="0"/>
-                <a:ea typeface="Consolas" pitchFamily="34" charset="-122"/>
-                <a:cs typeface="Consolas" pitchFamily="34" charset="-120"/>
-              </a:rPr>
-              <a:t>cmd=$(echo "$input" | jq -r .command)</a:t>
-            </a:r>
-            <a:endParaRPr lang="en-US" sz="1000"/>
-          </a:p>
-          <a:p>
-            <a:pPr marL="0" indent="0">
-              <a:buNone/>
-            </a:pPr>
-            <a:endParaRPr lang="en-US" sz="1000"/>
-          </a:p>
-          <a:p>
-            <a:pPr marL="0" indent="0">
-              <a:buNone/>
-            </a:pPr>
-            <a:r>
-              <a:rPr lang="en-US" sz="1000">
-                <a:solidFill>
-                  <a:srgbClr val="CADCFC"/>
-                </a:solidFill>
-                <a:latin typeface="Consolas" pitchFamily="34" charset="0"/>
-                <a:ea typeface="Consolas" pitchFamily="34" charset="-122"/>
-                <a:cs typeface="Consolas" pitchFamily="34" charset="-120"/>
-              </a:rPr>
-              <a:t>if echo "$cmd" | grep -qE \</a:t>
-            </a:r>
-            <a:endParaRPr lang="en-US" sz="1000"/>
-          </a:p>
-          <a:p>
-            <a:pPr marL="0" indent="0">
-              <a:buNone/>
-            </a:pPr>
-            <a:r>
-              <a:rPr lang="en-US" sz="1000">
-                <a:solidFill>
-                  <a:srgbClr val="CADCFC"/>
-                </a:solidFill>
-                <a:latin typeface="Consolas" pitchFamily="34" charset="0"/>
-                <a:ea typeface="Consolas" pitchFamily="34" charset="-122"/>
-                <a:cs typeface="Consolas" pitchFamily="34" charset="-120"/>
-              </a:rPr>
-              <a:t>    "rm -rf|curl |\.env"; then</a:t>
-            </a:r>
-            <a:endParaRPr lang="en-US" sz="1000"/>
-          </a:p>
-          <a:p>
-            <a:pPr marL="0" indent="0">
-              <a:buNone/>
-            </a:pPr>
-            <a:r>
-              <a:rPr lang="en-US" sz="1000">
-                <a:solidFill>
-                  <a:srgbClr val="F96167"/>
-                </a:solidFill>
-                <a:latin typeface="Consolas" pitchFamily="34" charset="0"/>
-                <a:ea typeface="Consolas" pitchFamily="34" charset="-122"/>
-                <a:cs typeface="Consolas" pitchFamily="34" charset="-120"/>
-              </a:rPr>
-              <a:t>  echo "Blocked: $cmd" &gt;&amp;2</a:t>
-            </a:r>
-            <a:endParaRPr lang="en-US" sz="1000"/>
-          </a:p>
-          <a:p>
-            <a:pPr marL="0" indent="0">
-              <a:buNone/>
-            </a:pPr>
-            <a:r>
-              <a:rPr lang="en-US" sz="1000">
-                <a:solidFill>
-                  <a:srgbClr val="F96167"/>
-                </a:solidFill>
-                <a:latin typeface="Consolas" pitchFamily="34" charset="0"/>
-                <a:ea typeface="Consolas" pitchFamily="34" charset="-122"/>
-                <a:cs typeface="Consolas" pitchFamily="34" charset="-120"/>
-              </a:rPr>
-              <a:t>  exit 2   # ← 決定的にブロック</a:t>
-            </a:r>
-            <a:endParaRPr lang="en-US" sz="1000"/>
-          </a:p>
-          <a:p>
-            <a:pPr marL="0" indent="0">
-              <a:buNone/>
-            </a:pPr>
-            <a:r>
-              <a:rPr lang="en-US" sz="1000">
-                <a:solidFill>
-                  <a:srgbClr val="CADCFC"/>
-                </a:solidFill>
-                <a:latin typeface="Consolas" pitchFamily="34" charset="0"/>
-                <a:ea typeface="Consolas" pitchFamily="34" charset="-122"/>
-                <a:cs typeface="Consolas" pitchFamily="34" charset="-120"/>
-              </a:rPr>
-              <a:t>fi</a:t>
-            </a:r>
-            <a:endParaRPr lang="en-US" sz="1000"/>
-          </a:p>
-          <a:p>
-            <a:pPr marL="0" indent="0">
-              <a:buNone/>
-            </a:pPr>
-            <a:endParaRPr lang="en-US" sz="1000"/>
-          </a:p>
-          <a:p>
-            <a:pPr marL="0" indent="0">
-              <a:buNone/>
-            </a:pPr>
-            <a:r>
-              <a:rPr lang="en-US" sz="1000">
-                <a:solidFill>
-                  <a:srgbClr val="A5D6A7"/>
-                </a:solidFill>
-                <a:latin typeface="Consolas" pitchFamily="34" charset="0"/>
-                <a:ea typeface="Consolas" pitchFamily="34" charset="-122"/>
-                <a:cs typeface="Consolas" pitchFamily="34" charset="-120"/>
-              </a:rPr>
-              <a:t>exit 0   # ← 許可</a:t>
-            </a:r>
-            <a:endParaRPr lang="en-US" sz="1000"/>
-          </a:p>
-        </p:txBody>
-      </p:sp>
-      <p:sp>
-        <p:nvSpPr>
-          <p:cNvPr id="11" name="Shape 9"/>
-          <p:cNvSpPr/>
-          <p:nvPr/>
-        </p:nvSpPr>
-        <p:spPr>
-          <a:xfrm>
-            <a:off x="457200" y="4526280"/>
-            <a:ext cx="8229600" cy="320040"/>
-          </a:xfrm>
-          <a:prstGeom prst="rect">
-            <a:avLst/>
-          </a:prstGeom>
-          <a:solidFill>
-            <a:srgbClr val="F8F9FC"/>
-          </a:solidFill>
-          <a:ln w="6350">
-            <a:solidFill>
-              <a:srgbClr val="E5E9F2"/>
-            </a:solidFill>
-            <a:prstDash val="solid"/>
-          </a:ln>
-        </p:spPr>
-        <p:txBody>
-          <a:bodyPr/>
-          <a:lstStyle/>
-          <a:p>
-            <a:endParaRPr lang="ja-JP" altLang="en-US"/>
-          </a:p>
-        </p:txBody>
-      </p:sp>
-      <p:sp>
-        <p:nvSpPr>
-          <p:cNvPr id="12" name="Text 10"/>
-          <p:cNvSpPr/>
-          <p:nvPr/>
-        </p:nvSpPr>
-        <p:spPr>
-          <a:xfrm>
-            <a:off x="594360" y="4526280"/>
-            <a:ext cx="7955280" cy="320040"/>
-          </a:xfrm>
-          <a:prstGeom prst="rect">
-            <a:avLst/>
-          </a:prstGeom>
-          <a:noFill/>
-          <a:ln/>
-        </p:spPr>
-        <p:txBody>
-          <a:bodyPr wrap="square" lIns="0" tIns="0" rIns="0" bIns="0" rtlCol="0" anchor="ctr"/>
-          <a:lstStyle/>
-          <a:p>
-            <a:pPr marL="0" indent="0">
-              <a:buNone/>
-            </a:pPr>
-            <a:r>
-              <a:rPr lang="en-US" sz="1100" b="1">
-                <a:solidFill>
-                  <a:srgbClr val="F96167"/>
-                </a:solidFill>
-                <a:latin typeface="Meiryo" pitchFamily="34" charset="0"/>
-                <a:ea typeface="Meiryo" pitchFamily="34" charset="-122"/>
-                <a:cs typeface="Meiryo" pitchFamily="34" charset="-120"/>
-              </a:rPr>
-              <a:t>ポイント ▸ </a:t>
-            </a:r>
-            <a:r>
-              <a:rPr lang="en-US" sz="1100">
-                <a:solidFill>
-                  <a:srgbClr val="2D3748"/>
-                </a:solidFill>
-                <a:latin typeface="Meiryo" pitchFamily="34" charset="0"/>
-                <a:ea typeface="Meiryo" pitchFamily="34" charset="-122"/>
-                <a:cs typeface="Meiryo" pitchFamily="34" charset="-120"/>
-              </a:rPr>
-              <a:t>Deny = Claude Codeが解釈 / Hook = OSレベルで強制。両方組み合わせるのが実務的</a:t>
-            </a:r>
-            <a:endParaRPr lang="en-US" sz="1100"/>
-          </a:p>
-        </p:txBody>
-      </p:sp>
-      <p:sp>
-        <p:nvSpPr>
-          <p:cNvPr id="13" name="Text 11"/>
-          <p:cNvSpPr/>
-          <p:nvPr/>
-        </p:nvSpPr>
-        <p:spPr>
-          <a:xfrm>
-            <a:off x="5486400" y="4828032"/>
-            <a:ext cx="3474720" cy="228600"/>
-          </a:xfrm>
-          <a:prstGeom prst="rect">
-            <a:avLst/>
-          </a:prstGeom>
-          <a:noFill/>
-          <a:ln/>
-        </p:spPr>
-        <p:txBody>
-          <a:bodyPr wrap="square" rtlCol="0" anchor="ctr"/>
-          <a:lstStyle/>
-          <a:p>
-            <a:pPr marL="0" indent="0" algn="r">
-              <a:buNone/>
-            </a:pPr>
-            <a:r>
-              <a:rPr lang="en-US" sz="1000" kern="0" spc="100">
-                <a:solidFill>
-                  <a:srgbClr val="64748B"/>
-                </a:solidFill>
-                <a:latin typeface="Arial" pitchFamily="34" charset="0"/>
-                <a:ea typeface="Arial" pitchFamily="34" charset="-122"/>
-                <a:cs typeface="Arial" pitchFamily="34" charset="-120"/>
-              </a:rPr>
-              <a:t>● ○ ○ ○ ○ ○ ○ ○ ○ ○</a:t>
-            </a:r>
-            <a:endParaRPr lang="en-US" sz="1000"/>
-          </a:p>
-        </p:txBody>
-      </p:sp>
-    </p:spTree>
   </p:cSld>
   <p:clrMapOvr>
     <a:masterClrMapping/>

--- a/session1/session1_full.pptx
+++ b/session1/session1_full.pptx
@@ -8,21 +8,21 @@
     <p:notesMasterId r:id="rId17"/>
   </p:notesMasterIdLst>
   <p:sldIdLst>
-    <p:sldId id="256" r:id="rId2"/>
-    <p:sldId id="269" r:id="rId3"/>
-    <p:sldId id="257" r:id="rId4"/>
-    <p:sldId id="258" r:id="rId5"/>
-    <p:sldId id="259" r:id="rId6"/>
-    <p:sldId id="260" r:id="rId7"/>
-    <p:sldId id="261" r:id="rId8"/>
-    <p:sldId id="262" r:id="rId9"/>
-    <p:sldId id="268" r:id="rId10"/>
-    <p:sldId id="264" r:id="rId11"/>
-    <p:sldId id="265" r:id="rId12"/>
-    <p:sldId id="266" r:id="rId13"/>
-    <p:sldId id="267" r:id="rId14"/>
-    <p:sldId id="271" r:id="rId15"/>
-    <p:sldId id="272" r:id="rId16"/>
+    <p:sldId id="273" r:id="rId2"/>
+    <p:sldId id="274" r:id="rId3"/>
+    <p:sldId id="275" r:id="rId4"/>
+    <p:sldId id="276" r:id="rId5"/>
+    <p:sldId id="277" r:id="rId6"/>
+    <p:sldId id="279" r:id="rId7"/>
+    <p:sldId id="280" r:id="rId8"/>
+    <p:sldId id="281" r:id="rId9"/>
+    <p:sldId id="282" r:id="rId10"/>
+    <p:sldId id="283" r:id="rId11"/>
+    <p:sldId id="284" r:id="rId12"/>
+    <p:sldId id="285" r:id="rId13"/>
+    <p:sldId id="286" r:id="rId14"/>
+    <p:sldId id="287" r:id="rId15"/>
+    <p:sldId id="288" r:id="rId16"/>
   </p:sldIdLst>
   <p:sldSz cx="9144000" cy="5143500" type="screen16x9"/>
   <p:notesSz cx="5143500" cy="9144000"/>
@@ -2110,7 +2110,7 @@
                 <a:ea typeface="Meiryo" pitchFamily="34" charset="-122"/>
                 <a:cs typeface="Meiryo" pitchFamily="34" charset="-120"/>
               </a:rPr>
-              <a:t>今日のテーマ:  AIセキュリティの3原則「分ける・防ぐ・残す」の全体像</a:t>
+              <a:t>今日のテーマ:  本シリーズで使う3原則「分ける・防ぐ・残す」の全体像</a:t>
             </a:r>
             <a:endParaRPr lang="en-US" sz="1400"/>
           </a:p>
@@ -2237,6 +2237,11 @@
         </p:txBody>
       </p:sp>
     </p:spTree>
+    <p:extLst>
+      <p:ext uri="{BB962C8B-B14F-4D97-AF65-F5344CB8AC3E}">
+        <p14:creationId xmlns:p14="http://schemas.microsoft.com/office/powerpoint/2010/main" val="1732995913"/>
+      </p:ext>
+    </p:extLst>
   </p:cSld>
   <p:clrMapOvr>
     <a:masterClrMapping/>
@@ -3070,28 +3075,38 @@
               <a:buNone/>
             </a:pPr>
             <a:r>
-              <a:rPr lang="en-US" sz="1100" b="1">
+              <a:rPr lang="ja-JP" sz="1200" b="1">
                 <a:solidFill>
                   <a:srgbClr val="F96167"/>
                 </a:solidFill>
-                <a:latin typeface="Meiryo" pitchFamily="34" charset="0"/>
-                <a:ea typeface="Meiryo" pitchFamily="34" charset="-122"/>
-                <a:cs typeface="Meiryo" pitchFamily="34" charset="-120"/>
+                <a:latin typeface="Meiryo"/>
+                <a:ea typeface="Meiryo"/>
+                <a:cs typeface="Meiryo"/>
               </a:rPr>
               <a:t>ポイント ▸ </a:t>
             </a:r>
             <a:r>
-              <a:rPr lang="en-US" sz="1100">
+              <a:rPr lang="ja-JP" sz="1200" b="1">
+                <a:solidFill>
+                  <a:srgbClr val="1E2761"/>
+                </a:solidFill>
+                <a:latin typeface="Meiryo"/>
+                <a:ea typeface="Meiryo"/>
+                <a:cs typeface="Meiryo"/>
+              </a:rPr>
+              <a:t>Deny ＝ Claude Codeが解釈 ／ Hook ＝ OSレベルで強制</a:t>
+            </a:r>
+            <a:r>
+              <a:rPr lang="ja-JP" sz="1200">
                 <a:solidFill>
                   <a:srgbClr val="2D3748"/>
                 </a:solidFill>
-                <a:latin typeface="Meiryo" pitchFamily="34" charset="0"/>
-                <a:ea typeface="Meiryo" pitchFamily="34" charset="-122"/>
-                <a:cs typeface="Meiryo" pitchFamily="34" charset="-120"/>
-              </a:rPr>
-              <a:t>Deny = Claude Codeが解釈 / Hook = OSレベルで強制。両方組み合わせるのが実務的</a:t>
-            </a:r>
-            <a:endParaRPr lang="en-US" sz="1100"/>
+                <a:latin typeface="Meiryo"/>
+                <a:ea typeface="Meiryo"/>
+                <a:cs typeface="Meiryo"/>
+              </a:rPr>
+              <a:t>　両方組み合わせるのが実務的</a:t>
+            </a:r>
           </a:p>
         </p:txBody>
       </p:sp>
@@ -3135,6 +3150,11 @@
         </p:txBody>
       </p:sp>
     </p:spTree>
+    <p:extLst>
+      <p:ext uri="{BB962C8B-B14F-4D97-AF65-F5344CB8AC3E}">
+        <p14:creationId xmlns:p14="http://schemas.microsoft.com/office/powerpoint/2010/main" val="4017948181"/>
+      </p:ext>
+    </p:extLst>
   </p:cSld>
   <p:clrMapOvr>
     <a:masterClrMapping/>
@@ -3231,7 +3251,7 @@
               <a:buNone/>
             </a:pPr>
             <a:r>
-              <a:rPr lang="en-US" sz="2800" b="1">
+              <a:rPr lang="en-US" sz="2800" b="1" dirty="0" err="1">
                 <a:solidFill>
                   <a:srgbClr val="FFFFFF"/>
                 </a:solidFill>
@@ -3239,9 +3259,20 @@
                 <a:ea typeface="Arial Black" pitchFamily="34" charset="-122"/>
                 <a:cs typeface="Arial Black" pitchFamily="34" charset="-120"/>
               </a:rPr>
-              <a:t>今日のKey Takeaway</a:t>
-            </a:r>
-            <a:endParaRPr lang="en-US" sz="2800"/>
+              <a:t>今日のKey</a:t>
+            </a:r>
+            <a:r>
+              <a:rPr lang="en-US" sz="2800" b="1" dirty="0">
+                <a:solidFill>
+                  <a:srgbClr val="FFFFFF"/>
+                </a:solidFill>
+                <a:latin typeface="Arial Black" pitchFamily="34" charset="0"/>
+                <a:ea typeface="Arial Black" pitchFamily="34" charset="-122"/>
+                <a:cs typeface="Arial Black" pitchFamily="34" charset="-120"/>
+              </a:rPr>
+              <a:t> Takeaway</a:t>
+            </a:r>
+            <a:endParaRPr lang="en-US" sz="2800" dirty="0"/>
           </a:p>
         </p:txBody>
       </p:sp>
@@ -3285,8 +3316,8 @@
         </p:nvSpPr>
         <p:spPr>
           <a:xfrm>
-            <a:off x="457200" y="1691640"/>
-            <a:ext cx="8229600" cy="1463040"/>
+            <a:off x="457200" y="1562440"/>
+            <a:ext cx="8229600" cy="1729400"/>
           </a:xfrm>
           <a:prstGeom prst="rect">
             <a:avLst/>
@@ -3306,8 +3337,23 @@
                 </a:solidFill>
                 <a:latin typeface="+mj-lt"/>
               </a:rPr>
-              <a:t>★ 「分ける・防ぐ・残す、だけ覚えて帰る」</a:t>
-            </a:r>
+              <a:t>★ </a:t>
+            </a:r>
+            <a:r>
+              <a:rPr lang="ja-JP" altLang="en-US" sz="2200" b="1">
+                <a:solidFill>
+                  <a:srgbClr val="FFC800"/>
+                </a:solidFill>
+                <a:latin typeface="+mj-lt"/>
+              </a:rPr>
+              <a:t>セキュリティを意識して利用する</a:t>
+            </a:r>
+            <a:endParaRPr lang="ja-JP" sz="2200" b="1">
+              <a:solidFill>
+                <a:srgbClr val="FFC800"/>
+              </a:solidFill>
+              <a:latin typeface="+mj-lt"/>
+            </a:endParaRPr>
           </a:p>
           <a:p>
             <a:endParaRPr lang="ja-JP" sz="800"/>
@@ -3320,39 +3366,38 @@
               <a:buNone/>
             </a:pPr>
             <a:r>
-              <a:rPr lang="en-US" sz="2200" b="1">
+              <a:rPr lang="ja-JP" sz="2200" b="1">
                 <a:solidFill>
                   <a:srgbClr val="FFFFFF"/>
                 </a:solidFill>
-                <a:latin typeface="Meiryo" pitchFamily="34" charset="0"/>
-                <a:ea typeface="Meiryo" pitchFamily="34" charset="-122"/>
-                <a:cs typeface="Meiryo" pitchFamily="34" charset="-120"/>
-              </a:rPr>
-              <a:t>使わないリスク </a:t>
-            </a:r>
-            <a:r>
-              <a:rPr lang="en-US" sz="2200" b="1">
+                <a:latin typeface="Meiryo"/>
+                <a:ea typeface="Meiryo"/>
+                <a:cs typeface="Meiryo"/>
+              </a:rPr>
+              <a:t>使うリスク </a:t>
+            </a:r>
+            <a:r>
+              <a:rPr lang="ja-JP" sz="2200" b="1">
                 <a:solidFill>
                   <a:srgbClr val="F96167"/>
                 </a:solidFill>
-                <a:latin typeface="Meiryo" pitchFamily="34" charset="0"/>
-                <a:ea typeface="Meiryo" pitchFamily="34" charset="-122"/>
-                <a:cs typeface="Meiryo" pitchFamily="34" charset="-120"/>
-              </a:rPr>
-              <a:t>＞ </a:t>
-            </a:r>
-            <a:r>
-              <a:rPr lang="en-US" sz="2200" b="1">
+                <a:latin typeface="Meiryo"/>
+                <a:ea typeface="Meiryo"/>
+                <a:cs typeface="Meiryo"/>
+              </a:rPr>
+              <a:t>＜ </a:t>
+            </a:r>
+            <a:r>
+              <a:rPr lang="ja-JP" sz="2200" b="1">
                 <a:solidFill>
                   <a:srgbClr val="FFFFFF"/>
                 </a:solidFill>
-                <a:latin typeface="Meiryo" pitchFamily="34" charset="0"/>
-                <a:ea typeface="Meiryo" pitchFamily="34" charset="-122"/>
-                <a:cs typeface="Meiryo" pitchFamily="34" charset="-120"/>
-              </a:rPr>
-              <a:t>使うリスク。</a:t>
-            </a:r>
-            <a:endParaRPr lang="en-US" sz="2200"/>
+                <a:latin typeface="Meiryo"/>
+                <a:ea typeface="Meiryo"/>
+                <a:cs typeface="Meiryo"/>
+              </a:rPr>
+              <a:t>使わないリスク。</a:t>
+            </a:r>
           </a:p>
           <a:p>
             <a:pPr marL="0" indent="0">
@@ -3362,39 +3407,38 @@
               <a:buNone/>
             </a:pPr>
             <a:r>
-              <a:rPr lang="en-US" sz="2200">
+              <a:rPr lang="ja-JP" sz="2200">
                 <a:solidFill>
                   <a:srgbClr val="CADCFC"/>
                 </a:solidFill>
-                <a:latin typeface="Meiryo" pitchFamily="34" charset="0"/>
-                <a:ea typeface="Meiryo" pitchFamily="34" charset="-122"/>
-                <a:cs typeface="Meiryo" pitchFamily="34" charset="-120"/>
+                <a:latin typeface="Meiryo"/>
+                <a:ea typeface="Meiryo"/>
+                <a:cs typeface="Meiryo"/>
               </a:rPr>
               <a:t>ただし </a:t>
             </a:r>
             <a:r>
-              <a:rPr lang="en-US" sz="2200" b="1">
+              <a:rPr lang="ja-JP" sz="2200" b="1">
                 <a:solidFill>
                   <a:srgbClr val="FFFFFF"/>
                 </a:solidFill>
-                <a:latin typeface="Meiryo" pitchFamily="34" charset="0"/>
-                <a:ea typeface="Meiryo" pitchFamily="34" charset="-122"/>
-                <a:cs typeface="Meiryo" pitchFamily="34" charset="-120"/>
+                <a:latin typeface="Meiryo"/>
+                <a:ea typeface="Meiryo"/>
+                <a:cs typeface="Meiryo"/>
               </a:rPr>
               <a:t>「分ける・防ぐ・残す」</a:t>
             </a:r>
             <a:r>
-              <a:rPr lang="en-US" sz="2200">
+              <a:rPr lang="ja-JP" sz="2200">
                 <a:solidFill>
                   <a:srgbClr val="CADCFC"/>
                 </a:solidFill>
-                <a:latin typeface="Meiryo" pitchFamily="34" charset="0"/>
-                <a:ea typeface="Meiryo" pitchFamily="34" charset="-122"/>
-                <a:cs typeface="Meiryo" pitchFamily="34" charset="-120"/>
+                <a:latin typeface="Meiryo"/>
+                <a:ea typeface="Meiryo"/>
+                <a:cs typeface="Meiryo"/>
               </a:rPr>
               <a:t> の3原則を押さえた人だけが、</a:t>
             </a:r>
-            <a:endParaRPr lang="en-US" sz="2200"/>
           </a:p>
           <a:p>
             <a:pPr marL="0" indent="0">
@@ -3404,39 +3448,38 @@
               <a:buNone/>
             </a:pPr>
             <a:r>
-              <a:rPr lang="en-US" sz="2200">
+              <a:rPr lang="ja-JP" sz="2200">
                 <a:solidFill>
                   <a:srgbClr val="CADCFC"/>
                 </a:solidFill>
-                <a:latin typeface="Meiryo" pitchFamily="34" charset="0"/>
-                <a:ea typeface="Meiryo" pitchFamily="34" charset="-122"/>
-                <a:cs typeface="Meiryo" pitchFamily="34" charset="-120"/>
+                <a:latin typeface="Meiryo"/>
+                <a:ea typeface="Meiryo"/>
+                <a:cs typeface="Meiryo"/>
               </a:rPr>
               <a:t>安全に</a:t>
             </a:r>
             <a:r>
-              <a:rPr lang="en-US" sz="2200" b="1">
+              <a:rPr lang="ja-JP" sz="2200" b="1">
                 <a:solidFill>
                   <a:srgbClr val="F96167"/>
                 </a:solidFill>
-                <a:latin typeface="Meiryo" pitchFamily="34" charset="0"/>
-                <a:ea typeface="Meiryo" pitchFamily="34" charset="-122"/>
-                <a:cs typeface="Meiryo" pitchFamily="34" charset="-120"/>
+                <a:latin typeface="Meiryo"/>
+                <a:ea typeface="Meiryo"/>
+                <a:cs typeface="Meiryo"/>
               </a:rPr>
               <a:t>速く</a:t>
             </a:r>
             <a:r>
-              <a:rPr lang="en-US" sz="2200">
+              <a:rPr lang="ja-JP" sz="2200">
                 <a:solidFill>
                   <a:srgbClr val="CADCFC"/>
                 </a:solidFill>
-                <a:latin typeface="Meiryo" pitchFamily="34" charset="0"/>
-                <a:ea typeface="Meiryo" pitchFamily="34" charset="-122"/>
-                <a:cs typeface="Meiryo" pitchFamily="34" charset="-120"/>
+                <a:latin typeface="Meiryo"/>
+                <a:ea typeface="Meiryo"/>
+                <a:cs typeface="Meiryo"/>
               </a:rPr>
               <a:t>走れる。</a:t>
             </a:r>
-            <a:endParaRPr lang="en-US" sz="2200"/>
           </a:p>
         </p:txBody>
       </p:sp>
@@ -3777,7 +3820,7 @@
         <p:spPr>
           <a:xfrm>
             <a:off x="457200" y="4900000"/>
-            <a:ext cx="8229600" cy="220000"/>
+            <a:ext cx="8229600" cy="169277"/>
           </a:xfrm>
           <a:prstGeom prst="rect">
             <a:avLst/>
@@ -3790,18 +3833,29 @@
           </a:bodyPr>
           <a:lstStyle/>
           <a:p>
-            <a:r>
-              <a:rPr sz="1100" b="1">
-                <a:solidFill>
-                  <a:srgbClr val="FFC800"/>
-                </a:solidFill>
-              </a:rPr>
-              <a:t>3原則の現在地：  01 分ける ⏳    02 防ぐ ⏳    03 残す ⏳    （今日: 3原則の導入）</a:t>
+            <a:pPr marL="0" indent="0" algn="ctr">
+              <a:buNone/>
+            </a:pPr>
+            <a:r>
+              <a:rPr lang="ja-JP" sz="1100">
+                <a:solidFill>
+                  <a:srgbClr val="CADCFC"/>
+                </a:solidFill>
+                <a:latin typeface="Meiryo"/>
+                <a:ea typeface="Meiryo"/>
+                <a:cs typeface="Meiryo"/>
+              </a:rPr>
+              <a:t>3原則の現在地：  ✅ 導入（今日）    01 分ける ⏳    02 防ぐ ⏳    03 残す ⏳</a:t>
             </a:r>
           </a:p>
         </p:txBody>
       </p:sp>
     </p:spTree>
+    <p:extLst>
+      <p:ext uri="{BB962C8B-B14F-4D97-AF65-F5344CB8AC3E}">
+        <p14:creationId xmlns:p14="http://schemas.microsoft.com/office/powerpoint/2010/main" val="1031152089"/>
+      </p:ext>
+    </p:extLst>
   </p:cSld>
   <p:clrMapOvr>
     <a:masterClrMapping/>
@@ -4122,17 +4176,16 @@
               <a:buNone/>
             </a:pPr>
             <a:r>
-              <a:rPr lang="en-US" sz="1300">
+              <a:rPr lang="ja-JP" sz="1300">
                 <a:solidFill>
                   <a:srgbClr val="2D3748"/>
                 </a:solidFill>
-                <a:latin typeface="Meiryo" pitchFamily="34" charset="0"/>
-                <a:ea typeface="Meiryo" pitchFamily="34" charset="-122"/>
-                <a:cs typeface="Meiryo" pitchFamily="34" charset="-120"/>
-              </a:rPr>
-              <a:t>分離には4段階ある（プロセス / コンテナ / VM / 物理マシン）</a:t>
-            </a:r>
-            <a:endParaRPr lang="en-US" sz="1300"/>
+                <a:latin typeface="Meiryo"/>
+                <a:ea typeface="Meiryo"/>
+                <a:cs typeface="Meiryo"/>
+              </a:rPr>
+              <a:t>分離の強さには4段階ある（プロセス → コンテナ → VM → 物理マシン）</a:t>
+            </a:r>
           </a:p>
         </p:txBody>
       </p:sp>
@@ -4193,17 +4246,16 @@
               <a:buNone/>
             </a:pPr>
             <a:r>
-              <a:rPr lang="en-US" sz="1300">
+              <a:rPr lang="ja-JP" sz="1300">
                 <a:solidFill>
                   <a:srgbClr val="2D3748"/>
                 </a:solidFill>
-                <a:latin typeface="Meiryo" pitchFamily="34" charset="0"/>
-                <a:ea typeface="Meiryo" pitchFamily="34" charset="-122"/>
-                <a:cs typeface="Meiryo" pitchFamily="34" charset="-120"/>
-              </a:rPr>
-              <a:t>DevContainer / VS Code拡張 / ローカル直接 の権限境界比較</a:t>
-            </a:r>
-            <a:endParaRPr lang="en-US" sz="1300"/>
+                <a:latin typeface="Meiryo"/>
+                <a:ea typeface="Meiryo"/>
+                <a:cs typeface="Meiryo"/>
+              </a:rPr>
+              <a:t>DevContainer / VS Code拡張 / ローカル直接 ― どこまで触れるかの違いを比較</a:t>
+            </a:r>
           </a:p>
         </p:txBody>
       </p:sp>
@@ -4432,6 +4484,11 @@
         </p:txBody>
       </p:sp>
     </p:spTree>
+    <p:extLst>
+      <p:ext uri="{BB962C8B-B14F-4D97-AF65-F5344CB8AC3E}">
+        <p14:creationId xmlns:p14="http://schemas.microsoft.com/office/powerpoint/2010/main" val="57671349"/>
+      </p:ext>
+    </p:extLst>
   </p:cSld>
   <p:clrMapOvr>
     <a:masterClrMapping/>
@@ -4519,6 +4576,13 @@
             <a:prstDash val="solid"/>
           </a:ln>
         </p:spPr>
+        <p:txBody>
+          <a:bodyPr/>
+          <a:lstStyle/>
+          <a:p>
+            <a:endParaRPr lang="ja-JP" altLang="en-US"/>
+          </a:p>
+        </p:txBody>
       </p:sp>
       <p:sp>
         <p:nvSpPr>
@@ -4565,11 +4629,17 @@
           <p:cNvGraphicFramePr>
             <a:graphicFrameLocks noGrp="1"/>
           </p:cNvGraphicFramePr>
-          <p:nvPr/>
+          <p:nvPr>
+            <p:extLst>
+              <p:ext uri="{D42A27DB-BD31-4B8C-83A1-F6EECF244321}">
+                <p14:modId xmlns:p14="http://schemas.microsoft.com/office/powerpoint/2010/main" val="586767028"/>
+              </p:ext>
+            </p:extLst>
+          </p:nvPr>
         </p:nvGraphicFramePr>
         <p:xfrm>
           <a:off x="457200" y="1417320"/>
-          <a:ext cx="7498080" cy="2663952"/>
+          <a:ext cx="7498080" cy="2785872"/>
         </p:xfrm>
         <a:graphic>
           <a:graphicData uri="http://schemas.openxmlformats.org/drawingml/2006/table">
@@ -5804,7 +5874,7 @@
                             <a:srgbClr val="000000"/>
                           </a:solidFill>
                         </a:rPr>
-                        <a:t>ログのPIIマスキング</a:t>
+                        <a:t>ログのシークレットマスキング</a:t>
                       </a:r>
                       <a:endParaRPr lang="en-US" sz="800" dirty="0"/>
                     </a:p>
@@ -6071,7 +6141,7 @@
                             <a:srgbClr val="000000"/>
                           </a:solidFill>
                         </a:rPr>
-                        <a:t>Langfuse(第6回)</a:t>
+                        <a:t>Langfuse※(第6回)</a:t>
                       </a:r>
                       <a:endParaRPr lang="en-US" sz="800" dirty="0"/>
                     </a:p>
@@ -6577,7 +6647,7 @@
                             <a:srgbClr val="000000"/>
                           </a:solidFill>
                         </a:rPr>
-                        <a:t>Sandbox(App.C)</a:t>
+                        <a:t>Sandbox(Appendix C)</a:t>
                       </a:r>
                       <a:endParaRPr lang="en-US" sz="800" dirty="0"/>
                     </a:p>
@@ -6655,6 +6725,13 @@
             <a:prstDash val="solid"/>
           </a:ln>
         </p:spPr>
+        <p:txBody>
+          <a:bodyPr/>
+          <a:lstStyle/>
+          <a:p>
+            <a:endParaRPr lang="ja-JP" altLang="en-US"/>
+          </a:p>
+        </p:txBody>
       </p:sp>
       <p:sp>
         <p:nvSpPr>
@@ -6681,75 +6758,63 @@
               <a:buNone/>
             </a:pPr>
             <a:r>
-              <a:rPr lang="en-US" sz="1200" dirty="0">
+              <a:rPr lang="ja-JP" sz="1100" b="1">
                 <a:solidFill>
                   <a:srgbClr val="F96167"/>
+                </a:solidFill>
+                <a:latin typeface="Meiryo"/>
+                <a:ea typeface="Meiryo"/>
+                <a:cs typeface="Meiryo"/>
+              </a:rPr>
+              <a:t>⚠️ 共通の教訓: </a:t>
+            </a:r>
+            <a:r>
+              <a:rPr lang="ja-JP" sz="1100">
+                <a:solidFill>
+                  <a:schemeClr val="bg1"/>
+                </a:solidFill>
+                <a:latin typeface="Meiryo"/>
+                <a:ea typeface="Meiryo"/>
+                <a:cs typeface="Meiryo"/>
+              </a:rPr>
+              <a:t>AIが危険なのではなく「ガードなしだと人間以上のスピードで事故が起きる」。Appendix Bの設定で #1 #3 #6 を即座に防御（#2 #4 #5 #7 は別の対策が必要）　　※Langfuse＝LLMの動きを記録・監視するツール</a:t>
+            </a:r>
+          </a:p>
+        </p:txBody>
+      </p:sp>
+      <p:sp>
+        <p:nvSpPr>
+          <p:cNvPr id="8" name="Text 5"/>
+          <p:cNvSpPr/>
+          <p:nvPr/>
+        </p:nvSpPr>
+        <p:spPr>
+          <a:xfrm>
+            <a:off x="457200" y="4754880"/>
+            <a:ext cx="8229600" cy="228600"/>
+          </a:xfrm>
+          <a:prstGeom prst="rect">
+            <a:avLst/>
+          </a:prstGeom>
+          <a:noFill/>
+          <a:ln/>
+        </p:spPr>
+        <p:txBody>
+          <a:bodyPr wrap="square" lIns="0" tIns="0" rIns="0" bIns="0" rtlCol="0" anchor="ctr"/>
+          <a:lstStyle/>
+          <a:p>
+            <a:pPr marL="0" indent="0">
+              <a:buNone/>
+            </a:pPr>
+            <a:r>
+              <a:rPr lang="en-US" sz="700" dirty="0">
+                <a:solidFill>
+                  <a:srgbClr val="64748B"/>
                 </a:solidFill>
                 <a:latin typeface="Meiryo" pitchFamily="34" charset="0"/>
                 <a:ea typeface="Meiryo" pitchFamily="34" charset="-122"/>
                 <a:cs typeface="Meiryo" pitchFamily="34" charset="-120"/>
               </a:rPr>
-              <a:t>⚠️ </a:t>
-            </a:r>
-            <a:r>
-              <a:rPr lang="en-US" sz="1000" b="1" dirty="0">
-                <a:solidFill>
-                  <a:srgbClr val="FFFFFF"/>
-                </a:solidFill>
-                <a:latin typeface="Meiryo" pitchFamily="34" charset="0"/>
-                <a:ea typeface="Meiryo" pitchFamily="34" charset="-122"/>
-                <a:cs typeface="Meiryo" pitchFamily="34" charset="-120"/>
-              </a:rPr>
-              <a:t>共通の教訓: </a:t>
-            </a:r>
-            <a:r>
-              <a:rPr lang="en-US" sz="900" dirty="0">
-                <a:solidFill>
-                  <a:srgbClr val="CADCFC"/>
-                </a:solidFill>
-                <a:latin typeface="Meiryo" pitchFamily="34" charset="0"/>
-                <a:ea typeface="Meiryo" pitchFamily="34" charset="-122"/>
-                <a:cs typeface="Meiryo" pitchFamily="34" charset="-120"/>
-              </a:rPr>
-              <a:t>AIが危険なのではなく「ガードなしだと人間以上のスピードで事故が起きる」。Appendix B の設定で #1 #3 #6 を即座に防御</a:t>
-            </a:r>
-            <a:endParaRPr lang="en-US" sz="1200" dirty="0"/>
-          </a:p>
-        </p:txBody>
-      </p:sp>
-      <p:sp>
-        <p:nvSpPr>
-          <p:cNvPr id="8" name="Text 5"/>
-          <p:cNvSpPr/>
-          <p:nvPr/>
-        </p:nvSpPr>
-        <p:spPr>
-          <a:xfrm>
-            <a:off x="457200" y="4754880"/>
-            <a:ext cx="8229600" cy="228600"/>
-          </a:xfrm>
-          <a:prstGeom prst="rect">
-            <a:avLst/>
-          </a:prstGeom>
-          <a:noFill/>
-          <a:ln/>
-        </p:spPr>
-        <p:txBody>
-          <a:bodyPr wrap="square" lIns="0" tIns="0" rIns="0" bIns="0" rtlCol="0" anchor="ctr"/>
-          <a:lstStyle/>
-          <a:p>
-            <a:pPr marL="0" indent="0">
-              <a:buNone/>
-            </a:pPr>
-            <a:r>
-              <a:rPr lang="en-US" sz="700" dirty="0">
-                <a:solidFill>
-                  <a:srgbClr val="64748B"/>
-                </a:solidFill>
-                <a:latin typeface="Meiryo" pitchFamily="34" charset="0"/>
-                <a:ea typeface="Meiryo" pitchFamily="34" charset="-122"/>
-                <a:cs typeface="Meiryo" pitchFamily="34" charset="-120"/>
-              </a:rPr>
               <a:t>出典: 中島氏 YouTube動画「Claude Code AIエージェントで起きた重大事故とセキュリティ対策」「Claude Codeで知っておくべきセキュリティ基礎」</a:t>
             </a:r>
             <a:endParaRPr lang="en-US" sz="700" dirty="0"/>
@@ -6757,6 +6822,11 @@
         </p:txBody>
       </p:sp>
     </p:spTree>
+    <p:extLst>
+      <p:ext uri="{BB962C8B-B14F-4D97-AF65-F5344CB8AC3E}">
+        <p14:creationId xmlns:p14="http://schemas.microsoft.com/office/powerpoint/2010/main" val="2429862679"/>
+      </p:ext>
+    </p:extLst>
   </p:cSld>
   <p:clrMapOvr>
     <a:masterClrMapping/>
@@ -6844,6 +6914,13 @@
             <a:prstDash val="solid"/>
           </a:ln>
         </p:spPr>
+        <p:txBody>
+          <a:bodyPr/>
+          <a:lstStyle/>
+          <a:p>
+            <a:endParaRPr lang="ja-JP" altLang="en-US"/>
+          </a:p>
+        </p:txBody>
       </p:sp>
       <p:sp>
         <p:nvSpPr>
@@ -6908,6 +6985,13 @@
             <a:prstDash val="solid"/>
           </a:ln>
         </p:spPr>
+        <p:txBody>
+          <a:bodyPr/>
+          <a:lstStyle/>
+          <a:p>
+            <a:endParaRPr lang="ja-JP" altLang="en-US"/>
+          </a:p>
+        </p:txBody>
       </p:sp>
       <p:sp>
         <p:nvSpPr>
@@ -7454,6 +7538,13 @@
             <a:prstDash val="solid"/>
           </a:ln>
         </p:spPr>
+        <p:txBody>
+          <a:bodyPr/>
+          <a:lstStyle/>
+          <a:p>
+            <a:endParaRPr lang="ja-JP" altLang="en-US"/>
+          </a:p>
+        </p:txBody>
       </p:sp>
       <p:sp>
         <p:nvSpPr>
@@ -7480,43 +7571,47 @@
               <a:buNone/>
             </a:pPr>
             <a:r>
-              <a:rPr lang="en-US" sz="1200" dirty="0">
+              <a:rPr lang="ja-JP" sz="1200" dirty="0">
                 <a:solidFill>
                   <a:srgbClr val="FFFFFF"/>
                 </a:solidFill>
-                <a:latin typeface="Meiryo" pitchFamily="34" charset="0"/>
-                <a:ea typeface="Meiryo" pitchFamily="34" charset="-122"/>
-                <a:cs typeface="Meiryo" pitchFamily="34" charset="-120"/>
+                <a:latin typeface="Meiryo"/>
+                <a:ea typeface="Meiryo"/>
+                <a:cs typeface="Meiryo"/>
               </a:rPr>
               <a:t>💡 </a:t>
             </a:r>
             <a:r>
-              <a:rPr lang="en-US" sz="1000" b="1" dirty="0">
+              <a:rPr lang="ja-JP" sz="1000" b="1" dirty="0">
                 <a:solidFill>
                   <a:srgbClr val="FFFFFF"/>
                 </a:solidFill>
-                <a:latin typeface="Meiryo" pitchFamily="34" charset="0"/>
-                <a:ea typeface="Meiryo" pitchFamily="34" charset="-122"/>
-                <a:cs typeface="Meiryo" pitchFamily="34" charset="-120"/>
-              </a:rPr>
-              <a:t>Deny（助言的）+ Hooks（決定的）の2段構え。</a:t>
-            </a:r>
-            <a:r>
-              <a:rPr lang="en-US" sz="1000" dirty="0">
+                <a:latin typeface="Meiryo"/>
+                <a:ea typeface="Meiryo"/>
+                <a:cs typeface="Meiryo"/>
+              </a:rPr>
+              <a:t>Deny（助言的）＋ Hooks（決定的）の2段構え。</a:t>
+            </a:r>
+            <a:r>
+              <a:rPr lang="ja-JP" sz="1000" dirty="0">
                 <a:solidFill>
                   <a:srgbClr val="CADCFC"/>
                 </a:solidFill>
-                <a:latin typeface="Meiryo" pitchFamily="34" charset="0"/>
-                <a:ea typeface="Meiryo" pitchFamily="34" charset="-122"/>
-                <a:cs typeface="Meiryo" pitchFamily="34" charset="-120"/>
-              </a:rPr>
-              <a:t>これをコピペするだけで、事例①②④の大半を予防できる</a:t>
-            </a:r>
-            <a:endParaRPr lang="en-US" sz="1200" dirty="0"/>
+                <a:latin typeface="Meiryo"/>
+                <a:ea typeface="Meiryo"/>
+                <a:cs typeface="Meiryo"/>
+              </a:rPr>
+              <a:t>これをコピペするだけで、Appendix A の #1 #3 #6 を中心に、典型事故の大半を予防できる</a:t>
+            </a:r>
           </a:p>
         </p:txBody>
       </p:sp>
     </p:spTree>
+    <p:extLst>
+      <p:ext uri="{BB962C8B-B14F-4D97-AF65-F5344CB8AC3E}">
+        <p14:creationId xmlns:p14="http://schemas.microsoft.com/office/powerpoint/2010/main" val="1139351023"/>
+      </p:ext>
+    </p:extLst>
   </p:cSld>
   <p:clrMapOvr>
     <a:masterClrMapping/>
@@ -7604,6 +7699,13 @@
             <a:prstDash val="solid"/>
           </a:ln>
         </p:spPr>
+        <p:txBody>
+          <a:bodyPr/>
+          <a:lstStyle/>
+          <a:p>
+            <a:endParaRPr lang="ja-JP" altLang="en-US"/>
+          </a:p>
+        </p:txBody>
       </p:sp>
       <p:sp>
         <p:nvSpPr>
@@ -7668,6 +7770,13 @@
             <a:prstDash val="solid"/>
           </a:ln>
         </p:spPr>
+        <p:txBody>
+          <a:bodyPr/>
+          <a:lstStyle/>
+          <a:p>
+            <a:endParaRPr lang="ja-JP" altLang="en-US"/>
+          </a:p>
+        </p:txBody>
       </p:sp>
       <p:sp>
         <p:nvSpPr>
@@ -8150,17 +8259,16 @@
               <a:buNone/>
             </a:pPr>
             <a:r>
-              <a:rPr lang="en-US" sz="800" dirty="0">
+              <a:rPr lang="ja-JP" sz="800" dirty="0">
                 <a:solidFill>
                   <a:srgbClr val="2D3748"/>
                 </a:solidFill>
-                <a:latin typeface="Meiryo" pitchFamily="34" charset="0"/>
-                <a:ea typeface="Meiryo" pitchFamily="34" charset="-122"/>
-                <a:cs typeface="Meiryo" pitchFamily="34" charset="-120"/>
-              </a:rPr>
-              <a:t>OSレベル（macOS Seatbelt / WSL2 bubblewrap）でbashプロセスを隔離する仕組み</a:t>
-            </a:r>
-            <a:endParaRPr lang="en-US" sz="800" dirty="0"/>
+                <a:latin typeface="Meiryo"/>
+                <a:ea typeface="Meiryo"/>
+                <a:cs typeface="Meiryo"/>
+              </a:rPr>
+              <a:t>OS標準の隔離機能（macOSではSeatbelt、Windows WSL2ではbubblewrap）でbashプロセスを隔離する仕組み</a:t>
+            </a:r>
           </a:p>
         </p:txBody>
       </p:sp>
@@ -8644,6 +8752,13 @@
             <a:prstDash val="solid"/>
           </a:ln>
         </p:spPr>
+        <p:txBody>
+          <a:bodyPr/>
+          <a:lstStyle/>
+          <a:p>
+            <a:endParaRPr lang="ja-JP" altLang="en-US"/>
+          </a:p>
+        </p:txBody>
       </p:sp>
       <p:sp>
         <p:nvSpPr>
@@ -8712,93 +8827,90 @@
               <a:buNone/>
             </a:pPr>
             <a:r>
-              <a:rPr lang="en-US" sz="900" dirty="0">
+              <a:rPr lang="ja-JP" sz="900" dirty="0">
                 <a:solidFill>
                   <a:srgbClr val="2D3748"/>
+                </a:solidFill>
+                <a:latin typeface="Meiryo"/>
+                <a:ea typeface="Meiryo"/>
+                <a:cs typeface="Meiryo"/>
+              </a:rPr>
+              <a:t>① /sandbox コマンドでモードと設定を確認</a:t>
+            </a:r>
+          </a:p>
+          <a:p>
+            <a:pPr marL="0" indent="0">
+              <a:spcAft>
+                <a:spcPts val="200"/>
+              </a:spcAft>
+              <a:buNone/>
+            </a:pPr>
+            <a:r>
+              <a:rPr lang="ja-JP" sz="900" dirty="0">
+                <a:solidFill>
+                  <a:srgbClr val="2D3748"/>
+                </a:solidFill>
+                <a:latin typeface="Meiryo"/>
+                <a:ea typeface="Meiryo"/>
+                <a:cs typeface="Meiryo"/>
+              </a:rPr>
+              <a:t> → ② Claude Codeを再起動（設定変更は再起動で反映されることが多い）</a:t>
+            </a:r>
+          </a:p>
+          <a:p>
+            <a:pPr marL="0" indent="0">
+              <a:spcAft>
+                <a:spcPts val="200"/>
+              </a:spcAft>
+              <a:buNone/>
+            </a:pPr>
+            <a:r>
+              <a:rPr lang="ja-JP" sz="900" dirty="0">
+                <a:solidFill>
+                  <a:srgbClr val="2D3748"/>
+                </a:solidFill>
+                <a:latin typeface="Meiryo"/>
+                <a:ea typeface="Meiryo"/>
+                <a:cs typeface="Meiryo"/>
+              </a:rPr>
+              <a:t> → ③ 設定ファイルの優先順位を確認（Managed &gt; CLI &gt; Local &gt; Project &gt; User、左ほど強い）</a:t>
+            </a:r>
+          </a:p>
+        </p:txBody>
+      </p:sp>
+      <p:sp>
+        <p:nvSpPr>
+          <p:cNvPr id="26" name="Text 24"/>
+          <p:cNvSpPr/>
+          <p:nvPr/>
+        </p:nvSpPr>
+        <p:spPr>
+          <a:xfrm>
+            <a:off x="457200" y="4907280"/>
+            <a:ext cx="8229600" cy="182880"/>
+          </a:xfrm>
+          <a:prstGeom prst="rect">
+            <a:avLst/>
+          </a:prstGeom>
+          <a:noFill/>
+          <a:ln/>
+        </p:spPr>
+        <p:txBody>
+          <a:bodyPr wrap="square" lIns="0" tIns="0" rIns="0" bIns="0" rtlCol="0" anchor="ctr"/>
+          <a:lstStyle/>
+          <a:p>
+            <a:pPr marL="0" indent="0">
+              <a:buNone/>
+            </a:pPr>
+            <a:r>
+              <a:rPr lang="en-US" sz="700" dirty="0">
+                <a:solidFill>
+                  <a:srgbClr val="64748B"/>
                 </a:solidFill>
                 <a:latin typeface="Meiryo" pitchFamily="34" charset="0"/>
                 <a:ea typeface="Meiryo" pitchFamily="34" charset="-122"/>
                 <a:cs typeface="Meiryo" pitchFamily="34" charset="-120"/>
               </a:rPr>
-              <a:t>① /sandbox コマンドでモードと設定を確認</a:t>
-            </a:r>
-            <a:endParaRPr lang="en-US" sz="900" dirty="0"/>
-          </a:p>
-          <a:p>
-            <a:pPr marL="0" indent="0">
-              <a:spcAft>
-                <a:spcPts val="200"/>
-              </a:spcAft>
-              <a:buNone/>
-            </a:pPr>
-            <a:r>
-              <a:rPr lang="en-US" sz="900" dirty="0">
-                <a:solidFill>
-                  <a:srgbClr val="2D3748"/>
-                </a:solidFill>
-                <a:latin typeface="Meiryo" pitchFamily="34" charset="0"/>
-                <a:ea typeface="Meiryo" pitchFamily="34" charset="-122"/>
-                <a:cs typeface="Meiryo" pitchFamily="34" charset="-120"/>
-              </a:rPr>
-              <a:t> → ② Claude Codeを再起動（設定変更は再起動で反映されることが多い）</a:t>
-            </a:r>
-            <a:endParaRPr lang="en-US" sz="900" dirty="0"/>
-          </a:p>
-          <a:p>
-            <a:pPr marL="0" indent="0">
-              <a:spcAft>
-                <a:spcPts val="200"/>
-              </a:spcAft>
-              <a:buNone/>
-            </a:pPr>
-            <a:r>
-              <a:rPr lang="en-US" sz="900" dirty="0">
-                <a:solidFill>
-                  <a:srgbClr val="2D3748"/>
-                </a:solidFill>
-                <a:latin typeface="Meiryo" pitchFamily="34" charset="0"/>
-                <a:ea typeface="Meiryo" pitchFamily="34" charset="-122"/>
-                <a:cs typeface="Meiryo" pitchFamily="34" charset="-120"/>
-              </a:rPr>
-              <a:t> → ③ 設定ファイルの優先順位を確認（Managed &gt; CLI &gt; Local &gt; Project &gt; User）</a:t>
-            </a:r>
-            <a:endParaRPr lang="en-US" sz="900" dirty="0"/>
-          </a:p>
-        </p:txBody>
-      </p:sp>
-      <p:sp>
-        <p:nvSpPr>
-          <p:cNvPr id="26" name="Text 24"/>
-          <p:cNvSpPr/>
-          <p:nvPr/>
-        </p:nvSpPr>
-        <p:spPr>
-          <a:xfrm>
-            <a:off x="457200" y="4983480"/>
-            <a:ext cx="8229600" cy="182880"/>
-          </a:xfrm>
-          <a:prstGeom prst="rect">
-            <a:avLst/>
-          </a:prstGeom>
-          <a:noFill/>
-          <a:ln/>
-        </p:spPr>
-        <p:txBody>
-          <a:bodyPr wrap="square" lIns="0" tIns="0" rIns="0" bIns="0" rtlCol="0" anchor="ctr"/>
-          <a:lstStyle/>
-          <a:p>
-            <a:pPr marL="0" indent="0">
-              <a:buNone/>
-            </a:pPr>
-            <a:r>
-              <a:rPr lang="en-US" sz="700" dirty="0">
-                <a:solidFill>
-                  <a:srgbClr val="64748B"/>
-                </a:solidFill>
-                <a:latin typeface="Meiryo" pitchFamily="34" charset="0"/>
-                <a:ea typeface="Meiryo" pitchFamily="34" charset="-122"/>
-                <a:cs typeface="Meiryo" pitchFamily="34" charset="-120"/>
-              </a:rPr>
               <a:t>出典: 「Claude Codeのsandboxを正しく理解する」YouTube動画 + Claude Code公式ドキュメント</a:t>
             </a:r>
             <a:endParaRPr lang="en-US" sz="700" dirty="0"/>
@@ -8806,6 +8918,11 @@
         </p:txBody>
       </p:sp>
     </p:spTree>
+    <p:extLst>
+      <p:ext uri="{BB962C8B-B14F-4D97-AF65-F5344CB8AC3E}">
+        <p14:creationId xmlns:p14="http://schemas.microsoft.com/office/powerpoint/2010/main" val="2252534545"/>
+      </p:ext>
+    </p:extLst>
   </p:cSld>
   <p:clrMapOvr>
     <a:masterClrMapping/>
@@ -8913,7 +9030,7 @@
         <p:spPr>
           <a:xfrm>
             <a:off x="457200" y="1450000"/>
-            <a:ext cx="8229600" cy="3500000"/>
+            <a:ext cx="8229600" cy="2313454"/>
           </a:xfrm>
           <a:prstGeom prst="rect">
             <a:avLst/>
@@ -8927,30 +9044,70 @@
           <a:lstStyle/>
           <a:p>
             <a:r>
-              <a:rPr sz="1600" b="1">
+              <a:rPr sz="1300" b="1" dirty="0">
                 <a:solidFill>
                   <a:srgbClr val="1E2761"/>
                 </a:solidFill>
               </a:rPr>
-              <a:t>●  DevContainer</a:t>
-            </a:r>
-            <a:r>
-              <a:rPr sz="1400" b="0">
+              <a:t>●  </a:t>
+            </a:r>
+            <a:r>
+              <a:rPr sz="1300" b="1" dirty="0" err="1">
+                <a:solidFill>
+                  <a:srgbClr val="1E2761"/>
+                </a:solidFill>
+              </a:rPr>
+              <a:t>DevContainer</a:t>
+            </a:r>
+            <a:r>
+              <a:rPr sz="1200" b="0" dirty="0">
                 <a:solidFill>
                   <a:srgbClr val="2D3748"/>
                 </a:solidFill>
               </a:rPr>
-              <a:t>　＝　プロジェクトごとの使い捨て開発コンテナ（ホストから分離）</a:t>
+              <a:t>　＝　</a:t>
+            </a:r>
+            <a:r>
+              <a:rPr sz="1200" b="0" dirty="0" err="1">
+                <a:solidFill>
+                  <a:srgbClr val="2D3748"/>
+                </a:solidFill>
+              </a:rPr>
+              <a:t>自分のPC本体</a:t>
+            </a:r>
+            <a:r>
+              <a:rPr lang="ja-JP" altLang="en-US" sz="1200" b="0">
+                <a:solidFill>
+                  <a:srgbClr val="2D3748"/>
+                </a:solidFill>
+              </a:rPr>
+              <a:t>とは</a:t>
+            </a:r>
+            <a:r>
+              <a:rPr sz="1200" b="0" dirty="0" err="1">
+                <a:solidFill>
+                  <a:srgbClr val="2D3748"/>
+                </a:solidFill>
+              </a:rPr>
+              <a:t>別に立てる、使い捨ての作業部屋（プロジェクト単位</a:t>
+            </a:r>
+            <a:r>
+              <a:rPr sz="1200" b="0" dirty="0">
+                <a:solidFill>
+                  <a:srgbClr val="2D3748"/>
+                </a:solidFill>
+              </a:rPr>
+              <a:t>）</a:t>
             </a:r>
           </a:p>
           <a:p>
             <a:pPr>
               <a:spcBef>
-                <a:spcPts val="800"/>
+                <a:spcPts val="500"/>
               </a:spcBef>
             </a:pPr>
             <a:r>
-              <a:rPr sz="1600" b="1">
+              <a:rPr sz="1300" b="1" dirty="0">
                 <a:solidFill>
                   <a:srgbClr val="1E2761"/>
                 </a:solidFill>
@@ -8958,22 +9115,35 @@
               <a:t>●  Sandbox</a:t>
             </a:r>
             <a:r>
-              <a:rPr sz="1400" b="0">
+              <a:rPr sz="1200" b="0" dirty="0">
                 <a:solidFill>
                   <a:srgbClr val="2D3748"/>
                 </a:solidFill>
               </a:rPr>
-              <a:t>　＝　OSが「ここから先は触らせない」と決める砂場</a:t>
-            </a:r>
+              <a:t>　＝　</a:t>
+            </a:r>
+            <a:r>
+              <a:rPr sz="1200" b="0" dirty="0" err="1">
+                <a:solidFill>
+                  <a:srgbClr val="2D3748"/>
+                </a:solidFill>
+              </a:rPr>
+              <a:t>パソコンの土台（OS）が「ここから先は触らせない」と決める砂場</a:t>
+            </a:r>
+            <a:endParaRPr sz="1200" b="0" dirty="0">
+              <a:solidFill>
+                <a:srgbClr val="2D3748"/>
+              </a:solidFill>
+            </a:endParaRPr>
           </a:p>
           <a:p>
             <a:pPr>
               <a:spcBef>
-                <a:spcPts val="800"/>
+                <a:spcPts val="500"/>
               </a:spcBef>
             </a:pPr>
             <a:r>
-              <a:rPr sz="1600" b="1">
+              <a:rPr sz="1300" b="1" dirty="0">
                 <a:solidFill>
                   <a:srgbClr val="1E2761"/>
                 </a:solidFill>
@@ -8981,59 +9151,296 @@
               <a:t>●  Hooks</a:t>
             </a:r>
             <a:r>
-              <a:rPr sz="1400" b="0">
+              <a:rPr sz="1200" b="0" dirty="0">
                 <a:solidFill>
                   <a:srgbClr val="2D3748"/>
                 </a:solidFill>
               </a:rPr>
-              <a:t>　＝　ツール実行の前後に必ず呼ばれる関数（決定的にブロックできる）</a:t>
+              <a:t>　＝　</a:t>
+            </a:r>
+            <a:r>
+              <a:rPr sz="1200" b="0" dirty="0" err="1">
+                <a:solidFill>
+                  <a:srgbClr val="2D3748"/>
+                </a:solidFill>
+              </a:rPr>
+              <a:t>ツール実行の前後に必ず呼ばれる関数（確実に止められる＝無視できない</a:t>
+            </a:r>
+            <a:r>
+              <a:rPr sz="1200" b="0" dirty="0">
+                <a:solidFill>
+                  <a:srgbClr val="2D3748"/>
+                </a:solidFill>
+              </a:rPr>
+              <a:t>）</a:t>
             </a:r>
           </a:p>
           <a:p>
             <a:pPr>
               <a:spcBef>
-                <a:spcPts val="800"/>
+                <a:spcPts val="500"/>
               </a:spcBef>
             </a:pPr>
             <a:r>
-              <a:rPr sz="1600" b="1">
+              <a:rPr sz="1300" b="1" dirty="0">
                 <a:solidFill>
                   <a:srgbClr val="1E2761"/>
                 </a:solidFill>
               </a:rPr>
-              <a:t>●  プロンプトインジェクション</a:t>
-            </a:r>
-            <a:r>
-              <a:rPr sz="1400" b="0">
+              <a:t>●  </a:t>
+            </a:r>
+            <a:r>
+              <a:rPr sz="1300" b="1" dirty="0" err="1">
+                <a:solidFill>
+                  <a:srgbClr val="1E2761"/>
+                </a:solidFill>
+              </a:rPr>
+              <a:t>プロンプトインジェクション</a:t>
+            </a:r>
+            <a:r>
+              <a:rPr sz="1200" b="0" dirty="0">
                 <a:solidFill>
                   <a:srgbClr val="2D3748"/>
                 </a:solidFill>
               </a:rPr>
-              <a:t>　＝　外部に仕込まれた指示でAIが誘導される攻撃</a:t>
-            </a:r>
+              <a:t>　＝　</a:t>
+            </a:r>
+            <a:r>
+              <a:rPr sz="1200" b="0" dirty="0" err="1">
+                <a:solidFill>
+                  <a:srgbClr val="2D3748"/>
+                </a:solidFill>
+              </a:rPr>
+              <a:t>Webページや読み込ませた資料に仕込まれた指示でAIが誘導される攻撃</a:t>
+            </a:r>
+            <a:endParaRPr sz="1200" b="0" dirty="0">
+              <a:solidFill>
+                <a:srgbClr val="2D3748"/>
+              </a:solidFill>
+            </a:endParaRPr>
           </a:p>
           <a:p>
             <a:pPr>
               <a:spcBef>
-                <a:spcPts val="800"/>
+                <a:spcPts val="500"/>
               </a:spcBef>
             </a:pPr>
             <a:r>
-              <a:rPr sz="1600" b="1">
+              <a:rPr sz="1300" b="1" dirty="0">
                 <a:solidFill>
                   <a:srgbClr val="1E2761"/>
                 </a:solidFill>
               </a:rPr>
-              <a:t>●  ラテラルムーブメント</a:t>
-            </a:r>
-            <a:r>
-              <a:rPr sz="1400" b="0">
+              <a:t>●  </a:t>
+            </a:r>
+            <a:r>
+              <a:rPr sz="1300" b="1" dirty="0" err="1">
+                <a:solidFill>
+                  <a:srgbClr val="1E2761"/>
+                </a:solidFill>
+              </a:rPr>
+              <a:t>ラテラルムーブメント（横展開</a:t>
+            </a:r>
+            <a:r>
+              <a:rPr sz="1300" b="1" dirty="0">
+                <a:solidFill>
+                  <a:srgbClr val="1E2761"/>
+                </a:solidFill>
+              </a:rPr>
+              <a:t>）</a:t>
+            </a:r>
+            <a:r>
+              <a:rPr sz="1200" b="0" dirty="0">
                 <a:solidFill>
                   <a:srgbClr val="2D3748"/>
                 </a:solidFill>
               </a:rPr>
               <a:t>　＝　1台が侵害されたあと他の機器に被害が拡がること</a:t>
             </a:r>
+          </a:p>
+          <a:p>
+            <a:pPr>
+              <a:spcBef>
+                <a:spcPts val="500"/>
+              </a:spcBef>
+            </a:pPr>
+            <a:r>
+              <a:rPr sz="1300" b="1" dirty="0">
+                <a:solidFill>
+                  <a:srgbClr val="1E2761"/>
+                </a:solidFill>
+              </a:rPr>
+              <a:t>●  </a:t>
+            </a:r>
+            <a:r>
+              <a:rPr sz="1300" b="1" dirty="0" err="1">
+                <a:solidFill>
+                  <a:srgbClr val="1E2761"/>
+                </a:solidFill>
+              </a:rPr>
+              <a:t>サプライチェーン攻撃</a:t>
+            </a:r>
+            <a:r>
+              <a:rPr sz="1200" b="0" dirty="0">
+                <a:solidFill>
+                  <a:srgbClr val="2D3748"/>
+                </a:solidFill>
+              </a:rPr>
+              <a:t>　＝　</a:t>
+            </a:r>
+            <a:r>
+              <a:rPr sz="1200" b="0" dirty="0" err="1">
+                <a:solidFill>
+                  <a:srgbClr val="2D3748"/>
+                </a:solidFill>
+              </a:rPr>
+              <a:t>ライブラリ等の供給経路に悪意あるコードを混ぜ込む攻撃</a:t>
+            </a:r>
+            <a:endParaRPr sz="1200" b="0" dirty="0">
+              <a:solidFill>
+                <a:srgbClr val="2D3748"/>
+              </a:solidFill>
+            </a:endParaRPr>
+          </a:p>
+          <a:p>
+            <a:pPr>
+              <a:spcBef>
+                <a:spcPts val="500"/>
+              </a:spcBef>
+            </a:pPr>
+            <a:r>
+              <a:rPr sz="1300" b="1" dirty="0">
+                <a:solidFill>
+                  <a:srgbClr val="1E2761"/>
+                </a:solidFill>
+              </a:rPr>
+              <a:t>●  IAM</a:t>
+            </a:r>
+            <a:r>
+              <a:rPr sz="1200" b="0" dirty="0">
+                <a:solidFill>
+                  <a:srgbClr val="2D3748"/>
+                </a:solidFill>
+              </a:rPr>
+              <a:t>　＝　</a:t>
+            </a:r>
+            <a:r>
+              <a:rPr sz="1200" b="0" dirty="0" err="1">
+                <a:solidFill>
+                  <a:srgbClr val="2D3748"/>
+                </a:solidFill>
+              </a:rPr>
+              <a:t>クラウド上で「誰が何にアクセスできるか」を決める権限の仕組み</a:t>
+            </a:r>
+            <a:endParaRPr sz="1200" b="0" dirty="0">
+              <a:solidFill>
+                <a:srgbClr val="2D3748"/>
+              </a:solidFill>
+            </a:endParaRPr>
+          </a:p>
+          <a:p>
+            <a:pPr>
+              <a:spcBef>
+                <a:spcPts val="500"/>
+              </a:spcBef>
+            </a:pPr>
+            <a:r>
+              <a:rPr sz="1300" b="1" dirty="0">
+                <a:solidFill>
+                  <a:srgbClr val="1E2761"/>
+                </a:solidFill>
+              </a:rPr>
+              <a:t>●  </a:t>
+            </a:r>
+            <a:r>
+              <a:rPr sz="1300" b="1" dirty="0" err="1">
+                <a:solidFill>
+                  <a:srgbClr val="1E2761"/>
+                </a:solidFill>
+              </a:rPr>
+              <a:t>助言的</a:t>
+            </a:r>
+            <a:r>
+              <a:rPr sz="1300" b="1" dirty="0">
+                <a:solidFill>
+                  <a:srgbClr val="1E2761"/>
+                </a:solidFill>
+              </a:rPr>
+              <a:t> vs </a:t>
+            </a:r>
+            <a:r>
+              <a:rPr sz="1300" b="1" dirty="0" err="1">
+                <a:solidFill>
+                  <a:srgbClr val="1E2761"/>
+                </a:solidFill>
+              </a:rPr>
+              <a:t>決定的</a:t>
+            </a:r>
+            <a:r>
+              <a:rPr sz="1200" b="0" dirty="0">
+                <a:solidFill>
+                  <a:srgbClr val="2D3748"/>
+                </a:solidFill>
+              </a:rPr>
+              <a:t>　＝　</a:t>
+            </a:r>
+            <a:r>
+              <a:rPr sz="1200" b="0" dirty="0" err="1">
+                <a:solidFill>
+                  <a:srgbClr val="2D3748"/>
+                </a:solidFill>
+              </a:rPr>
+              <a:t>お願いベース（守られないことがある）か、強制ベース（必ず止まる）か</a:t>
+            </a:r>
+            <a:endParaRPr sz="1200" b="0" dirty="0">
+              <a:solidFill>
+                <a:srgbClr val="2D3748"/>
+              </a:solidFill>
+            </a:endParaRPr>
+          </a:p>
+          <a:p>
+            <a:pPr>
+              <a:spcBef>
+                <a:spcPts val="500"/>
+              </a:spcBef>
+            </a:pPr>
+            <a:r>
+              <a:rPr sz="1300" b="1" dirty="0">
+                <a:solidFill>
+                  <a:srgbClr val="1E2761"/>
+                </a:solidFill>
+              </a:rPr>
+              <a:t>●  </a:t>
+            </a:r>
+            <a:r>
+              <a:rPr sz="1300" b="1" dirty="0" err="1">
+                <a:solidFill>
+                  <a:srgbClr val="1E2761"/>
+                </a:solidFill>
+              </a:rPr>
+              <a:t>最小権限の原則</a:t>
+            </a:r>
+            <a:r>
+              <a:rPr sz="1200" b="0" dirty="0">
+                <a:solidFill>
+                  <a:srgbClr val="2D3748"/>
+                </a:solidFill>
+              </a:rPr>
+              <a:t>　＝　</a:t>
+            </a:r>
+            <a:r>
+              <a:rPr sz="1200" b="0" dirty="0" err="1">
+                <a:solidFill>
+                  <a:srgbClr val="2D3748"/>
+                </a:solidFill>
+              </a:rPr>
+              <a:t>仕事に必要な最低限の権限だけを与える（広く渡さない）という考え方</a:t>
+            </a:r>
+            <a:endParaRPr sz="1200" b="0" dirty="0">
+              <a:solidFill>
+                <a:srgbClr val="2D3748"/>
+              </a:solidFill>
+            </a:endParaRPr>
           </a:p>
         </p:txBody>
       </p:sp>
@@ -9071,6 +9478,11 @@
         </p:txBody>
       </p:sp>
     </p:spTree>
+    <p:extLst>
+      <p:ext uri="{BB962C8B-B14F-4D97-AF65-F5344CB8AC3E}">
+        <p14:creationId xmlns:p14="http://schemas.microsoft.com/office/powerpoint/2010/main" val="1921810573"/>
+      </p:ext>
+    </p:extLst>
   </p:cSld>
   <p:clrMapOvr>
     <a:masterClrMapping/>
@@ -9283,21 +9695,20 @@
           <a:bodyPr wrap="square" lIns="0" tIns="0" rIns="0" bIns="0" rtlCol="0" anchor="t"/>
           <a:lstStyle/>
           <a:p>
-            <a:pPr marL="0" indent="0">
-              <a:buNone/>
-            </a:pPr>
-            <a:r>
-              <a:rPr lang="en-US" sz="1500" b="1">
-                <a:solidFill>
-                  <a:srgbClr val="1E2761"/>
-                </a:solidFill>
-                <a:latin typeface="Meiryo" pitchFamily="34" charset="0"/>
-                <a:ea typeface="Meiryo" pitchFamily="34" charset="-122"/>
-                <a:cs typeface="Meiryo" pitchFamily="34" charset="-120"/>
+            <a:pPr marL="0" indent="0" algn="ctr">
+              <a:buNone/>
+            </a:pPr>
+            <a:r>
+              <a:rPr lang="ja-JP" sz="1700" b="1">
+                <a:solidFill>
+                  <a:srgbClr val="C0392B"/>
+                </a:solidFill>
+                <a:latin typeface="Meiryo"/>
+                <a:ea typeface="Meiryo"/>
+                <a:cs typeface="Meiryo"/>
               </a:rPr>
               <a:t>使うリスク &lt; 使わないリスク</a:t>
             </a:r>
-            <a:endParaRPr lang="en-US" sz="1500"/>
           </a:p>
         </p:txBody>
       </p:sp>
@@ -9667,21 +10078,47 @@
               <a:buNone/>
             </a:pPr>
             <a:r>
-              <a:rPr lang="en-US" sz="1100" dirty="0">
+              <a:rPr lang="ja-JP" sz="1100">
                 <a:solidFill>
                   <a:srgbClr val="2D3748"/>
                 </a:solidFill>
-                <a:latin typeface="Meiryo" pitchFamily="34" charset="0"/>
-                <a:ea typeface="Meiryo" pitchFamily="34" charset="-122"/>
-                <a:cs typeface="Meiryo" pitchFamily="34" charset="-120"/>
-              </a:rPr>
-              <a:t>リスクの大半は「型」を押さえれば防げる。今日はその型をシリーズ全10回の背骨として渡す。</a:t>
-            </a:r>
-            <a:endParaRPr lang="en-US" sz="1100" dirty="0"/>
+                <a:latin typeface="Meiryo"/>
+                <a:ea typeface="Meiryo"/>
+                <a:cs typeface="Meiryo"/>
+              </a:rPr>
+              <a:t>リスクの大半は「型」を押さえれば防げる。今日はその型を、シリーズ全10回を貫く軸として</a:t>
+            </a:r>
+            <a:r>
+              <a:rPr lang="ja-JP" altLang="en-US" sz="1100">
+                <a:solidFill>
+                  <a:srgbClr val="2D3748"/>
+                </a:solidFill>
+                <a:latin typeface="Meiryo"/>
+                <a:ea typeface="Meiryo"/>
+                <a:cs typeface="Meiryo"/>
+              </a:rPr>
+              <a:t>示す</a:t>
+            </a:r>
+            <a:r>
+              <a:rPr lang="ja-JP" sz="1100">
+                <a:solidFill>
+                  <a:srgbClr val="2D3748"/>
+                </a:solidFill>
+                <a:latin typeface="Meiryo"/>
+                <a:ea typeface="Meiryo"/>
+                <a:cs typeface="Meiryo"/>
+              </a:rPr>
+              <a:t>。</a:t>
+            </a:r>
           </a:p>
         </p:txBody>
       </p:sp>
     </p:spTree>
+    <p:extLst>
+      <p:ext uri="{BB962C8B-B14F-4D97-AF65-F5344CB8AC3E}">
+        <p14:creationId xmlns:p14="http://schemas.microsoft.com/office/powerpoint/2010/main" val="235064002"/>
+      </p:ext>
+    </p:extLst>
   </p:cSld>
   <p:clrMapOvr>
     <a:masterClrMapping/>
@@ -9959,17 +10396,16 @@
               <a:buNone/>
             </a:pPr>
             <a:r>
-              <a:rPr lang="en-US" sz="1100" i="1">
+              <a:rPr lang="ja-JP" sz="1100" i="1">
                 <a:solidFill>
                   <a:srgbClr val="64748B"/>
                 </a:solidFill>
-                <a:latin typeface="Meiryo" pitchFamily="34" charset="0"/>
-                <a:ea typeface="Meiryo" pitchFamily="34" charset="-122"/>
-                <a:cs typeface="Meiryo" pitchFamily="34" charset="-120"/>
-              </a:rPr>
-              <a:t>汚染されたものが入ってくる</a:t>
-            </a:r>
-            <a:endParaRPr lang="en-US" sz="1100"/>
+                <a:latin typeface="Meiryo"/>
+                <a:ea typeface="Meiryo"/>
+                <a:cs typeface="Meiryo"/>
+              </a:rPr>
+              <a:t>エージェントが汚染されたものを取り込む</a:t>
+            </a:r>
           </a:p>
         </p:txBody>
       </p:sp>
@@ -10011,8 +10447,8 @@
         </p:nvSpPr>
         <p:spPr>
           <a:xfrm>
-            <a:off x="731520" y="2834640"/>
-            <a:ext cx="2148840" cy="1188720"/>
+            <a:off x="731520" y="2834639"/>
+            <a:ext cx="2148840" cy="1371595"/>
           </a:xfrm>
           <a:prstGeom prst="rect">
             <a:avLst/>
@@ -10032,7 +10468,7 @@
               <a:buChar char="■"/>
             </a:pPr>
             <a:r>
-              <a:rPr lang="en-US" sz="1200">
+              <a:rPr lang="en-US" sz="1200" dirty="0" err="1">
                 <a:solidFill>
                   <a:srgbClr val="2D3748"/>
                 </a:solidFill>
@@ -10042,7 +10478,7 @@
               </a:rPr>
               <a:t>サプライチェーン攻撃</a:t>
             </a:r>
-            <a:endParaRPr lang="en-US" sz="1200"/>
+            <a:endParaRPr lang="en-US" sz="1200" dirty="0"/>
           </a:p>
           <a:p>
             <a:pPr marL="342900" indent="-342900">
@@ -10053,7 +10489,7 @@
               <a:buChar char="■"/>
             </a:pPr>
             <a:r>
-              <a:rPr lang="en-US" sz="1200">
+              <a:rPr lang="en-US" sz="1200" dirty="0" err="1">
                 <a:solidFill>
                   <a:srgbClr val="2D3748"/>
                 </a:solidFill>
@@ -10063,7 +10499,7 @@
               </a:rPr>
               <a:t>信頼性の低いライブラリ</a:t>
             </a:r>
-            <a:endParaRPr lang="en-US" sz="1200"/>
+            <a:endParaRPr lang="en-US" sz="1200" dirty="0"/>
           </a:p>
           <a:p>
             <a:pPr marL="342900" indent="-342900">
@@ -10074,7 +10510,7 @@
               <a:buChar char="■"/>
             </a:pPr>
             <a:r>
-              <a:rPr lang="en-US" sz="1200">
+              <a:rPr lang="en-US" sz="1200" dirty="0" err="1">
                 <a:solidFill>
                   <a:srgbClr val="2D3748"/>
                 </a:solidFill>
@@ -10082,9 +10518,60 @@
                 <a:ea typeface="Meiryo" pitchFamily="34" charset="-122"/>
                 <a:cs typeface="Meiryo" pitchFamily="34" charset="-120"/>
               </a:rPr>
-              <a:t>悪意あるスキル / プラグイン</a:t>
-            </a:r>
-            <a:endParaRPr lang="en-US" sz="1200"/>
+              <a:t>Web検索</a:t>
+            </a:r>
+            <a:r>
+              <a:rPr lang="en-US" sz="1200" dirty="0">
+                <a:solidFill>
+                  <a:srgbClr val="2D3748"/>
+                </a:solidFill>
+                <a:latin typeface="Meiryo" pitchFamily="34" charset="0"/>
+                <a:ea typeface="Meiryo" pitchFamily="34" charset="-122"/>
+                <a:cs typeface="Meiryo" pitchFamily="34" charset="-120"/>
+              </a:rPr>
+              <a:t>/</a:t>
+            </a:r>
+            <a:r>
+              <a:rPr lang="en-US" sz="1200" dirty="0" err="1">
+                <a:solidFill>
+                  <a:srgbClr val="2D3748"/>
+                </a:solidFill>
+                <a:latin typeface="Meiryo" pitchFamily="34" charset="0"/>
+                <a:ea typeface="Meiryo" pitchFamily="34" charset="-122"/>
+                <a:cs typeface="Meiryo" pitchFamily="34" charset="-120"/>
+              </a:rPr>
+              <a:t>悪意あるスキル</a:t>
+            </a:r>
+            <a:r>
+              <a:rPr lang="en-US" sz="1200" dirty="0">
+                <a:solidFill>
+                  <a:srgbClr val="2D3748"/>
+                </a:solidFill>
+                <a:latin typeface="Meiryo" pitchFamily="34" charset="0"/>
+                <a:ea typeface="Meiryo" pitchFamily="34" charset="-122"/>
+                <a:cs typeface="Meiryo" pitchFamily="34" charset="-120"/>
+              </a:rPr>
+              <a:t> / </a:t>
+            </a:r>
+            <a:r>
+              <a:rPr lang="en-US" sz="1200" dirty="0" err="1">
+                <a:solidFill>
+                  <a:srgbClr val="2D3748"/>
+                </a:solidFill>
+                <a:latin typeface="Meiryo" pitchFamily="34" charset="0"/>
+                <a:ea typeface="Meiryo" pitchFamily="34" charset="-122"/>
+                <a:cs typeface="Meiryo" pitchFamily="34" charset="-120"/>
+              </a:rPr>
+              <a:t>プラグイン</a:t>
+            </a:r>
+            <a:endParaRPr lang="en-US" sz="1200" dirty="0">
+              <a:solidFill>
+                <a:srgbClr val="2D3748"/>
+              </a:solidFill>
+              <a:latin typeface="Meiryo" pitchFamily="34" charset="0"/>
+              <a:ea typeface="Meiryo" pitchFamily="34" charset="-122"/>
+              <a:cs typeface="Meiryo" pitchFamily="34" charset="-120"/>
+            </a:endParaRPr>
           </a:p>
         </p:txBody>
       </p:sp>
@@ -10240,17 +10727,16 @@
               <a:buNone/>
             </a:pPr>
             <a:r>
-              <a:rPr lang="en-US" sz="1100" i="1">
+              <a:rPr lang="ja-JP" sz="1100" i="1">
                 <a:solidFill>
                   <a:srgbClr val="64748B"/>
                 </a:solidFill>
-                <a:latin typeface="Meiryo" pitchFamily="34" charset="0"/>
-                <a:ea typeface="Meiryo" pitchFamily="34" charset="-122"/>
-                <a:cs typeface="Meiryo" pitchFamily="34" charset="-120"/>
-              </a:rPr>
-              <a:t>意図しない操作をしてしまう</a:t>
-            </a:r>
-            <a:endParaRPr lang="en-US" sz="1100"/>
+                <a:latin typeface="Meiryo"/>
+                <a:ea typeface="Meiryo"/>
+                <a:cs typeface="Meiryo"/>
+              </a:rPr>
+              <a:t>エージェントが意図しない操作をする</a:t>
+            </a:r>
           </a:p>
         </p:txBody>
       </p:sp>
@@ -10313,7 +10799,7 @@
               <a:buChar char="■"/>
             </a:pPr>
             <a:r>
-              <a:rPr lang="en-US" sz="1200">
+              <a:rPr lang="en-US" sz="1200" dirty="0" err="1">
                 <a:solidFill>
                   <a:srgbClr val="2D3748"/>
                 </a:solidFill>
@@ -10321,9 +10807,20 @@
                 <a:ea typeface="Meiryo" pitchFamily="34" charset="-122"/>
                 <a:cs typeface="Meiryo" pitchFamily="34" charset="-120"/>
               </a:rPr>
-              <a:t>ファイル削除 (rm -rf)</a:t>
-            </a:r>
-            <a:endParaRPr lang="en-US" sz="1200"/>
+              <a:t>ファイル削除</a:t>
+            </a:r>
+            <a:r>
+              <a:rPr lang="en-US" sz="1200" dirty="0">
+                <a:solidFill>
+                  <a:srgbClr val="2D3748"/>
+                </a:solidFill>
+                <a:latin typeface="Meiryo" pitchFamily="34" charset="0"/>
+                <a:ea typeface="Meiryo" pitchFamily="34" charset="-122"/>
+                <a:cs typeface="Meiryo" pitchFamily="34" charset="-120"/>
+              </a:rPr>
+              <a:t> (rm -rf)</a:t>
+            </a:r>
+            <a:endParaRPr lang="en-US" sz="1200" dirty="0"/>
           </a:p>
           <a:p>
             <a:pPr marL="342900" indent="-342900">
@@ -10334,7 +10831,7 @@
               <a:buChar char="■"/>
             </a:pPr>
             <a:r>
-              <a:rPr lang="en-US" sz="1200">
+              <a:rPr lang="en-US" sz="1200" dirty="0" err="1">
                 <a:solidFill>
                   <a:srgbClr val="2D3748"/>
                 </a:solidFill>
@@ -10344,7 +10841,7 @@
               </a:rPr>
               <a:t>Web経由で外部送信</a:t>
             </a:r>
-            <a:endParaRPr lang="en-US" sz="1200"/>
+            <a:endParaRPr lang="en-US" sz="1200" dirty="0"/>
           </a:p>
           <a:p>
             <a:pPr marL="342900" indent="-342900">
@@ -10355,7 +10852,7 @@
               <a:buChar char="■"/>
             </a:pPr>
             <a:r>
-              <a:rPr lang="en-US" sz="1200">
+              <a:rPr lang="en-US" sz="1200" dirty="0" err="1">
                 <a:solidFill>
                   <a:srgbClr val="2D3748"/>
                 </a:solidFill>
@@ -10363,9 +10860,31 @@
                 <a:ea typeface="Meiryo" pitchFamily="34" charset="-122"/>
                 <a:cs typeface="Meiryo" pitchFamily="34" charset="-120"/>
               </a:rPr>
-              <a:t>APIキー・認証情報の漏洩</a:t>
-            </a:r>
-            <a:endParaRPr lang="en-US" sz="1200"/>
+              <a:t>APIキ</a:t>
+            </a:r>
+            <a:r>
+              <a:rPr lang="en-US" sz="1200" dirty="0">
+                <a:solidFill>
+                  <a:srgbClr val="2D3748"/>
+                </a:solidFill>
+                <a:latin typeface="Meiryo" pitchFamily="34" charset="0"/>
+                <a:ea typeface="Meiryo" pitchFamily="34" charset="-122"/>
+                <a:cs typeface="Meiryo" pitchFamily="34" charset="-120"/>
+              </a:rPr>
+              <a:t>ー・</a:t>
+            </a:r>
+            <a:r>
+              <a:rPr lang="en-US" sz="1200" dirty="0" err="1">
+                <a:solidFill>
+                  <a:srgbClr val="2D3748"/>
+                </a:solidFill>
+                <a:latin typeface="Meiryo" pitchFamily="34" charset="0"/>
+                <a:ea typeface="Meiryo" pitchFamily="34" charset="-122"/>
+                <a:cs typeface="Meiryo" pitchFamily="34" charset="-120"/>
+              </a:rPr>
+              <a:t>認証情報の漏洩</a:t>
+            </a:r>
+            <a:endParaRPr lang="en-US" sz="1200" dirty="0"/>
           </a:p>
         </p:txBody>
       </p:sp>
@@ -10521,17 +11040,16 @@
               <a:buNone/>
             </a:pPr>
             <a:r>
-              <a:rPr lang="en-US" sz="1100" i="1">
+              <a:rPr lang="ja-JP" sz="1100" i="1">
                 <a:solidFill>
                   <a:srgbClr val="64748B"/>
                 </a:solidFill>
-                <a:latin typeface="Meiryo" pitchFamily="34" charset="0"/>
-                <a:ea typeface="Meiryo" pitchFamily="34" charset="-122"/>
-                <a:cs typeface="Meiryo" pitchFamily="34" charset="-120"/>
-              </a:rPr>
-              <a:t>自分の外に被害が拡がる</a:t>
-            </a:r>
-            <a:endParaRPr lang="en-US" sz="1100"/>
+                <a:latin typeface="Meiryo"/>
+                <a:ea typeface="Meiryo"/>
+                <a:cs typeface="Meiryo"/>
+              </a:rPr>
+              <a:t>被害がエージェントの外へ拡がる</a:t>
+            </a:r>
           </a:p>
         </p:txBody>
       </p:sp>
@@ -10574,7 +11092,7 @@
         <p:spPr>
           <a:xfrm>
             <a:off x="6400800" y="2834640"/>
-            <a:ext cx="2148840" cy="1188720"/>
+            <a:ext cx="2560320" cy="1188720"/>
           </a:xfrm>
           <a:prstGeom prst="rect">
             <a:avLst/>
@@ -10594,17 +11112,16 @@
               <a:buChar char="■"/>
             </a:pPr>
             <a:r>
-              <a:rPr lang="en-US" sz="1200">
+              <a:rPr lang="ja-JP" sz="1200">
                 <a:solidFill>
                   <a:srgbClr val="2D3748"/>
                 </a:solidFill>
-                <a:latin typeface="Meiryo" pitchFamily="34" charset="0"/>
-                <a:ea typeface="Meiryo" pitchFamily="34" charset="-122"/>
-                <a:cs typeface="Meiryo" pitchFamily="34" charset="-120"/>
+                <a:latin typeface="Meiryo"/>
+                <a:ea typeface="Meiryo"/>
+                <a:cs typeface="Meiryo"/>
               </a:rPr>
               <a:t>踏み台化（社内他端末へ）</a:t>
             </a:r>
-            <a:endParaRPr lang="en-US" sz="1200"/>
           </a:p>
           <a:p>
             <a:pPr marL="342900" indent="-342900">
@@ -10615,17 +11132,16 @@
               <a:buChar char="■"/>
             </a:pPr>
             <a:r>
-              <a:rPr lang="en-US" sz="1200">
+              <a:rPr lang="ja-JP" sz="1200">
                 <a:solidFill>
                   <a:srgbClr val="2D3748"/>
                 </a:solidFill>
-                <a:latin typeface="Meiryo" pitchFamily="34" charset="0"/>
-                <a:ea typeface="Meiryo" pitchFamily="34" charset="-122"/>
-                <a:cs typeface="Meiryo" pitchFamily="34" charset="-120"/>
-              </a:rPr>
-              <a:t>クラウドIAMの暴走</a:t>
-            </a:r>
-            <a:endParaRPr lang="en-US" sz="1200"/>
+                <a:latin typeface="Meiryo"/>
+                <a:ea typeface="Meiryo"/>
+                <a:cs typeface="Meiryo"/>
+              </a:rPr>
+              <a:t>クラウドの権限（IAM）の暴走</a:t>
+            </a:r>
           </a:p>
           <a:p>
             <a:pPr marL="342900" indent="-342900">
@@ -10636,17 +11152,16 @@
               <a:buChar char="■"/>
             </a:pPr>
             <a:r>
-              <a:rPr lang="en-US" sz="1200">
+              <a:rPr lang="ja-JP" sz="1200">
                 <a:solidFill>
                   <a:srgbClr val="2D3748"/>
                 </a:solidFill>
-                <a:latin typeface="Meiryo" pitchFamily="34" charset="0"/>
-                <a:ea typeface="Meiryo" pitchFamily="34" charset="-122"/>
-                <a:cs typeface="Meiryo" pitchFamily="34" charset="-120"/>
+                <a:latin typeface="Meiryo"/>
+                <a:ea typeface="Meiryo"/>
+                <a:cs typeface="Meiryo"/>
               </a:rPr>
               <a:t>課金爆発・他サービス侵害</a:t>
             </a:r>
-            <a:endParaRPr lang="en-US" sz="1200"/>
           </a:p>
         </p:txBody>
       </p:sp>
@@ -10658,7 +11173,7 @@
         </p:nvSpPr>
         <p:spPr>
           <a:xfrm>
-            <a:off x="457200" y="4480560"/>
+            <a:off x="457200" y="4453122"/>
             <a:ext cx="8229600" cy="502920"/>
           </a:xfrm>
           <a:prstGeom prst="rect">
@@ -10690,8 +11205,8 @@
         </p:nvSpPr>
         <p:spPr>
           <a:xfrm>
-            <a:off x="594360" y="4480560"/>
-            <a:ext cx="7955280" cy="502920"/>
+            <a:off x="594360" y="4471410"/>
+            <a:ext cx="8092440" cy="502920"/>
           </a:xfrm>
           <a:prstGeom prst="rect">
             <a:avLst/>
@@ -10707,7 +11222,7 @@
               <a:buNone/>
             </a:pPr>
             <a:r>
-              <a:rPr lang="en-US" sz="1200">
+              <a:rPr lang="en-US" sz="1200" dirty="0">
                 <a:solidFill>
                   <a:srgbClr val="CADCFC"/>
                 </a:solidFill>
@@ -10718,7 +11233,7 @@
               <a:t>この3カテゴリは、第3回「基本ガード」の </a:t>
             </a:r>
             <a:r>
-              <a:rPr lang="en-US" sz="1200" b="1">
+              <a:rPr lang="en-US" sz="1200" b="1" dirty="0" err="1">
                 <a:solidFill>
                   <a:srgbClr val="FFFFFF"/>
                 </a:solidFill>
@@ -10726,24 +11241,40 @@
                 <a:ea typeface="Meiryo" pitchFamily="34" charset="-122"/>
                 <a:cs typeface="Meiryo" pitchFamily="34" charset="-120"/>
               </a:rPr>
-              <a:t>CLAUDE.md / Permission / Hooks </a:t>
-            </a:r>
-            <a:r>
-              <a:rPr lang="en-US" sz="1200">
-                <a:solidFill>
-                  <a:srgbClr val="CADCFC"/>
+              <a:t>CLAUDE.md</a:t>
+            </a:r>
+            <a:r>
+              <a:rPr lang="en-US" sz="1200" b="1" dirty="0">
+                <a:solidFill>
+                  <a:srgbClr val="FFFFFF"/>
                 </a:solidFill>
                 <a:latin typeface="Meiryo" pitchFamily="34" charset="0"/>
                 <a:ea typeface="Meiryo" pitchFamily="34" charset="-122"/>
                 <a:cs typeface="Meiryo" pitchFamily="34" charset="-120"/>
               </a:rPr>
-              <a:t>の3点セットに対応します</a:t>
-            </a:r>
-            <a:endParaRPr lang="en-US" sz="1200"/>
+              <a:t> / Sandbox / Permission / Hooks </a:t>
+            </a:r>
+            <a:r>
+              <a:rPr lang="en-US" sz="1200" dirty="0">
+                <a:solidFill>
+                  <a:srgbClr val="CADCFC"/>
+                </a:solidFill>
+                <a:latin typeface="Meiryo" pitchFamily="34" charset="0"/>
+                <a:ea typeface="Meiryo" pitchFamily="34" charset="-122"/>
+                <a:cs typeface="Meiryo" pitchFamily="34" charset="-120"/>
+              </a:rPr>
+              <a:t>の4点セットで対応</a:t>
+            </a:r>
+            <a:endParaRPr lang="en-US" sz="1200" dirty="0"/>
           </a:p>
         </p:txBody>
       </p:sp>
     </p:spTree>
+    <p:extLst>
+      <p:ext uri="{BB962C8B-B14F-4D97-AF65-F5344CB8AC3E}">
+        <p14:creationId xmlns:p14="http://schemas.microsoft.com/office/powerpoint/2010/main" val="3133227706"/>
+      </p:ext>
+    </p:extLst>
   </p:cSld>
   <p:clrMapOvr>
     <a:masterClrMapping/>
@@ -11045,17 +11576,16 @@
               <a:buNone/>
             </a:pPr>
             <a:r>
-              <a:rPr lang="en-US" sz="1100">
+              <a:rPr lang="ja-JP" sz="1100">
                 <a:solidFill>
                   <a:srgbClr val="CADCFC"/>
                 </a:solidFill>
-                <a:latin typeface="Meiryo" pitchFamily="34" charset="0"/>
-                <a:ea typeface="Meiryo" pitchFamily="34" charset="-122"/>
-                <a:cs typeface="Meiryo" pitchFamily="34" charset="-120"/>
-              </a:rPr>
-              <a:t>動作環境・アカウント・権限を、メイン環境から分離する。</a:t>
-            </a:r>
-            <a:endParaRPr lang="en-US" sz="1100"/>
+                <a:latin typeface="Meiryo"/>
+                <a:ea typeface="Meiryo"/>
+                <a:cs typeface="Meiryo"/>
+              </a:rPr>
+              <a:t>動作環境・アカウント・権限を、普段使うPCやアカウントから分離する。</a:t>
+            </a:r>
           </a:p>
         </p:txBody>
       </p:sp>
@@ -11067,7 +11597,7 @@
         </p:nvSpPr>
         <p:spPr>
           <a:xfrm>
-            <a:off x="640080" y="3520440"/>
+            <a:off x="640080" y="3615033"/>
             <a:ext cx="2331720" cy="502920"/>
           </a:xfrm>
           <a:prstGeom prst="rect">
@@ -11099,7 +11629,7 @@
         </p:nvSpPr>
         <p:spPr>
           <a:xfrm>
-            <a:off x="731520" y="3520440"/>
+            <a:off x="868680" y="3657600"/>
             <a:ext cx="2148840" cy="502920"/>
           </a:xfrm>
           <a:prstGeom prst="rect">
@@ -11116,7 +11646,7 @@
               <a:buNone/>
             </a:pPr>
             <a:r>
-              <a:rPr lang="en-US" sz="1000">
+              <a:rPr lang="en-US" sz="1000" dirty="0">
                 <a:solidFill>
                   <a:srgbClr val="CADCFC"/>
                 </a:solidFill>
@@ -11127,7 +11657,7 @@
               <a:t>第2回で深掘り </a:t>
             </a:r>
             <a:r>
-              <a:rPr lang="en-US" sz="1100" b="1">
+              <a:rPr lang="en-US" sz="1100" b="1" dirty="0">
                 <a:solidFill>
                   <a:srgbClr val="FFFFFF"/>
                 </a:solidFill>
@@ -11135,9 +11665,20 @@
                 <a:ea typeface="Meiryo" pitchFamily="34" charset="-122"/>
                 <a:cs typeface="Meiryo" pitchFamily="34" charset="-120"/>
               </a:rPr>
-              <a:t>▸ 環境</a:t>
-            </a:r>
-            <a:endParaRPr lang="en-US" sz="1000"/>
+              <a:t>▸ </a:t>
+            </a:r>
+            <a:r>
+              <a:rPr lang="en-US" sz="1100" b="1" dirty="0" err="1">
+                <a:solidFill>
+                  <a:srgbClr val="FFFFFF"/>
+                </a:solidFill>
+                <a:latin typeface="Meiryo" pitchFamily="34" charset="0"/>
+                <a:ea typeface="Meiryo" pitchFamily="34" charset="-122"/>
+                <a:cs typeface="Meiryo" pitchFamily="34" charset="-120"/>
+              </a:rPr>
+              <a:t>環境</a:t>
+            </a:r>
+            <a:endParaRPr lang="en-US" sz="1000" dirty="0"/>
           </a:p>
         </p:txBody>
       </p:sp>
@@ -11300,7 +11841,7 @@
               <a:buNone/>
             </a:pPr>
             <a:r>
-              <a:rPr lang="en-US" sz="1100">
+              <a:rPr lang="en-US" sz="1100" dirty="0" err="1">
                 <a:solidFill>
                   <a:srgbClr val="CADCFC"/>
                 </a:solidFill>
@@ -11308,9 +11849,20 @@
                 <a:ea typeface="Meiryo" pitchFamily="34" charset="-122"/>
                 <a:cs typeface="Meiryo" pitchFamily="34" charset="-120"/>
               </a:rPr>
-              <a:t>悪意あるものを入れない、意図しない操作を止める。</a:t>
-            </a:r>
-            <a:endParaRPr lang="en-US" sz="1100"/>
+              <a:t>悪意あるものを入れない、意図しない操作を止める</a:t>
+            </a:r>
+            <a:r>
+              <a:rPr lang="en-US" sz="1100" dirty="0">
+                <a:solidFill>
+                  <a:srgbClr val="CADCFC"/>
+                </a:solidFill>
+                <a:latin typeface="Meiryo" pitchFamily="34" charset="0"/>
+                <a:ea typeface="Meiryo" pitchFamily="34" charset="-122"/>
+                <a:cs typeface="Meiryo" pitchFamily="34" charset="-120"/>
+              </a:rPr>
+              <a:t>。</a:t>
+            </a:r>
+            <a:endParaRPr lang="en-US" sz="1100" dirty="0"/>
           </a:p>
         </p:txBody>
       </p:sp>
@@ -11322,7 +11874,7 @@
         </p:nvSpPr>
         <p:spPr>
           <a:xfrm>
-            <a:off x="3474720" y="3520440"/>
+            <a:off x="3474720" y="3634740"/>
             <a:ext cx="2331720" cy="502920"/>
           </a:xfrm>
           <a:prstGeom prst="rect">
@@ -11354,7 +11906,7 @@
         </p:nvSpPr>
         <p:spPr>
           <a:xfrm>
-            <a:off x="3566160" y="3520440"/>
+            <a:off x="3566160" y="3657600"/>
             <a:ext cx="2148840" cy="502920"/>
           </a:xfrm>
           <a:prstGeom prst="rect">
@@ -11371,7 +11923,7 @@
               <a:buNone/>
             </a:pPr>
             <a:r>
-              <a:rPr lang="en-US" sz="1000">
+              <a:rPr lang="en-US" sz="1000" dirty="0">
                 <a:solidFill>
                   <a:srgbClr val="CADCFC"/>
                 </a:solidFill>
@@ -11382,7 +11934,7 @@
               <a:t>第3回で深掘り </a:t>
             </a:r>
             <a:r>
-              <a:rPr lang="en-US" sz="1100" b="1">
+              <a:rPr lang="en-US" sz="1100" b="1" dirty="0">
                 <a:solidFill>
                   <a:srgbClr val="FFFFFF"/>
                 </a:solidFill>
@@ -11390,9 +11942,20 @@
                 <a:ea typeface="Meiryo" pitchFamily="34" charset="-122"/>
                 <a:cs typeface="Meiryo" pitchFamily="34" charset="-120"/>
               </a:rPr>
-              <a:t>▸ 基本ガード</a:t>
-            </a:r>
-            <a:endParaRPr lang="en-US" sz="1000"/>
+              <a:t>▸ </a:t>
+            </a:r>
+            <a:r>
+              <a:rPr lang="en-US" sz="1100" b="1" dirty="0" err="1">
+                <a:solidFill>
+                  <a:srgbClr val="FFFFFF"/>
+                </a:solidFill>
+                <a:latin typeface="Meiryo" pitchFamily="34" charset="0"/>
+                <a:ea typeface="Meiryo" pitchFamily="34" charset="-122"/>
+                <a:cs typeface="Meiryo" pitchFamily="34" charset="-120"/>
+              </a:rPr>
+              <a:t>基本ガード</a:t>
+            </a:r>
+            <a:endParaRPr lang="en-US" sz="1000" dirty="0"/>
           </a:p>
         </p:txBody>
       </p:sp>
@@ -11555,17 +12118,16 @@
               <a:buNone/>
             </a:pPr>
             <a:r>
-              <a:rPr lang="en-US" sz="1100">
+              <a:rPr lang="ja-JP" sz="1100">
                 <a:solidFill>
                   <a:srgbClr val="CADCFC"/>
                 </a:solidFill>
-                <a:latin typeface="Meiryo" pitchFamily="34" charset="0"/>
-                <a:ea typeface="Meiryo" pitchFamily="34" charset="-122"/>
-                <a:cs typeface="Meiryo" pitchFamily="34" charset="-120"/>
-              </a:rPr>
-              <a:t>エージェントの行動ログを記録し、監査・評価できる状態にする。</a:t>
-            </a:r>
-            <a:endParaRPr lang="en-US" sz="1100"/>
+                <a:latin typeface="Meiryo"/>
+                <a:ea typeface="Meiryo"/>
+                <a:cs typeface="Meiryo"/>
+              </a:rPr>
+              <a:t>エージェントの行動ログを記録し、あとから何をしたか追える状態にする。</a:t>
+            </a:r>
           </a:p>
         </p:txBody>
       </p:sp>
@@ -11577,7 +12139,7 @@
         </p:nvSpPr>
         <p:spPr>
           <a:xfrm>
-            <a:off x="6309360" y="3520440"/>
+            <a:off x="6309360" y="3615033"/>
             <a:ext cx="2331720" cy="502920"/>
           </a:xfrm>
           <a:prstGeom prst="rect">
@@ -11609,7 +12171,7 @@
         </p:nvSpPr>
         <p:spPr>
           <a:xfrm>
-            <a:off x="6400800" y="3520440"/>
+            <a:off x="6400800" y="3634740"/>
             <a:ext cx="2148840" cy="502920"/>
           </a:xfrm>
           <a:prstGeom prst="rect">
@@ -11626,7 +12188,7 @@
               <a:buNone/>
             </a:pPr>
             <a:r>
-              <a:rPr lang="en-US" sz="1000">
+              <a:rPr lang="en-US" sz="1000" dirty="0">
                 <a:solidFill>
                   <a:srgbClr val="CADCFC"/>
                 </a:solidFill>
@@ -11637,7 +12199,7 @@
               <a:t>第6回で深掘り </a:t>
             </a:r>
             <a:r>
-              <a:rPr lang="en-US" sz="1100" b="1">
+              <a:rPr lang="en-US" sz="1100" b="1" dirty="0">
                 <a:solidFill>
                   <a:srgbClr val="FFFFFF"/>
                 </a:solidFill>
@@ -11645,45 +12207,78 @@
                 <a:ea typeface="Meiryo" pitchFamily="34" charset="-122"/>
                 <a:cs typeface="Meiryo" pitchFamily="34" charset="-120"/>
               </a:rPr>
-              <a:t>▸ ログ / トレース</a:t>
-            </a:r>
-            <a:endParaRPr lang="en-US" sz="1000"/>
-          </a:p>
-        </p:txBody>
-      </p:sp>
-      <p:sp>
-        <p:nvSpPr>
-          <p:cNvPr id="26" name="Text 21"/>
-          <p:cNvSpPr/>
-          <p:nvPr/>
-        </p:nvSpPr>
-        <p:spPr>
-          <a:xfrm>
-            <a:off x="457200" y="4709160"/>
-            <a:ext cx="8229600" cy="228600"/>
-          </a:xfrm>
-          <a:prstGeom prst="rect">
-            <a:avLst/>
-          </a:prstGeom>
-          <a:noFill/>
-          <a:ln/>
-        </p:spPr>
-        <p:txBody>
-          <a:bodyPr wrap="square" lIns="0" tIns="0" rIns="0" bIns="0" rtlCol="0" anchor="ctr"/>
-          <a:lstStyle/>
-          <a:p>
-            <a:pPr marL="0" indent="0">
-              <a:buNone/>
-            </a:pPr>
-            <a:r>
-              <a:rPr lang="en-US" sz="900" i="1">
-                <a:solidFill>
-                  <a:srgbClr val="64748B"/>
+              <a:t>▸ </a:t>
+            </a:r>
+            <a:r>
+              <a:rPr lang="en-US" sz="1100" b="1" dirty="0" err="1">
+                <a:solidFill>
+                  <a:srgbClr val="FFFFFF"/>
                 </a:solidFill>
                 <a:latin typeface="Meiryo" pitchFamily="34" charset="0"/>
                 <a:ea typeface="Meiryo" pitchFamily="34" charset="-122"/>
                 <a:cs typeface="Meiryo" pitchFamily="34" charset="-120"/>
               </a:rPr>
+              <a:t>ログ</a:t>
+            </a:r>
+            <a:r>
+              <a:rPr lang="en-US" sz="1100" b="1" dirty="0">
+                <a:solidFill>
+                  <a:srgbClr val="FFFFFF"/>
+                </a:solidFill>
+                <a:latin typeface="Meiryo" pitchFamily="34" charset="0"/>
+                <a:ea typeface="Meiryo" pitchFamily="34" charset="-122"/>
+                <a:cs typeface="Meiryo" pitchFamily="34" charset="-120"/>
+              </a:rPr>
+              <a:t> / </a:t>
+            </a:r>
+            <a:r>
+              <a:rPr lang="en-US" sz="1100" b="1" dirty="0" err="1">
+                <a:solidFill>
+                  <a:srgbClr val="FFFFFF"/>
+                </a:solidFill>
+                <a:latin typeface="Meiryo" pitchFamily="34" charset="0"/>
+                <a:ea typeface="Meiryo" pitchFamily="34" charset="-122"/>
+                <a:cs typeface="Meiryo" pitchFamily="34" charset="-120"/>
+              </a:rPr>
+              <a:t>トレース</a:t>
+            </a:r>
+            <a:endParaRPr lang="en-US" sz="1000" dirty="0"/>
+          </a:p>
+        </p:txBody>
+      </p:sp>
+      <p:sp>
+        <p:nvSpPr>
+          <p:cNvPr id="26" name="Text 21"/>
+          <p:cNvSpPr/>
+          <p:nvPr/>
+        </p:nvSpPr>
+        <p:spPr>
+          <a:xfrm>
+            <a:off x="457200" y="4709160"/>
+            <a:ext cx="8229600" cy="228600"/>
+          </a:xfrm>
+          <a:prstGeom prst="rect">
+            <a:avLst/>
+          </a:prstGeom>
+          <a:noFill/>
+          <a:ln/>
+        </p:spPr>
+        <p:txBody>
+          <a:bodyPr wrap="square" lIns="0" tIns="0" rIns="0" bIns="0" rtlCol="0" anchor="ctr"/>
+          <a:lstStyle/>
+          <a:p>
+            <a:pPr marL="0" indent="0">
+              <a:buNone/>
+            </a:pPr>
+            <a:r>
+              <a:rPr lang="en-US" sz="900" i="1">
+                <a:solidFill>
+                  <a:srgbClr val="64748B"/>
+                </a:solidFill>
+                <a:latin typeface="Meiryo" pitchFamily="34" charset="0"/>
+                <a:ea typeface="Meiryo" pitchFamily="34" charset="-122"/>
+                <a:cs typeface="Meiryo" pitchFamily="34" charset="-120"/>
+              </a:rPr>
               <a:t>出典: GMOフラットセキュリティ CTO 米氏 対談より ／ ※3原則の概念は米氏対談、順序は本シリーズの構成上の都合で入れ替え</a:t>
             </a:r>
             <a:endParaRPr lang="en-US" sz="900"/>
@@ -11691,6 +12286,11 @@
         </p:txBody>
       </p:sp>
     </p:spTree>
+    <p:extLst>
+      <p:ext uri="{BB962C8B-B14F-4D97-AF65-F5344CB8AC3E}">
+        <p14:creationId xmlns:p14="http://schemas.microsoft.com/office/powerpoint/2010/main" val="2479984723"/>
+      </p:ext>
+    </p:extLst>
   </p:cSld>
   <p:clrMapOvr>
     <a:masterClrMapping/>
@@ -11946,17 +12546,16 @@
               <a:buNone/>
             </a:pPr>
             <a:r>
-              <a:rPr lang="en-US" sz="1500" b="1">
+              <a:rPr lang="ja-JP" sz="1400" b="1">
                 <a:solidFill>
                   <a:srgbClr val="1E2761"/>
                 </a:solidFill>
-                <a:latin typeface="Meiryo" pitchFamily="34" charset="0"/>
-                <a:ea typeface="Meiryo" pitchFamily="34" charset="-122"/>
-                <a:cs typeface="Meiryo" pitchFamily="34" charset="-120"/>
-              </a:rPr>
-              <a:t>サプライチェーン</a:t>
-            </a:r>
-            <a:endParaRPr lang="en-US" sz="1500"/>
+                <a:latin typeface="Meiryo"/>
+                <a:ea typeface="Meiryo"/>
+                <a:cs typeface="Meiryo"/>
+              </a:rPr>
+              <a:t>汚染されたパッケージ</a:t>
+            </a:r>
           </a:p>
         </p:txBody>
       </p:sp>
@@ -12096,17 +12695,16 @@
               <a:buNone/>
             </a:pPr>
             <a:r>
-              <a:rPr lang="en-US" sz="1050">
+              <a:rPr lang="ja-JP" sz="1050">
                 <a:solidFill>
                   <a:srgbClr val="2D3748"/>
                 </a:solidFill>
-                <a:latin typeface="Meiryo" pitchFamily="34" charset="0"/>
-                <a:ea typeface="Meiryo" pitchFamily="34" charset="-122"/>
-                <a:cs typeface="Meiryo" pitchFamily="34" charset="-120"/>
-              </a:rPr>
-              <a:t>installしたら最後：ブラウザのログイン情報・APIキー・SSH鍵が丸ごと抜かれる。</a:t>
-            </a:r>
-            <a:endParaRPr lang="en-US" sz="1050"/>
+                <a:latin typeface="Meiryo"/>
+                <a:ea typeface="Meiryo"/>
+                <a:cs typeface="Meiryo"/>
+              </a:rPr>
+              <a:t>一度入れてしまうと、ブラウザのログイン情報・APIキー・SSH鍵が丸ごと抜かれる。</a:t>
+            </a:r>
           </a:p>
           <a:p>
             <a:pPr marL="0" indent="0">
@@ -12116,17 +12714,16 @@
               <a:buNone/>
             </a:pPr>
             <a:r>
-              <a:rPr lang="en-US" sz="1050">
+              <a:rPr lang="ja-JP" sz="1050">
                 <a:solidFill>
                   <a:srgbClr val="2D3748"/>
                 </a:solidFill>
-                <a:latin typeface="Meiryo" pitchFamily="34" charset="0"/>
-                <a:ea typeface="Meiryo" pitchFamily="34" charset="-122"/>
-                <a:cs typeface="Meiryo" pitchFamily="34" charset="-120"/>
+                <a:latin typeface="Meiryo"/>
+                <a:ea typeface="Meiryo"/>
+                <a:cs typeface="Meiryo"/>
               </a:rPr>
               <a:t>2段階認証も、エージェントがブラウザ自動操作できれば突破される。</a:t>
             </a:r>
-            <a:endParaRPr lang="en-US" sz="1050"/>
           </a:p>
         </p:txBody>
       </p:sp>
@@ -12243,17 +12840,16 @@
               <a:buNone/>
             </a:pPr>
             <a:r>
-              <a:rPr lang="en-US" sz="1500" b="1">
+              <a:rPr lang="ja-JP" sz="1400" b="1">
                 <a:solidFill>
                   <a:srgbClr val="1E2761"/>
                 </a:solidFill>
-                <a:latin typeface="Meiryo" pitchFamily="34" charset="0"/>
-                <a:ea typeface="Meiryo" pitchFamily="34" charset="-122"/>
-                <a:cs typeface="Meiryo" pitchFamily="34" charset="-120"/>
-              </a:rPr>
-              <a:t>低信頼ライブラリ</a:t>
-            </a:r>
-            <a:endParaRPr lang="en-US" sz="1500"/>
+                <a:latin typeface="Meiryo"/>
+                <a:ea typeface="Meiryo"/>
+                <a:cs typeface="Meiryo"/>
+              </a:rPr>
+              <a:t>信頼性の低いライブラリ</a:t>
+            </a:r>
           </a:p>
         </p:txBody>
       </p:sp>
@@ -12282,17 +12878,16 @@
               <a:buNone/>
             </a:pPr>
             <a:r>
-              <a:rPr lang="en-US" sz="1700" b="1">
+              <a:rPr lang="ja-JP" sz="1500" b="1">
                 <a:solidFill>
                   <a:srgbClr val="F96167"/>
                 </a:solidFill>
-                <a:latin typeface="Arial Black" pitchFamily="34" charset="0"/>
-                <a:ea typeface="Arial Black" pitchFamily="34" charset="-122"/>
-                <a:cs typeface="Arial Black" pitchFamily="34" charset="-120"/>
-              </a:rPr>
-              <a:t>★数・ランキング</a:t>
-            </a:r>
-            <a:endParaRPr lang="en-US" sz="1700"/>
+                <a:latin typeface="Arial Black"/>
+                <a:ea typeface="Meiryo"/>
+                <a:cs typeface="Meiryo"/>
+              </a:rPr>
+              <a:t>★数やランキングは操作できる</a:t>
+            </a:r>
           </a:p>
         </p:txBody>
       </p:sp>
@@ -12321,17 +12916,16 @@
               <a:buNone/>
             </a:pPr>
             <a:r>
-              <a:rPr lang="en-US" sz="1000" i="1">
+              <a:rPr lang="ja-JP" sz="1100">
                 <a:solidFill>
                   <a:srgbClr val="64748B"/>
                 </a:solidFill>
-                <a:latin typeface="Meiryo" pitchFamily="34" charset="0"/>
-                <a:ea typeface="Meiryo" pitchFamily="34" charset="-122"/>
-                <a:cs typeface="Meiryo" pitchFamily="34" charset="-120"/>
-              </a:rPr>
-              <a:t>は操作可能</a:t>
-            </a:r>
-            <a:endParaRPr lang="en-US" sz="1000"/>
+                <a:latin typeface="Meiryo"/>
+                <a:ea typeface="Meiryo"/>
+                <a:cs typeface="Meiryo"/>
+              </a:rPr>
+              <a:t>人気指標は信用しすぎない</a:t>
+            </a:r>
           </a:p>
         </p:txBody>
       </p:sp>
@@ -12520,17 +13114,16 @@
               <a:buNone/>
             </a:pPr>
             <a:r>
-              <a:rPr lang="en-US" sz="1500" b="1">
+              <a:rPr lang="ja-JP" sz="1400" b="1">
                 <a:solidFill>
                   <a:srgbClr val="1E2761"/>
                 </a:solidFill>
-                <a:latin typeface="Meiryo" pitchFamily="34" charset="0"/>
-                <a:ea typeface="Meiryo" pitchFamily="34" charset="-122"/>
-                <a:cs typeface="Meiryo" pitchFamily="34" charset="-120"/>
-              </a:rPr>
-              <a:t>悪意あるスキル</a:t>
-            </a:r>
-            <a:endParaRPr lang="en-US" sz="1500"/>
+                <a:latin typeface="Meiryo"/>
+                <a:ea typeface="Meiryo"/>
+                <a:cs typeface="Meiryo"/>
+              </a:rPr>
+              <a:t>悪意あるスキル/プラグイン</a:t>
+            </a:r>
           </a:p>
         </p:txBody>
       </p:sp>
@@ -12559,17 +13152,16 @@
               <a:buNone/>
             </a:pPr>
             <a:r>
-              <a:rPr lang="en-US" sz="1700" b="1">
+              <a:rPr lang="ja-JP" sz="1500" b="1">
                 <a:solidFill>
                   <a:srgbClr val="F96167"/>
                 </a:solidFill>
-                <a:latin typeface="Arial Black" pitchFamily="34" charset="0"/>
-                <a:ea typeface="Arial Black" pitchFamily="34" charset="-122"/>
-                <a:cs typeface="Arial Black" pitchFamily="34" charset="-120"/>
-              </a:rPr>
-              <a:t>プロンプト注入</a:t>
-            </a:r>
-            <a:endParaRPr lang="en-US" sz="1700"/>
+                <a:latin typeface="Arial Black"/>
+                <a:ea typeface="Meiryo"/>
+                <a:cs typeface="Meiryo"/>
+              </a:rPr>
+              <a:t>プロンプトインジェクション</a:t>
+            </a:r>
           </a:p>
         </p:txBody>
       </p:sp>
@@ -12598,17 +13190,16 @@
               <a:buNone/>
             </a:pPr>
             <a:r>
-              <a:rPr lang="en-US" sz="1000" i="1">
+              <a:rPr lang="ja-JP" sz="1100">
                 <a:solidFill>
                   <a:srgbClr val="64748B"/>
                 </a:solidFill>
-                <a:latin typeface="Meiryo" pitchFamily="34" charset="0"/>
-                <a:ea typeface="Meiryo" pitchFamily="34" charset="-122"/>
-                <a:cs typeface="Meiryo" pitchFamily="34" charset="-120"/>
+                <a:latin typeface="Meiryo"/>
+                <a:ea typeface="Meiryo"/>
+                <a:cs typeface="Meiryo"/>
               </a:rPr>
               <a:t>を仕込まれたスキル</a:t>
             </a:r>
-            <a:endParaRPr lang="en-US" sz="1000"/>
           </a:p>
         </p:txBody>
       </p:sp>
@@ -12737,11 +13328,8 @@
           <a:bodyPr wrap="square" lIns="0" tIns="0" rIns="0" bIns="0" rtlCol="0" anchor="ctr"/>
           <a:lstStyle/>
           <a:p>
-            <a:pPr marL="0" indent="0">
-              <a:buNone/>
-            </a:pPr>
-            <a:r>
-              <a:rPr lang="en-US" sz="1100" b="1">
+            <a:r>
+              <a:rPr lang="en-US" sz="1100" b="1" dirty="0" err="1">
                 <a:solidFill>
                   <a:srgbClr val="F96167"/>
                 </a:solidFill>
@@ -12749,32 +13337,21 @@
                 <a:ea typeface="Meiryo" pitchFamily="34" charset="-122"/>
                 <a:cs typeface="Meiryo" pitchFamily="34" charset="-120"/>
               </a:rPr>
-              <a:t>対策 ▸ </a:t>
-            </a:r>
-            <a:r>
-              <a:rPr lang="en-US" sz="1100">
-                <a:solidFill>
-                  <a:srgbClr val="CADCFC"/>
+              <a:t>対策</a:t>
+            </a:r>
+            <a:r>
+              <a:rPr lang="en-US" sz="1100" b="1" dirty="0">
+                <a:solidFill>
+                  <a:srgbClr val="F96167"/>
                 </a:solidFill>
                 <a:latin typeface="Meiryo" pitchFamily="34" charset="0"/>
                 <a:ea typeface="Meiryo" pitchFamily="34" charset="-122"/>
                 <a:cs typeface="Meiryo" pitchFamily="34" charset="-120"/>
               </a:rPr>
-              <a:t>第3回の Deny ルール / パッケージ </a:t>
-            </a:r>
-            <a:r>
-              <a:rPr lang="en-US" sz="1100" b="1">
-                <a:solidFill>
-                  <a:srgbClr val="FFFFFF"/>
-                </a:solidFill>
-                <a:latin typeface="Consolas" pitchFamily="34" charset="0"/>
-                <a:ea typeface="Consolas" pitchFamily="34" charset="-122"/>
-                <a:cs typeface="Consolas" pitchFamily="34" charset="-120"/>
-              </a:rPr>
-              <a:t>minimumReleaseAge </a:t>
-            </a:r>
-            <a:r>
-              <a:rPr lang="en-US" sz="1100">
+              <a:t> ▸ </a:t>
+            </a:r>
+            <a:r>
+              <a:rPr lang="en-US" altLang="ja-JP" sz="1100" dirty="0">
                 <a:solidFill>
                   <a:srgbClr val="CADCFC"/>
                 </a:solidFill>
@@ -12782,9 +13359,86 @@
                 <a:ea typeface="Meiryo" pitchFamily="34" charset="-122"/>
                 <a:cs typeface="Meiryo" pitchFamily="34" charset="-120"/>
               </a:rPr>
-              <a:t>でクールダウン</a:t>
-            </a:r>
-            <a:endParaRPr lang="en-US" sz="1100"/>
+              <a:t>第3回「基本ガード」 </a:t>
+            </a:r>
+            <a:r>
+              <a:rPr lang="en-US" sz="1100" dirty="0" err="1">
+                <a:solidFill>
+                  <a:srgbClr val="CADCFC"/>
+                </a:solidFill>
+                <a:latin typeface="Meiryo" pitchFamily="34" charset="0"/>
+                <a:ea typeface="Meiryo" pitchFamily="34" charset="-122"/>
+                <a:cs typeface="Meiryo" pitchFamily="34" charset="-120"/>
+              </a:rPr>
+              <a:t>の</a:t>
+            </a:r>
+            <a:r>
+              <a:rPr lang="en-US" sz="1100" dirty="0">
+                <a:solidFill>
+                  <a:srgbClr val="CADCFC"/>
+                </a:solidFill>
+                <a:latin typeface="Meiryo" pitchFamily="34" charset="0"/>
+                <a:ea typeface="Meiryo" pitchFamily="34" charset="-122"/>
+                <a:cs typeface="Meiryo" pitchFamily="34" charset="-120"/>
+              </a:rPr>
+              <a:t> Deny </a:t>
+            </a:r>
+            <a:r>
+              <a:rPr lang="en-US" sz="1100" dirty="0" err="1">
+                <a:solidFill>
+                  <a:srgbClr val="CADCFC"/>
+                </a:solidFill>
+                <a:latin typeface="Meiryo" pitchFamily="34" charset="0"/>
+                <a:ea typeface="Meiryo" pitchFamily="34" charset="-122"/>
+                <a:cs typeface="Meiryo" pitchFamily="34" charset="-120"/>
+              </a:rPr>
+              <a:t>ルール</a:t>
+            </a:r>
+            <a:r>
+              <a:rPr lang="en-US" sz="1100" dirty="0">
+                <a:solidFill>
+                  <a:srgbClr val="CADCFC"/>
+                </a:solidFill>
+                <a:latin typeface="Meiryo" pitchFamily="34" charset="0"/>
+                <a:ea typeface="Meiryo" pitchFamily="34" charset="-122"/>
+                <a:cs typeface="Meiryo" pitchFamily="34" charset="-120"/>
+              </a:rPr>
+              <a:t> / Hooks / </a:t>
+            </a:r>
+            <a:r>
+              <a:rPr lang="en-US" sz="1100" dirty="0" err="1">
+                <a:solidFill>
+                  <a:srgbClr val="CADCFC"/>
+                </a:solidFill>
+                <a:latin typeface="Meiryo" pitchFamily="34" charset="0"/>
+                <a:ea typeface="Meiryo" pitchFamily="34" charset="-122"/>
+                <a:cs typeface="Meiryo" pitchFamily="34" charset="-120"/>
+              </a:rPr>
+              <a:t>パッケージ</a:t>
+            </a:r>
+            <a:r>
+              <a:rPr lang="en-US" sz="1100" dirty="0">
+                <a:solidFill>
+                  <a:srgbClr val="CADCFC"/>
+                </a:solidFill>
+                <a:latin typeface="Meiryo" pitchFamily="34" charset="0"/>
+                <a:ea typeface="Meiryo" pitchFamily="34" charset="-122"/>
+                <a:cs typeface="Meiryo" pitchFamily="34" charset="-120"/>
+              </a:rPr>
+              <a:t> </a:t>
+            </a:r>
+            <a:r>
+              <a:rPr lang="en-US" sz="1100" dirty="0" err="1">
+                <a:solidFill>
+                  <a:srgbClr val="CADCFC"/>
+                </a:solidFill>
+                <a:latin typeface="Meiryo" pitchFamily="34" charset="0"/>
+                <a:ea typeface="Meiryo" pitchFamily="34" charset="-122"/>
+                <a:cs typeface="Meiryo" pitchFamily="34" charset="-120"/>
+              </a:rPr>
+              <a:t>クールダウン</a:t>
+            </a:r>
+            <a:endParaRPr lang="en-US" sz="1100" dirty="0"/>
           </a:p>
         </p:txBody>
       </p:sp>
@@ -12828,6 +13482,11 @@
         </p:txBody>
       </p:sp>
     </p:spTree>
+    <p:extLst>
+      <p:ext uri="{BB962C8B-B14F-4D97-AF65-F5344CB8AC3E}">
+        <p14:creationId xmlns:p14="http://schemas.microsoft.com/office/powerpoint/2010/main" val="1657981999"/>
+      </p:ext>
+    </p:extLst>
   </p:cSld>
   <p:clrMapOvr>
     <a:masterClrMapping/>
@@ -13149,23 +13808,19 @@
           <a:lstStyle/>
           <a:p>
             <a:pPr marL="0" indent="0">
-              <a:spcAft>
-                <a:spcPts val="300"/>
-              </a:spcAft>
-              <a:buNone/>
-            </a:pPr>
-            <a:r>
-              <a:rPr lang="en-US" sz="1100">
+              <a:buNone/>
+            </a:pPr>
+            <a:r>
+              <a:rPr lang="ja-JP" sz="1100">
                 <a:solidFill>
                   <a:srgbClr val="2D3748"/>
                 </a:solidFill>
-                <a:latin typeface="Meiryo" pitchFamily="34" charset="0"/>
-                <a:ea typeface="Meiryo" pitchFamily="34" charset="-122"/>
-                <a:cs typeface="Meiryo" pitchFamily="34" charset="-120"/>
-              </a:rPr>
-              <a:t>エージェントが rm -rf を実行しても、非エンジニアには意味が分からない。Google Drive / SaaS に権限を渡すと、ファイルを勝手に書き換えるリスク。</a:t>
-            </a:r>
-            <a:endParaRPr lang="en-US" sz="1100"/>
+                <a:latin typeface="Meiryo"/>
+                <a:ea typeface="Meiryo"/>
+                <a:cs typeface="Meiryo"/>
+              </a:rPr>
+              <a:t>エージェントが rm -rf（再帰削除コマンド）を実行しても、非エンジニアには意味が分からない。Google Drive / SaaS に権限を渡すと、ファイルを勝手に書き換えるリスク。</a:t>
+            </a:r>
           </a:p>
         </p:txBody>
       </p:sp>
@@ -13348,23 +14003,19 @@
           <a:lstStyle/>
           <a:p>
             <a:pPr marL="0" indent="0">
-              <a:spcAft>
-                <a:spcPts val="300"/>
-              </a:spcAft>
-              <a:buNone/>
-            </a:pPr>
-            <a:r>
-              <a:rPr lang="en-US" sz="1100">
+              <a:buNone/>
+            </a:pPr>
+            <a:r>
+              <a:rPr lang="ja-JP" sz="1100">
                 <a:solidFill>
                   <a:srgbClr val="2D3748"/>
                 </a:solidFill>
-                <a:latin typeface="Meiryo" pitchFamily="34" charset="0"/>
-                <a:ea typeface="Meiryo" pitchFamily="34" charset="-122"/>
-                <a:cs typeface="Meiryo" pitchFamily="34" charset="-120"/>
-              </a:rPr>
-              <a:t>Web検索・Fetch を通じて、社内情報を外部送信してしまうケース。許可ドメイン制がないと、機密情報がどこへ流れるか追跡不能になる。</a:t>
-            </a:r>
-            <a:endParaRPr lang="en-US" sz="1100"/>
+                <a:latin typeface="Meiryo"/>
+                <a:ea typeface="Meiryo"/>
+                <a:cs typeface="Meiryo"/>
+              </a:rPr>
+              <a:t>Web検索やページ取得（Fetch）ツールを通じて、社内情報を外部送信してしまうケース。許可ドメイン制がないと、機密情報がどこへ流れるか追跡不能になる。</a:t>
+            </a:r>
           </a:p>
         </p:txBody>
       </p:sp>
@@ -13547,23 +14198,19 @@
           <a:lstStyle/>
           <a:p>
             <a:pPr marL="0" indent="0">
-              <a:spcAft>
-                <a:spcPts val="300"/>
-              </a:spcAft>
-              <a:buNone/>
-            </a:pPr>
-            <a:r>
-              <a:rPr lang="en-US" sz="1100">
+              <a:buNone/>
+            </a:pPr>
+            <a:r>
+              <a:rPr lang="ja-JP" sz="1100">
                 <a:solidFill>
                   <a:srgbClr val="2D3748"/>
                 </a:solidFill>
-                <a:latin typeface="Meiryo" pitchFamily="34" charset="0"/>
-                <a:ea typeface="Meiryo" pitchFamily="34" charset="-122"/>
-                <a:cs typeface="Meiryo" pitchFamily="34" charset="-120"/>
-              </a:rPr>
-              <a:t>.env / credentials ファイルをエージェントが読む → プロンプト経由で流出。dotenvx + SOPS による .env 暗号化が基本線。</a:t>
-            </a:r>
-            <a:endParaRPr lang="en-US" sz="1100"/>
+                <a:latin typeface="Meiryo"/>
+                <a:ea typeface="Meiryo"/>
+                <a:cs typeface="Meiryo"/>
+              </a:rPr>
+              <a:t>.env / credentials ファイルをエージェントが読む → プロンプト経由で流出。.env ファイルの暗号化（dotenvx + SOPS など）が基本線。</a:t>
+            </a:r>
           </a:p>
         </p:txBody>
       </p:sp>
@@ -13620,11 +14267,8 @@
           <a:bodyPr wrap="square" lIns="0" tIns="0" rIns="0" bIns="0" rtlCol="0" anchor="ctr"/>
           <a:lstStyle/>
           <a:p>
-            <a:pPr marL="0" indent="0">
-              <a:buNone/>
-            </a:pPr>
-            <a:r>
-              <a:rPr lang="en-US" sz="1100" b="1">
+            <a:r>
+              <a:rPr lang="en-US" sz="1100" b="1" dirty="0" err="1">
                 <a:solidFill>
                   <a:srgbClr val="F96167"/>
                 </a:solidFill>
@@ -13632,21 +14276,54 @@
                 <a:ea typeface="Meiryo" pitchFamily="34" charset="-122"/>
                 <a:cs typeface="Meiryo" pitchFamily="34" charset="-120"/>
               </a:rPr>
-              <a:t>対策 ▸ </a:t>
-            </a:r>
-            <a:r>
-              <a:rPr lang="en-US" sz="1100">
-                <a:solidFill>
-                  <a:srgbClr val="CADCFC"/>
+              <a:t>対策</a:t>
+            </a:r>
+            <a:r>
+              <a:rPr lang="en-US" sz="1100" b="1" dirty="0">
+                <a:solidFill>
+                  <a:srgbClr val="F96167"/>
                 </a:solidFill>
                 <a:latin typeface="Meiryo" pitchFamily="34" charset="0"/>
                 <a:ea typeface="Meiryo" pitchFamily="34" charset="-122"/>
                 <a:cs typeface="Meiryo" pitchFamily="34" charset="-120"/>
               </a:rPr>
-              <a:t>第3回の </a:t>
-            </a:r>
-            <a:r>
-              <a:rPr lang="en-US" sz="1100" b="1">
+              <a:t> ▸ </a:t>
+            </a:r>
+            <a:r>
+              <a:rPr lang="en-US" altLang="ja-JP" sz="1100" dirty="0">
+                <a:solidFill>
+                  <a:srgbClr val="CADCFC"/>
+                </a:solidFill>
+                <a:latin typeface="Meiryo" pitchFamily="34" charset="0"/>
+                <a:ea typeface="Meiryo" pitchFamily="34" charset="-122"/>
+                <a:cs typeface="Meiryo" pitchFamily="34" charset="-120"/>
+              </a:rPr>
+              <a:t>第3回「基本ガード」 </a:t>
+            </a:r>
+            <a:r>
+              <a:rPr lang="en-US" sz="1100" dirty="0" err="1">
+                <a:solidFill>
+                  <a:srgbClr val="CADCFC"/>
+                </a:solidFill>
+                <a:latin typeface="Meiryo" pitchFamily="34" charset="0"/>
+                <a:ea typeface="Meiryo" pitchFamily="34" charset="-122"/>
+                <a:cs typeface="Meiryo" pitchFamily="34" charset="-120"/>
+              </a:rPr>
+              <a:t>の</a:t>
+            </a:r>
+            <a:r>
+              <a:rPr lang="en-US" sz="1100" dirty="0">
+                <a:solidFill>
+                  <a:srgbClr val="CADCFC"/>
+                </a:solidFill>
+                <a:latin typeface="Meiryo" pitchFamily="34" charset="0"/>
+                <a:ea typeface="Meiryo" pitchFamily="34" charset="-122"/>
+                <a:cs typeface="Meiryo" pitchFamily="34" charset="-120"/>
+              </a:rPr>
+              <a:t> </a:t>
+            </a:r>
+            <a:r>
+              <a:rPr lang="en-US" sz="1100" b="1" dirty="0">
                 <a:solidFill>
                   <a:srgbClr val="FFFFFF"/>
                 </a:solidFill>
@@ -13657,7 +14334,7 @@
               <a:t>Deny</a:t>
             </a:r>
             <a:r>
-              <a:rPr lang="en-US" sz="1100">
+              <a:rPr lang="en-US" sz="1100" dirty="0">
                 <a:solidFill>
                   <a:srgbClr val="CADCFC"/>
                 </a:solidFill>
@@ -13665,9 +14342,75 @@
                 <a:ea typeface="Meiryo" pitchFamily="34" charset="-122"/>
                 <a:cs typeface="Meiryo" pitchFamily="34" charset="-120"/>
               </a:rPr>
-              <a:t> ルール / 許可ドメインリスト / PreToolUse Hook</a:t>
-            </a:r>
-            <a:endParaRPr lang="en-US" sz="1100"/>
+              <a:t> </a:t>
+            </a:r>
+            <a:r>
+              <a:rPr lang="en-US" sz="1100" dirty="0" err="1">
+                <a:solidFill>
+                  <a:srgbClr val="CADCFC"/>
+                </a:solidFill>
+                <a:latin typeface="Meiryo" pitchFamily="34" charset="0"/>
+                <a:ea typeface="Meiryo" pitchFamily="34" charset="-122"/>
+                <a:cs typeface="Meiryo" pitchFamily="34" charset="-120"/>
+              </a:rPr>
+              <a:t>ルール</a:t>
+            </a:r>
+            <a:r>
+              <a:rPr lang="en-US" sz="1100" dirty="0">
+                <a:solidFill>
+                  <a:srgbClr val="CADCFC"/>
+                </a:solidFill>
+                <a:latin typeface="Meiryo" pitchFamily="34" charset="0"/>
+                <a:ea typeface="Meiryo" pitchFamily="34" charset="-122"/>
+                <a:cs typeface="Meiryo" pitchFamily="34" charset="-120"/>
+              </a:rPr>
+              <a:t> / </a:t>
+            </a:r>
+            <a:r>
+              <a:rPr lang="en-US" sz="1100" dirty="0" err="1">
+                <a:solidFill>
+                  <a:srgbClr val="CADCFC"/>
+                </a:solidFill>
+                <a:latin typeface="Meiryo" pitchFamily="34" charset="0"/>
+                <a:ea typeface="Meiryo" pitchFamily="34" charset="-122"/>
+                <a:cs typeface="Meiryo" pitchFamily="34" charset="-120"/>
+              </a:rPr>
+              <a:t>許可ドメインリスト</a:t>
+            </a:r>
+            <a:r>
+              <a:rPr lang="en-US" sz="1100" dirty="0">
+                <a:solidFill>
+                  <a:srgbClr val="CADCFC"/>
+                </a:solidFill>
+                <a:latin typeface="Meiryo" pitchFamily="34" charset="0"/>
+                <a:ea typeface="Meiryo" pitchFamily="34" charset="-122"/>
+                <a:cs typeface="Meiryo" pitchFamily="34" charset="-120"/>
+              </a:rPr>
+              <a:t> / </a:t>
+            </a:r>
+            <a:r>
+              <a:rPr lang="en-US" sz="1100" dirty="0" err="1">
+                <a:solidFill>
+                  <a:srgbClr val="CADCFC"/>
+                </a:solidFill>
+                <a:latin typeface="Meiryo" pitchFamily="34" charset="0"/>
+                <a:ea typeface="Meiryo" pitchFamily="34" charset="-122"/>
+                <a:cs typeface="Meiryo" pitchFamily="34" charset="-120"/>
+              </a:rPr>
+              <a:t>PreToolUse</a:t>
+            </a:r>
+            <a:r>
+              <a:rPr lang="en-US" sz="1100" dirty="0">
+                <a:solidFill>
+                  <a:srgbClr val="CADCFC"/>
+                </a:solidFill>
+                <a:latin typeface="Meiryo" pitchFamily="34" charset="0"/>
+                <a:ea typeface="Meiryo" pitchFamily="34" charset="-122"/>
+                <a:cs typeface="Meiryo" pitchFamily="34" charset="-120"/>
+              </a:rPr>
+              <a:t> Hook</a:t>
+            </a:r>
+            <a:endParaRPr lang="en-US" sz="1100" dirty="0"/>
           </a:p>
         </p:txBody>
       </p:sp>
@@ -13711,6 +14454,11 @@
         </p:txBody>
       </p:sp>
     </p:spTree>
+    <p:extLst>
+      <p:ext uri="{BB962C8B-B14F-4D97-AF65-F5344CB8AC3E}">
+        <p14:creationId xmlns:p14="http://schemas.microsoft.com/office/powerpoint/2010/main" val="3096795643"/>
+      </p:ext>
+    </p:extLst>
   </p:cSld>
   <p:clrMapOvr>
     <a:masterClrMapping/>
@@ -14001,67 +14749,42 @@
           <a:bodyPr wrap="square" lIns="0" tIns="0" rIns="0" bIns="0" rtlCol="0" anchor="t"/>
           <a:lstStyle/>
           <a:p>
-            <a:pPr marL="342900" indent="-342900">
+            <a:pPr marL="228600" indent="-228600">
               <a:spcAft>
-                <a:spcPts val="400"/>
+                <a:spcPts val="300"/>
               </a:spcAft>
-              <a:buSzPct val="100000"/>
-              <a:buChar char="■"/>
-            </a:pPr>
-            <a:r>
-              <a:rPr lang="en-US" sz="1100">
+              <a:buChar char="●"/>
+            </a:pPr>
+            <a:r>
+              <a:rPr lang="ja-JP" sz="1200">
                 <a:solidFill>
                   <a:srgbClr val="2D3748"/>
                 </a:solidFill>
-                <a:latin typeface="Meiryo" pitchFamily="34" charset="0"/>
-                <a:ea typeface="Meiryo" pitchFamily="34" charset="-122"/>
-                <a:cs typeface="Meiryo" pitchFamily="34" charset="-120"/>
-              </a:rPr>
-              <a:t>自分のPCが侵害される → そこを起点に社内ネットワーク・自宅ネットワークの他機器へ攻撃が拡がる</a:t>
-            </a:r>
-            <a:endParaRPr lang="en-US" sz="1100"/>
-          </a:p>
-          <a:p>
-            <a:pPr marL="342900" indent="-342900">
+                <a:latin typeface="Meiryo"/>
+                <a:ea typeface="Meiryo"/>
+                <a:cs typeface="Meiryo"/>
+              </a:rPr>
+              <a:t>自分のPCが侵害されると、社内ネットや自宅ネットの他機器へ攻撃が拡がる</a:t>
+            </a:r>
+          </a:p>
+          <a:p>
+            <a:pPr marL="228600" indent="-228600">
               <a:spcAft>
-                <a:spcPts val="400"/>
+                <a:spcPts val="300"/>
               </a:spcAft>
-              <a:buSzPct val="100000"/>
-              <a:buChar char="■"/>
-            </a:pPr>
-            <a:r>
-              <a:rPr lang="en-US" sz="1100">
+              <a:buChar char="●"/>
+            </a:pPr>
+            <a:r>
+              <a:rPr lang="ja-JP" sz="1200">
                 <a:solidFill>
                   <a:srgbClr val="2D3748"/>
                 </a:solidFill>
-                <a:latin typeface="Meiryo" pitchFamily="34" charset="0"/>
-                <a:ea typeface="Meiryo" pitchFamily="34" charset="-122"/>
-                <a:cs typeface="Meiryo" pitchFamily="34" charset="-120"/>
-              </a:rPr>
-              <a:t>知らないうちに、自分のPCが他者への犯罪の踏み台になる</a:t>
-            </a:r>
-            <a:endParaRPr lang="en-US" sz="1100"/>
-          </a:p>
-          <a:p>
-            <a:pPr marL="342900" indent="-342900">
-              <a:spcAft>
-                <a:spcPts val="400"/>
-              </a:spcAft>
-              <a:buSzPct val="100000"/>
-              <a:buChar char="■"/>
-            </a:pPr>
-            <a:r>
-              <a:rPr lang="en-US" sz="1100">
-                <a:solidFill>
-                  <a:srgbClr val="2D3748"/>
-                </a:solidFill>
-                <a:latin typeface="Meiryo" pitchFamily="34" charset="0"/>
-                <a:ea typeface="Meiryo" pitchFamily="34" charset="-122"/>
-                <a:cs typeface="Meiryo" pitchFamily="34" charset="-120"/>
-              </a:rPr>
-              <a:t>一度踏み台になると、法的責任を問われる可能性もある</a:t>
-            </a:r>
-            <a:endParaRPr lang="en-US" sz="1100"/>
+                <a:latin typeface="Meiryo"/>
+                <a:ea typeface="Meiryo"/>
+                <a:cs typeface="Meiryo"/>
+              </a:rPr>
+              <a:t>自分のPCが他者への犯罪の踏み台となり、法的責任を問われる可能性も</a:t>
+            </a:r>
           </a:p>
         </p:txBody>
       </p:sp>
@@ -14213,67 +14936,42 @@
           <a:bodyPr wrap="square" lIns="0" tIns="0" rIns="0" bIns="0" rtlCol="0" anchor="t"/>
           <a:lstStyle/>
           <a:p>
-            <a:pPr marL="342900" indent="-342900">
+            <a:pPr marL="228600" indent="-228600">
               <a:spcAft>
-                <a:spcPts val="400"/>
+                <a:spcPts val="300"/>
               </a:spcAft>
-              <a:buSzPct val="100000"/>
-              <a:buChar char="■"/>
-            </a:pPr>
-            <a:r>
-              <a:rPr lang="en-US" sz="1100">
+              <a:buChar char="●"/>
+            </a:pPr>
+            <a:r>
+              <a:rPr lang="ja-JP" sz="1200">
                 <a:solidFill>
                   <a:srgbClr val="2D3748"/>
                 </a:solidFill>
-                <a:latin typeface="Meiryo" pitchFamily="34" charset="0"/>
-                <a:ea typeface="Meiryo" pitchFamily="34" charset="-122"/>
-                <a:cs typeface="Meiryo" pitchFamily="34" charset="-120"/>
-              </a:rPr>
-              <a:t>クラウド上のサーバーには想定外のIAMロールがついていることがある</a:t>
-            </a:r>
-            <a:endParaRPr lang="en-US" sz="1100"/>
-          </a:p>
-          <a:p>
-            <a:pPr marL="342900" indent="-342900">
+                <a:latin typeface="Meiryo"/>
+                <a:ea typeface="Meiryo"/>
+                <a:cs typeface="Meiryo"/>
+              </a:rPr>
+              <a:t>クラウド上のサーバーには想定外の権限（IAMロール）がついていることがある</a:t>
+            </a:r>
+          </a:p>
+          <a:p>
+            <a:pPr marL="228600" indent="-228600">
               <a:spcAft>
-                <a:spcPts val="400"/>
+                <a:spcPts val="300"/>
               </a:spcAft>
-              <a:buSzPct val="100000"/>
-              <a:buChar char="■"/>
-            </a:pPr>
-            <a:r>
-              <a:rPr lang="en-US" sz="1100">
+              <a:buChar char="●"/>
+            </a:pPr>
+            <a:r>
+              <a:rPr lang="ja-JP" sz="1200">
                 <a:solidFill>
                   <a:srgbClr val="2D3748"/>
                 </a:solidFill>
-                <a:latin typeface="Meiryo" pitchFamily="34" charset="0"/>
-                <a:ea typeface="Meiryo" pitchFamily="34" charset="-122"/>
-                <a:cs typeface="Meiryo" pitchFamily="34" charset="-120"/>
-              </a:rPr>
-              <a:t>エージェントがそこで動くと、AWS/GCPの他リソースに勝手にアクセス</a:t>
-            </a:r>
-            <a:endParaRPr lang="en-US" sz="1100"/>
-          </a:p>
-          <a:p>
-            <a:pPr marL="342900" indent="-342900">
-              <a:spcAft>
-                <a:spcPts val="400"/>
-              </a:spcAft>
-              <a:buSzPct val="100000"/>
-              <a:buChar char="■"/>
-            </a:pPr>
-            <a:r>
-              <a:rPr lang="en-US" sz="1100">
-                <a:solidFill>
-                  <a:srgbClr val="2D3748"/>
-                </a:solidFill>
-                <a:latin typeface="Meiryo" pitchFamily="34" charset="0"/>
-                <a:ea typeface="Meiryo" pitchFamily="34" charset="-122"/>
-                <a:cs typeface="Meiryo" pitchFamily="34" charset="-120"/>
-              </a:rPr>
-              <a:t>課金爆発・他サービス侵害・データ流出につながる</a:t>
-            </a:r>
-            <a:endParaRPr lang="en-US" sz="1100"/>
+                <a:latin typeface="Meiryo"/>
+                <a:ea typeface="Meiryo"/>
+                <a:cs typeface="Meiryo"/>
+              </a:rPr>
+              <a:t>エージェントがそこで動くと、AWS/GCPの他リソースに勝手にアクセス → 課金爆発・データ流出</a:t>
+            </a:r>
           </a:p>
         </p:txBody>
       </p:sp>
@@ -14399,6 +15097,11 @@
         </p:txBody>
       </p:sp>
     </p:spTree>
+    <p:extLst>
+      <p:ext uri="{BB962C8B-B14F-4D97-AF65-F5344CB8AC3E}">
+        <p14:creationId xmlns:p14="http://schemas.microsoft.com/office/powerpoint/2010/main" val="2629305929"/>
+      </p:ext>
+    </p:extLst>
   </p:cSld>
   <p:clrMapOvr>
     <a:masterClrMapping/>
@@ -15144,79 +15847,23 @@
               <a:buNone/>
             </a:pPr>
             <a:r>
-              <a:rPr lang="en-US" sz="1100" i="1" dirty="0">
+              <a:rPr lang="ja-JP" sz="1100" i="1" dirty="0">
                 <a:solidFill>
                   <a:srgbClr val="CADCFC"/>
                 </a:solidFill>
-                <a:latin typeface="Meiryo" pitchFamily="34" charset="0"/>
-                <a:ea typeface="Meiryo" pitchFamily="34" charset="-122"/>
-                <a:cs typeface="Meiryo" pitchFamily="34" charset="-120"/>
-              </a:rPr>
-              <a:t>※「</a:t>
-            </a:r>
-            <a:r>
-              <a:rPr lang="en-US" sz="1100" i="1" dirty="0" err="1">
-                <a:solidFill>
-                  <a:srgbClr val="CADCFC"/>
-                </a:solidFill>
-                <a:latin typeface="Meiryo" pitchFamily="34" charset="0"/>
-                <a:ea typeface="Meiryo" pitchFamily="34" charset="-122"/>
-                <a:cs typeface="Meiryo" pitchFamily="34" charset="-120"/>
-              </a:rPr>
-              <a:t>助言的（CLAUDE.md</a:t>
-            </a:r>
-            <a:r>
-              <a:rPr lang="en-US" sz="1100" i="1" dirty="0">
-                <a:solidFill>
-                  <a:srgbClr val="CADCFC"/>
-                </a:solidFill>
-                <a:latin typeface="Meiryo" pitchFamily="34" charset="0"/>
-                <a:ea typeface="Meiryo" pitchFamily="34" charset="-122"/>
-                <a:cs typeface="Meiryo" pitchFamily="34" charset="-120"/>
-              </a:rPr>
-              <a:t>）」</a:t>
-            </a:r>
-            <a:r>
-              <a:rPr lang="en-US" sz="1100" i="1" dirty="0" err="1">
-                <a:solidFill>
-                  <a:srgbClr val="CADCFC"/>
-                </a:solidFill>
-                <a:latin typeface="Meiryo" pitchFamily="34" charset="0"/>
-                <a:ea typeface="Meiryo" pitchFamily="34" charset="-122"/>
-                <a:cs typeface="Meiryo" pitchFamily="34" charset="-120"/>
-              </a:rPr>
-              <a:t>に記載しても防げないので「決定的（Hooks</a:t>
-            </a:r>
-            <a:r>
-              <a:rPr lang="en-US" sz="1100" i="1" dirty="0">
-                <a:solidFill>
-                  <a:srgbClr val="CADCFC"/>
-                </a:solidFill>
-                <a:latin typeface="Meiryo" pitchFamily="34" charset="0"/>
-                <a:ea typeface="Meiryo" pitchFamily="34" charset="-122"/>
-                <a:cs typeface="Meiryo" pitchFamily="34" charset="-120"/>
-              </a:rPr>
-              <a:t>）」</a:t>
-            </a:r>
-            <a:r>
-              <a:rPr lang="en-US" sz="1100" i="1" dirty="0" err="1">
-                <a:solidFill>
-                  <a:srgbClr val="CADCFC"/>
-                </a:solidFill>
-                <a:latin typeface="Meiryo" pitchFamily="34" charset="0"/>
-                <a:ea typeface="Meiryo" pitchFamily="34" charset="-122"/>
-                <a:cs typeface="Meiryo" pitchFamily="34" charset="-120"/>
-              </a:rPr>
-              <a:t>で確実にブロックする</a:t>
-            </a:r>
-            <a:endParaRPr lang="en-US" sz="1100" dirty="0"/>
+                <a:latin typeface="Meiryo"/>
+                <a:ea typeface="Meiryo"/>
+                <a:cs typeface="Meiryo"/>
+              </a:rPr>
+              <a:t>※プロンプト指示（CLAUDE.md などの設定ファイル）に記載する「助言的」なルールでは防げない。Hooksによる「決定的」なブロックが必要</a:t>
+            </a:r>
           </a:p>
         </p:txBody>
       </p:sp>
     </p:spTree>
     <p:extLst>
       <p:ext uri="{BB962C8B-B14F-4D97-AF65-F5344CB8AC3E}">
-        <p14:creationId xmlns:p14="http://schemas.microsoft.com/office/powerpoint/2010/main" val="976499251"/>
+        <p14:creationId xmlns:p14="http://schemas.microsoft.com/office/powerpoint/2010/main" val="1317229044"/>
       </p:ext>
     </p:extLst>
   </p:cSld>
